--- a/presentation/Lead-Trace-pitch-enhanced.pptx
+++ b/presentation/Lead-Trace-pitch-enhanced.pptx
@@ -2,22 +2,24 @@
 <file path=ppt/presentation.xml><?xml version="1.0" encoding="utf-8"?>
 <p:presentation xmlns:p="http://schemas.openxmlformats.org/presentationml/2006/main">
   <p:sldMasterIdLst>
-    <p:sldMasterId xmlns:r="http://schemas.openxmlformats.org/officeDocument/2006/relationships" id="2147483648" r:id="Rabc31960788c45a4"/>
+    <p:sldMasterId xmlns:r="http://schemas.openxmlformats.org/officeDocument/2006/relationships" id="2147483648" r:id="Rfaecfd622b0945c5"/>
   </p:sldMasterIdLst>
   <p:notesMasterIdLst>
-    <p:notesMasterId xmlns:r="http://schemas.openxmlformats.org/officeDocument/2006/relationships" r:id="Rcdf1a07cf3f44409"/>
+    <p:notesMasterId xmlns:r="http://schemas.openxmlformats.org/officeDocument/2006/relationships" r:id="Rbd5f59f1022f45cc"/>
   </p:notesMasterIdLst>
   <p:sldIdLst>
-    <p:sldId xmlns:r="http://schemas.openxmlformats.org/officeDocument/2006/relationships" id="256" r:id="Rfb9d16a555fa49c8"/>
-    <p:sldId xmlns:r="http://schemas.openxmlformats.org/officeDocument/2006/relationships" id="257" r:id="R2c7550623ba2478a"/>
-    <p:sldId xmlns:r="http://schemas.openxmlformats.org/officeDocument/2006/relationships" id="258" r:id="R7ee56db81c2a4bab"/>
-    <p:sldId xmlns:r="http://schemas.openxmlformats.org/officeDocument/2006/relationships" id="259" r:id="Rb0b15f849191493f"/>
-    <p:sldId xmlns:r="http://schemas.openxmlformats.org/officeDocument/2006/relationships" id="260" r:id="Ra58cacfafc334538"/>
-    <p:sldId xmlns:r="http://schemas.openxmlformats.org/officeDocument/2006/relationships" id="261" r:id="R8d2bfeee09e948ec"/>
-    <p:sldId xmlns:r="http://schemas.openxmlformats.org/officeDocument/2006/relationships" id="262" r:id="Rbdd51bd1854f48e4"/>
-    <p:sldId xmlns:r="http://schemas.openxmlformats.org/officeDocument/2006/relationships" id="263" r:id="R07eb3be6fd4f4e29"/>
-    <p:sldId xmlns:r="http://schemas.openxmlformats.org/officeDocument/2006/relationships" id="264" r:id="R885f899616c24649"/>
-    <p:sldId xmlns:r="http://schemas.openxmlformats.org/officeDocument/2006/relationships" id="265" r:id="R3718e84a9c174489"/>
+    <p:sldId xmlns:r="http://schemas.openxmlformats.org/officeDocument/2006/relationships" id="256" r:id="R75654f25b6e44ded"/>
+    <p:sldId xmlns:r="http://schemas.openxmlformats.org/officeDocument/2006/relationships" id="257" r:id="R455c4fc8e4da4773"/>
+    <p:sldId xmlns:r="http://schemas.openxmlformats.org/officeDocument/2006/relationships" id="258" r:id="Rab1e7ba288e44390"/>
+    <p:sldId xmlns:r="http://schemas.openxmlformats.org/officeDocument/2006/relationships" id="259" r:id="R156a08735f9b419c"/>
+    <p:sldId xmlns:r="http://schemas.openxmlformats.org/officeDocument/2006/relationships" id="260" r:id="R97a56dd60f16475e"/>
+    <p:sldId xmlns:r="http://schemas.openxmlformats.org/officeDocument/2006/relationships" id="261" r:id="R3aa7cde5534d4f59"/>
+    <p:sldId xmlns:r="http://schemas.openxmlformats.org/officeDocument/2006/relationships" id="262" r:id="R6bf712163fc64698"/>
+    <p:sldId xmlns:r="http://schemas.openxmlformats.org/officeDocument/2006/relationships" id="263" r:id="R29cf3f0fac38420a"/>
+    <p:sldId xmlns:r="http://schemas.openxmlformats.org/officeDocument/2006/relationships" id="264" r:id="R2040d32c5724414a"/>
+    <p:sldId xmlns:r="http://schemas.openxmlformats.org/officeDocument/2006/relationships" id="265" r:id="R1d85c420b9b44e73"/>
+    <p:sldId xmlns:r="http://schemas.openxmlformats.org/officeDocument/2006/relationships" id="266" r:id="R8515417c972a4a4d"/>
+    <p:sldId xmlns:r="http://schemas.openxmlformats.org/officeDocument/2006/relationships" id="267" r:id="R2eb4d2b9384840e6"/>
   </p:sldIdLst>
   <p:sldSz cx="12192000" cy="6858000"/>
   <p:notesSz cx="6858000" cy="9144000"/>
@@ -451,7 +453,7 @@
           <a:lstStyle xmlns:a="http://schemas.openxmlformats.org/drawingml/2006/main"/>
           <a:p xmlns:a="http://schemas.openxmlformats.org/drawingml/2006/main">
             <a:r>
-              <a:t>InsightIQ helps people prepare for a sales conversation using public research, their offer, and evidence they can inspect.</a:t>
+              <a:t>Lead Trace helps people prepare for a sales conversation using public research, their offer, and evidence they can inspect.</a:t>
             </a:r>
           </a:p>
         </p:txBody>
@@ -521,7 +523,147 @@
           <a:lstStyle xmlns:a="http://schemas.openxmlformats.org/drawingml/2006/main"/>
           <a:p xmlns:a="http://schemas.openxmlformats.org/drawingml/2006/main">
             <a:r>
-              <a:t>InsightIQ was built by Afnan Ahmad Tariq, Danyal Rana, and Hassan. The product is available at insightiq.zerotools.online.</a:t>
+              <a:t>The outreach draft connects the research to the offer and invites a reply. The seller can personalize the message and verify its claims before sending.</a:t>
+            </a:r>
+          </a:p>
+        </p:txBody>
+      </p:sp>
+      <p:sp>
+        <p:nvSpPr>
+          <p:cNvPr id="4" name="Slide Number Placeholder 3"/>
+          <p:cNvSpPr>
+            <a:spLocks xmlns:a="http://schemas.openxmlformats.org/drawingml/2006/main" noGrp="1"/>
+          </p:cNvSpPr>
+          <p:nvPr>
+            <p:ph type="sldNum" idx="5"/>
+          </p:nvPr>
+        </p:nvSpPr>
+        <p:spPr/>
+        <p:txBody>
+          <a:bodyPr xmlns:a="http://schemas.openxmlformats.org/drawingml/2006/main"/>
+          <a:lstStyle xmlns:a="http://schemas.openxmlformats.org/drawingml/2006/main"/>
+          <a:p xmlns:a="http://schemas.openxmlformats.org/drawingml/2006/main"/>
+        </p:txBody>
+      </p:sp>
+    </p:spTree>
+  </p:cSld>
+  <p:clrMapOvr>
+    <a:masterClrMapping xmlns:a="http://schemas.openxmlformats.org/drawingml/2006/main"/>
+  </p:clrMapOvr>
+</p:notes>
+</file>
+
+<file path=ppt/notesSlides/notesSlide11.xml><?xml version="1.0" encoding="utf-8"?>
+<p:notes xmlns:p="http://schemas.openxmlformats.org/presentationml/2006/main">
+  <p:cSld>
+    <p:spTree>
+      <p:nvGrpSpPr>
+        <p:cNvPr id="1" name=""/>
+        <p:cNvGrpSpPr/>
+        <p:nvPr/>
+      </p:nvGrpSpPr>
+      <p:grpSpPr>
+        <a:xfrm xmlns:a="http://schemas.openxmlformats.org/drawingml/2006/main"/>
+      </p:grpSpPr>
+      <p:sp>
+        <p:nvSpPr>
+          <p:cNvPr id="2" name="Slide Image Placeholder 1"/>
+          <p:cNvSpPr>
+            <a:spLocks xmlns:a="http://schemas.openxmlformats.org/drawingml/2006/main" noGrp="1"/>
+          </p:cNvSpPr>
+          <p:nvPr>
+            <p:ph type="sldImg" idx="0"/>
+          </p:nvPr>
+        </p:nvSpPr>
+        <p:spPr/>
+      </p:sp>
+      <p:sp>
+        <p:nvSpPr>
+          <p:cNvPr id="3" name="Notes Placeholder 2"/>
+          <p:cNvSpPr>
+            <a:spLocks xmlns:a="http://schemas.openxmlformats.org/drawingml/2006/main" noGrp="1"/>
+          </p:cNvSpPr>
+          <p:nvPr>
+            <p:ph type="body" idx="1"/>
+          </p:nvPr>
+        </p:nvSpPr>
+        <p:spPr/>
+        <p:txBody>
+          <a:bodyPr xmlns:a="http://schemas.openxmlformats.org/drawingml/2006/main"/>
+          <a:lstStyle xmlns:a="http://schemas.openxmlformats.org/drawingml/2006/main"/>
+          <a:p xmlns:a="http://schemas.openxmlformats.org/drawingml/2006/main">
+            <a:r>
+              <a:t>Roadmap direction supplied by the project team. Features and dates remain to be finalized. Do not describe planned capabilities as already implemented.</a:t>
+            </a:r>
+          </a:p>
+        </p:txBody>
+      </p:sp>
+      <p:sp>
+        <p:nvSpPr>
+          <p:cNvPr id="4" name="Slide Number Placeholder 3"/>
+          <p:cNvSpPr>
+            <a:spLocks xmlns:a="http://schemas.openxmlformats.org/drawingml/2006/main" noGrp="1"/>
+          </p:cNvSpPr>
+          <p:nvPr>
+            <p:ph type="sldNum" idx="5"/>
+          </p:nvPr>
+        </p:nvSpPr>
+        <p:spPr/>
+        <p:txBody>
+          <a:bodyPr xmlns:a="http://schemas.openxmlformats.org/drawingml/2006/main"/>
+          <a:lstStyle xmlns:a="http://schemas.openxmlformats.org/drawingml/2006/main"/>
+          <a:p xmlns:a="http://schemas.openxmlformats.org/drawingml/2006/main"/>
+        </p:txBody>
+      </p:sp>
+    </p:spTree>
+  </p:cSld>
+  <p:clrMapOvr>
+    <a:masterClrMapping xmlns:a="http://schemas.openxmlformats.org/drawingml/2006/main"/>
+  </p:clrMapOvr>
+</p:notes>
+</file>
+
+<file path=ppt/notesSlides/notesSlide12.xml><?xml version="1.0" encoding="utf-8"?>
+<p:notes xmlns:p="http://schemas.openxmlformats.org/presentationml/2006/main">
+  <p:cSld>
+    <p:spTree>
+      <p:nvGrpSpPr>
+        <p:cNvPr id="1" name=""/>
+        <p:cNvGrpSpPr/>
+        <p:nvPr/>
+      </p:nvGrpSpPr>
+      <p:grpSpPr>
+        <a:xfrm xmlns:a="http://schemas.openxmlformats.org/drawingml/2006/main"/>
+      </p:grpSpPr>
+      <p:sp>
+        <p:nvSpPr>
+          <p:cNvPr id="2" name="Slide Image Placeholder 1"/>
+          <p:cNvSpPr>
+            <a:spLocks xmlns:a="http://schemas.openxmlformats.org/drawingml/2006/main" noGrp="1"/>
+          </p:cNvSpPr>
+          <p:nvPr>
+            <p:ph type="sldImg" idx="0"/>
+          </p:nvPr>
+        </p:nvSpPr>
+        <p:spPr/>
+      </p:sp>
+      <p:sp>
+        <p:nvSpPr>
+          <p:cNvPr id="3" name="Notes Placeholder 2"/>
+          <p:cNvSpPr>
+            <a:spLocks xmlns:a="http://schemas.openxmlformats.org/drawingml/2006/main" noGrp="1"/>
+          </p:cNvSpPr>
+          <p:nvPr>
+            <p:ph type="body" idx="1"/>
+          </p:nvPr>
+        </p:nvSpPr>
+        <p:spPr/>
+        <p:txBody>
+          <a:bodyPr xmlns:a="http://schemas.openxmlformats.org/drawingml/2006/main"/>
+          <a:lstStyle xmlns:a="http://schemas.openxmlformats.org/drawingml/2006/main"/>
+          <a:p xmlns:a="http://schemas.openxmlformats.org/drawingml/2006/main">
+            <a:r>
+              <a:t>Lead Trace was built by Afnan Ahmad Tariq, Danyal Rana, and Hassan. The product is available at leadtrace.online.</a:t>
             </a:r>
           </a:p>
         </p:txBody>
@@ -591,7 +733,7 @@
           <a:lstStyle xmlns:a="http://schemas.openxmlformats.org/drawingml/2006/main"/>
           <a:p xmlns:a="http://schemas.openxmlformats.org/drawingml/2006/main">
             <a:r>
-              <a:t>Our starting point was a common sales problem: knowing a company fact is useful, but knowing how to discuss its possible relevance takes more work. InsightIQ separates the fact, possible fit, and question.</a:t>
+              <a:t>The project team reports feedback from industry professionals as the reason for evolving InsightIQ into Lead Trace. Do not imply a quantified interview study, named customer validation, or industry certification. Lead generation and CRM are planned, not released.</a:t>
             </a:r>
           </a:p>
         </p:txBody>
@@ -661,7 +803,7 @@
           <a:lstStyle xmlns:a="http://schemas.openxmlformats.org/drawingml/2006/main"/>
           <a:p xmlns:a="http://schemas.openxmlformats.org/drawingml/2006/main">
             <a:r>
-              <a:t>The seller chooses meeting preparation or outreach, adds a prospect, and explains the offer. That context shapes the research and output.</a:t>
+              <a:t>Our starting point was a common sales problem: knowing a company fact is useful, but knowing how to discuss its possible relevance takes more work. Lead Trace separates the fact, possible fit, and question.</a:t>
             </a:r>
           </a:p>
         </p:txBody>
@@ -731,7 +873,7 @@
           <a:lstStyle xmlns:a="http://schemas.openxmlformats.org/drawingml/2006/main"/>
           <a:p xmlns:a="http://schemas.openxmlformats.org/drawingml/2006/main">
             <a:r>
-              <a:t>The workflow saves the context, finds public sources, extracts evidence, and builds a brief. The seller reviews sources and gaps before using the result.</a:t>
+              <a:t>Product screenshots use deterministic local demonstration fixtures. They do not represent live research, customer adoption, or measured sales outcomes.</a:t>
             </a:r>
           </a:p>
         </p:txBody>
@@ -801,7 +943,7 @@
           <a:lstStyle xmlns:a="http://schemas.openxmlformats.org/drawingml/2006/main"/>
           <a:p xmlns:a="http://schemas.openxmlformats.org/drawingml/2006/main">
             <a:r>
-              <a:t>This dashboard keeps research progress and saved briefs in the same workspace. A seller can open completed research and continue preparing.</a:t>
+              <a:t>The workflow saves the context, finds public sources, extracts evidence, and builds a brief. The seller reviews sources and gaps before using the result.</a:t>
             </a:r>
           </a:p>
         </p:txBody>
@@ -871,7 +1013,7 @@
           <a:lstStyle xmlns:a="http://schemas.openxmlformats.org/drawingml/2006/main"/>
           <a:p xmlns:a="http://schemas.openxmlformats.org/drawingml/2006/main">
             <a:r>
-              <a:t>This is an example from a Vercel brief. The source claim stays separate from the possible fit. The conditional wording matters: the seller still needs to test the hypothesis by asking the question.</a:t>
+              <a:t>Product screenshots use deterministic local demonstration fixtures. They do not represent live research, customer adoption, or measured sales outcomes.</a:t>
             </a:r>
           </a:p>
         </p:txBody>
@@ -941,7 +1083,7 @@
           <a:lstStyle xmlns:a="http://schemas.openxmlformats.org/drawingml/2006/main"/>
           <a:p xmlns:a="http://schemas.openxmlformats.org/drawingml/2006/main">
             <a:r>
-              <a:t>A seller can inspect the evidence behind a signal and check source freshness or contradictions. A citation makes a claim traceable, but human judgment still matters.</a:t>
+              <a:t>Demonstration fixture source: https://en.wikipedia.org/wiki/Tim_Cook. The claim illustrates how stored evidence is presented, not a live verified research result.</a:t>
             </a:r>
           </a:p>
         </p:txBody>
@@ -1011,7 +1153,7 @@
           <a:lstStyle xmlns:a="http://schemas.openxmlformats.org/drawingml/2006/main"/>
           <a:p xmlns:a="http://schemas.openxmlformats.org/drawingml/2006/main">
             <a:r>
-              <a:t>The Next.js dashboard talks to a NestJS API. PostgreSQL stores the workspace and research jobs. A Python and LangGraph worker runs the research, using Tavily discovery and Qwen through DashScope.</a:t>
+              <a:t>Product screenshots use deterministic local demonstration fixtures. They do not represent live research, customer adoption, or measured sales outcomes.</a:t>
             </a:r>
           </a:p>
         </p:txBody>
@@ -1081,7 +1223,7 @@
           <a:lstStyle xmlns:a="http://schemas.openxmlformats.org/drawingml/2006/main"/>
           <a:p xmlns:a="http://schemas.openxmlformats.org/drawingml/2006/main">
             <a:r>
-              <a:t>The outreach draft connects the research to the offer and invites a reply. The seller can personalize the message and verify its claims before sending.</a:t>
+              <a:t>The Next.js dashboard talks to a NestJS API. PostgreSQL stores the workspace and research jobs. A Python and LangGraph worker runs the research, using Tavily discovery and Qwen through DashScope.</a:t>
             </a:r>
           </a:p>
         </p:txBody>
@@ -1149,7 +1291,7 @@
   </p:cSld>
   <p:clrMap bg1="lt1" tx1="dk1" bg2="lt2" tx2="dk2" accent1="accent1" accent2="accent2" accent3="accent3" accent4="accent4" accent5="accent5" accent6="accent6" hlink="hlink" folHlink="folHlink"/>
   <p:sldLayoutIdLst>
-    <p:sldLayoutId xmlns:r="http://schemas.openxmlformats.org/officeDocument/2006/relationships" id="2147483649" r:id="R35a7179dcb284c84"/>
+    <p:sldLayoutId xmlns:r="http://schemas.openxmlformats.org/officeDocument/2006/relationships" id="2147483649" r:id="R5b9c2c152beb4ad0"/>
   </p:sldLayoutIdLst>
   <p:txStyles>
     <p:titleStyle>
@@ -1697,14 +1839,21 @@
       </p:grpSpPr>
       <p:pic>
         <p:nvPicPr>
-          <p:cNvPr id="6" name=""/>
+          <p:cNvPr id="6" name="">
+            <a:extLst xmlns:a="http://schemas.openxmlformats.org/drawingml/2006/main">
+              <a:ext uri="{FF2B5EF4-FFF2-40B4-BE49-F238E27FC236}">
+                <a16:creationId xmlns:a16="http://schemas.microsoft.com/office/drawing/2014/main" id="{5882605E-D62F-4B59-99B9-6E7C32A099B1}"/>
+              </a:ext>
+            </a:extLst>
+          </p:cNvPr>
           <p:cNvPicPr>
             <a:picLocks xmlns:a="http://schemas.openxmlformats.org/drawingml/2006/main" noChangeAspect="1"/>
           </p:cNvPicPr>
           <p:nvPr/>
         </p:nvPicPr>
         <p:blipFill>
-          <a:blip xmlns:r="http://schemas.openxmlformats.org/officeDocument/2006/relationships" xmlns:a="http://schemas.openxmlformats.org/drawingml/2006/main" r:embed="Ree3f3351a38d4c0f"/>
+          <a:blip xmlns:r="http://schemas.openxmlformats.org/officeDocument/2006/relationships" xmlns:a="http://schemas.openxmlformats.org/drawingml/2006/main" r:embed="R903f14867ee24dea"/>
+          <a:srcRect xmlns:a="http://schemas.openxmlformats.org/drawingml/2006/main" l="0" t="0" r="0" b="0"/>
           <a:stretch xmlns:a="http://schemas.openxmlformats.org/drawingml/2006/main"/>
         </p:blipFill>
         <p:spPr>
@@ -1751,6 +1900,7 @@
           <a:lstStyle xmlns:a="http://schemas.openxmlformats.org/drawingml/2006/main"/>
           <a:p xmlns:a="http://schemas.openxmlformats.org/drawingml/2006/main">
             <a:pPr>
+              <a:buNone/>
               <a:defRPr sz="6150" b="1">
                 <a:solidFill>
                   <a:srgbClr val="0B214A"/>
@@ -1769,7 +1919,7 @@
                 <a:ea typeface="Helvetica Neue"/>
                 <a:cs typeface="Helvetica Neue"/>
               </a:rPr>
-              <a:t>InsightIQ</a:t>
+              <a:t>Lead Trace</a:t>
             </a:r>
           </a:p>
         </p:txBody>
@@ -1805,9 +1955,41 @@
           <a:bodyPr xmlns:a="http://schemas.openxmlformats.org/drawingml/2006/main">
             <a:noAutofit/>
           </a:bodyPr>
-          <a:lstStyle xmlns:a="http://schemas.openxmlformats.org/drawingml/2006/main"/>
-          <a:p xmlns:a="http://schemas.openxmlformats.org/drawingml/2006/main">
-            <a:pPr>
+          <a:lstStyle xmlns:a="http://schemas.openxmlformats.org/drawingml/2006/main">
+            <a:defPPr>
+              <a:defRPr sz="2925"/>
+            </a:defPPr>
+            <a:lvl1pPr>
+              <a:defRPr sz="2925"/>
+            </a:lvl1pPr>
+            <a:lvl2pPr>
+              <a:defRPr sz="2925"/>
+            </a:lvl2pPr>
+            <a:lvl3pPr>
+              <a:defRPr sz="2925"/>
+            </a:lvl3pPr>
+            <a:lvl4pPr>
+              <a:defRPr sz="2925"/>
+            </a:lvl4pPr>
+            <a:lvl5pPr>
+              <a:defRPr sz="2925"/>
+            </a:lvl5pPr>
+            <a:lvl6pPr>
+              <a:defRPr sz="2925"/>
+            </a:lvl6pPr>
+            <a:lvl7pPr>
+              <a:defRPr sz="2925"/>
+            </a:lvl7pPr>
+            <a:lvl8pPr>
+              <a:defRPr sz="2925"/>
+            </a:lvl8pPr>
+            <a:lvl9pPr>
+              <a:defRPr sz="2925"/>
+            </a:lvl9pPr>
+          </a:lstStyle>
+          <a:p xmlns:a="http://schemas.openxmlformats.org/drawingml/2006/main">
+            <a:pPr>
+              <a:buNone/>
               <a:defRPr sz="3225" b="0">
                 <a:solidFill>
                   <a:srgbClr val="123363"/>
@@ -1818,7 +2000,7 @@
               </a:defRPr>
             </a:pPr>
             <a:r>
-              <a:rPr sz="3225" b="0">
+              <a:rPr sz="2925" b="0">
                 <a:solidFill>
                   <a:srgbClr val="123363"/>
                 </a:solidFill>
@@ -1826,11 +2008,12 @@
                 <a:ea typeface="Helvetica Neue"/>
                 <a:cs typeface="Helvetica Neue"/>
               </a:rPr>
-              <a:t>AI research for your</a:t>
-            </a:r>
-          </a:p>
-          <a:p xmlns:a="http://schemas.openxmlformats.org/drawingml/2006/main">
-            <a:pPr>
+              <a:t>Research today.</a:t>
+            </a:r>
+          </a:p>
+          <a:p xmlns:a="http://schemas.openxmlformats.org/drawingml/2006/main">
+            <a:pPr>
+              <a:buNone/>
               <a:defRPr sz="3225" b="0">
                 <a:solidFill>
                   <a:srgbClr val="123363"/>
@@ -1841,7 +2024,7 @@
               </a:defRPr>
             </a:pPr>
             <a:r>
-              <a:rPr sz="3225" b="0">
+              <a:rPr sz="2925" b="0">
                 <a:solidFill>
                   <a:srgbClr val="123363"/>
                 </a:solidFill>
@@ -1849,7 +2032,7 @@
                 <a:ea typeface="Helvetica Neue"/>
                 <a:cs typeface="Helvetica Neue"/>
               </a:rPr>
-              <a:t>next sales conversation</a:t>
+              <a:t>A broader sales workflow ahead.</a:t>
             </a:r>
           </a:p>
         </p:txBody>
@@ -1885,9 +2068,41 @@
           <a:bodyPr xmlns:a="http://schemas.openxmlformats.org/drawingml/2006/main">
             <a:noAutofit/>
           </a:bodyPr>
-          <a:lstStyle xmlns:a="http://schemas.openxmlformats.org/drawingml/2006/main"/>
-          <a:p xmlns:a="http://schemas.openxmlformats.org/drawingml/2006/main">
-            <a:pPr>
+          <a:lstStyle xmlns:a="http://schemas.openxmlformats.org/drawingml/2006/main">
+            <a:defPPr>
+              <a:defRPr sz="1875"/>
+            </a:defPPr>
+            <a:lvl1pPr>
+              <a:defRPr sz="1875"/>
+            </a:lvl1pPr>
+            <a:lvl2pPr>
+              <a:defRPr sz="1875"/>
+            </a:lvl2pPr>
+            <a:lvl3pPr>
+              <a:defRPr sz="1875"/>
+            </a:lvl3pPr>
+            <a:lvl4pPr>
+              <a:defRPr sz="1875"/>
+            </a:lvl4pPr>
+            <a:lvl5pPr>
+              <a:defRPr sz="1875"/>
+            </a:lvl5pPr>
+            <a:lvl6pPr>
+              <a:defRPr sz="1875"/>
+            </a:lvl6pPr>
+            <a:lvl7pPr>
+              <a:defRPr sz="1875"/>
+            </a:lvl7pPr>
+            <a:lvl8pPr>
+              <a:defRPr sz="1875"/>
+            </a:lvl8pPr>
+            <a:lvl9pPr>
+              <a:defRPr sz="1875"/>
+            </a:lvl9pPr>
+          </a:lstStyle>
+          <a:p xmlns:a="http://schemas.openxmlformats.org/drawingml/2006/main">
+            <a:pPr>
+              <a:buNone/>
               <a:defRPr sz="2100" b="0">
                 <a:solidFill>
                   <a:srgbClr val="58718B"/>
@@ -1898,7 +2113,7 @@
               </a:defRPr>
             </a:pPr>
             <a:r>
-              <a:rPr sz="2100" b="0">
+              <a:rPr sz="1875" b="0">
                 <a:solidFill>
                   <a:srgbClr val="58718B"/>
                 </a:solidFill>
@@ -1906,7 +2121,7 @@
                 <a:ea typeface="Helvetica Neue"/>
                 <a:cs typeface="Helvetica Neue"/>
               </a:rPr>
-              <a:t>Cited claims. Conditional fit. Questions worth asking.</a:t>
+              <a:t>Prospect research and cited briefs, expanding toward lead generation and CRM.</a:t>
             </a:r>
           </a:p>
         </p:txBody>
@@ -1945,6 +2160,7 @@
           <a:lstStyle xmlns:a="http://schemas.openxmlformats.org/drawingml/2006/main"/>
           <a:p xmlns:a="http://schemas.openxmlformats.org/drawingml/2006/main">
             <a:pPr>
+              <a:buNone/>
               <a:defRPr sz="1575" b="0">
                 <a:solidFill>
                   <a:srgbClr val="58718B"/>
@@ -1963,7 +2179,7 @@
                 <a:ea typeface="Helvetica Neue"/>
                 <a:cs typeface="Helvetica Neue"/>
               </a:rPr>
-              <a:t>Alibaba Bano Qabil AI Hackathon 2026</a:t>
+              <a:t>Project evolution, October 2026</a:t>
             </a:r>
           </a:p>
         </p:txBody>
@@ -1979,6 +2195,1470 @@
 </file>
 
 <file path=ppt/slides/slide10.xml><?xml version="1.0" encoding="utf-8"?>
+<p:sld xmlns:p="http://schemas.openxmlformats.org/presentationml/2006/main">
+  <p:cSld>
+    <p:bg>
+      <p:bgPr>
+        <a:solidFill xmlns:a="http://schemas.openxmlformats.org/drawingml/2006/main">
+          <a:srgbClr val="FFFFFF"/>
+        </a:solidFill>
+      </p:bgPr>
+    </p:bg>
+    <p:spTree>
+      <p:nvGrpSpPr>
+        <p:cNvPr id="1" name=""/>
+        <p:cNvGrpSpPr/>
+        <p:nvPr/>
+      </p:nvGrpSpPr>
+      <p:grpSpPr>
+        <a:xfrm xmlns:a="http://schemas.openxmlformats.org/drawingml/2006/main"/>
+      </p:grpSpPr>
+      <p:sp>
+        <p:nvSpPr>
+          <p:cNvPr id="8" name="">
+            <a:extLst xmlns:a="http://schemas.openxmlformats.org/drawingml/2006/main">
+              <a:ext uri="{FF2B5EF4-FFF2-40B4-BE49-F238E27FC236}">
+                <a16:creationId xmlns:a16="http://schemas.microsoft.com/office/drawing/2014/main" id="{1BE8D7F7-5B1F-4DC0-BBBF-D586352E1F34}"/>
+              </a:ext>
+            </a:extLst>
+          </p:cNvPr>
+          <p:cNvSpPr>
+            <a:spLocks xmlns:a="http://schemas.openxmlformats.org/drawingml/2006/main" noGrp="1"/>
+          </p:cNvSpPr>
+          <p:nvPr/>
+        </p:nvSpPr>
+        <p:spPr>
+          <a:xfrm xmlns:a="http://schemas.openxmlformats.org/drawingml/2006/main">
+            <a:off x="533400" y="457200"/>
+            <a:ext cx="10953750" cy="752475"/>
+          </a:xfrm>
+          <a:prstGeom xmlns:a="http://schemas.openxmlformats.org/drawingml/2006/main" prst="rect">
+            <a:avLst/>
+          </a:prstGeom>
+          <a:noFill xmlns:a="http://schemas.openxmlformats.org/drawingml/2006/main"/>
+          <a:ln xmlns:a="http://schemas.openxmlformats.org/drawingml/2006/main" w="0">
+            <a:noFill/>
+          </a:ln>
+        </p:spPr>
+        <p:txBody>
+          <a:bodyPr xmlns:a="http://schemas.openxmlformats.org/drawingml/2006/main">
+            <a:noAutofit/>
+          </a:bodyPr>
+          <a:lstStyle xmlns:a="http://schemas.openxmlformats.org/drawingml/2006/main"/>
+          <a:p xmlns:a="http://schemas.openxmlformats.org/drawingml/2006/main">
+            <a:pPr>
+              <a:buNone/>
+              <a:defRPr sz="3825" b="1">
+                <a:solidFill>
+                  <a:srgbClr val="0B214A"/>
+                </a:solidFill>
+                <a:latin typeface="Helvetica Neue"/>
+                <a:ea typeface="Helvetica Neue"/>
+                <a:cs typeface="Helvetica Neue"/>
+              </a:defRPr>
+            </a:pPr>
+            <a:r>
+              <a:rPr sz="3825" b="1">
+                <a:solidFill>
+                  <a:srgbClr val="0B214A"/>
+                </a:solidFill>
+                <a:latin typeface="Helvetica Neue"/>
+                <a:ea typeface="Helvetica Neue"/>
+                <a:cs typeface="Helvetica Neue"/>
+              </a:rPr>
+              <a:t>An outreach draft for your review</a:t>
+            </a:r>
+          </a:p>
+        </p:txBody>
+      </p:sp>
+      <p:sp>
+        <p:nvSpPr>
+          <p:cNvPr id="2" name="">
+            <a:extLst xmlns:a="http://schemas.openxmlformats.org/drawingml/2006/main">
+              <a:ext uri="{FF2B5EF4-FFF2-40B4-BE49-F238E27FC236}">
+                <a16:creationId xmlns:a16="http://schemas.microsoft.com/office/drawing/2014/main" id="{BF6B1CCC-7EC0-4393-8788-A356D9BE9A8B}"/>
+              </a:ext>
+            </a:extLst>
+          </p:cNvPr>
+          <p:cNvSpPr>
+            <a:spLocks xmlns:a="http://schemas.openxmlformats.org/drawingml/2006/main" noGrp="1"/>
+          </p:cNvSpPr>
+          <p:nvPr/>
+        </p:nvSpPr>
+        <p:spPr>
+          <a:xfrm xmlns:a="http://schemas.openxmlformats.org/drawingml/2006/main">
+            <a:off x="590550" y="1352550"/>
+            <a:ext cx="10953750" cy="571500"/>
+          </a:xfrm>
+          <a:prstGeom xmlns:a="http://schemas.openxmlformats.org/drawingml/2006/main" prst="rect">
+            <a:avLst/>
+          </a:prstGeom>
+          <a:noFill xmlns:a="http://schemas.openxmlformats.org/drawingml/2006/main"/>
+          <a:ln xmlns:a="http://schemas.openxmlformats.org/drawingml/2006/main" w="0">
+            <a:noFill/>
+          </a:ln>
+        </p:spPr>
+        <p:txBody>
+          <a:bodyPr xmlns:a="http://schemas.openxmlformats.org/drawingml/2006/main">
+            <a:noAutofit/>
+          </a:bodyPr>
+          <a:lstStyle xmlns:a="http://schemas.openxmlformats.org/drawingml/2006/main"/>
+          <a:p xmlns:a="http://schemas.openxmlformats.org/drawingml/2006/main">
+            <a:pPr>
+              <a:buNone/>
+              <a:defRPr sz="2025" b="0">
+                <a:solidFill>
+                  <a:srgbClr val="58718B"/>
+                </a:solidFill>
+                <a:latin typeface="Helvetica Neue"/>
+                <a:ea typeface="Helvetica Neue"/>
+                <a:cs typeface="Helvetica Neue"/>
+              </a:defRPr>
+            </a:pPr>
+            <a:r>
+              <a:rPr sz="2025" b="0">
+                <a:solidFill>
+                  <a:srgbClr val="58718B"/>
+                </a:solidFill>
+                <a:latin typeface="Helvetica Neue"/>
+                <a:ea typeface="Helvetica Neue"/>
+                <a:cs typeface="Helvetica Neue"/>
+              </a:rPr>
+              <a:t>A source-based opener, a conditional fit, and a question that invites a reply.</a:t>
+            </a:r>
+          </a:p>
+        </p:txBody>
+      </p:sp>
+      <p:sp>
+        <p:nvSpPr>
+          <p:cNvPr id="3" name="">
+            <a:extLst xmlns:a="http://schemas.openxmlformats.org/drawingml/2006/main">
+              <a:ext uri="{FF2B5EF4-FFF2-40B4-BE49-F238E27FC236}">
+                <a16:creationId xmlns:a16="http://schemas.microsoft.com/office/drawing/2014/main" id="{425D3703-05BD-4BCB-A5E7-700879BC8AF0}"/>
+              </a:ext>
+            </a:extLst>
+          </p:cNvPr>
+          <p:cNvSpPr>
+            <a:spLocks xmlns:a="http://schemas.openxmlformats.org/drawingml/2006/main" noGrp="1"/>
+          </p:cNvSpPr>
+          <p:nvPr/>
+        </p:nvSpPr>
+        <p:spPr>
+          <a:xfrm xmlns:a="http://schemas.openxmlformats.org/drawingml/2006/main">
+            <a:off x="657225" y="2305050"/>
+            <a:ext cx="10829925" cy="390525"/>
+          </a:xfrm>
+          <a:prstGeom xmlns:a="http://schemas.openxmlformats.org/drawingml/2006/main" prst="rect">
+            <a:avLst/>
+          </a:prstGeom>
+          <a:noFill xmlns:a="http://schemas.openxmlformats.org/drawingml/2006/main"/>
+          <a:ln xmlns:a="http://schemas.openxmlformats.org/drawingml/2006/main" w="0">
+            <a:noFill/>
+          </a:ln>
+        </p:spPr>
+        <p:txBody>
+          <a:bodyPr xmlns:a="http://schemas.openxmlformats.org/drawingml/2006/main">
+            <a:noAutofit/>
+          </a:bodyPr>
+          <a:lstStyle xmlns:a="http://schemas.openxmlformats.org/drawingml/2006/main"/>
+          <a:p xmlns:a="http://schemas.openxmlformats.org/drawingml/2006/main">
+            <a:pPr>
+              <a:buNone/>
+              <a:defRPr sz="1875" b="0">
+                <a:solidFill>
+                  <a:srgbClr val="123363"/>
+                </a:solidFill>
+                <a:latin typeface="Helvetica Neue"/>
+                <a:ea typeface="Helvetica Neue"/>
+                <a:cs typeface="Helvetica Neue"/>
+              </a:defRPr>
+            </a:pPr>
+            <a:r>
+              <a:rPr sz="1875" b="0">
+                <a:solidFill>
+                  <a:srgbClr val="123363"/>
+                </a:solidFill>
+                <a:latin typeface="Helvetica Neue"/>
+                <a:ea typeface="Helvetica Neue"/>
+                <a:cs typeface="Helvetica Neue"/>
+              </a:rPr>
+              <a:t>Hi Tim,</a:t>
+            </a:r>
+          </a:p>
+        </p:txBody>
+      </p:sp>
+      <p:sp>
+        <p:nvSpPr>
+          <p:cNvPr id="4" name="">
+            <a:extLst xmlns:a="http://schemas.openxmlformats.org/drawingml/2006/main">
+              <a:ext uri="{FF2B5EF4-FFF2-40B4-BE49-F238E27FC236}">
+                <a16:creationId xmlns:a16="http://schemas.microsoft.com/office/drawing/2014/main" id="{E3721BE4-D65B-44D2-913A-1FD0D1C2343A}"/>
+              </a:ext>
+            </a:extLst>
+          </p:cNvPr>
+          <p:cNvSpPr>
+            <a:spLocks xmlns:a="http://schemas.openxmlformats.org/drawingml/2006/main" noGrp="1"/>
+          </p:cNvSpPr>
+          <p:nvPr/>
+        </p:nvSpPr>
+        <p:spPr>
+          <a:xfrm xmlns:a="http://schemas.openxmlformats.org/drawingml/2006/main">
+            <a:off x="657225" y="2886075"/>
+            <a:ext cx="10829925" cy="1343025"/>
+          </a:xfrm>
+          <a:prstGeom xmlns:a="http://schemas.openxmlformats.org/drawingml/2006/main" prst="rect">
+            <a:avLst/>
+          </a:prstGeom>
+          <a:noFill xmlns:a="http://schemas.openxmlformats.org/drawingml/2006/main"/>
+          <a:ln xmlns:a="http://schemas.openxmlformats.org/drawingml/2006/main" w="0">
+            <a:noFill/>
+          </a:ln>
+        </p:spPr>
+        <p:txBody>
+          <a:bodyPr xmlns:a="http://schemas.openxmlformats.org/drawingml/2006/main">
+            <a:noAutofit/>
+          </a:bodyPr>
+          <a:lstStyle xmlns:a="http://schemas.openxmlformats.org/drawingml/2006/main"/>
+          <a:p xmlns:a="http://schemas.openxmlformats.org/drawingml/2006/main">
+            <a:pPr>
+              <a:buNone/>
+              <a:defRPr sz="1875" b="0">
+                <a:solidFill>
+                  <a:srgbClr val="123363"/>
+                </a:solidFill>
+                <a:latin typeface="Helvetica Neue"/>
+                <a:ea typeface="Helvetica Neue"/>
+                <a:cs typeface="Helvetica Neue"/>
+              </a:defRPr>
+            </a:pPr>
+            <a:r>
+              <a:rPr sz="1875" b="0">
+                <a:solidFill>
+                  <a:srgbClr val="123363"/>
+                </a:solidFill>
+                <a:latin typeface="Helvetica Neue"/>
+                <a:ea typeface="Helvetica Neue"/>
+                <a:cs typeface="Helvetica Neue"/>
+              </a:rPr>
+              <a:t>I noticed your leadership role at Apple. I would like to understand which current priorities, if any, would make this conversation useful.</a:t>
+            </a:r>
+          </a:p>
+        </p:txBody>
+      </p:sp>
+      <p:sp>
+        <p:nvSpPr>
+          <p:cNvPr id="5" name="">
+            <a:extLst xmlns:a="http://schemas.openxmlformats.org/drawingml/2006/main">
+              <a:ext uri="{FF2B5EF4-FFF2-40B4-BE49-F238E27FC236}">
+                <a16:creationId xmlns:a16="http://schemas.microsoft.com/office/drawing/2014/main" id="{F0FC8601-A985-4591-A9D2-AAD1A6F60EBB}"/>
+              </a:ext>
+            </a:extLst>
+          </p:cNvPr>
+          <p:cNvSpPr>
+            <a:spLocks xmlns:a="http://schemas.openxmlformats.org/drawingml/2006/main" noGrp="1"/>
+          </p:cNvSpPr>
+          <p:nvPr/>
+        </p:nvSpPr>
+        <p:spPr>
+          <a:xfrm xmlns:a="http://schemas.openxmlformats.org/drawingml/2006/main">
+            <a:off x="657225" y="4324350"/>
+            <a:ext cx="10829925" cy="1047750"/>
+          </a:xfrm>
+          <a:prstGeom xmlns:a="http://schemas.openxmlformats.org/drawingml/2006/main" prst="rect">
+            <a:avLst/>
+          </a:prstGeom>
+          <a:noFill xmlns:a="http://schemas.openxmlformats.org/drawingml/2006/main"/>
+          <a:ln xmlns:a="http://schemas.openxmlformats.org/drawingml/2006/main" w="0">
+            <a:noFill/>
+          </a:ln>
+        </p:spPr>
+        <p:txBody>
+          <a:bodyPr xmlns:a="http://schemas.openxmlformats.org/drawingml/2006/main">
+            <a:noAutofit/>
+          </a:bodyPr>
+          <a:lstStyle xmlns:a="http://schemas.openxmlformats.org/drawingml/2006/main"/>
+          <a:p xmlns:a="http://schemas.openxmlformats.org/drawingml/2006/main">
+            <a:pPr>
+              <a:buNone/>
+              <a:defRPr sz="1875" b="0">
+                <a:solidFill>
+                  <a:srgbClr val="123363"/>
+                </a:solidFill>
+                <a:latin typeface="Helvetica Neue"/>
+                <a:ea typeface="Helvetica Neue"/>
+                <a:cs typeface="Helvetica Neue"/>
+              </a:defRPr>
+            </a:pPr>
+            <a:r>
+              <a:rPr sz="1875" b="0">
+                <a:solidFill>
+                  <a:srgbClr val="123363"/>
+                </a:solidFill>
+                <a:latin typeface="Helvetica Neue"/>
+                <a:ea typeface="Helvetica Neue"/>
+                <a:cs typeface="Helvetica Neue"/>
+              </a:rPr>
+              <a:t>We help sales teams turn public prospect research into source-linked conversation briefs. If that relates to an active need, could we compare it with your current approach?</a:t>
+            </a:r>
+          </a:p>
+        </p:txBody>
+      </p:sp>
+      <p:sp>
+        <p:nvSpPr>
+          <p:cNvPr id="6" name="">
+            <a:extLst xmlns:a="http://schemas.openxmlformats.org/drawingml/2006/main">
+              <a:ext uri="{FF2B5EF4-FFF2-40B4-BE49-F238E27FC236}">
+                <a16:creationId xmlns:a16="http://schemas.microsoft.com/office/drawing/2014/main" id="{866FC527-9622-42D4-BEE6-DF4F2B91D9C0}"/>
+              </a:ext>
+            </a:extLst>
+          </p:cNvPr>
+          <p:cNvSpPr>
+            <a:spLocks xmlns:a="http://schemas.openxmlformats.org/drawingml/2006/main" noGrp="1"/>
+          </p:cNvSpPr>
+          <p:nvPr/>
+        </p:nvSpPr>
+        <p:spPr>
+          <a:xfrm xmlns:a="http://schemas.openxmlformats.org/drawingml/2006/main">
+            <a:off x="657225" y="5467350"/>
+            <a:ext cx="10829925" cy="733425"/>
+          </a:xfrm>
+          <a:prstGeom xmlns:a="http://schemas.openxmlformats.org/drawingml/2006/main" prst="rect">
+            <a:avLst/>
+          </a:prstGeom>
+          <a:noFill xmlns:a="http://schemas.openxmlformats.org/drawingml/2006/main"/>
+          <a:ln xmlns:a="http://schemas.openxmlformats.org/drawingml/2006/main" w="0">
+            <a:noFill/>
+          </a:ln>
+        </p:spPr>
+        <p:txBody>
+          <a:bodyPr xmlns:a="http://schemas.openxmlformats.org/drawingml/2006/main">
+            <a:noAutofit/>
+          </a:bodyPr>
+          <a:lstStyle xmlns:a="http://schemas.openxmlformats.org/drawingml/2006/main"/>
+          <a:p xmlns:a="http://schemas.openxmlformats.org/drawingml/2006/main">
+            <a:pPr>
+              <a:buNone/>
+              <a:defRPr sz="1800" b="0">
+                <a:solidFill>
+                  <a:srgbClr val="58718B"/>
+                </a:solidFill>
+                <a:latin typeface="Helvetica Neue"/>
+                <a:ea typeface="Helvetica Neue"/>
+                <a:cs typeface="Helvetica Neue"/>
+              </a:defRPr>
+            </a:pPr>
+            <a:r>
+              <a:rPr sz="1800" b="0">
+                <a:solidFill>
+                  <a:srgbClr val="58718B"/>
+                </a:solidFill>
+                <a:latin typeface="Helvetica Neue"/>
+                <a:ea typeface="Helvetica Neue"/>
+                <a:cs typeface="Helvetica Neue"/>
+              </a:rPr>
+              <a:t>Best,</a:t>
+            </a:r>
+          </a:p>
+          <a:p xmlns:a="http://schemas.openxmlformats.org/drawingml/2006/main">
+            <a:pPr>
+              <a:buNone/>
+              <a:defRPr sz="1800" b="0">
+                <a:solidFill>
+                  <a:srgbClr val="58718B"/>
+                </a:solidFill>
+                <a:latin typeface="Helvetica Neue"/>
+                <a:ea typeface="Helvetica Neue"/>
+                <a:cs typeface="Helvetica Neue"/>
+              </a:defRPr>
+            </a:pPr>
+            <a:r>
+              <a:rPr sz="1800" b="0">
+                <a:solidFill>
+                  <a:srgbClr val="58718B"/>
+                </a:solidFill>
+                <a:latin typeface="Helvetica Neue"/>
+                <a:ea typeface="Helvetica Neue"/>
+                <a:cs typeface="Helvetica Neue"/>
+              </a:rPr>
+              <a:t>The Lead Trace team</a:t>
+            </a:r>
+          </a:p>
+        </p:txBody>
+      </p:sp>
+      <p:sp>
+        <p:nvSpPr>
+          <p:cNvPr id="7" name="">
+            <a:extLst xmlns:a="http://schemas.openxmlformats.org/drawingml/2006/main">
+              <a:ext uri="{FF2B5EF4-FFF2-40B4-BE49-F238E27FC236}">
+                <a16:creationId xmlns:a16="http://schemas.microsoft.com/office/drawing/2014/main" id="{19AE429C-87E2-4E84-8610-E1DF3EB8C1F8}"/>
+              </a:ext>
+            </a:extLst>
+          </p:cNvPr>
+          <p:cNvSpPr>
+            <a:spLocks xmlns:a="http://schemas.openxmlformats.org/drawingml/2006/main" noGrp="1"/>
+          </p:cNvSpPr>
+          <p:nvPr/>
+        </p:nvSpPr>
+        <p:spPr>
+          <a:xfrm xmlns:a="http://schemas.openxmlformats.org/drawingml/2006/main">
+            <a:off x="590550" y="6315075"/>
+            <a:ext cx="10858500" cy="409575"/>
+          </a:xfrm>
+          <a:prstGeom xmlns:a="http://schemas.openxmlformats.org/drawingml/2006/main" prst="rect">
+            <a:avLst/>
+          </a:prstGeom>
+          <a:noFill xmlns:a="http://schemas.openxmlformats.org/drawingml/2006/main"/>
+          <a:ln xmlns:a="http://schemas.openxmlformats.org/drawingml/2006/main" w="0">
+            <a:noFill/>
+          </a:ln>
+        </p:spPr>
+        <p:txBody>
+          <a:bodyPr xmlns:a="http://schemas.openxmlformats.org/drawingml/2006/main">
+            <a:noAutofit/>
+          </a:bodyPr>
+          <a:lstStyle xmlns:a="http://schemas.openxmlformats.org/drawingml/2006/main"/>
+          <a:p xmlns:a="http://schemas.openxmlformats.org/drawingml/2006/main">
+            <a:pPr>
+              <a:buNone/>
+              <a:defRPr sz="1800" b="1">
+                <a:solidFill>
+                  <a:srgbClr val="123363"/>
+                </a:solidFill>
+                <a:latin typeface="Helvetica Neue"/>
+                <a:ea typeface="Helvetica Neue"/>
+                <a:cs typeface="Helvetica Neue"/>
+              </a:defRPr>
+            </a:pPr>
+            <a:r>
+              <a:rPr sz="1800" b="1">
+                <a:solidFill>
+                  <a:srgbClr val="123363"/>
+                </a:solidFill>
+                <a:latin typeface="Helvetica Neue"/>
+                <a:ea typeface="Helvetica Neue"/>
+                <a:cs typeface="Helvetica Neue"/>
+              </a:rPr>
+              <a:t>Illustrative draft. Verify the source and personalize the message before sending.</a:t>
+            </a:r>
+          </a:p>
+        </p:txBody>
+      </p:sp>
+    </p:spTree>
+    <p:extLst>
+      <p:ext uri="{BB962C8B-B14F-4D97-AF65-F5344CB8AC3E}">
+        <p14:creationId xmlns:p14="http://schemas.microsoft.com/office/powerpoint/2010/main" val="1597425485"/>
+      </p:ext>
+    </p:extLst>
+  </p:cSld>
+</p:sld>
+</file>
+
+<file path=ppt/slides/slide11.xml><?xml version="1.0" encoding="utf-8"?>
+<p:sld xmlns:p="http://schemas.openxmlformats.org/presentationml/2006/main">
+  <p:cSld>
+    <p:bg>
+      <p:bgPr>
+        <a:solidFill xmlns:a="http://schemas.openxmlformats.org/drawingml/2006/main">
+          <a:srgbClr val="EDF6FF"/>
+        </a:solidFill>
+      </p:bgPr>
+    </p:bg>
+    <p:spTree>
+      <p:nvGrpSpPr>
+        <p:cNvPr id="1" name=""/>
+        <p:cNvGrpSpPr/>
+        <p:nvPr/>
+      </p:nvGrpSpPr>
+      <p:grpSpPr>
+        <a:xfrm xmlns:a="http://schemas.openxmlformats.org/drawingml/2006/main"/>
+      </p:grpSpPr>
+      <p:sp>
+        <p:nvSpPr>
+          <p:cNvPr id="8" name="">
+            <a:extLst xmlns:a="http://schemas.openxmlformats.org/drawingml/2006/main">
+              <a:ext uri="{FF2B5EF4-FFF2-40B4-BE49-F238E27FC236}">
+                <a16:creationId xmlns:a16="http://schemas.microsoft.com/office/drawing/2014/main" id="{2B6B193B-FC77-433D-B0E2-70FD9D0C032C}"/>
+              </a:ext>
+            </a:extLst>
+          </p:cNvPr>
+          <p:cNvSpPr>
+            <a:spLocks xmlns:a="http://schemas.openxmlformats.org/drawingml/2006/main" noGrp="1"/>
+          </p:cNvSpPr>
+          <p:nvPr/>
+        </p:nvSpPr>
+        <p:spPr>
+          <a:xfrm xmlns:a="http://schemas.openxmlformats.org/drawingml/2006/main">
+            <a:off x="609600" y="457200"/>
+            <a:ext cx="10972800" cy="762000"/>
+          </a:xfrm>
+          <a:prstGeom xmlns:a="http://schemas.openxmlformats.org/drawingml/2006/main" prst="rect">
+            <a:avLst/>
+          </a:prstGeom>
+          <a:noFill xmlns:a="http://schemas.openxmlformats.org/drawingml/2006/main"/>
+          <a:ln xmlns:a="http://schemas.openxmlformats.org/drawingml/2006/main" w="0">
+            <a:noFill/>
+          </a:ln>
+        </p:spPr>
+        <p:txBody>
+          <a:bodyPr xmlns:a="http://schemas.openxmlformats.org/drawingml/2006/main" lIns="0" tIns="0" rIns="0" bIns="0">
+            <a:noAutofit/>
+          </a:bodyPr>
+          <a:lstStyle xmlns:a="http://schemas.openxmlformats.org/drawingml/2006/main">
+            <a:defPPr>
+              <a:defRPr sz="3450" b="1">
+                <a:solidFill>
+                  <a:srgbClr val="0B214A"/>
+                </a:solidFill>
+                <a:latin typeface="Helvetica Neue"/>
+                <a:ea typeface="Helvetica Neue"/>
+                <a:cs typeface="Helvetica Neue"/>
+              </a:defRPr>
+            </a:defPPr>
+            <a:lvl1pPr>
+              <a:defRPr sz="3450" b="1">
+                <a:solidFill>
+                  <a:srgbClr val="0B214A"/>
+                </a:solidFill>
+                <a:latin typeface="Helvetica Neue"/>
+                <a:ea typeface="Helvetica Neue"/>
+                <a:cs typeface="Helvetica Neue"/>
+              </a:defRPr>
+            </a:lvl1pPr>
+            <a:lvl2pPr>
+              <a:defRPr sz="3450" b="1">
+                <a:solidFill>
+                  <a:srgbClr val="0B214A"/>
+                </a:solidFill>
+                <a:latin typeface="Helvetica Neue"/>
+                <a:ea typeface="Helvetica Neue"/>
+                <a:cs typeface="Helvetica Neue"/>
+              </a:defRPr>
+            </a:lvl2pPr>
+            <a:lvl3pPr>
+              <a:defRPr sz="3450" b="1">
+                <a:solidFill>
+                  <a:srgbClr val="0B214A"/>
+                </a:solidFill>
+                <a:latin typeface="Helvetica Neue"/>
+                <a:ea typeface="Helvetica Neue"/>
+                <a:cs typeface="Helvetica Neue"/>
+              </a:defRPr>
+            </a:lvl3pPr>
+            <a:lvl4pPr>
+              <a:defRPr sz="3450" b="1">
+                <a:solidFill>
+                  <a:srgbClr val="0B214A"/>
+                </a:solidFill>
+                <a:latin typeface="Helvetica Neue"/>
+                <a:ea typeface="Helvetica Neue"/>
+                <a:cs typeface="Helvetica Neue"/>
+              </a:defRPr>
+            </a:lvl4pPr>
+            <a:lvl5pPr>
+              <a:defRPr sz="3450" b="1">
+                <a:solidFill>
+                  <a:srgbClr val="0B214A"/>
+                </a:solidFill>
+                <a:latin typeface="Helvetica Neue"/>
+                <a:ea typeface="Helvetica Neue"/>
+                <a:cs typeface="Helvetica Neue"/>
+              </a:defRPr>
+            </a:lvl5pPr>
+            <a:lvl6pPr>
+              <a:defRPr sz="3450" b="1">
+                <a:solidFill>
+                  <a:srgbClr val="0B214A"/>
+                </a:solidFill>
+                <a:latin typeface="Helvetica Neue"/>
+                <a:ea typeface="Helvetica Neue"/>
+                <a:cs typeface="Helvetica Neue"/>
+              </a:defRPr>
+            </a:lvl6pPr>
+            <a:lvl7pPr>
+              <a:defRPr sz="3450" b="1">
+                <a:solidFill>
+                  <a:srgbClr val="0B214A"/>
+                </a:solidFill>
+                <a:latin typeface="Helvetica Neue"/>
+                <a:ea typeface="Helvetica Neue"/>
+                <a:cs typeface="Helvetica Neue"/>
+              </a:defRPr>
+            </a:lvl7pPr>
+            <a:lvl8pPr>
+              <a:defRPr sz="3450" b="1">
+                <a:solidFill>
+                  <a:srgbClr val="0B214A"/>
+                </a:solidFill>
+                <a:latin typeface="Helvetica Neue"/>
+                <a:ea typeface="Helvetica Neue"/>
+                <a:cs typeface="Helvetica Neue"/>
+              </a:defRPr>
+            </a:lvl8pPr>
+            <a:lvl9pPr>
+              <a:defRPr sz="3450" b="1">
+                <a:solidFill>
+                  <a:srgbClr val="0B214A"/>
+                </a:solidFill>
+                <a:latin typeface="Helvetica Neue"/>
+                <a:ea typeface="Helvetica Neue"/>
+                <a:cs typeface="Helvetica Neue"/>
+              </a:defRPr>
+            </a:lvl9pPr>
+          </a:lstStyle>
+          <a:p xmlns:a="http://schemas.openxmlformats.org/drawingml/2006/main">
+            <a:pPr>
+              <a:defRPr sz="3450" b="1">
+                <a:solidFill>
+                  <a:srgbClr val="0B214A"/>
+                </a:solidFill>
+                <a:latin typeface="Helvetica Neue"/>
+                <a:ea typeface="Helvetica Neue"/>
+                <a:cs typeface="Helvetica Neue"/>
+              </a:defRPr>
+            </a:pPr>
+            <a:r>
+              <a:rPr sz="3450" b="1">
+                <a:solidFill>
+                  <a:srgbClr val="0B214A"/>
+                </a:solidFill>
+                <a:latin typeface="Helvetica Neue"/>
+                <a:ea typeface="Helvetica Neue"/>
+                <a:cs typeface="Helvetica Neue"/>
+              </a:rPr>
+              <a:t>A broader direction for Lead Trace</a:t>
+            </a:r>
+          </a:p>
+        </p:txBody>
+      </p:sp>
+      <p:sp>
+        <p:nvSpPr>
+          <p:cNvPr id="2" name="">
+            <a:extLst xmlns:a="http://schemas.openxmlformats.org/drawingml/2006/main">
+              <a:ext uri="{FF2B5EF4-FFF2-40B4-BE49-F238E27FC236}">
+                <a16:creationId xmlns:a16="http://schemas.microsoft.com/office/drawing/2014/main" id="{00BEF7A7-D39A-4DFA-9B95-032902CC069A}"/>
+              </a:ext>
+            </a:extLst>
+          </p:cNvPr>
+          <p:cNvSpPr>
+            <a:spLocks xmlns:a="http://schemas.openxmlformats.org/drawingml/2006/main" noGrp="1"/>
+          </p:cNvSpPr>
+          <p:nvPr/>
+        </p:nvSpPr>
+        <p:spPr>
+          <a:xfrm xmlns:a="http://schemas.openxmlformats.org/drawingml/2006/main">
+            <a:off x="657225" y="1752600"/>
+            <a:ext cx="7239000" cy="523875"/>
+          </a:xfrm>
+          <a:prstGeom xmlns:a="http://schemas.openxmlformats.org/drawingml/2006/main" prst="rect">
+            <a:avLst/>
+          </a:prstGeom>
+          <a:noFill xmlns:a="http://schemas.openxmlformats.org/drawingml/2006/main"/>
+          <a:ln xmlns:a="http://schemas.openxmlformats.org/drawingml/2006/main" w="0">
+            <a:noFill/>
+          </a:ln>
+        </p:spPr>
+        <p:txBody>
+          <a:bodyPr xmlns:a="http://schemas.openxmlformats.org/drawingml/2006/main" lIns="0" tIns="0" rIns="0" bIns="0">
+            <a:noAutofit/>
+          </a:bodyPr>
+          <a:lstStyle xmlns:a="http://schemas.openxmlformats.org/drawingml/2006/main">
+            <a:defPPr>
+              <a:defRPr sz="2325" b="1">
+                <a:solidFill>
+                  <a:srgbClr val="1868C8"/>
+                </a:solidFill>
+                <a:latin typeface="Helvetica Neue"/>
+                <a:ea typeface="Helvetica Neue"/>
+                <a:cs typeface="Helvetica Neue"/>
+              </a:defRPr>
+            </a:defPPr>
+            <a:lvl1pPr>
+              <a:defRPr sz="2325" b="1">
+                <a:solidFill>
+                  <a:srgbClr val="1868C8"/>
+                </a:solidFill>
+                <a:latin typeface="Helvetica Neue"/>
+                <a:ea typeface="Helvetica Neue"/>
+                <a:cs typeface="Helvetica Neue"/>
+              </a:defRPr>
+            </a:lvl1pPr>
+            <a:lvl2pPr>
+              <a:defRPr sz="2325" b="1">
+                <a:solidFill>
+                  <a:srgbClr val="1868C8"/>
+                </a:solidFill>
+                <a:latin typeface="Helvetica Neue"/>
+                <a:ea typeface="Helvetica Neue"/>
+                <a:cs typeface="Helvetica Neue"/>
+              </a:defRPr>
+            </a:lvl2pPr>
+            <a:lvl3pPr>
+              <a:defRPr sz="2325" b="1">
+                <a:solidFill>
+                  <a:srgbClr val="1868C8"/>
+                </a:solidFill>
+                <a:latin typeface="Helvetica Neue"/>
+                <a:ea typeface="Helvetica Neue"/>
+                <a:cs typeface="Helvetica Neue"/>
+              </a:defRPr>
+            </a:lvl3pPr>
+            <a:lvl4pPr>
+              <a:defRPr sz="2325" b="1">
+                <a:solidFill>
+                  <a:srgbClr val="1868C8"/>
+                </a:solidFill>
+                <a:latin typeface="Helvetica Neue"/>
+                <a:ea typeface="Helvetica Neue"/>
+                <a:cs typeface="Helvetica Neue"/>
+              </a:defRPr>
+            </a:lvl4pPr>
+            <a:lvl5pPr>
+              <a:defRPr sz="2325" b="1">
+                <a:solidFill>
+                  <a:srgbClr val="1868C8"/>
+                </a:solidFill>
+                <a:latin typeface="Helvetica Neue"/>
+                <a:ea typeface="Helvetica Neue"/>
+                <a:cs typeface="Helvetica Neue"/>
+              </a:defRPr>
+            </a:lvl5pPr>
+            <a:lvl6pPr>
+              <a:defRPr sz="2325" b="1">
+                <a:solidFill>
+                  <a:srgbClr val="1868C8"/>
+                </a:solidFill>
+                <a:latin typeface="Helvetica Neue"/>
+                <a:ea typeface="Helvetica Neue"/>
+                <a:cs typeface="Helvetica Neue"/>
+              </a:defRPr>
+            </a:lvl6pPr>
+            <a:lvl7pPr>
+              <a:defRPr sz="2325" b="1">
+                <a:solidFill>
+                  <a:srgbClr val="1868C8"/>
+                </a:solidFill>
+                <a:latin typeface="Helvetica Neue"/>
+                <a:ea typeface="Helvetica Neue"/>
+                <a:cs typeface="Helvetica Neue"/>
+              </a:defRPr>
+            </a:lvl7pPr>
+            <a:lvl8pPr>
+              <a:defRPr sz="2325" b="1">
+                <a:solidFill>
+                  <a:srgbClr val="1868C8"/>
+                </a:solidFill>
+                <a:latin typeface="Helvetica Neue"/>
+                <a:ea typeface="Helvetica Neue"/>
+                <a:cs typeface="Helvetica Neue"/>
+              </a:defRPr>
+            </a:lvl8pPr>
+            <a:lvl9pPr>
+              <a:defRPr sz="2325" b="1">
+                <a:solidFill>
+                  <a:srgbClr val="1868C8"/>
+                </a:solidFill>
+                <a:latin typeface="Helvetica Neue"/>
+                <a:ea typeface="Helvetica Neue"/>
+                <a:cs typeface="Helvetica Neue"/>
+              </a:defRPr>
+            </a:lvl9pPr>
+          </a:lstStyle>
+          <a:p xmlns:a="http://schemas.openxmlformats.org/drawingml/2006/main">
+            <a:pPr>
+              <a:defRPr sz="2325" b="1">
+                <a:solidFill>
+                  <a:srgbClr val="1868C8"/>
+                </a:solidFill>
+                <a:latin typeface="Helvetica Neue"/>
+                <a:ea typeface="Helvetica Neue"/>
+                <a:cs typeface="Helvetica Neue"/>
+              </a:defRPr>
+            </a:pPr>
+            <a:r>
+              <a:rPr sz="2325" b="1">
+                <a:solidFill>
+                  <a:srgbClr val="1868C8"/>
+                </a:solidFill>
+                <a:latin typeface="Helvetica Neue"/>
+                <a:ea typeface="Helvetica Neue"/>
+                <a:cs typeface="Helvetica Neue"/>
+              </a:rPr>
+              <a:t>Available today</a:t>
+            </a:r>
+          </a:p>
+        </p:txBody>
+      </p:sp>
+      <p:sp>
+        <p:nvSpPr>
+          <p:cNvPr id="3" name="">
+            <a:extLst xmlns:a="http://schemas.openxmlformats.org/drawingml/2006/main">
+              <a:ext uri="{FF2B5EF4-FFF2-40B4-BE49-F238E27FC236}">
+                <a16:creationId xmlns:a16="http://schemas.microsoft.com/office/drawing/2014/main" id="{DC705064-E02C-4250-A6B6-3B77D91EC450}"/>
+              </a:ext>
+            </a:extLst>
+          </p:cNvPr>
+          <p:cNvSpPr>
+            <a:spLocks xmlns:a="http://schemas.openxmlformats.org/drawingml/2006/main" noGrp="1"/>
+          </p:cNvSpPr>
+          <p:nvPr/>
+        </p:nvSpPr>
+        <p:spPr>
+          <a:xfrm xmlns:a="http://schemas.openxmlformats.org/drawingml/2006/main">
+            <a:off x="657225" y="2371725"/>
+            <a:ext cx="7048500" cy="1047750"/>
+          </a:xfrm>
+          <a:prstGeom xmlns:a="http://schemas.openxmlformats.org/drawingml/2006/main" prst="rect">
+            <a:avLst/>
+          </a:prstGeom>
+          <a:noFill xmlns:a="http://schemas.openxmlformats.org/drawingml/2006/main"/>
+          <a:ln xmlns:a="http://schemas.openxmlformats.org/drawingml/2006/main" w="0">
+            <a:noFill/>
+          </a:ln>
+        </p:spPr>
+        <p:txBody>
+          <a:bodyPr xmlns:a="http://schemas.openxmlformats.org/drawingml/2006/main" lIns="0" tIns="0" rIns="0" bIns="0">
+            <a:noAutofit/>
+          </a:bodyPr>
+          <a:lstStyle xmlns:a="http://schemas.openxmlformats.org/drawingml/2006/main">
+            <a:defPPr>
+              <a:defRPr sz="2175" b="0">
+                <a:solidFill>
+                  <a:srgbClr val="0B214A"/>
+                </a:solidFill>
+                <a:latin typeface="Helvetica Neue"/>
+                <a:ea typeface="Helvetica Neue"/>
+                <a:cs typeface="Helvetica Neue"/>
+              </a:defRPr>
+            </a:defPPr>
+            <a:lvl1pPr>
+              <a:defRPr sz="2175" b="0">
+                <a:solidFill>
+                  <a:srgbClr val="0B214A"/>
+                </a:solidFill>
+                <a:latin typeface="Helvetica Neue"/>
+                <a:ea typeface="Helvetica Neue"/>
+                <a:cs typeface="Helvetica Neue"/>
+              </a:defRPr>
+            </a:lvl1pPr>
+            <a:lvl2pPr>
+              <a:defRPr sz="2175" b="0">
+                <a:solidFill>
+                  <a:srgbClr val="0B214A"/>
+                </a:solidFill>
+                <a:latin typeface="Helvetica Neue"/>
+                <a:ea typeface="Helvetica Neue"/>
+                <a:cs typeface="Helvetica Neue"/>
+              </a:defRPr>
+            </a:lvl2pPr>
+            <a:lvl3pPr>
+              <a:defRPr sz="2175" b="0">
+                <a:solidFill>
+                  <a:srgbClr val="0B214A"/>
+                </a:solidFill>
+                <a:latin typeface="Helvetica Neue"/>
+                <a:ea typeface="Helvetica Neue"/>
+                <a:cs typeface="Helvetica Neue"/>
+              </a:defRPr>
+            </a:lvl3pPr>
+            <a:lvl4pPr>
+              <a:defRPr sz="2175" b="0">
+                <a:solidFill>
+                  <a:srgbClr val="0B214A"/>
+                </a:solidFill>
+                <a:latin typeface="Helvetica Neue"/>
+                <a:ea typeface="Helvetica Neue"/>
+                <a:cs typeface="Helvetica Neue"/>
+              </a:defRPr>
+            </a:lvl4pPr>
+            <a:lvl5pPr>
+              <a:defRPr sz="2175" b="0">
+                <a:solidFill>
+                  <a:srgbClr val="0B214A"/>
+                </a:solidFill>
+                <a:latin typeface="Helvetica Neue"/>
+                <a:ea typeface="Helvetica Neue"/>
+                <a:cs typeface="Helvetica Neue"/>
+              </a:defRPr>
+            </a:lvl5pPr>
+            <a:lvl6pPr>
+              <a:defRPr sz="2175" b="0">
+                <a:solidFill>
+                  <a:srgbClr val="0B214A"/>
+                </a:solidFill>
+                <a:latin typeface="Helvetica Neue"/>
+                <a:ea typeface="Helvetica Neue"/>
+                <a:cs typeface="Helvetica Neue"/>
+              </a:defRPr>
+            </a:lvl6pPr>
+            <a:lvl7pPr>
+              <a:defRPr sz="2175" b="0">
+                <a:solidFill>
+                  <a:srgbClr val="0B214A"/>
+                </a:solidFill>
+                <a:latin typeface="Helvetica Neue"/>
+                <a:ea typeface="Helvetica Neue"/>
+                <a:cs typeface="Helvetica Neue"/>
+              </a:defRPr>
+            </a:lvl7pPr>
+            <a:lvl8pPr>
+              <a:defRPr sz="2175" b="0">
+                <a:solidFill>
+                  <a:srgbClr val="0B214A"/>
+                </a:solidFill>
+                <a:latin typeface="Helvetica Neue"/>
+                <a:ea typeface="Helvetica Neue"/>
+                <a:cs typeface="Helvetica Neue"/>
+              </a:defRPr>
+            </a:lvl8pPr>
+            <a:lvl9pPr>
+              <a:defRPr sz="2175" b="0">
+                <a:solidFill>
+                  <a:srgbClr val="0B214A"/>
+                </a:solidFill>
+                <a:latin typeface="Helvetica Neue"/>
+                <a:ea typeface="Helvetica Neue"/>
+                <a:cs typeface="Helvetica Neue"/>
+              </a:defRPr>
+            </a:lvl9pPr>
+          </a:lstStyle>
+          <a:p xmlns:a="http://schemas.openxmlformats.org/drawingml/2006/main">
+            <a:pPr>
+              <a:defRPr sz="2175" b="0">
+                <a:solidFill>
+                  <a:srgbClr val="0B214A"/>
+                </a:solidFill>
+                <a:latin typeface="Helvetica Neue"/>
+                <a:ea typeface="Helvetica Neue"/>
+                <a:cs typeface="Helvetica Neue"/>
+              </a:defRPr>
+            </a:pPr>
+            <a:r>
+              <a:rPr sz="2175" b="0">
+                <a:solidFill>
+                  <a:srgbClr val="0B214A"/>
+                </a:solidFill>
+                <a:latin typeface="Helvetica Neue"/>
+                <a:ea typeface="Helvetica Neue"/>
+                <a:cs typeface="Helvetica Neue"/>
+              </a:rPr>
+              <a:t>Prospect research, source evidence, cited briefs, outreach drafts, and shared workspaces.</a:t>
+            </a:r>
+          </a:p>
+        </p:txBody>
+      </p:sp>
+      <p:sp>
+        <p:nvSpPr>
+          <p:cNvPr id="4" name="">
+            <a:extLst xmlns:a="http://schemas.openxmlformats.org/drawingml/2006/main">
+              <a:ext uri="{FF2B5EF4-FFF2-40B4-BE49-F238E27FC236}">
+                <a16:creationId xmlns:a16="http://schemas.microsoft.com/office/drawing/2014/main" id="{92C4E8C8-79D4-4502-AA8B-681352FF96AC}"/>
+              </a:ext>
+            </a:extLst>
+          </p:cNvPr>
+          <p:cNvSpPr>
+            <a:spLocks xmlns:a="http://schemas.openxmlformats.org/drawingml/2006/main" noGrp="1"/>
+          </p:cNvSpPr>
+          <p:nvPr/>
+        </p:nvSpPr>
+        <p:spPr>
+          <a:xfrm xmlns:a="http://schemas.openxmlformats.org/drawingml/2006/main">
+            <a:off x="657225" y="3752850"/>
+            <a:ext cx="7239000" cy="523875"/>
+          </a:xfrm>
+          <a:prstGeom xmlns:a="http://schemas.openxmlformats.org/drawingml/2006/main" prst="rect">
+            <a:avLst/>
+          </a:prstGeom>
+          <a:noFill xmlns:a="http://schemas.openxmlformats.org/drawingml/2006/main"/>
+          <a:ln xmlns:a="http://schemas.openxmlformats.org/drawingml/2006/main" w="0">
+            <a:noFill/>
+          </a:ln>
+        </p:spPr>
+        <p:txBody>
+          <a:bodyPr xmlns:a="http://schemas.openxmlformats.org/drawingml/2006/main" lIns="0" tIns="0" rIns="0" bIns="0">
+            <a:noAutofit/>
+          </a:bodyPr>
+          <a:lstStyle xmlns:a="http://schemas.openxmlformats.org/drawingml/2006/main">
+            <a:defPPr>
+              <a:defRPr sz="2325" b="1">
+                <a:solidFill>
+                  <a:srgbClr val="1868C8"/>
+                </a:solidFill>
+                <a:latin typeface="Helvetica Neue"/>
+                <a:ea typeface="Helvetica Neue"/>
+                <a:cs typeface="Helvetica Neue"/>
+              </a:defRPr>
+            </a:defPPr>
+            <a:lvl1pPr>
+              <a:defRPr sz="2325" b="1">
+                <a:solidFill>
+                  <a:srgbClr val="1868C8"/>
+                </a:solidFill>
+                <a:latin typeface="Helvetica Neue"/>
+                <a:ea typeface="Helvetica Neue"/>
+                <a:cs typeface="Helvetica Neue"/>
+              </a:defRPr>
+            </a:lvl1pPr>
+            <a:lvl2pPr>
+              <a:defRPr sz="2325" b="1">
+                <a:solidFill>
+                  <a:srgbClr val="1868C8"/>
+                </a:solidFill>
+                <a:latin typeface="Helvetica Neue"/>
+                <a:ea typeface="Helvetica Neue"/>
+                <a:cs typeface="Helvetica Neue"/>
+              </a:defRPr>
+            </a:lvl2pPr>
+            <a:lvl3pPr>
+              <a:defRPr sz="2325" b="1">
+                <a:solidFill>
+                  <a:srgbClr val="1868C8"/>
+                </a:solidFill>
+                <a:latin typeface="Helvetica Neue"/>
+                <a:ea typeface="Helvetica Neue"/>
+                <a:cs typeface="Helvetica Neue"/>
+              </a:defRPr>
+            </a:lvl3pPr>
+            <a:lvl4pPr>
+              <a:defRPr sz="2325" b="1">
+                <a:solidFill>
+                  <a:srgbClr val="1868C8"/>
+                </a:solidFill>
+                <a:latin typeface="Helvetica Neue"/>
+                <a:ea typeface="Helvetica Neue"/>
+                <a:cs typeface="Helvetica Neue"/>
+              </a:defRPr>
+            </a:lvl4pPr>
+            <a:lvl5pPr>
+              <a:defRPr sz="2325" b="1">
+                <a:solidFill>
+                  <a:srgbClr val="1868C8"/>
+                </a:solidFill>
+                <a:latin typeface="Helvetica Neue"/>
+                <a:ea typeface="Helvetica Neue"/>
+                <a:cs typeface="Helvetica Neue"/>
+              </a:defRPr>
+            </a:lvl5pPr>
+            <a:lvl6pPr>
+              <a:defRPr sz="2325" b="1">
+                <a:solidFill>
+                  <a:srgbClr val="1868C8"/>
+                </a:solidFill>
+                <a:latin typeface="Helvetica Neue"/>
+                <a:ea typeface="Helvetica Neue"/>
+                <a:cs typeface="Helvetica Neue"/>
+              </a:defRPr>
+            </a:lvl6pPr>
+            <a:lvl7pPr>
+              <a:defRPr sz="2325" b="1">
+                <a:solidFill>
+                  <a:srgbClr val="1868C8"/>
+                </a:solidFill>
+                <a:latin typeface="Helvetica Neue"/>
+                <a:ea typeface="Helvetica Neue"/>
+                <a:cs typeface="Helvetica Neue"/>
+              </a:defRPr>
+            </a:lvl7pPr>
+            <a:lvl8pPr>
+              <a:defRPr sz="2325" b="1">
+                <a:solidFill>
+                  <a:srgbClr val="1868C8"/>
+                </a:solidFill>
+                <a:latin typeface="Helvetica Neue"/>
+                <a:ea typeface="Helvetica Neue"/>
+                <a:cs typeface="Helvetica Neue"/>
+              </a:defRPr>
+            </a:lvl8pPr>
+            <a:lvl9pPr>
+              <a:defRPr sz="2325" b="1">
+                <a:solidFill>
+                  <a:srgbClr val="1868C8"/>
+                </a:solidFill>
+                <a:latin typeface="Helvetica Neue"/>
+                <a:ea typeface="Helvetica Neue"/>
+                <a:cs typeface="Helvetica Neue"/>
+              </a:defRPr>
+            </a:lvl9pPr>
+          </a:lstStyle>
+          <a:p xmlns:a="http://schemas.openxmlformats.org/drawingml/2006/main">
+            <a:pPr>
+              <a:defRPr sz="2325" b="1">
+                <a:solidFill>
+                  <a:srgbClr val="1868C8"/>
+                </a:solidFill>
+                <a:latin typeface="Helvetica Neue"/>
+                <a:ea typeface="Helvetica Neue"/>
+                <a:cs typeface="Helvetica Neue"/>
+              </a:defRPr>
+            </a:pPr>
+            <a:r>
+              <a:rPr sz="2325" b="1">
+                <a:solidFill>
+                  <a:srgbClr val="1868C8"/>
+                </a:solidFill>
+                <a:latin typeface="Helvetica Neue"/>
+                <a:ea typeface="Helvetica Neue"/>
+                <a:cs typeface="Helvetica Neue"/>
+              </a:rPr>
+              <a:t>Planned next</a:t>
+            </a:r>
+          </a:p>
+        </p:txBody>
+      </p:sp>
+      <p:sp>
+        <p:nvSpPr>
+          <p:cNvPr id="5" name="">
+            <a:extLst xmlns:a="http://schemas.openxmlformats.org/drawingml/2006/main">
+              <a:ext uri="{FF2B5EF4-FFF2-40B4-BE49-F238E27FC236}">
+                <a16:creationId xmlns:a16="http://schemas.microsoft.com/office/drawing/2014/main" id="{73D34366-FCFA-4B12-9DEF-1BD6AF72502C}"/>
+              </a:ext>
+            </a:extLst>
+          </p:cNvPr>
+          <p:cNvSpPr>
+            <a:spLocks xmlns:a="http://schemas.openxmlformats.org/drawingml/2006/main" noGrp="1"/>
+          </p:cNvSpPr>
+          <p:nvPr/>
+        </p:nvSpPr>
+        <p:spPr>
+          <a:xfrm xmlns:a="http://schemas.openxmlformats.org/drawingml/2006/main">
+            <a:off x="657225" y="4371975"/>
+            <a:ext cx="7048500" cy="952500"/>
+          </a:xfrm>
+          <a:prstGeom xmlns:a="http://schemas.openxmlformats.org/drawingml/2006/main" prst="rect">
+            <a:avLst/>
+          </a:prstGeom>
+          <a:noFill xmlns:a="http://schemas.openxmlformats.org/drawingml/2006/main"/>
+          <a:ln xmlns:a="http://schemas.openxmlformats.org/drawingml/2006/main" w="0">
+            <a:noFill/>
+          </a:ln>
+        </p:spPr>
+        <p:txBody>
+          <a:bodyPr xmlns:a="http://schemas.openxmlformats.org/drawingml/2006/main" lIns="0" tIns="0" rIns="0" bIns="0">
+            <a:noAutofit/>
+          </a:bodyPr>
+          <a:lstStyle xmlns:a="http://schemas.openxmlformats.org/drawingml/2006/main">
+            <a:defPPr>
+              <a:defRPr sz="2175" b="0">
+                <a:solidFill>
+                  <a:srgbClr val="0B214A"/>
+                </a:solidFill>
+                <a:latin typeface="Helvetica Neue"/>
+                <a:ea typeface="Helvetica Neue"/>
+                <a:cs typeface="Helvetica Neue"/>
+              </a:defRPr>
+            </a:defPPr>
+            <a:lvl1pPr>
+              <a:defRPr sz="2175" b="0">
+                <a:solidFill>
+                  <a:srgbClr val="0B214A"/>
+                </a:solidFill>
+                <a:latin typeface="Helvetica Neue"/>
+                <a:ea typeface="Helvetica Neue"/>
+                <a:cs typeface="Helvetica Neue"/>
+              </a:defRPr>
+            </a:lvl1pPr>
+            <a:lvl2pPr>
+              <a:defRPr sz="2175" b="0">
+                <a:solidFill>
+                  <a:srgbClr val="0B214A"/>
+                </a:solidFill>
+                <a:latin typeface="Helvetica Neue"/>
+                <a:ea typeface="Helvetica Neue"/>
+                <a:cs typeface="Helvetica Neue"/>
+              </a:defRPr>
+            </a:lvl2pPr>
+            <a:lvl3pPr>
+              <a:defRPr sz="2175" b="0">
+                <a:solidFill>
+                  <a:srgbClr val="0B214A"/>
+                </a:solidFill>
+                <a:latin typeface="Helvetica Neue"/>
+                <a:ea typeface="Helvetica Neue"/>
+                <a:cs typeface="Helvetica Neue"/>
+              </a:defRPr>
+            </a:lvl3pPr>
+            <a:lvl4pPr>
+              <a:defRPr sz="2175" b="0">
+                <a:solidFill>
+                  <a:srgbClr val="0B214A"/>
+                </a:solidFill>
+                <a:latin typeface="Helvetica Neue"/>
+                <a:ea typeface="Helvetica Neue"/>
+                <a:cs typeface="Helvetica Neue"/>
+              </a:defRPr>
+            </a:lvl4pPr>
+            <a:lvl5pPr>
+              <a:defRPr sz="2175" b="0">
+                <a:solidFill>
+                  <a:srgbClr val="0B214A"/>
+                </a:solidFill>
+                <a:latin typeface="Helvetica Neue"/>
+                <a:ea typeface="Helvetica Neue"/>
+                <a:cs typeface="Helvetica Neue"/>
+              </a:defRPr>
+            </a:lvl5pPr>
+            <a:lvl6pPr>
+              <a:defRPr sz="2175" b="0">
+                <a:solidFill>
+                  <a:srgbClr val="0B214A"/>
+                </a:solidFill>
+                <a:latin typeface="Helvetica Neue"/>
+                <a:ea typeface="Helvetica Neue"/>
+                <a:cs typeface="Helvetica Neue"/>
+              </a:defRPr>
+            </a:lvl6pPr>
+            <a:lvl7pPr>
+              <a:defRPr sz="2175" b="0">
+                <a:solidFill>
+                  <a:srgbClr val="0B214A"/>
+                </a:solidFill>
+                <a:latin typeface="Helvetica Neue"/>
+                <a:ea typeface="Helvetica Neue"/>
+                <a:cs typeface="Helvetica Neue"/>
+              </a:defRPr>
+            </a:lvl7pPr>
+            <a:lvl8pPr>
+              <a:defRPr sz="2175" b="0">
+                <a:solidFill>
+                  <a:srgbClr val="0B214A"/>
+                </a:solidFill>
+                <a:latin typeface="Helvetica Neue"/>
+                <a:ea typeface="Helvetica Neue"/>
+                <a:cs typeface="Helvetica Neue"/>
+              </a:defRPr>
+            </a:lvl8pPr>
+            <a:lvl9pPr>
+              <a:defRPr sz="2175" b="0">
+                <a:solidFill>
+                  <a:srgbClr val="0B214A"/>
+                </a:solidFill>
+                <a:latin typeface="Helvetica Neue"/>
+                <a:ea typeface="Helvetica Neue"/>
+                <a:cs typeface="Helvetica Neue"/>
+              </a:defRPr>
+            </a:lvl9pPr>
+          </a:lstStyle>
+          <a:p xmlns:a="http://schemas.openxmlformats.org/drawingml/2006/main">
+            <a:pPr>
+              <a:defRPr sz="2175" b="0">
+                <a:solidFill>
+                  <a:srgbClr val="0B214A"/>
+                </a:solidFill>
+                <a:latin typeface="Helvetica Neue"/>
+                <a:ea typeface="Helvetica Neue"/>
+                <a:cs typeface="Helvetica Neue"/>
+              </a:defRPr>
+            </a:pPr>
+            <a:r>
+              <a:rPr sz="2175" b="0">
+                <a:solidFill>
+                  <a:srgbClr val="0B214A"/>
+                </a:solidFill>
+                <a:latin typeface="Helvetica Neue"/>
+                <a:ea typeface="Helvetica Neue"/>
+                <a:cs typeface="Helvetica Neue"/>
+              </a:rPr>
+              <a:t>Lead generation, CRM, and related sales workflows.</a:t>
+            </a:r>
+          </a:p>
+        </p:txBody>
+      </p:sp>
+      <p:pic>
+        <p:nvPicPr>
+          <p:cNvPr id="6" name="">
+            <a:extLst xmlns:a="http://schemas.openxmlformats.org/drawingml/2006/main">
+              <a:ext uri="{FF2B5EF4-FFF2-40B4-BE49-F238E27FC236}">
+                <a16:creationId xmlns:a16="http://schemas.microsoft.com/office/drawing/2014/main" id="{4F3BC2E1-4B9C-438B-B525-941759A7AAFF}"/>
+              </a:ext>
+            </a:extLst>
+          </p:cNvPr>
+          <p:cNvPicPr>
+            <a:picLocks xmlns:a="http://schemas.openxmlformats.org/drawingml/2006/main" noChangeAspect="1"/>
+          </p:cNvPicPr>
+          <p:nvPr/>
+        </p:nvPicPr>
+        <p:blipFill>
+          <a:blip xmlns:r="http://schemas.openxmlformats.org/officeDocument/2006/relationships" xmlns:a="http://schemas.openxmlformats.org/drawingml/2006/main" r:embed="Reb48c1e76174402c"/>
+          <a:stretch xmlns:a="http://schemas.openxmlformats.org/drawingml/2006/main"/>
+        </p:blipFill>
+        <p:spPr>
+          <a:xfrm xmlns:a="http://schemas.openxmlformats.org/drawingml/2006/main">
+            <a:off x="8334375" y="2000250"/>
+            <a:ext cx="3143250" cy="3143250"/>
+          </a:xfrm>
+          <a:prstGeom xmlns:a="http://schemas.openxmlformats.org/drawingml/2006/main" prst="rect">
+            <a:avLst/>
+          </a:prstGeom>
+        </p:spPr>
+      </p:pic>
+      <p:sp>
+        <p:nvSpPr>
+          <p:cNvPr id="7" name="">
+            <a:extLst xmlns:a="http://schemas.openxmlformats.org/drawingml/2006/main">
+              <a:ext uri="{FF2B5EF4-FFF2-40B4-BE49-F238E27FC236}">
+                <a16:creationId xmlns:a16="http://schemas.microsoft.com/office/drawing/2014/main" id="{414F09AE-FA9E-452B-857D-BC18173EB560}"/>
+              </a:ext>
+            </a:extLst>
+          </p:cNvPr>
+          <p:cNvSpPr>
+            <a:spLocks xmlns:a="http://schemas.openxmlformats.org/drawingml/2006/main" noGrp="1"/>
+          </p:cNvSpPr>
+          <p:nvPr/>
+        </p:nvSpPr>
+        <p:spPr>
+          <a:xfrm xmlns:a="http://schemas.openxmlformats.org/drawingml/2006/main">
+            <a:off x="657225" y="5810250"/>
+            <a:ext cx="10877550" cy="619125"/>
+          </a:xfrm>
+          <a:prstGeom xmlns:a="http://schemas.openxmlformats.org/drawingml/2006/main" prst="rect">
+            <a:avLst/>
+          </a:prstGeom>
+          <a:noFill xmlns:a="http://schemas.openxmlformats.org/drawingml/2006/main"/>
+          <a:ln xmlns:a="http://schemas.openxmlformats.org/drawingml/2006/main" w="0">
+            <a:noFill/>
+          </a:ln>
+        </p:spPr>
+        <p:txBody>
+          <a:bodyPr xmlns:a="http://schemas.openxmlformats.org/drawingml/2006/main" lIns="0" tIns="0" rIns="0" bIns="0">
+            <a:noAutofit/>
+          </a:bodyPr>
+          <a:lstStyle xmlns:a="http://schemas.openxmlformats.org/drawingml/2006/main">
+            <a:defPPr>
+              <a:defRPr sz="1800" b="0">
+                <a:solidFill>
+                  <a:srgbClr val="58718B"/>
+                </a:solidFill>
+                <a:latin typeface="Helvetica Neue"/>
+                <a:ea typeface="Helvetica Neue"/>
+                <a:cs typeface="Helvetica Neue"/>
+              </a:defRPr>
+            </a:defPPr>
+            <a:lvl1pPr>
+              <a:defRPr sz="1800" b="0">
+                <a:solidFill>
+                  <a:srgbClr val="58718B"/>
+                </a:solidFill>
+                <a:latin typeface="Helvetica Neue"/>
+                <a:ea typeface="Helvetica Neue"/>
+                <a:cs typeface="Helvetica Neue"/>
+              </a:defRPr>
+            </a:lvl1pPr>
+            <a:lvl2pPr>
+              <a:defRPr sz="1800" b="0">
+                <a:solidFill>
+                  <a:srgbClr val="58718B"/>
+                </a:solidFill>
+                <a:latin typeface="Helvetica Neue"/>
+                <a:ea typeface="Helvetica Neue"/>
+                <a:cs typeface="Helvetica Neue"/>
+              </a:defRPr>
+            </a:lvl2pPr>
+            <a:lvl3pPr>
+              <a:defRPr sz="1800" b="0">
+                <a:solidFill>
+                  <a:srgbClr val="58718B"/>
+                </a:solidFill>
+                <a:latin typeface="Helvetica Neue"/>
+                <a:ea typeface="Helvetica Neue"/>
+                <a:cs typeface="Helvetica Neue"/>
+              </a:defRPr>
+            </a:lvl3pPr>
+            <a:lvl4pPr>
+              <a:defRPr sz="1800" b="0">
+                <a:solidFill>
+                  <a:srgbClr val="58718B"/>
+                </a:solidFill>
+                <a:latin typeface="Helvetica Neue"/>
+                <a:ea typeface="Helvetica Neue"/>
+                <a:cs typeface="Helvetica Neue"/>
+              </a:defRPr>
+            </a:lvl4pPr>
+            <a:lvl5pPr>
+              <a:defRPr sz="1800" b="0">
+                <a:solidFill>
+                  <a:srgbClr val="58718B"/>
+                </a:solidFill>
+                <a:latin typeface="Helvetica Neue"/>
+                <a:ea typeface="Helvetica Neue"/>
+                <a:cs typeface="Helvetica Neue"/>
+              </a:defRPr>
+            </a:lvl5pPr>
+            <a:lvl6pPr>
+              <a:defRPr sz="1800" b="0">
+                <a:solidFill>
+                  <a:srgbClr val="58718B"/>
+                </a:solidFill>
+                <a:latin typeface="Helvetica Neue"/>
+                <a:ea typeface="Helvetica Neue"/>
+                <a:cs typeface="Helvetica Neue"/>
+              </a:defRPr>
+            </a:lvl6pPr>
+            <a:lvl7pPr>
+              <a:defRPr sz="1800" b="0">
+                <a:solidFill>
+                  <a:srgbClr val="58718B"/>
+                </a:solidFill>
+                <a:latin typeface="Helvetica Neue"/>
+                <a:ea typeface="Helvetica Neue"/>
+                <a:cs typeface="Helvetica Neue"/>
+              </a:defRPr>
+            </a:lvl7pPr>
+            <a:lvl8pPr>
+              <a:defRPr sz="1800" b="0">
+                <a:solidFill>
+                  <a:srgbClr val="58718B"/>
+                </a:solidFill>
+                <a:latin typeface="Helvetica Neue"/>
+                <a:ea typeface="Helvetica Neue"/>
+                <a:cs typeface="Helvetica Neue"/>
+              </a:defRPr>
+            </a:lvl8pPr>
+            <a:lvl9pPr>
+              <a:defRPr sz="1800" b="0">
+                <a:solidFill>
+                  <a:srgbClr val="58718B"/>
+                </a:solidFill>
+                <a:latin typeface="Helvetica Neue"/>
+                <a:ea typeface="Helvetica Neue"/>
+                <a:cs typeface="Helvetica Neue"/>
+              </a:defRPr>
+            </a:lvl9pPr>
+          </a:lstStyle>
+          <a:p xmlns:a="http://schemas.openxmlformats.org/drawingml/2006/main">
+            <a:pPr>
+              <a:defRPr sz="1800" b="0">
+                <a:solidFill>
+                  <a:srgbClr val="58718B"/>
+                </a:solidFill>
+                <a:latin typeface="Helvetica Neue"/>
+                <a:ea typeface="Helvetica Neue"/>
+                <a:cs typeface="Helvetica Neue"/>
+              </a:defRPr>
+            </a:pPr>
+            <a:r>
+              <a:rPr sz="1800" b="0">
+                <a:solidFill>
+                  <a:srgbClr val="58718B"/>
+                </a:solidFill>
+                <a:latin typeface="Helvetica Neue"/>
+                <a:ea typeface="Helvetica Neue"/>
+                <a:cs typeface="Helvetica Neue"/>
+              </a:rPr>
+              <a:t>We will finalize the feature set and release plans as development and industry feedback progress.</a:t>
+            </a:r>
+          </a:p>
+        </p:txBody>
+      </p:sp>
+    </p:spTree>
+    <p:extLst>
+      <p:ext uri="{BB962C8B-B14F-4D97-AF65-F5344CB8AC3E}">
+        <p14:creationId xmlns:p14="http://schemas.microsoft.com/office/powerpoint/2010/main" val="2036101426"/>
+      </p:ext>
+    </p:extLst>
+  </p:cSld>
+</p:sld>
+</file>
+
+<file path=ppt/slides/slide12.xml><?xml version="1.0" encoding="utf-8"?>
 <p:sld xmlns:p="http://schemas.openxmlformats.org/presentationml/2006/main">
   <p:cSld>
     <p:bg>
@@ -2031,6 +3711,7 @@
           <a:lstStyle xmlns:a="http://schemas.openxmlformats.org/drawingml/2006/main"/>
           <a:p xmlns:a="http://schemas.openxmlformats.org/drawingml/2006/main">
             <a:pPr>
+              <a:buNone/>
               <a:defRPr sz="4200" b="1">
                 <a:solidFill>
                   <a:srgbClr val="FFFFFF"/>
@@ -2049,7 +3730,7 @@
                 <a:ea typeface="Helvetica Neue"/>
                 <a:cs typeface="Helvetica Neue"/>
               </a:rPr>
-              <a:t>InsightIQ</a:t>
+              <a:t>Lead Trace</a:t>
             </a:r>
           </a:p>
         </p:txBody>
@@ -2088,6 +3769,7 @@
           <a:lstStyle xmlns:a="http://schemas.openxmlformats.org/drawingml/2006/main"/>
           <a:p xmlns:a="http://schemas.openxmlformats.org/drawingml/2006/main">
             <a:pPr>
+              <a:buNone/>
               <a:defRPr sz="4650" b="1">
                 <a:solidFill>
                   <a:srgbClr val="FFFFFF"/>
@@ -2111,6 +3793,7 @@
           </a:p>
           <a:p xmlns:a="http://schemas.openxmlformats.org/drawingml/2006/main">
             <a:pPr>
+              <a:buNone/>
               <a:defRPr sz="4650" b="1">
                 <a:solidFill>
                   <a:srgbClr val="FFFFFF"/>
@@ -2134,6 +3817,7 @@
           </a:p>
           <a:p xmlns:a="http://schemas.openxmlformats.org/drawingml/2006/main">
             <a:pPr>
+              <a:buNone/>
               <a:defRPr sz="4650" b="1">
                 <a:solidFill>
                   <a:srgbClr val="FFFFFF"/>
@@ -2191,6 +3875,7 @@
           <a:lstStyle xmlns:a="http://schemas.openxmlformats.org/drawingml/2006/main"/>
           <a:p xmlns:a="http://schemas.openxmlformats.org/drawingml/2006/main">
             <a:pPr>
+              <a:buNone/>
               <a:defRPr sz="1950" b="1">
                 <a:solidFill>
                   <a:srgbClr val="63D7F2"/>
@@ -2248,6 +3933,7 @@
           <a:lstStyle xmlns:a="http://schemas.openxmlformats.org/drawingml/2006/main"/>
           <a:p xmlns:a="http://schemas.openxmlformats.org/drawingml/2006/main">
             <a:pPr>
+              <a:buNone/>
               <a:defRPr sz="2250" b="1">
                 <a:solidFill>
                   <a:srgbClr val="FFFFFF"/>
@@ -2276,6 +3962,7 @@
           </a:p>
           <a:p xmlns:a="http://schemas.openxmlformats.org/drawingml/2006/main">
             <a:pPr>
+              <a:buNone/>
               <a:defRPr sz="2250" b="1">
                 <a:solidFill>
                   <a:srgbClr val="FFFFFF"/>
@@ -2304,6 +3991,7 @@
           </a:p>
           <a:p xmlns:a="http://schemas.openxmlformats.org/drawingml/2006/main">
             <a:pPr>
+              <a:buNone/>
               <a:defRPr sz="2250" b="1">
                 <a:solidFill>
                   <a:srgbClr val="FFFFFF"/>
@@ -2361,6 +4049,7 @@
           <a:lstStyle xmlns:a="http://schemas.openxmlformats.org/drawingml/2006/main"/>
           <a:p xmlns:a="http://schemas.openxmlformats.org/drawingml/2006/main">
             <a:pPr>
+              <a:buNone/>
               <a:defRPr sz="2400" b="1">
                 <a:solidFill>
                   <a:srgbClr val="63D7F2"/>
@@ -2379,7 +4068,7 @@
                 <a:ea typeface="Helvetica Neue"/>
                 <a:cs typeface="Helvetica Neue"/>
               </a:rPr>
-              <a:t>insightiq.zerotools.online</a:t>
+              <a:t>leadtrace.online</a:t>
             </a:r>
           </a:p>
         </p:txBody>
@@ -2395,6 +4084,911 @@
 </file>
 
 <file path=ppt/slides/slide2.xml><?xml version="1.0" encoding="utf-8"?>
+<p:sld xmlns:p="http://schemas.openxmlformats.org/presentationml/2006/main">
+  <p:cSld>
+    <p:bg>
+      <p:bgPr>
+        <a:solidFill xmlns:a="http://schemas.openxmlformats.org/drawingml/2006/main">
+          <a:srgbClr val="FFFFFF"/>
+        </a:solidFill>
+      </p:bgPr>
+    </p:bg>
+    <p:spTree>
+      <p:nvGrpSpPr>
+        <p:cNvPr id="1" name=""/>
+        <p:cNvGrpSpPr/>
+        <p:nvPr/>
+      </p:nvGrpSpPr>
+      <p:grpSpPr>
+        <a:xfrm xmlns:a="http://schemas.openxmlformats.org/drawingml/2006/main"/>
+      </p:grpSpPr>
+      <p:sp>
+        <p:nvSpPr>
+          <p:cNvPr id="9" name="">
+            <a:extLst xmlns:a="http://schemas.openxmlformats.org/drawingml/2006/main">
+              <a:ext uri="{FF2B5EF4-FFF2-40B4-BE49-F238E27FC236}">
+                <a16:creationId xmlns:a16="http://schemas.microsoft.com/office/drawing/2014/main" id="{D52B4A75-012D-4924-9FED-186277A3E35A}"/>
+              </a:ext>
+            </a:extLst>
+          </p:cNvPr>
+          <p:cNvSpPr>
+            <a:spLocks xmlns:a="http://schemas.openxmlformats.org/drawingml/2006/main" noGrp="1"/>
+          </p:cNvSpPr>
+          <p:nvPr/>
+        </p:nvSpPr>
+        <p:spPr>
+          <a:xfrm xmlns:a="http://schemas.openxmlformats.org/drawingml/2006/main">
+            <a:off x="609600" y="457200"/>
+            <a:ext cx="10972800" cy="762000"/>
+          </a:xfrm>
+          <a:prstGeom xmlns:a="http://schemas.openxmlformats.org/drawingml/2006/main" prst="rect">
+            <a:avLst/>
+          </a:prstGeom>
+          <a:noFill xmlns:a="http://schemas.openxmlformats.org/drawingml/2006/main"/>
+          <a:ln xmlns:a="http://schemas.openxmlformats.org/drawingml/2006/main" w="0">
+            <a:noFill/>
+          </a:ln>
+        </p:spPr>
+        <p:txBody>
+          <a:bodyPr xmlns:a="http://schemas.openxmlformats.org/drawingml/2006/main" lIns="0" tIns="0" rIns="0" bIns="0">
+            <a:noAutofit/>
+          </a:bodyPr>
+          <a:lstStyle xmlns:a="http://schemas.openxmlformats.org/drawingml/2006/main">
+            <a:defPPr>
+              <a:defRPr sz="3675" b="1">
+                <a:solidFill>
+                  <a:srgbClr val="0B214A"/>
+                </a:solidFill>
+                <a:latin typeface="Helvetica Neue"/>
+                <a:ea typeface="Helvetica Neue"/>
+                <a:cs typeface="Helvetica Neue"/>
+              </a:defRPr>
+            </a:defPPr>
+            <a:lvl1pPr>
+              <a:defRPr sz="3675" b="1">
+                <a:solidFill>
+                  <a:srgbClr val="0B214A"/>
+                </a:solidFill>
+                <a:latin typeface="Helvetica Neue"/>
+                <a:ea typeface="Helvetica Neue"/>
+                <a:cs typeface="Helvetica Neue"/>
+              </a:defRPr>
+            </a:lvl1pPr>
+            <a:lvl2pPr>
+              <a:defRPr sz="3675" b="1">
+                <a:solidFill>
+                  <a:srgbClr val="0B214A"/>
+                </a:solidFill>
+                <a:latin typeface="Helvetica Neue"/>
+                <a:ea typeface="Helvetica Neue"/>
+                <a:cs typeface="Helvetica Neue"/>
+              </a:defRPr>
+            </a:lvl2pPr>
+            <a:lvl3pPr>
+              <a:defRPr sz="3675" b="1">
+                <a:solidFill>
+                  <a:srgbClr val="0B214A"/>
+                </a:solidFill>
+                <a:latin typeface="Helvetica Neue"/>
+                <a:ea typeface="Helvetica Neue"/>
+                <a:cs typeface="Helvetica Neue"/>
+              </a:defRPr>
+            </a:lvl3pPr>
+            <a:lvl4pPr>
+              <a:defRPr sz="3675" b="1">
+                <a:solidFill>
+                  <a:srgbClr val="0B214A"/>
+                </a:solidFill>
+                <a:latin typeface="Helvetica Neue"/>
+                <a:ea typeface="Helvetica Neue"/>
+                <a:cs typeface="Helvetica Neue"/>
+              </a:defRPr>
+            </a:lvl4pPr>
+            <a:lvl5pPr>
+              <a:defRPr sz="3675" b="1">
+                <a:solidFill>
+                  <a:srgbClr val="0B214A"/>
+                </a:solidFill>
+                <a:latin typeface="Helvetica Neue"/>
+                <a:ea typeface="Helvetica Neue"/>
+                <a:cs typeface="Helvetica Neue"/>
+              </a:defRPr>
+            </a:lvl5pPr>
+            <a:lvl6pPr>
+              <a:defRPr sz="3675" b="1">
+                <a:solidFill>
+                  <a:srgbClr val="0B214A"/>
+                </a:solidFill>
+                <a:latin typeface="Helvetica Neue"/>
+                <a:ea typeface="Helvetica Neue"/>
+                <a:cs typeface="Helvetica Neue"/>
+              </a:defRPr>
+            </a:lvl6pPr>
+            <a:lvl7pPr>
+              <a:defRPr sz="3675" b="1">
+                <a:solidFill>
+                  <a:srgbClr val="0B214A"/>
+                </a:solidFill>
+                <a:latin typeface="Helvetica Neue"/>
+                <a:ea typeface="Helvetica Neue"/>
+                <a:cs typeface="Helvetica Neue"/>
+              </a:defRPr>
+            </a:lvl7pPr>
+            <a:lvl8pPr>
+              <a:defRPr sz="3675" b="1">
+                <a:solidFill>
+                  <a:srgbClr val="0B214A"/>
+                </a:solidFill>
+                <a:latin typeface="Helvetica Neue"/>
+                <a:ea typeface="Helvetica Neue"/>
+                <a:cs typeface="Helvetica Neue"/>
+              </a:defRPr>
+            </a:lvl8pPr>
+            <a:lvl9pPr>
+              <a:defRPr sz="3675" b="1">
+                <a:solidFill>
+                  <a:srgbClr val="0B214A"/>
+                </a:solidFill>
+                <a:latin typeface="Helvetica Neue"/>
+                <a:ea typeface="Helvetica Neue"/>
+                <a:cs typeface="Helvetica Neue"/>
+              </a:defRPr>
+            </a:lvl9pPr>
+          </a:lstStyle>
+          <a:p xmlns:a="http://schemas.openxmlformats.org/drawingml/2006/main">
+            <a:pPr>
+              <a:defRPr sz="3675" b="1">
+                <a:solidFill>
+                  <a:srgbClr val="0B214A"/>
+                </a:solidFill>
+                <a:latin typeface="Helvetica Neue"/>
+                <a:ea typeface="Helvetica Neue"/>
+                <a:cs typeface="Helvetica Neue"/>
+              </a:defRPr>
+            </a:pPr>
+            <a:r>
+              <a:rPr sz="3675" b="1">
+                <a:solidFill>
+                  <a:srgbClr val="0B214A"/>
+                </a:solidFill>
+                <a:latin typeface="Helvetica Neue"/>
+                <a:ea typeface="Helvetica Neue"/>
+                <a:cs typeface="Helvetica Neue"/>
+              </a:rPr>
+              <a:t>InsightIQ is now Lead Trace</a:t>
+            </a:r>
+          </a:p>
+        </p:txBody>
+      </p:sp>
+      <p:sp>
+        <p:nvSpPr>
+          <p:cNvPr id="2" name="">
+            <a:extLst xmlns:a="http://schemas.openxmlformats.org/drawingml/2006/main">
+              <a:ext uri="{FF2B5EF4-FFF2-40B4-BE49-F238E27FC236}">
+                <a16:creationId xmlns:a16="http://schemas.microsoft.com/office/drawing/2014/main" id="{FF479AE0-B0C8-46EF-903E-07D7CF3C06F3}"/>
+              </a:ext>
+            </a:extLst>
+          </p:cNvPr>
+          <p:cNvSpPr>
+            <a:spLocks xmlns:a="http://schemas.openxmlformats.org/drawingml/2006/main" noGrp="1"/>
+          </p:cNvSpPr>
+          <p:nvPr/>
+        </p:nvSpPr>
+        <p:spPr>
+          <a:xfrm xmlns:a="http://schemas.openxmlformats.org/drawingml/2006/main">
+            <a:off x="657225" y="1409700"/>
+            <a:ext cx="10668000" cy="952500"/>
+          </a:xfrm>
+          <a:prstGeom xmlns:a="http://schemas.openxmlformats.org/drawingml/2006/main" prst="rect">
+            <a:avLst/>
+          </a:prstGeom>
+          <a:noFill xmlns:a="http://schemas.openxmlformats.org/drawingml/2006/main"/>
+          <a:ln xmlns:a="http://schemas.openxmlformats.org/drawingml/2006/main" w="0">
+            <a:noFill/>
+          </a:ln>
+        </p:spPr>
+        <p:txBody>
+          <a:bodyPr xmlns:a="http://schemas.openxmlformats.org/drawingml/2006/main" lIns="0" tIns="0" rIns="0" bIns="0">
+            <a:noAutofit/>
+          </a:bodyPr>
+          <a:lstStyle xmlns:a="http://schemas.openxmlformats.org/drawingml/2006/main">
+            <a:defPPr>
+              <a:defRPr sz="2175" b="0">
+                <a:solidFill>
+                  <a:srgbClr val="58718B"/>
+                </a:solidFill>
+                <a:latin typeface="Helvetica Neue"/>
+                <a:ea typeface="Helvetica Neue"/>
+                <a:cs typeface="Helvetica Neue"/>
+              </a:defRPr>
+            </a:defPPr>
+            <a:lvl1pPr>
+              <a:defRPr sz="2175" b="0">
+                <a:solidFill>
+                  <a:srgbClr val="58718B"/>
+                </a:solidFill>
+                <a:latin typeface="Helvetica Neue"/>
+                <a:ea typeface="Helvetica Neue"/>
+                <a:cs typeface="Helvetica Neue"/>
+              </a:defRPr>
+            </a:lvl1pPr>
+            <a:lvl2pPr>
+              <a:defRPr sz="2175" b="0">
+                <a:solidFill>
+                  <a:srgbClr val="58718B"/>
+                </a:solidFill>
+                <a:latin typeface="Helvetica Neue"/>
+                <a:ea typeface="Helvetica Neue"/>
+                <a:cs typeface="Helvetica Neue"/>
+              </a:defRPr>
+            </a:lvl2pPr>
+            <a:lvl3pPr>
+              <a:defRPr sz="2175" b="0">
+                <a:solidFill>
+                  <a:srgbClr val="58718B"/>
+                </a:solidFill>
+                <a:latin typeface="Helvetica Neue"/>
+                <a:ea typeface="Helvetica Neue"/>
+                <a:cs typeface="Helvetica Neue"/>
+              </a:defRPr>
+            </a:lvl3pPr>
+            <a:lvl4pPr>
+              <a:defRPr sz="2175" b="0">
+                <a:solidFill>
+                  <a:srgbClr val="58718B"/>
+                </a:solidFill>
+                <a:latin typeface="Helvetica Neue"/>
+                <a:ea typeface="Helvetica Neue"/>
+                <a:cs typeface="Helvetica Neue"/>
+              </a:defRPr>
+            </a:lvl4pPr>
+            <a:lvl5pPr>
+              <a:defRPr sz="2175" b="0">
+                <a:solidFill>
+                  <a:srgbClr val="58718B"/>
+                </a:solidFill>
+                <a:latin typeface="Helvetica Neue"/>
+                <a:ea typeface="Helvetica Neue"/>
+                <a:cs typeface="Helvetica Neue"/>
+              </a:defRPr>
+            </a:lvl5pPr>
+            <a:lvl6pPr>
+              <a:defRPr sz="2175" b="0">
+                <a:solidFill>
+                  <a:srgbClr val="58718B"/>
+                </a:solidFill>
+                <a:latin typeface="Helvetica Neue"/>
+                <a:ea typeface="Helvetica Neue"/>
+                <a:cs typeface="Helvetica Neue"/>
+              </a:defRPr>
+            </a:lvl6pPr>
+            <a:lvl7pPr>
+              <a:defRPr sz="2175" b="0">
+                <a:solidFill>
+                  <a:srgbClr val="58718B"/>
+                </a:solidFill>
+                <a:latin typeface="Helvetica Neue"/>
+                <a:ea typeface="Helvetica Neue"/>
+                <a:cs typeface="Helvetica Neue"/>
+              </a:defRPr>
+            </a:lvl7pPr>
+            <a:lvl8pPr>
+              <a:defRPr sz="2175" b="0">
+                <a:solidFill>
+                  <a:srgbClr val="58718B"/>
+                </a:solidFill>
+                <a:latin typeface="Helvetica Neue"/>
+                <a:ea typeface="Helvetica Neue"/>
+                <a:cs typeface="Helvetica Neue"/>
+              </a:defRPr>
+            </a:lvl8pPr>
+            <a:lvl9pPr>
+              <a:defRPr sz="2175" b="0">
+                <a:solidFill>
+                  <a:srgbClr val="58718B"/>
+                </a:solidFill>
+                <a:latin typeface="Helvetica Neue"/>
+                <a:ea typeface="Helvetica Neue"/>
+                <a:cs typeface="Helvetica Neue"/>
+              </a:defRPr>
+            </a:lvl9pPr>
+          </a:lstStyle>
+          <a:p xmlns:a="http://schemas.openxmlformats.org/drawingml/2006/main">
+            <a:pPr>
+              <a:defRPr sz="2175" b="0">
+                <a:solidFill>
+                  <a:srgbClr val="58718B"/>
+                </a:solidFill>
+                <a:latin typeface="Helvetica Neue"/>
+                <a:ea typeface="Helvetica Neue"/>
+                <a:cs typeface="Helvetica Neue"/>
+              </a:defRPr>
+            </a:pPr>
+            <a:r>
+              <a:rPr sz="2175" b="0">
+                <a:solidFill>
+                  <a:srgbClr val="58718B"/>
+                </a:solidFill>
+                <a:latin typeface="Helvetica Neue"/>
+                <a:ea typeface="Helvetica Neue"/>
+                <a:cs typeface="Helvetica Neue"/>
+              </a:rPr>
+              <a:t>We listened to feedback from industry professionals and shaped our next stage around the needs of sales teams.</a:t>
+            </a:r>
+          </a:p>
+        </p:txBody>
+      </p:sp>
+      <p:pic>
+        <p:nvPicPr>
+          <p:cNvPr id="3" name="">
+            <a:extLst xmlns:a="http://schemas.openxmlformats.org/drawingml/2006/main">
+              <a:ext uri="{FF2B5EF4-FFF2-40B4-BE49-F238E27FC236}">
+                <a16:creationId xmlns:a16="http://schemas.microsoft.com/office/drawing/2014/main" id="{9E47A2B7-9C98-473E-B7C6-AFE855C9ACCF}"/>
+              </a:ext>
+            </a:extLst>
+          </p:cNvPr>
+          <p:cNvPicPr>
+            <a:picLocks xmlns:a="http://schemas.openxmlformats.org/drawingml/2006/main" noChangeAspect="1"/>
+          </p:cNvPicPr>
+          <p:nvPr/>
+        </p:nvPicPr>
+        <p:blipFill>
+          <a:blip xmlns:r="http://schemas.openxmlformats.org/officeDocument/2006/relationships" xmlns:a="http://schemas.openxmlformats.org/drawingml/2006/main" r:embed="Rb5a68cbe6f3d4c96"/>
+          <a:stretch xmlns:a="http://schemas.openxmlformats.org/drawingml/2006/main"/>
+        </p:blipFill>
+        <p:spPr>
+          <a:xfrm xmlns:a="http://schemas.openxmlformats.org/drawingml/2006/main">
+            <a:off x="2524125" y="2667000"/>
+            <a:ext cx="1524000" cy="1524000"/>
+          </a:xfrm>
+          <a:prstGeom xmlns:a="http://schemas.openxmlformats.org/drawingml/2006/main" prst="rect">
+            <a:avLst/>
+          </a:prstGeom>
+        </p:spPr>
+      </p:pic>
+      <p:pic>
+        <p:nvPicPr>
+          <p:cNvPr id="4" name="">
+            <a:extLst xmlns:a="http://schemas.openxmlformats.org/drawingml/2006/main">
+              <a:ext uri="{FF2B5EF4-FFF2-40B4-BE49-F238E27FC236}">
+                <a16:creationId xmlns:a16="http://schemas.microsoft.com/office/drawing/2014/main" id="{E6CF73C7-9E17-43E0-BA25-28FDFA106E82}"/>
+              </a:ext>
+            </a:extLst>
+          </p:cNvPr>
+          <p:cNvPicPr>
+            <a:picLocks xmlns:a="http://schemas.openxmlformats.org/drawingml/2006/main" noChangeAspect="1"/>
+          </p:cNvPicPr>
+          <p:nvPr/>
+        </p:nvPicPr>
+        <p:blipFill>
+          <a:blip xmlns:r="http://schemas.openxmlformats.org/officeDocument/2006/relationships" xmlns:a="http://schemas.openxmlformats.org/drawingml/2006/main" r:embed="R53abb72437024950"/>
+          <a:stretch xmlns:a="http://schemas.openxmlformats.org/drawingml/2006/main"/>
+        </p:blipFill>
+        <p:spPr>
+          <a:xfrm xmlns:a="http://schemas.openxmlformats.org/drawingml/2006/main">
+            <a:off x="8096250" y="2667000"/>
+            <a:ext cx="1524000" cy="1524000"/>
+          </a:xfrm>
+          <a:prstGeom xmlns:a="http://schemas.openxmlformats.org/drawingml/2006/main" prst="rect">
+            <a:avLst/>
+          </a:prstGeom>
+        </p:spPr>
+      </p:pic>
+      <p:sp>
+        <p:nvSpPr>
+          <p:cNvPr id="5" name="">
+            <a:extLst xmlns:a="http://schemas.openxmlformats.org/drawingml/2006/main">
+              <a:ext uri="{FF2B5EF4-FFF2-40B4-BE49-F238E27FC236}">
+                <a16:creationId xmlns:a16="http://schemas.microsoft.com/office/drawing/2014/main" id="{8550BD22-5633-4682-8289-A3B8B5197F1E}"/>
+              </a:ext>
+            </a:extLst>
+          </p:cNvPr>
+          <p:cNvSpPr>
+            <a:spLocks xmlns:a="http://schemas.openxmlformats.org/drawingml/2006/main" noGrp="1"/>
+          </p:cNvSpPr>
+          <p:nvPr/>
+        </p:nvSpPr>
+        <p:spPr>
+          <a:xfrm xmlns:a="http://schemas.openxmlformats.org/drawingml/2006/main">
+            <a:off x="5619750" y="3209925"/>
+            <a:ext cx="952500" cy="381000"/>
+          </a:xfrm>
+          <a:prstGeom xmlns:a="http://schemas.openxmlformats.org/drawingml/2006/main" prst="rightArrow">
+            <a:avLst/>
+          </a:prstGeom>
+          <a:solidFill xmlns:a="http://schemas.openxmlformats.org/drawingml/2006/main">
+            <a:srgbClr val="1868C8"/>
+          </a:solidFill>
+          <a:ln xmlns:a="http://schemas.openxmlformats.org/drawingml/2006/main" w="0">
+            <a:noFill/>
+          </a:ln>
+        </p:spPr>
+      </p:sp>
+      <p:sp>
+        <p:nvSpPr>
+          <p:cNvPr id="6" name="">
+            <a:extLst xmlns:a="http://schemas.openxmlformats.org/drawingml/2006/main">
+              <a:ext uri="{FF2B5EF4-FFF2-40B4-BE49-F238E27FC236}">
+                <a16:creationId xmlns:a16="http://schemas.microsoft.com/office/drawing/2014/main" id="{3DCAED45-4944-4798-9556-6046BD15DA2F}"/>
+              </a:ext>
+            </a:extLst>
+          </p:cNvPr>
+          <p:cNvSpPr>
+            <a:spLocks xmlns:a="http://schemas.openxmlformats.org/drawingml/2006/main" noGrp="1"/>
+          </p:cNvSpPr>
+          <p:nvPr/>
+        </p:nvSpPr>
+        <p:spPr>
+          <a:xfrm xmlns:a="http://schemas.openxmlformats.org/drawingml/2006/main">
+            <a:off x="2381250" y="4514850"/>
+            <a:ext cx="2286000" cy="476250"/>
+          </a:xfrm>
+          <a:prstGeom xmlns:a="http://schemas.openxmlformats.org/drawingml/2006/main" prst="rect">
+            <a:avLst/>
+          </a:prstGeom>
+          <a:noFill xmlns:a="http://schemas.openxmlformats.org/drawingml/2006/main"/>
+          <a:ln xmlns:a="http://schemas.openxmlformats.org/drawingml/2006/main" w="0">
+            <a:noFill/>
+          </a:ln>
+        </p:spPr>
+        <p:txBody>
+          <a:bodyPr xmlns:a="http://schemas.openxmlformats.org/drawingml/2006/main" lIns="0" tIns="0" rIns="0" bIns="0">
+            <a:noAutofit/>
+          </a:bodyPr>
+          <a:lstStyle xmlns:a="http://schemas.openxmlformats.org/drawingml/2006/main">
+            <a:defPPr>
+              <a:defRPr sz="2550" b="1">
+                <a:solidFill>
+                  <a:srgbClr val="0B214A"/>
+                </a:solidFill>
+                <a:latin typeface="Helvetica Neue"/>
+                <a:ea typeface="Helvetica Neue"/>
+                <a:cs typeface="Helvetica Neue"/>
+              </a:defRPr>
+            </a:defPPr>
+            <a:lvl1pPr>
+              <a:defRPr sz="2550" b="1">
+                <a:solidFill>
+                  <a:srgbClr val="0B214A"/>
+                </a:solidFill>
+                <a:latin typeface="Helvetica Neue"/>
+                <a:ea typeface="Helvetica Neue"/>
+                <a:cs typeface="Helvetica Neue"/>
+              </a:defRPr>
+            </a:lvl1pPr>
+            <a:lvl2pPr>
+              <a:defRPr sz="2550" b="1">
+                <a:solidFill>
+                  <a:srgbClr val="0B214A"/>
+                </a:solidFill>
+                <a:latin typeface="Helvetica Neue"/>
+                <a:ea typeface="Helvetica Neue"/>
+                <a:cs typeface="Helvetica Neue"/>
+              </a:defRPr>
+            </a:lvl2pPr>
+            <a:lvl3pPr>
+              <a:defRPr sz="2550" b="1">
+                <a:solidFill>
+                  <a:srgbClr val="0B214A"/>
+                </a:solidFill>
+                <a:latin typeface="Helvetica Neue"/>
+                <a:ea typeface="Helvetica Neue"/>
+                <a:cs typeface="Helvetica Neue"/>
+              </a:defRPr>
+            </a:lvl3pPr>
+            <a:lvl4pPr>
+              <a:defRPr sz="2550" b="1">
+                <a:solidFill>
+                  <a:srgbClr val="0B214A"/>
+                </a:solidFill>
+                <a:latin typeface="Helvetica Neue"/>
+                <a:ea typeface="Helvetica Neue"/>
+                <a:cs typeface="Helvetica Neue"/>
+              </a:defRPr>
+            </a:lvl4pPr>
+            <a:lvl5pPr>
+              <a:defRPr sz="2550" b="1">
+                <a:solidFill>
+                  <a:srgbClr val="0B214A"/>
+                </a:solidFill>
+                <a:latin typeface="Helvetica Neue"/>
+                <a:ea typeface="Helvetica Neue"/>
+                <a:cs typeface="Helvetica Neue"/>
+              </a:defRPr>
+            </a:lvl5pPr>
+            <a:lvl6pPr>
+              <a:defRPr sz="2550" b="1">
+                <a:solidFill>
+                  <a:srgbClr val="0B214A"/>
+                </a:solidFill>
+                <a:latin typeface="Helvetica Neue"/>
+                <a:ea typeface="Helvetica Neue"/>
+                <a:cs typeface="Helvetica Neue"/>
+              </a:defRPr>
+            </a:lvl6pPr>
+            <a:lvl7pPr>
+              <a:defRPr sz="2550" b="1">
+                <a:solidFill>
+                  <a:srgbClr val="0B214A"/>
+                </a:solidFill>
+                <a:latin typeface="Helvetica Neue"/>
+                <a:ea typeface="Helvetica Neue"/>
+                <a:cs typeface="Helvetica Neue"/>
+              </a:defRPr>
+            </a:lvl7pPr>
+            <a:lvl8pPr>
+              <a:defRPr sz="2550" b="1">
+                <a:solidFill>
+                  <a:srgbClr val="0B214A"/>
+                </a:solidFill>
+                <a:latin typeface="Helvetica Neue"/>
+                <a:ea typeface="Helvetica Neue"/>
+                <a:cs typeface="Helvetica Neue"/>
+              </a:defRPr>
+            </a:lvl8pPr>
+            <a:lvl9pPr>
+              <a:defRPr sz="2550" b="1">
+                <a:solidFill>
+                  <a:srgbClr val="0B214A"/>
+                </a:solidFill>
+                <a:latin typeface="Helvetica Neue"/>
+                <a:ea typeface="Helvetica Neue"/>
+                <a:cs typeface="Helvetica Neue"/>
+              </a:defRPr>
+            </a:lvl9pPr>
+          </a:lstStyle>
+          <a:p xmlns:a="http://schemas.openxmlformats.org/drawingml/2006/main">
+            <a:pPr>
+              <a:defRPr sz="2550" b="1">
+                <a:solidFill>
+                  <a:srgbClr val="0B214A"/>
+                </a:solidFill>
+                <a:latin typeface="Helvetica Neue"/>
+                <a:ea typeface="Helvetica Neue"/>
+                <a:cs typeface="Helvetica Neue"/>
+              </a:defRPr>
+            </a:pPr>
+            <a:r>
+              <a:rPr sz="2550" b="1">
+                <a:solidFill>
+                  <a:srgbClr val="0B214A"/>
+                </a:solidFill>
+                <a:latin typeface="Helvetica Neue"/>
+                <a:ea typeface="Helvetica Neue"/>
+                <a:cs typeface="Helvetica Neue"/>
+              </a:rPr>
+              <a:t>InsightIQ</a:t>
+            </a:r>
+          </a:p>
+        </p:txBody>
+      </p:sp>
+      <p:sp>
+        <p:nvSpPr>
+          <p:cNvPr id="7" name="">
+            <a:extLst xmlns:a="http://schemas.openxmlformats.org/drawingml/2006/main">
+              <a:ext uri="{FF2B5EF4-FFF2-40B4-BE49-F238E27FC236}">
+                <a16:creationId xmlns:a16="http://schemas.microsoft.com/office/drawing/2014/main" id="{7FE8E52A-ABAB-446E-A6E3-28335598D108}"/>
+              </a:ext>
+            </a:extLst>
+          </p:cNvPr>
+          <p:cNvSpPr>
+            <a:spLocks xmlns:a="http://schemas.openxmlformats.org/drawingml/2006/main" noGrp="1"/>
+          </p:cNvSpPr>
+          <p:nvPr/>
+        </p:nvSpPr>
+        <p:spPr>
+          <a:xfrm xmlns:a="http://schemas.openxmlformats.org/drawingml/2006/main">
+            <a:off x="7762875" y="4514850"/>
+            <a:ext cx="2857500" cy="476250"/>
+          </a:xfrm>
+          <a:prstGeom xmlns:a="http://schemas.openxmlformats.org/drawingml/2006/main" prst="rect">
+            <a:avLst/>
+          </a:prstGeom>
+          <a:noFill xmlns:a="http://schemas.openxmlformats.org/drawingml/2006/main"/>
+          <a:ln xmlns:a="http://schemas.openxmlformats.org/drawingml/2006/main" w="0">
+            <a:noFill/>
+          </a:ln>
+        </p:spPr>
+        <p:txBody>
+          <a:bodyPr xmlns:a="http://schemas.openxmlformats.org/drawingml/2006/main" lIns="0" tIns="0" rIns="0" bIns="0">
+            <a:noAutofit/>
+          </a:bodyPr>
+          <a:lstStyle xmlns:a="http://schemas.openxmlformats.org/drawingml/2006/main">
+            <a:defPPr>
+              <a:defRPr sz="2550" b="1">
+                <a:solidFill>
+                  <a:srgbClr val="1868C8"/>
+                </a:solidFill>
+                <a:latin typeface="Helvetica Neue"/>
+                <a:ea typeface="Helvetica Neue"/>
+                <a:cs typeface="Helvetica Neue"/>
+              </a:defRPr>
+            </a:defPPr>
+            <a:lvl1pPr>
+              <a:defRPr sz="2550" b="1">
+                <a:solidFill>
+                  <a:srgbClr val="1868C8"/>
+                </a:solidFill>
+                <a:latin typeface="Helvetica Neue"/>
+                <a:ea typeface="Helvetica Neue"/>
+                <a:cs typeface="Helvetica Neue"/>
+              </a:defRPr>
+            </a:lvl1pPr>
+            <a:lvl2pPr>
+              <a:defRPr sz="2550" b="1">
+                <a:solidFill>
+                  <a:srgbClr val="1868C8"/>
+                </a:solidFill>
+                <a:latin typeface="Helvetica Neue"/>
+                <a:ea typeface="Helvetica Neue"/>
+                <a:cs typeface="Helvetica Neue"/>
+              </a:defRPr>
+            </a:lvl2pPr>
+            <a:lvl3pPr>
+              <a:defRPr sz="2550" b="1">
+                <a:solidFill>
+                  <a:srgbClr val="1868C8"/>
+                </a:solidFill>
+                <a:latin typeface="Helvetica Neue"/>
+                <a:ea typeface="Helvetica Neue"/>
+                <a:cs typeface="Helvetica Neue"/>
+              </a:defRPr>
+            </a:lvl3pPr>
+            <a:lvl4pPr>
+              <a:defRPr sz="2550" b="1">
+                <a:solidFill>
+                  <a:srgbClr val="1868C8"/>
+                </a:solidFill>
+                <a:latin typeface="Helvetica Neue"/>
+                <a:ea typeface="Helvetica Neue"/>
+                <a:cs typeface="Helvetica Neue"/>
+              </a:defRPr>
+            </a:lvl4pPr>
+            <a:lvl5pPr>
+              <a:defRPr sz="2550" b="1">
+                <a:solidFill>
+                  <a:srgbClr val="1868C8"/>
+                </a:solidFill>
+                <a:latin typeface="Helvetica Neue"/>
+                <a:ea typeface="Helvetica Neue"/>
+                <a:cs typeface="Helvetica Neue"/>
+              </a:defRPr>
+            </a:lvl5pPr>
+            <a:lvl6pPr>
+              <a:defRPr sz="2550" b="1">
+                <a:solidFill>
+                  <a:srgbClr val="1868C8"/>
+                </a:solidFill>
+                <a:latin typeface="Helvetica Neue"/>
+                <a:ea typeface="Helvetica Neue"/>
+                <a:cs typeface="Helvetica Neue"/>
+              </a:defRPr>
+            </a:lvl6pPr>
+            <a:lvl7pPr>
+              <a:defRPr sz="2550" b="1">
+                <a:solidFill>
+                  <a:srgbClr val="1868C8"/>
+                </a:solidFill>
+                <a:latin typeface="Helvetica Neue"/>
+                <a:ea typeface="Helvetica Neue"/>
+                <a:cs typeface="Helvetica Neue"/>
+              </a:defRPr>
+            </a:lvl7pPr>
+            <a:lvl8pPr>
+              <a:defRPr sz="2550" b="1">
+                <a:solidFill>
+                  <a:srgbClr val="1868C8"/>
+                </a:solidFill>
+                <a:latin typeface="Helvetica Neue"/>
+                <a:ea typeface="Helvetica Neue"/>
+                <a:cs typeface="Helvetica Neue"/>
+              </a:defRPr>
+            </a:lvl8pPr>
+            <a:lvl9pPr>
+              <a:defRPr sz="2550" b="1">
+                <a:solidFill>
+                  <a:srgbClr val="1868C8"/>
+                </a:solidFill>
+                <a:latin typeface="Helvetica Neue"/>
+                <a:ea typeface="Helvetica Neue"/>
+                <a:cs typeface="Helvetica Neue"/>
+              </a:defRPr>
+            </a:lvl9pPr>
+          </a:lstStyle>
+          <a:p xmlns:a="http://schemas.openxmlformats.org/drawingml/2006/main">
+            <a:pPr>
+              <a:defRPr sz="2550" b="1">
+                <a:solidFill>
+                  <a:srgbClr val="1868C8"/>
+                </a:solidFill>
+                <a:latin typeface="Helvetica Neue"/>
+                <a:ea typeface="Helvetica Neue"/>
+                <a:cs typeface="Helvetica Neue"/>
+              </a:defRPr>
+            </a:pPr>
+            <a:r>
+              <a:rPr sz="2550" b="1">
+                <a:solidFill>
+                  <a:srgbClr val="1868C8"/>
+                </a:solidFill>
+                <a:latin typeface="Helvetica Neue"/>
+                <a:ea typeface="Helvetica Neue"/>
+                <a:cs typeface="Helvetica Neue"/>
+              </a:rPr>
+              <a:t>Lead Trace</a:t>
+            </a:r>
+          </a:p>
+        </p:txBody>
+      </p:sp>
+      <p:sp>
+        <p:nvSpPr>
+          <p:cNvPr id="8" name="">
+            <a:extLst xmlns:a="http://schemas.openxmlformats.org/drawingml/2006/main">
+              <a:ext uri="{FF2B5EF4-FFF2-40B4-BE49-F238E27FC236}">
+                <a16:creationId xmlns:a16="http://schemas.microsoft.com/office/drawing/2014/main" id="{309AD96D-B5AA-4ABC-813D-6F173CAE76D1}"/>
+              </a:ext>
+            </a:extLst>
+          </p:cNvPr>
+          <p:cNvSpPr>
+            <a:spLocks xmlns:a="http://schemas.openxmlformats.org/drawingml/2006/main" noGrp="1"/>
+          </p:cNvSpPr>
+          <p:nvPr/>
+        </p:nvSpPr>
+        <p:spPr>
+          <a:xfrm xmlns:a="http://schemas.openxmlformats.org/drawingml/2006/main">
+            <a:off x="657225" y="5467350"/>
+            <a:ext cx="10877550" cy="809625"/>
+          </a:xfrm>
+          <a:prstGeom xmlns:a="http://schemas.openxmlformats.org/drawingml/2006/main" prst="rect">
+            <a:avLst/>
+          </a:prstGeom>
+          <a:noFill xmlns:a="http://schemas.openxmlformats.org/drawingml/2006/main"/>
+          <a:ln xmlns:a="http://schemas.openxmlformats.org/drawingml/2006/main" w="0">
+            <a:noFill/>
+          </a:ln>
+        </p:spPr>
+        <p:txBody>
+          <a:bodyPr xmlns:a="http://schemas.openxmlformats.org/drawingml/2006/main" lIns="0" tIns="0" rIns="0" bIns="0">
+            <a:noAutofit/>
+          </a:bodyPr>
+          <a:lstStyle xmlns:a="http://schemas.openxmlformats.org/drawingml/2006/main">
+            <a:defPPr>
+              <a:defRPr sz="2250" b="0">
+                <a:solidFill>
+                  <a:srgbClr val="0B214A"/>
+                </a:solidFill>
+                <a:latin typeface="Helvetica Neue"/>
+                <a:ea typeface="Helvetica Neue"/>
+                <a:cs typeface="Helvetica Neue"/>
+              </a:defRPr>
+            </a:defPPr>
+            <a:lvl1pPr>
+              <a:defRPr sz="2250" b="0">
+                <a:solidFill>
+                  <a:srgbClr val="0B214A"/>
+                </a:solidFill>
+                <a:latin typeface="Helvetica Neue"/>
+                <a:ea typeface="Helvetica Neue"/>
+                <a:cs typeface="Helvetica Neue"/>
+              </a:defRPr>
+            </a:lvl1pPr>
+            <a:lvl2pPr>
+              <a:defRPr sz="2250" b="0">
+                <a:solidFill>
+                  <a:srgbClr val="0B214A"/>
+                </a:solidFill>
+                <a:latin typeface="Helvetica Neue"/>
+                <a:ea typeface="Helvetica Neue"/>
+                <a:cs typeface="Helvetica Neue"/>
+              </a:defRPr>
+            </a:lvl2pPr>
+            <a:lvl3pPr>
+              <a:defRPr sz="2250" b="0">
+                <a:solidFill>
+                  <a:srgbClr val="0B214A"/>
+                </a:solidFill>
+                <a:latin typeface="Helvetica Neue"/>
+                <a:ea typeface="Helvetica Neue"/>
+                <a:cs typeface="Helvetica Neue"/>
+              </a:defRPr>
+            </a:lvl3pPr>
+            <a:lvl4pPr>
+              <a:defRPr sz="2250" b="0">
+                <a:solidFill>
+                  <a:srgbClr val="0B214A"/>
+                </a:solidFill>
+                <a:latin typeface="Helvetica Neue"/>
+                <a:ea typeface="Helvetica Neue"/>
+                <a:cs typeface="Helvetica Neue"/>
+              </a:defRPr>
+            </a:lvl4pPr>
+            <a:lvl5pPr>
+              <a:defRPr sz="2250" b="0">
+                <a:solidFill>
+                  <a:srgbClr val="0B214A"/>
+                </a:solidFill>
+                <a:latin typeface="Helvetica Neue"/>
+                <a:ea typeface="Helvetica Neue"/>
+                <a:cs typeface="Helvetica Neue"/>
+              </a:defRPr>
+            </a:lvl5pPr>
+            <a:lvl6pPr>
+              <a:defRPr sz="2250" b="0">
+                <a:solidFill>
+                  <a:srgbClr val="0B214A"/>
+                </a:solidFill>
+                <a:latin typeface="Helvetica Neue"/>
+                <a:ea typeface="Helvetica Neue"/>
+                <a:cs typeface="Helvetica Neue"/>
+              </a:defRPr>
+            </a:lvl6pPr>
+            <a:lvl7pPr>
+              <a:defRPr sz="2250" b="0">
+                <a:solidFill>
+                  <a:srgbClr val="0B214A"/>
+                </a:solidFill>
+                <a:latin typeface="Helvetica Neue"/>
+                <a:ea typeface="Helvetica Neue"/>
+                <a:cs typeface="Helvetica Neue"/>
+              </a:defRPr>
+            </a:lvl7pPr>
+            <a:lvl8pPr>
+              <a:defRPr sz="2250" b="0">
+                <a:solidFill>
+                  <a:srgbClr val="0B214A"/>
+                </a:solidFill>
+                <a:latin typeface="Helvetica Neue"/>
+                <a:ea typeface="Helvetica Neue"/>
+                <a:cs typeface="Helvetica Neue"/>
+              </a:defRPr>
+            </a:lvl8pPr>
+            <a:lvl9pPr>
+              <a:defRPr sz="2250" b="0">
+                <a:solidFill>
+                  <a:srgbClr val="0B214A"/>
+                </a:solidFill>
+                <a:latin typeface="Helvetica Neue"/>
+                <a:ea typeface="Helvetica Neue"/>
+                <a:cs typeface="Helvetica Neue"/>
+              </a:defRPr>
+            </a:lvl9pPr>
+          </a:lstStyle>
+          <a:p xmlns:a="http://schemas.openxmlformats.org/drawingml/2006/main">
+            <a:pPr>
+              <a:defRPr sz="2250" b="0">
+                <a:solidFill>
+                  <a:srgbClr val="0B214A"/>
+                </a:solidFill>
+                <a:latin typeface="Helvetica Neue"/>
+                <a:ea typeface="Helvetica Neue"/>
+                <a:cs typeface="Helvetica Neue"/>
+              </a:defRPr>
+            </a:pPr>
+            <a:r>
+              <a:rPr sz="2250" b="0">
+                <a:solidFill>
+                  <a:srgbClr val="0B214A"/>
+                </a:solidFill>
+                <a:latin typeface="Helvetica Neue"/>
+                <a:ea typeface="Helvetica Neue"/>
+                <a:cs typeface="Helvetica Neue"/>
+              </a:rPr>
+              <a:t>Our research foundation is expanding toward lead generation, CRM, and connected sales workflows.</a:t>
+            </a:r>
+          </a:p>
+        </p:txBody>
+      </p:sp>
+    </p:spTree>
+    <p:extLst>
+      <p:ext uri="{BB962C8B-B14F-4D97-AF65-F5344CB8AC3E}">
+        <p14:creationId xmlns:p14="http://schemas.microsoft.com/office/powerpoint/2010/main" val="553039102"/>
+      </p:ext>
+    </p:extLst>
+  </p:cSld>
+</p:sld>
+</file>
+
+<file path=ppt/slides/slide3.xml><?xml version="1.0" encoding="utf-8"?>
 <p:sld xmlns:p="http://schemas.openxmlformats.org/presentationml/2006/main">
   <p:cSld>
     <p:bg>
@@ -2447,6 +5041,7 @@
           <a:lstStyle xmlns:a="http://schemas.openxmlformats.org/drawingml/2006/main"/>
           <a:p xmlns:a="http://schemas.openxmlformats.org/drawingml/2006/main">
             <a:pPr>
+              <a:buNone/>
               <a:defRPr sz="3525" b="1">
                 <a:solidFill>
                   <a:srgbClr val="FFFFFF"/>
@@ -2465,7 +5060,7 @@
                 <a:ea typeface="Helvetica Neue"/>
                 <a:cs typeface="Helvetica Neue"/>
               </a:rPr>
-              <a:t>The idea behind InsightIQ</a:t>
+              <a:t>The idea behind Lead Trace</a:t>
             </a:r>
           </a:p>
         </p:txBody>
@@ -2504,6 +5099,7 @@
           <a:lstStyle xmlns:a="http://schemas.openxmlformats.org/drawingml/2006/main"/>
           <a:p xmlns:a="http://schemas.openxmlformats.org/drawingml/2006/main">
             <a:pPr>
+              <a:buNone/>
               <a:defRPr sz="2175" b="1">
                 <a:solidFill>
                   <a:srgbClr val="63D7F2"/>
@@ -2561,6 +5157,7 @@
           <a:lstStyle xmlns:a="http://schemas.openxmlformats.org/drawingml/2006/main"/>
           <a:p xmlns:a="http://schemas.openxmlformats.org/drawingml/2006/main">
             <a:pPr>
+              <a:buNone/>
               <a:defRPr sz="2325" b="0">
                 <a:solidFill>
                   <a:srgbClr val="FFFFFF"/>
@@ -2584,6 +5181,7 @@
           </a:p>
           <a:p xmlns:a="http://schemas.openxmlformats.org/drawingml/2006/main">
             <a:pPr>
+              <a:buNone/>
               <a:defRPr sz="2325" b="0">
                 <a:solidFill>
                   <a:srgbClr val="FFFFFF"/>
@@ -2607,6 +5205,7 @@
           </a:p>
           <a:p xmlns:a="http://schemas.openxmlformats.org/drawingml/2006/main">
             <a:pPr>
+              <a:buNone/>
               <a:defRPr sz="2325" b="0">
                 <a:solidFill>
                   <a:srgbClr val="FFFFFF"/>
@@ -2664,6 +5263,7 @@
           <a:lstStyle xmlns:a="http://schemas.openxmlformats.org/drawingml/2006/main"/>
           <a:p xmlns:a="http://schemas.openxmlformats.org/drawingml/2006/main">
             <a:pPr>
+              <a:buNone/>
               <a:defRPr sz="2175" b="1">
                 <a:solidFill>
                   <a:srgbClr val="63D7F2"/>
@@ -2721,6 +5321,7 @@
           <a:lstStyle xmlns:a="http://schemas.openxmlformats.org/drawingml/2006/main"/>
           <a:p xmlns:a="http://schemas.openxmlformats.org/drawingml/2006/main">
             <a:pPr>
+              <a:buNone/>
               <a:defRPr sz="2325" b="0">
                 <a:solidFill>
                   <a:srgbClr val="FFFFFF"/>
@@ -2744,6 +5345,7 @@
           </a:p>
           <a:p xmlns:a="http://schemas.openxmlformats.org/drawingml/2006/main">
             <a:pPr>
+              <a:buNone/>
               <a:defRPr sz="2325" b="0">
                 <a:solidFill>
                   <a:srgbClr val="FFFFFF"/>
@@ -2767,6 +5369,7 @@
           </a:p>
           <a:p xmlns:a="http://schemas.openxmlformats.org/drawingml/2006/main">
             <a:pPr>
+              <a:buNone/>
               <a:defRPr sz="2325" b="0">
                 <a:solidFill>
                   <a:srgbClr val="FFFFFF"/>
@@ -2824,6 +5427,7 @@
           <a:lstStyle xmlns:a="http://schemas.openxmlformats.org/drawingml/2006/main"/>
           <a:p xmlns:a="http://schemas.openxmlformats.org/drawingml/2006/main">
             <a:pPr>
+              <a:buNone/>
               <a:defRPr sz="2325" b="1">
                 <a:solidFill>
                   <a:srgbClr val="FFFFFF"/>
@@ -2881,6 +5485,7 @@
           <a:lstStyle xmlns:a="http://schemas.openxmlformats.org/drawingml/2006/main"/>
           <a:p xmlns:a="http://schemas.openxmlformats.org/drawingml/2006/main">
             <a:pPr>
+              <a:buNone/>
               <a:defRPr sz="2025" b="0">
                 <a:solidFill>
                   <a:srgbClr val="63D7F2"/>
@@ -2914,7 +5519,7 @@
 </p:sld>
 </file>
 
-<file path=ppt/slides/slide3.xml><?xml version="1.0" encoding="utf-8"?>
+<file path=ppt/slides/slide4.xml><?xml version="1.0" encoding="utf-8"?>
 <p:sld xmlns:p="http://schemas.openxmlformats.org/presentationml/2006/main">
   <p:cSld>
     <p:bg>
@@ -2967,6 +5572,7 @@
           <a:lstStyle xmlns:a="http://schemas.openxmlformats.org/drawingml/2006/main"/>
           <a:p xmlns:a="http://schemas.openxmlformats.org/drawingml/2006/main">
             <a:pPr>
+              <a:buNone/>
               <a:defRPr sz="3975" b="1">
                 <a:solidFill>
                   <a:srgbClr val="0B214A"/>
@@ -2990,6 +5596,7 @@
           </a:p>
           <a:p xmlns:a="http://schemas.openxmlformats.org/drawingml/2006/main">
             <a:pPr>
+              <a:buNone/>
               <a:defRPr sz="3975" b="1">
                 <a:solidFill>
                   <a:srgbClr val="0B214A"/>
@@ -3047,6 +5654,7 @@
           <a:lstStyle xmlns:a="http://schemas.openxmlformats.org/drawingml/2006/main"/>
           <a:p xmlns:a="http://schemas.openxmlformats.org/drawingml/2006/main">
             <a:pPr>
+              <a:buNone/>
               <a:defRPr sz="2250" b="1">
                 <a:solidFill>
                   <a:srgbClr val="126FCE"/>
@@ -3104,6 +5712,7 @@
           <a:lstStyle xmlns:a="http://schemas.openxmlformats.org/drawingml/2006/main"/>
           <a:p xmlns:a="http://schemas.openxmlformats.org/drawingml/2006/main">
             <a:pPr>
+              <a:buNone/>
               <a:defRPr sz="2100" b="0">
                 <a:solidFill>
                   <a:srgbClr val="58718B"/>
@@ -3127,6 +5736,7 @@
           </a:p>
           <a:p xmlns:a="http://schemas.openxmlformats.org/drawingml/2006/main">
             <a:pPr>
+              <a:buNone/>
               <a:defRPr sz="2100" b="0">
                 <a:solidFill>
                   <a:srgbClr val="58718B"/>
@@ -3145,11 +5755,12 @@
                 <a:ea typeface="Helvetica Neue"/>
                 <a:cs typeface="Helvetica Neue"/>
               </a:rPr>
-              <a:t>what you sell. InsightIQ</a:t>
-            </a:r>
-          </a:p>
-          <a:p xmlns:a="http://schemas.openxmlformats.org/drawingml/2006/main">
-            <a:pPr>
+              <a:t>what you sell. Lead Trace</a:t>
+            </a:r>
+          </a:p>
+          <a:p xmlns:a="http://schemas.openxmlformats.org/drawingml/2006/main">
+            <a:pPr>
+              <a:buNone/>
               <a:defRPr sz="2100" b="0">
                 <a:solidFill>
                   <a:srgbClr val="58718B"/>
@@ -3175,14 +5786,21 @@
       </p:sp>
       <p:pic>
         <p:nvPicPr>
-          <p:cNvPr id="10" name=""/>
+          <p:cNvPr id="10" name="">
+            <a:extLst xmlns:a="http://schemas.openxmlformats.org/drawingml/2006/main">
+              <a:ext uri="{FF2B5EF4-FFF2-40B4-BE49-F238E27FC236}">
+                <a16:creationId xmlns:a16="http://schemas.microsoft.com/office/drawing/2014/main" id="{8C40794F-A5D9-4D83-BC86-73133588FB8B}"/>
+              </a:ext>
+            </a:extLst>
+          </p:cNvPr>
           <p:cNvPicPr>
             <a:picLocks xmlns:a="http://schemas.openxmlformats.org/drawingml/2006/main" noChangeAspect="1"/>
           </p:cNvPicPr>
           <p:nvPr/>
         </p:nvPicPr>
         <p:blipFill>
-          <a:blip xmlns:r="http://schemas.openxmlformats.org/officeDocument/2006/relationships" xmlns:a="http://schemas.openxmlformats.org/drawingml/2006/main" r:embed="R1a30b88975eb4ebd"/>
+          <a:blip xmlns:r="http://schemas.openxmlformats.org/officeDocument/2006/relationships" xmlns:a="http://schemas.openxmlformats.org/drawingml/2006/main" r:embed="R0dc9d6c4d7764ba7"/>
+          <a:srcRect xmlns:a="http://schemas.openxmlformats.org/drawingml/2006/main" l="0" t="0" r="0" b="0"/>
           <a:stretch xmlns:a="http://schemas.openxmlformats.org/drawingml/2006/main"/>
         </p:blipFill>
         <p:spPr>
@@ -3229,6 +5847,7 @@
           <a:lstStyle xmlns:a="http://schemas.openxmlformats.org/drawingml/2006/main"/>
           <a:p xmlns:a="http://schemas.openxmlformats.org/drawingml/2006/main">
             <a:pPr>
+              <a:buNone/>
               <a:defRPr sz="1800" b="1">
                 <a:solidFill>
                   <a:srgbClr val="123363"/>
@@ -3286,6 +5905,7 @@
           <a:lstStyle xmlns:a="http://schemas.openxmlformats.org/drawingml/2006/main"/>
           <a:p xmlns:a="http://schemas.openxmlformats.org/drawingml/2006/main">
             <a:pPr>
+              <a:buNone/>
               <a:defRPr sz="1800" b="1">
                 <a:solidFill>
                   <a:srgbClr val="123363"/>
@@ -3319,7 +5939,7 @@
 </p:sld>
 </file>
 
-<file path=ppt/slides/slide4.xml><?xml version="1.0" encoding="utf-8"?>
+<file path=ppt/slides/slide5.xml><?xml version="1.0" encoding="utf-8"?>
 <p:sld xmlns:p="http://schemas.openxmlformats.org/presentationml/2006/main">
   <p:cSld>
     <p:bg>
@@ -3372,6 +5992,7 @@
           <a:lstStyle xmlns:a="http://schemas.openxmlformats.org/drawingml/2006/main"/>
           <a:p xmlns:a="http://schemas.openxmlformats.org/drawingml/2006/main">
             <a:pPr>
+              <a:buNone/>
               <a:defRPr sz="3825" b="1">
                 <a:solidFill>
                   <a:srgbClr val="FFFFFF"/>
@@ -3433,6 +6054,7 @@
           <a:lstStyle xmlns:a="http://schemas.openxmlformats.org/drawingml/2006/main"/>
           <a:p xmlns:a="http://schemas.openxmlformats.org/drawingml/2006/main">
             <a:pPr algn="ctr">
+              <a:buNone/>
               <a:defRPr sz="2775" b="1">
                 <a:solidFill>
                   <a:srgbClr val="63D7F2"/>
@@ -3490,6 +6112,7 @@
           <a:lstStyle xmlns:a="http://schemas.openxmlformats.org/drawingml/2006/main"/>
           <a:p xmlns:a="http://schemas.openxmlformats.org/drawingml/2006/main">
             <a:pPr>
+              <a:buNone/>
               <a:defRPr sz="2325" b="1">
                 <a:solidFill>
                   <a:srgbClr val="FFFFFF"/>
@@ -3547,6 +6170,7 @@
           <a:lstStyle xmlns:a="http://schemas.openxmlformats.org/drawingml/2006/main"/>
           <a:p xmlns:a="http://schemas.openxmlformats.org/drawingml/2006/main">
             <a:pPr>
+              <a:buNone/>
               <a:defRPr sz="1950" b="0">
                 <a:solidFill>
                   <a:srgbClr val="FFFFFF"/>
@@ -3570,6 +6194,7 @@
           </a:p>
           <a:p xmlns:a="http://schemas.openxmlformats.org/drawingml/2006/main">
             <a:pPr>
+              <a:buNone/>
               <a:defRPr sz="1950" b="0">
                 <a:solidFill>
                   <a:srgbClr val="FFFFFF"/>
@@ -3631,6 +6256,7 @@
           <a:lstStyle xmlns:a="http://schemas.openxmlformats.org/drawingml/2006/main"/>
           <a:p xmlns:a="http://schemas.openxmlformats.org/drawingml/2006/main">
             <a:pPr algn="ctr">
+              <a:buNone/>
               <a:defRPr sz="2775" b="1">
                 <a:solidFill>
                   <a:srgbClr val="63D7F2"/>
@@ -3688,6 +6314,7 @@
           <a:lstStyle xmlns:a="http://schemas.openxmlformats.org/drawingml/2006/main"/>
           <a:p xmlns:a="http://schemas.openxmlformats.org/drawingml/2006/main">
             <a:pPr>
+              <a:buNone/>
               <a:defRPr sz="2325" b="1">
                 <a:solidFill>
                   <a:srgbClr val="FFFFFF"/>
@@ -3745,6 +6372,7 @@
           <a:lstStyle xmlns:a="http://schemas.openxmlformats.org/drawingml/2006/main"/>
           <a:p xmlns:a="http://schemas.openxmlformats.org/drawingml/2006/main">
             <a:pPr>
+              <a:buNone/>
               <a:defRPr sz="1950" b="0">
                 <a:solidFill>
                   <a:srgbClr val="FFFFFF"/>
@@ -3768,6 +6396,7 @@
           </a:p>
           <a:p xmlns:a="http://schemas.openxmlformats.org/drawingml/2006/main">
             <a:pPr>
+              <a:buNone/>
               <a:defRPr sz="1950" b="0">
                 <a:solidFill>
                   <a:srgbClr val="FFFFFF"/>
@@ -3793,7 +6422,13 @@
       </p:sp>
       <p:cxnSp>
         <p:nvCxnSpPr>
-          <p:cNvPr id="29" name=""/>
+          <p:cNvPr id="29" name="">
+            <a:extLst xmlns:a="http://schemas.openxmlformats.org/drawingml/2006/main">
+              <a:ext uri="{FF2B5EF4-FFF2-40B4-BE49-F238E27FC236}">
+                <a16:creationId xmlns:a16="http://schemas.microsoft.com/office/drawing/2014/main" id="{317F50CC-B02F-46DB-B31D-78E509BDB772}"/>
+              </a:ext>
+            </a:extLst>
+          </p:cNvPr>
           <p:cNvCxnSpPr>
             <a:stCxn xmlns:a="http://schemas.openxmlformats.org/drawingml/2006/main" id="2" idx="6"/>
             <a:endCxn xmlns:a="http://schemas.openxmlformats.org/drawingml/2006/main" id="5" idx="2"/>
@@ -3854,6 +6489,7 @@
           <a:lstStyle xmlns:a="http://schemas.openxmlformats.org/drawingml/2006/main"/>
           <a:p xmlns:a="http://schemas.openxmlformats.org/drawingml/2006/main">
             <a:pPr algn="ctr">
+              <a:buNone/>
               <a:defRPr sz="2775" b="1">
                 <a:solidFill>
                   <a:srgbClr val="63D7F2"/>
@@ -3911,6 +6547,7 @@
           <a:lstStyle xmlns:a="http://schemas.openxmlformats.org/drawingml/2006/main"/>
           <a:p xmlns:a="http://schemas.openxmlformats.org/drawingml/2006/main">
             <a:pPr>
+              <a:buNone/>
               <a:defRPr sz="2325" b="1">
                 <a:solidFill>
                   <a:srgbClr val="FFFFFF"/>
@@ -3968,6 +6605,7 @@
           <a:lstStyle xmlns:a="http://schemas.openxmlformats.org/drawingml/2006/main"/>
           <a:p xmlns:a="http://schemas.openxmlformats.org/drawingml/2006/main">
             <a:pPr>
+              <a:buNone/>
               <a:defRPr sz="1950" b="0">
                 <a:solidFill>
                   <a:srgbClr val="FFFFFF"/>
@@ -3991,6 +6629,7 @@
           </a:p>
           <a:p xmlns:a="http://schemas.openxmlformats.org/drawingml/2006/main">
             <a:pPr>
+              <a:buNone/>
               <a:defRPr sz="1950" b="0">
                 <a:solidFill>
                   <a:srgbClr val="FFFFFF"/>
@@ -4016,7 +6655,13 @@
       </p:sp>
       <p:cxnSp>
         <p:nvCxnSpPr>
-          <p:cNvPr id="33" name=""/>
+          <p:cNvPr id="33" name="">
+            <a:extLst xmlns:a="http://schemas.openxmlformats.org/drawingml/2006/main">
+              <a:ext uri="{FF2B5EF4-FFF2-40B4-BE49-F238E27FC236}">
+                <a16:creationId xmlns:a16="http://schemas.microsoft.com/office/drawing/2014/main" id="{66429007-89EE-4CD3-B5BC-251505121F99}"/>
+              </a:ext>
+            </a:extLst>
+          </p:cNvPr>
           <p:cNvCxnSpPr>
             <a:stCxn xmlns:a="http://schemas.openxmlformats.org/drawingml/2006/main" id="5" idx="6"/>
             <a:endCxn xmlns:a="http://schemas.openxmlformats.org/drawingml/2006/main" id="9" idx="2"/>
@@ -4077,6 +6722,7 @@
           <a:lstStyle xmlns:a="http://schemas.openxmlformats.org/drawingml/2006/main"/>
           <a:p xmlns:a="http://schemas.openxmlformats.org/drawingml/2006/main">
             <a:pPr algn="ctr">
+              <a:buNone/>
               <a:defRPr sz="2775" b="1">
                 <a:solidFill>
                   <a:srgbClr val="63D7F2"/>
@@ -4134,6 +6780,7 @@
           <a:lstStyle xmlns:a="http://schemas.openxmlformats.org/drawingml/2006/main"/>
           <a:p xmlns:a="http://schemas.openxmlformats.org/drawingml/2006/main">
             <a:pPr>
+              <a:buNone/>
               <a:defRPr sz="2325" b="1">
                 <a:solidFill>
                   <a:srgbClr val="FFFFFF"/>
@@ -4191,6 +6838,7 @@
           <a:lstStyle xmlns:a="http://schemas.openxmlformats.org/drawingml/2006/main"/>
           <a:p xmlns:a="http://schemas.openxmlformats.org/drawingml/2006/main">
             <a:pPr>
+              <a:buNone/>
               <a:defRPr sz="1950" b="0">
                 <a:solidFill>
                   <a:srgbClr val="FFFFFF"/>
@@ -4214,6 +6862,7 @@
           </a:p>
           <a:p xmlns:a="http://schemas.openxmlformats.org/drawingml/2006/main">
             <a:pPr>
+              <a:buNone/>
               <a:defRPr sz="1950" b="0">
                 <a:solidFill>
                   <a:srgbClr val="FFFFFF"/>
@@ -4239,7 +6888,13 @@
       </p:sp>
       <p:cxnSp>
         <p:nvCxnSpPr>
-          <p:cNvPr id="37" name=""/>
+          <p:cNvPr id="37" name="">
+            <a:extLst xmlns:a="http://schemas.openxmlformats.org/drawingml/2006/main">
+              <a:ext uri="{FF2B5EF4-FFF2-40B4-BE49-F238E27FC236}">
+                <a16:creationId xmlns:a16="http://schemas.microsoft.com/office/drawing/2014/main" id="{7E65BE25-21BE-4C1A-A9BD-1D15746F5D1C}"/>
+              </a:ext>
+            </a:extLst>
+          </p:cNvPr>
           <p:cNvCxnSpPr>
             <a:stCxn xmlns:a="http://schemas.openxmlformats.org/drawingml/2006/main" id="9" idx="6"/>
             <a:endCxn xmlns:a="http://schemas.openxmlformats.org/drawingml/2006/main" id="13" idx="2"/>
@@ -4300,6 +6955,7 @@
           <a:lstStyle xmlns:a="http://schemas.openxmlformats.org/drawingml/2006/main"/>
           <a:p xmlns:a="http://schemas.openxmlformats.org/drawingml/2006/main">
             <a:pPr algn="ctr">
+              <a:buNone/>
               <a:defRPr sz="2775" b="1">
                 <a:solidFill>
                   <a:srgbClr val="0B214A"/>
@@ -4357,6 +7013,7 @@
           <a:lstStyle xmlns:a="http://schemas.openxmlformats.org/drawingml/2006/main"/>
           <a:p xmlns:a="http://schemas.openxmlformats.org/drawingml/2006/main">
             <a:pPr>
+              <a:buNone/>
               <a:defRPr sz="2325" b="1">
                 <a:solidFill>
                   <a:srgbClr val="FFFFFF"/>
@@ -4414,6 +7071,7 @@
           <a:lstStyle xmlns:a="http://schemas.openxmlformats.org/drawingml/2006/main"/>
           <a:p xmlns:a="http://schemas.openxmlformats.org/drawingml/2006/main">
             <a:pPr>
+              <a:buNone/>
               <a:defRPr sz="1950" b="0">
                 <a:solidFill>
                   <a:srgbClr val="FFFFFF"/>
@@ -4437,6 +7095,7 @@
           </a:p>
           <a:p xmlns:a="http://schemas.openxmlformats.org/drawingml/2006/main">
             <a:pPr>
+              <a:buNone/>
               <a:defRPr sz="1950" b="0">
                 <a:solidFill>
                   <a:srgbClr val="FFFFFF"/>
@@ -4462,7 +7121,13 @@
       </p:sp>
       <p:cxnSp>
         <p:nvCxnSpPr>
-          <p:cNvPr id="41" name=""/>
+          <p:cNvPr id="41" name="">
+            <a:extLst xmlns:a="http://schemas.openxmlformats.org/drawingml/2006/main">
+              <a:ext uri="{FF2B5EF4-FFF2-40B4-BE49-F238E27FC236}">
+                <a16:creationId xmlns:a16="http://schemas.microsoft.com/office/drawing/2014/main" id="{8FEA6169-F21B-481D-9224-7A35EDEE5EE6}"/>
+              </a:ext>
+            </a:extLst>
+          </p:cNvPr>
           <p:cNvCxnSpPr>
             <a:stCxn xmlns:a="http://schemas.openxmlformats.org/drawingml/2006/main" id="13" idx="6"/>
             <a:endCxn xmlns:a="http://schemas.openxmlformats.org/drawingml/2006/main" id="17" idx="2"/>
@@ -4519,6 +7184,7 @@
           <a:lstStyle xmlns:a="http://schemas.openxmlformats.org/drawingml/2006/main"/>
           <a:p xmlns:a="http://schemas.openxmlformats.org/drawingml/2006/main">
             <a:pPr>
+              <a:buNone/>
               <a:defRPr sz="2100" b="1">
                 <a:solidFill>
                   <a:srgbClr val="63D7F2"/>
@@ -4546,456 +7212,6 @@
     <p:extLst>
       <p:ext uri="{BB962C8B-B14F-4D97-AF65-F5344CB8AC3E}">
         <p14:creationId xmlns:p14="http://schemas.microsoft.com/office/powerpoint/2010/main" val="106431827"/>
-      </p:ext>
-    </p:extLst>
-  </p:cSld>
-</p:sld>
-</file>
-
-<file path=ppt/slides/slide5.xml><?xml version="1.0" encoding="utf-8"?>
-<p:sld xmlns:p="http://schemas.openxmlformats.org/presentationml/2006/main">
-  <p:cSld>
-    <p:bg>
-      <p:bgPr>
-        <a:solidFill xmlns:a="http://schemas.openxmlformats.org/drawingml/2006/main">
-          <a:srgbClr val="FFFFFF"/>
-        </a:solidFill>
-      </p:bgPr>
-    </p:bg>
-    <p:spTree>
-      <p:nvGrpSpPr>
-        <p:cNvPr id="1" name=""/>
-        <p:cNvGrpSpPr/>
-        <p:nvPr/>
-      </p:nvGrpSpPr>
-      <p:grpSpPr>
-        <a:xfrm xmlns:a="http://schemas.openxmlformats.org/drawingml/2006/main"/>
-      </p:grpSpPr>
-      <p:sp>
-        <p:nvSpPr>
-          <p:cNvPr id="9" name="">
-            <a:extLst xmlns:a="http://schemas.openxmlformats.org/drawingml/2006/main">
-              <a:ext uri="{FF2B5EF4-FFF2-40B4-BE49-F238E27FC236}">
-                <a16:creationId xmlns:a16="http://schemas.microsoft.com/office/drawing/2014/main" id="{9311C953-25D8-4A72-94D9-7FA81C39B456}"/>
-              </a:ext>
-            </a:extLst>
-          </p:cNvPr>
-          <p:cNvSpPr>
-            <a:spLocks xmlns:a="http://schemas.openxmlformats.org/drawingml/2006/main" noGrp="1"/>
-          </p:cNvSpPr>
-          <p:nvPr/>
-        </p:nvSpPr>
-        <p:spPr>
-          <a:xfrm xmlns:a="http://schemas.openxmlformats.org/drawingml/2006/main">
-            <a:off x="609600" y="457200"/>
-            <a:ext cx="10972800" cy="762000"/>
-          </a:xfrm>
-          <a:prstGeom xmlns:a="http://schemas.openxmlformats.org/drawingml/2006/main" prst="rect">
-            <a:avLst/>
-          </a:prstGeom>
-          <a:noFill xmlns:a="http://schemas.openxmlformats.org/drawingml/2006/main"/>
-          <a:ln xmlns:a="http://schemas.openxmlformats.org/drawingml/2006/main" w="0">
-            <a:noFill/>
-          </a:ln>
-        </p:spPr>
-        <p:txBody>
-          <a:bodyPr xmlns:a="http://schemas.openxmlformats.org/drawingml/2006/main">
-            <a:noAutofit/>
-          </a:bodyPr>
-          <a:lstStyle xmlns:a="http://schemas.openxmlformats.org/drawingml/2006/main"/>
-          <a:p xmlns:a="http://schemas.openxmlformats.org/drawingml/2006/main">
-            <a:pPr>
-              <a:defRPr sz="3525" b="1">
-                <a:solidFill>
-                  <a:srgbClr val="0B214A"/>
-                </a:solidFill>
-                <a:latin typeface="Helvetica Neue"/>
-                <a:ea typeface="Helvetica Neue"/>
-                <a:cs typeface="Helvetica Neue"/>
-              </a:defRPr>
-            </a:pPr>
-            <a:r>
-              <a:rPr sz="3525" b="1">
-                <a:solidFill>
-                  <a:srgbClr val="0B214A"/>
-                </a:solidFill>
-                <a:latin typeface="Helvetica Neue"/>
-                <a:ea typeface="Helvetica Neue"/>
-                <a:cs typeface="Helvetica Neue"/>
-              </a:rPr>
-              <a:t>Your research, in one workspace</a:t>
-            </a:r>
-          </a:p>
-        </p:txBody>
-      </p:sp>
-      <p:pic>
-        <p:nvPicPr>
-          <p:cNvPr id="10" name=""/>
-          <p:cNvPicPr>
-            <a:picLocks xmlns:a="http://schemas.openxmlformats.org/drawingml/2006/main" noChangeAspect="1"/>
-          </p:cNvPicPr>
-          <p:nvPr/>
-        </p:nvPicPr>
-        <p:blipFill>
-          <a:blip xmlns:r="http://schemas.openxmlformats.org/officeDocument/2006/relationships" xmlns:a="http://schemas.openxmlformats.org/drawingml/2006/main" r:embed="R7f59ccfb4e2c4af0"/>
-          <a:stretch xmlns:a="http://schemas.openxmlformats.org/drawingml/2006/main"/>
-        </p:blipFill>
-        <p:spPr>
-          <a:xfrm xmlns:a="http://schemas.openxmlformats.org/drawingml/2006/main">
-            <a:off x="540089" y="1666875"/>
-            <a:ext cx="7987622" cy="4495800"/>
-          </a:xfrm>
-          <a:prstGeom xmlns:a="http://schemas.openxmlformats.org/drawingml/2006/main" prst="rect">
-            <a:avLst/>
-          </a:prstGeom>
-        </p:spPr>
-      </p:pic>
-      <p:sp>
-        <p:nvSpPr>
-          <p:cNvPr id="3" name="">
-            <a:extLst xmlns:a="http://schemas.openxmlformats.org/drawingml/2006/main">
-              <a:ext uri="{FF2B5EF4-FFF2-40B4-BE49-F238E27FC236}">
-                <a16:creationId xmlns:a16="http://schemas.microsoft.com/office/drawing/2014/main" id="{6D4B3D26-960D-4EE6-9561-80539284A247}"/>
-              </a:ext>
-            </a:extLst>
-          </p:cNvPr>
-          <p:cNvSpPr>
-            <a:spLocks xmlns:a="http://schemas.openxmlformats.org/drawingml/2006/main" noGrp="1"/>
-          </p:cNvSpPr>
-          <p:nvPr/>
-        </p:nvSpPr>
-        <p:spPr>
-          <a:xfrm xmlns:a="http://schemas.openxmlformats.org/drawingml/2006/main">
-            <a:off x="8953500" y="1809750"/>
-            <a:ext cx="2619375" cy="447675"/>
-          </a:xfrm>
-          <a:prstGeom xmlns:a="http://schemas.openxmlformats.org/drawingml/2006/main" prst="rect">
-            <a:avLst/>
-          </a:prstGeom>
-          <a:noFill xmlns:a="http://schemas.openxmlformats.org/drawingml/2006/main"/>
-          <a:ln xmlns:a="http://schemas.openxmlformats.org/drawingml/2006/main" w="0">
-            <a:noFill/>
-          </a:ln>
-        </p:spPr>
-        <p:txBody>
-          <a:bodyPr xmlns:a="http://schemas.openxmlformats.org/drawingml/2006/main">
-            <a:noAutofit/>
-          </a:bodyPr>
-          <a:lstStyle xmlns:a="http://schemas.openxmlformats.org/drawingml/2006/main"/>
-          <a:p xmlns:a="http://schemas.openxmlformats.org/drawingml/2006/main">
-            <a:pPr>
-              <a:defRPr sz="2025" b="1">
-                <a:solidFill>
-                  <a:srgbClr val="126FCE"/>
-                </a:solidFill>
-                <a:latin typeface="Helvetica Neue"/>
-                <a:ea typeface="Helvetica Neue"/>
-                <a:cs typeface="Helvetica Neue"/>
-              </a:defRPr>
-            </a:pPr>
-            <a:r>
-              <a:rPr sz="2025" b="1">
-                <a:solidFill>
-                  <a:srgbClr val="126FCE"/>
-                </a:solidFill>
-                <a:latin typeface="Helvetica Neue"/>
-                <a:ea typeface="Helvetica Neue"/>
-                <a:cs typeface="Helvetica Neue"/>
-              </a:rPr>
-              <a:t>Research progress</a:t>
-            </a:r>
-          </a:p>
-        </p:txBody>
-      </p:sp>
-      <p:sp>
-        <p:nvSpPr>
-          <p:cNvPr id="4" name="">
-            <a:extLst xmlns:a="http://schemas.openxmlformats.org/drawingml/2006/main">
-              <a:ext uri="{FF2B5EF4-FFF2-40B4-BE49-F238E27FC236}">
-                <a16:creationId xmlns:a16="http://schemas.microsoft.com/office/drawing/2014/main" id="{79EBDED9-B7B0-4396-8DB1-3AEC410453B7}"/>
-              </a:ext>
-            </a:extLst>
-          </p:cNvPr>
-          <p:cNvSpPr>
-            <a:spLocks xmlns:a="http://schemas.openxmlformats.org/drawingml/2006/main" noGrp="1"/>
-          </p:cNvSpPr>
-          <p:nvPr/>
-        </p:nvSpPr>
-        <p:spPr>
-          <a:xfrm xmlns:a="http://schemas.openxmlformats.org/drawingml/2006/main">
-            <a:off x="8953500" y="2343150"/>
-            <a:ext cx="2619375" cy="819150"/>
-          </a:xfrm>
-          <a:prstGeom xmlns:a="http://schemas.openxmlformats.org/drawingml/2006/main" prst="rect">
-            <a:avLst/>
-          </a:prstGeom>
-          <a:noFill xmlns:a="http://schemas.openxmlformats.org/drawingml/2006/main"/>
-          <a:ln xmlns:a="http://schemas.openxmlformats.org/drawingml/2006/main" w="0">
-            <a:noFill/>
-          </a:ln>
-        </p:spPr>
-        <p:txBody>
-          <a:bodyPr xmlns:a="http://schemas.openxmlformats.org/drawingml/2006/main">
-            <a:noAutofit/>
-          </a:bodyPr>
-          <a:lstStyle xmlns:a="http://schemas.openxmlformats.org/drawingml/2006/main"/>
-          <a:p xmlns:a="http://schemas.openxmlformats.org/drawingml/2006/main">
-            <a:pPr>
-              <a:defRPr sz="1875" b="0">
-                <a:solidFill>
-                  <a:srgbClr val="123363"/>
-                </a:solidFill>
-                <a:latin typeface="Helvetica Neue"/>
-                <a:ea typeface="Helvetica Neue"/>
-                <a:cs typeface="Helvetica Neue"/>
-              </a:defRPr>
-            </a:pPr>
-            <a:r>
-              <a:rPr sz="1875" b="0">
-                <a:solidFill>
-                  <a:srgbClr val="123363"/>
-                </a:solidFill>
-                <a:latin typeface="Helvetica Neue"/>
-                <a:ea typeface="Helvetica Neue"/>
-                <a:cs typeface="Helvetica Neue"/>
-              </a:rPr>
-              <a:t>See what is running and what is ready.</a:t>
-            </a:r>
-          </a:p>
-        </p:txBody>
-      </p:sp>
-      <p:sp>
-        <p:nvSpPr>
-          <p:cNvPr id="5" name="">
-            <a:extLst xmlns:a="http://schemas.openxmlformats.org/drawingml/2006/main">
-              <a:ext uri="{FF2B5EF4-FFF2-40B4-BE49-F238E27FC236}">
-                <a16:creationId xmlns:a16="http://schemas.microsoft.com/office/drawing/2014/main" id="{D495551F-3E43-4BDB-8B00-99CE6415D692}"/>
-              </a:ext>
-            </a:extLst>
-          </p:cNvPr>
-          <p:cNvSpPr>
-            <a:spLocks xmlns:a="http://schemas.openxmlformats.org/drawingml/2006/main" noGrp="1"/>
-          </p:cNvSpPr>
-          <p:nvPr/>
-        </p:nvSpPr>
-        <p:spPr>
-          <a:xfrm xmlns:a="http://schemas.openxmlformats.org/drawingml/2006/main">
-            <a:off x="8953500" y="3438525"/>
-            <a:ext cx="2619375" cy="447675"/>
-          </a:xfrm>
-          <a:prstGeom xmlns:a="http://schemas.openxmlformats.org/drawingml/2006/main" prst="rect">
-            <a:avLst/>
-          </a:prstGeom>
-          <a:noFill xmlns:a="http://schemas.openxmlformats.org/drawingml/2006/main"/>
-          <a:ln xmlns:a="http://schemas.openxmlformats.org/drawingml/2006/main" w="0">
-            <a:noFill/>
-          </a:ln>
-        </p:spPr>
-        <p:txBody>
-          <a:bodyPr xmlns:a="http://schemas.openxmlformats.org/drawingml/2006/main">
-            <a:noAutofit/>
-          </a:bodyPr>
-          <a:lstStyle xmlns:a="http://schemas.openxmlformats.org/drawingml/2006/main"/>
-          <a:p xmlns:a="http://schemas.openxmlformats.org/drawingml/2006/main">
-            <a:pPr>
-              <a:defRPr sz="2025" b="1">
-                <a:solidFill>
-                  <a:srgbClr val="126FCE"/>
-                </a:solidFill>
-                <a:latin typeface="Helvetica Neue"/>
-                <a:ea typeface="Helvetica Neue"/>
-                <a:cs typeface="Helvetica Neue"/>
-              </a:defRPr>
-            </a:pPr>
-            <a:r>
-              <a:rPr sz="2025" b="1">
-                <a:solidFill>
-                  <a:srgbClr val="126FCE"/>
-                </a:solidFill>
-                <a:latin typeface="Helvetica Neue"/>
-                <a:ea typeface="Helvetica Neue"/>
-                <a:cs typeface="Helvetica Neue"/>
-              </a:rPr>
-              <a:t>Saved briefs</a:t>
-            </a:r>
-          </a:p>
-        </p:txBody>
-      </p:sp>
-      <p:sp>
-        <p:nvSpPr>
-          <p:cNvPr id="6" name="">
-            <a:extLst xmlns:a="http://schemas.openxmlformats.org/drawingml/2006/main">
-              <a:ext uri="{FF2B5EF4-FFF2-40B4-BE49-F238E27FC236}">
-                <a16:creationId xmlns:a16="http://schemas.microsoft.com/office/drawing/2014/main" id="{3A88ED9A-9505-482C-9495-930128A2EFF1}"/>
-              </a:ext>
-            </a:extLst>
-          </p:cNvPr>
-          <p:cNvSpPr>
-            <a:spLocks xmlns:a="http://schemas.openxmlformats.org/drawingml/2006/main" noGrp="1"/>
-          </p:cNvSpPr>
-          <p:nvPr/>
-        </p:nvSpPr>
-        <p:spPr>
-          <a:xfrm xmlns:a="http://schemas.openxmlformats.org/drawingml/2006/main">
-            <a:off x="8953500" y="3962400"/>
-            <a:ext cx="2619375" cy="971550"/>
-          </a:xfrm>
-          <a:prstGeom xmlns:a="http://schemas.openxmlformats.org/drawingml/2006/main" prst="rect">
-            <a:avLst/>
-          </a:prstGeom>
-          <a:noFill xmlns:a="http://schemas.openxmlformats.org/drawingml/2006/main"/>
-          <a:ln xmlns:a="http://schemas.openxmlformats.org/drawingml/2006/main" w="0">
-            <a:noFill/>
-          </a:ln>
-        </p:spPr>
-        <p:txBody>
-          <a:bodyPr xmlns:a="http://schemas.openxmlformats.org/drawingml/2006/main">
-            <a:noAutofit/>
-          </a:bodyPr>
-          <a:lstStyle xmlns:a="http://schemas.openxmlformats.org/drawingml/2006/main"/>
-          <a:p xmlns:a="http://schemas.openxmlformats.org/drawingml/2006/main">
-            <a:pPr>
-              <a:defRPr sz="1875" b="0">
-                <a:solidFill>
-                  <a:srgbClr val="123363"/>
-                </a:solidFill>
-                <a:latin typeface="Helvetica Neue"/>
-                <a:ea typeface="Helvetica Neue"/>
-                <a:cs typeface="Helvetica Neue"/>
-              </a:defRPr>
-            </a:pPr>
-            <a:r>
-              <a:rPr sz="1875" b="0">
-                <a:solidFill>
-                  <a:srgbClr val="123363"/>
-                </a:solidFill>
-                <a:latin typeface="Helvetica Neue"/>
-                <a:ea typeface="Helvetica Neue"/>
-                <a:cs typeface="Helvetica Neue"/>
-              </a:rPr>
-              <a:t>Open the latest research and continue preparing.</a:t>
-            </a:r>
-          </a:p>
-        </p:txBody>
-      </p:sp>
-      <p:sp>
-        <p:nvSpPr>
-          <p:cNvPr id="7" name="">
-            <a:extLst xmlns:a="http://schemas.openxmlformats.org/drawingml/2006/main">
-              <a:ext uri="{FF2B5EF4-FFF2-40B4-BE49-F238E27FC236}">
-                <a16:creationId xmlns:a16="http://schemas.microsoft.com/office/drawing/2014/main" id="{5245E354-F539-4A0C-A96E-733686BC0350}"/>
-              </a:ext>
-            </a:extLst>
-          </p:cNvPr>
-          <p:cNvSpPr>
-            <a:spLocks xmlns:a="http://schemas.openxmlformats.org/drawingml/2006/main" noGrp="1"/>
-          </p:cNvSpPr>
-          <p:nvPr/>
-        </p:nvSpPr>
-        <p:spPr>
-          <a:xfrm xmlns:a="http://schemas.openxmlformats.org/drawingml/2006/main">
-            <a:off x="8953500" y="5229225"/>
-            <a:ext cx="2619375" cy="447675"/>
-          </a:xfrm>
-          <a:prstGeom xmlns:a="http://schemas.openxmlformats.org/drawingml/2006/main" prst="rect">
-            <a:avLst/>
-          </a:prstGeom>
-          <a:noFill xmlns:a="http://schemas.openxmlformats.org/drawingml/2006/main"/>
-          <a:ln xmlns:a="http://schemas.openxmlformats.org/drawingml/2006/main" w="0">
-            <a:noFill/>
-          </a:ln>
-        </p:spPr>
-        <p:txBody>
-          <a:bodyPr xmlns:a="http://schemas.openxmlformats.org/drawingml/2006/main">
-            <a:noAutofit/>
-          </a:bodyPr>
-          <a:lstStyle xmlns:a="http://schemas.openxmlformats.org/drawingml/2006/main"/>
-          <a:p xmlns:a="http://schemas.openxmlformats.org/drawingml/2006/main">
-            <a:pPr>
-              <a:defRPr sz="2025" b="1">
-                <a:solidFill>
-                  <a:srgbClr val="126FCE"/>
-                </a:solidFill>
-                <a:latin typeface="Helvetica Neue"/>
-                <a:ea typeface="Helvetica Neue"/>
-                <a:cs typeface="Helvetica Neue"/>
-              </a:defRPr>
-            </a:pPr>
-            <a:r>
-              <a:rPr sz="2025" b="1">
-                <a:solidFill>
-                  <a:srgbClr val="126FCE"/>
-                </a:solidFill>
-                <a:latin typeface="Helvetica Neue"/>
-                <a:ea typeface="Helvetica Neue"/>
-                <a:cs typeface="Helvetica Neue"/>
-              </a:rPr>
-              <a:t>Team workspace</a:t>
-            </a:r>
-          </a:p>
-        </p:txBody>
-      </p:sp>
-      <p:sp>
-        <p:nvSpPr>
-          <p:cNvPr id="8" name="">
-            <a:extLst xmlns:a="http://schemas.openxmlformats.org/drawingml/2006/main">
-              <a:ext uri="{FF2B5EF4-FFF2-40B4-BE49-F238E27FC236}">
-                <a16:creationId xmlns:a16="http://schemas.microsoft.com/office/drawing/2014/main" id="{29849976-896E-48F3-8FF4-10B5E1151B39}"/>
-              </a:ext>
-            </a:extLst>
-          </p:cNvPr>
-          <p:cNvSpPr>
-            <a:spLocks xmlns:a="http://schemas.openxmlformats.org/drawingml/2006/main" noGrp="1"/>
-          </p:cNvSpPr>
-          <p:nvPr/>
-        </p:nvSpPr>
-        <p:spPr>
-          <a:xfrm xmlns:a="http://schemas.openxmlformats.org/drawingml/2006/main">
-            <a:off x="8953500" y="5762625"/>
-            <a:ext cx="2619375" cy="762000"/>
-          </a:xfrm>
-          <a:prstGeom xmlns:a="http://schemas.openxmlformats.org/drawingml/2006/main" prst="rect">
-            <a:avLst/>
-          </a:prstGeom>
-          <a:noFill xmlns:a="http://schemas.openxmlformats.org/drawingml/2006/main"/>
-          <a:ln xmlns:a="http://schemas.openxmlformats.org/drawingml/2006/main" w="0">
-            <a:noFill/>
-          </a:ln>
-        </p:spPr>
-        <p:txBody>
-          <a:bodyPr xmlns:a="http://schemas.openxmlformats.org/drawingml/2006/main">
-            <a:noAutofit/>
-          </a:bodyPr>
-          <a:lstStyle xmlns:a="http://schemas.openxmlformats.org/drawingml/2006/main"/>
-          <a:p xmlns:a="http://schemas.openxmlformats.org/drawingml/2006/main">
-            <a:pPr>
-              <a:defRPr sz="1875" b="0">
-                <a:solidFill>
-                  <a:srgbClr val="123363"/>
-                </a:solidFill>
-                <a:latin typeface="Helvetica Neue"/>
-                <a:ea typeface="Helvetica Neue"/>
-                <a:cs typeface="Helvetica Neue"/>
-              </a:defRPr>
-            </a:pPr>
-            <a:r>
-              <a:rPr sz="1875" b="0">
-                <a:solidFill>
-                  <a:srgbClr val="123363"/>
-                </a:solidFill>
-                <a:latin typeface="Helvetica Neue"/>
-                <a:ea typeface="Helvetica Neue"/>
-                <a:cs typeface="Helvetica Neue"/>
-              </a:rPr>
-              <a:t>Keep prospect research together.</a:t>
-            </a:r>
-          </a:p>
-        </p:txBody>
-      </p:sp>
-    </p:spTree>
-    <p:extLst>
-      <p:ext uri="{BB962C8B-B14F-4D97-AF65-F5344CB8AC3E}">
-        <p14:creationId xmlns:p14="http://schemas.microsoft.com/office/powerpoint/2010/main" val="381628285"/>
       </p:ext>
     </p:extLst>
   </p:cSld>
@@ -5023,10 +7239,10 @@
       </p:grpSpPr>
       <p:sp>
         <p:nvSpPr>
-          <p:cNvPr id="11" name="">
-            <a:extLst xmlns:a="http://schemas.openxmlformats.org/drawingml/2006/main">
-              <a:ext uri="{FF2B5EF4-FFF2-40B4-BE49-F238E27FC236}">
-                <a16:creationId xmlns:a16="http://schemas.microsoft.com/office/drawing/2014/main" id="{A7863CEE-2475-45B2-ABB5-4B8FD2B27792}"/>
+          <p:cNvPr id="9" name="">
+            <a:extLst xmlns:a="http://schemas.openxmlformats.org/drawingml/2006/main">
+              <a:ext uri="{FF2B5EF4-FFF2-40B4-BE49-F238E27FC236}">
+                <a16:creationId xmlns:a16="http://schemas.microsoft.com/office/drawing/2014/main" id="{9311C953-25D8-4A72-94D9-7FA81C39B456}"/>
               </a:ext>
             </a:extLst>
           </p:cNvPr>
@@ -5055,6 +7271,7 @@
           <a:lstStyle xmlns:a="http://schemas.openxmlformats.org/drawingml/2006/main"/>
           <a:p xmlns:a="http://schemas.openxmlformats.org/drawingml/2006/main">
             <a:pPr>
+              <a:buNone/>
               <a:defRPr sz="3525" b="1">
                 <a:solidFill>
                   <a:srgbClr val="0B214A"/>
@@ -5073,29 +7290,58 @@
                 <a:ea typeface="Helvetica Neue"/>
                 <a:cs typeface="Helvetica Neue"/>
               </a:rPr>
-              <a:t>Conversation angles you can test</a:t>
-            </a:r>
-          </a:p>
-        </p:txBody>
-      </p:sp>
-      <p:sp>
-        <p:nvSpPr>
-          <p:cNvPr id="2" name="">
-            <a:extLst xmlns:a="http://schemas.openxmlformats.org/drawingml/2006/main">
-              <a:ext uri="{FF2B5EF4-FFF2-40B4-BE49-F238E27FC236}">
-                <a16:creationId xmlns:a16="http://schemas.microsoft.com/office/drawing/2014/main" id="{949CC28D-91EF-4A02-9703-A4D4217664DD}"/>
-              </a:ext>
-            </a:extLst>
-          </p:cNvPr>
-          <p:cNvSpPr>
-            <a:spLocks xmlns:a="http://schemas.openxmlformats.org/drawingml/2006/main" noGrp="1"/>
-          </p:cNvSpPr>
-          <p:nvPr/>
-        </p:nvSpPr>
-        <p:spPr>
-          <a:xfrm xmlns:a="http://schemas.openxmlformats.org/drawingml/2006/main">
-            <a:off x="657225" y="1266825"/>
-            <a:ext cx="10896600" cy="457200"/>
+              <a:t>Your research, in one workspace</a:t>
+            </a:r>
+          </a:p>
+        </p:txBody>
+      </p:sp>
+      <p:pic>
+        <p:nvPicPr>
+          <p:cNvPr id="10" name="">
+            <a:extLst xmlns:a="http://schemas.openxmlformats.org/drawingml/2006/main">
+              <a:ext uri="{FF2B5EF4-FFF2-40B4-BE49-F238E27FC236}">
+                <a16:creationId xmlns:a16="http://schemas.microsoft.com/office/drawing/2014/main" id="{B9037DDC-CDAE-44AE-9990-AEC253466BCA}"/>
+              </a:ext>
+            </a:extLst>
+          </p:cNvPr>
+          <p:cNvPicPr>
+            <a:picLocks xmlns:a="http://schemas.openxmlformats.org/drawingml/2006/main" noChangeAspect="1"/>
+          </p:cNvPicPr>
+          <p:nvPr/>
+        </p:nvPicPr>
+        <p:blipFill>
+          <a:blip xmlns:r="http://schemas.openxmlformats.org/officeDocument/2006/relationships" xmlns:a="http://schemas.openxmlformats.org/drawingml/2006/main" r:embed="R846512ee346a4e54"/>
+          <a:srcRect xmlns:a="http://schemas.openxmlformats.org/drawingml/2006/main" l="0" t="0" r="0" b="0"/>
+          <a:stretch xmlns:a="http://schemas.openxmlformats.org/drawingml/2006/main"/>
+        </p:blipFill>
+        <p:spPr>
+          <a:xfrm xmlns:a="http://schemas.openxmlformats.org/drawingml/2006/main">
+            <a:off x="540089" y="1666875"/>
+            <a:ext cx="7987622" cy="4495800"/>
+          </a:xfrm>
+          <a:prstGeom xmlns:a="http://schemas.openxmlformats.org/drawingml/2006/main" prst="rect">
+            <a:avLst/>
+          </a:prstGeom>
+        </p:spPr>
+      </p:pic>
+      <p:sp>
+        <p:nvSpPr>
+          <p:cNvPr id="3" name="">
+            <a:extLst xmlns:a="http://schemas.openxmlformats.org/drawingml/2006/main">
+              <a:ext uri="{FF2B5EF4-FFF2-40B4-BE49-F238E27FC236}">
+                <a16:creationId xmlns:a16="http://schemas.microsoft.com/office/drawing/2014/main" id="{6D4B3D26-960D-4EE6-9561-80539284A247}"/>
+              </a:ext>
+            </a:extLst>
+          </p:cNvPr>
+          <p:cNvSpPr>
+            <a:spLocks xmlns:a="http://schemas.openxmlformats.org/drawingml/2006/main" noGrp="1"/>
+          </p:cNvSpPr>
+          <p:nvPr/>
+        </p:nvSpPr>
+        <p:spPr>
+          <a:xfrm xmlns:a="http://schemas.openxmlformats.org/drawingml/2006/main">
+            <a:off x="8953500" y="1809750"/>
+            <a:ext cx="2619375" cy="447675"/>
           </a:xfrm>
           <a:prstGeom xmlns:a="http://schemas.openxmlformats.org/drawingml/2006/main" prst="rect">
             <a:avLst/>
@@ -5112,47 +7358,48 @@
           <a:lstStyle xmlns:a="http://schemas.openxmlformats.org/drawingml/2006/main"/>
           <a:p xmlns:a="http://schemas.openxmlformats.org/drawingml/2006/main">
             <a:pPr>
-              <a:defRPr sz="1875" b="0">
-                <a:solidFill>
-                  <a:srgbClr val="58718B"/>
-                </a:solidFill>
-                <a:latin typeface="Helvetica Neue"/>
-                <a:ea typeface="Helvetica Neue"/>
-                <a:cs typeface="Helvetica Neue"/>
-              </a:defRPr>
-            </a:pPr>
-            <a:r>
-              <a:rPr sz="1875" b="0">
-                <a:solidFill>
-                  <a:srgbClr val="58718B"/>
-                </a:solidFill>
-                <a:latin typeface="Helvetica Neue"/>
-                <a:ea typeface="Helvetica Neue"/>
-                <a:cs typeface="Helvetica Neue"/>
-              </a:rPr>
-              <a:t>Vercel example: product detail</a:t>
-            </a:r>
-          </a:p>
-        </p:txBody>
-      </p:sp>
-      <p:sp>
-        <p:nvSpPr>
-          <p:cNvPr id="3" name="">
-            <a:extLst xmlns:a="http://schemas.openxmlformats.org/drawingml/2006/main">
-              <a:ext uri="{FF2B5EF4-FFF2-40B4-BE49-F238E27FC236}">
-                <a16:creationId xmlns:a16="http://schemas.microsoft.com/office/drawing/2014/main" id="{792B2997-B961-46E9-83A3-877776FE407A}"/>
-              </a:ext>
-            </a:extLst>
-          </p:cNvPr>
-          <p:cNvSpPr>
-            <a:spLocks xmlns:a="http://schemas.openxmlformats.org/drawingml/2006/main" noGrp="1"/>
-          </p:cNvSpPr>
-          <p:nvPr/>
-        </p:nvSpPr>
-        <p:spPr>
-          <a:xfrm xmlns:a="http://schemas.openxmlformats.org/drawingml/2006/main">
-            <a:off x="657225" y="2085975"/>
-            <a:ext cx="4524375" cy="457200"/>
+              <a:buNone/>
+              <a:defRPr sz="2025" b="1">
+                <a:solidFill>
+                  <a:srgbClr val="126FCE"/>
+                </a:solidFill>
+                <a:latin typeface="Helvetica Neue"/>
+                <a:ea typeface="Helvetica Neue"/>
+                <a:cs typeface="Helvetica Neue"/>
+              </a:defRPr>
+            </a:pPr>
+            <a:r>
+              <a:rPr sz="2025" b="1">
+                <a:solidFill>
+                  <a:srgbClr val="126FCE"/>
+                </a:solidFill>
+                <a:latin typeface="Helvetica Neue"/>
+                <a:ea typeface="Helvetica Neue"/>
+                <a:cs typeface="Helvetica Neue"/>
+              </a:rPr>
+              <a:t>Research progress</a:t>
+            </a:r>
+          </a:p>
+        </p:txBody>
+      </p:sp>
+      <p:sp>
+        <p:nvSpPr>
+          <p:cNvPr id="4" name="">
+            <a:extLst xmlns:a="http://schemas.openxmlformats.org/drawingml/2006/main">
+              <a:ext uri="{FF2B5EF4-FFF2-40B4-BE49-F238E27FC236}">
+                <a16:creationId xmlns:a16="http://schemas.microsoft.com/office/drawing/2014/main" id="{79EBDED9-B7B0-4396-8DB1-3AEC410453B7}"/>
+              </a:ext>
+            </a:extLst>
+          </p:cNvPr>
+          <p:cNvSpPr>
+            <a:spLocks xmlns:a="http://schemas.openxmlformats.org/drawingml/2006/main" noGrp="1"/>
+          </p:cNvSpPr>
+          <p:nvPr/>
+        </p:nvSpPr>
+        <p:spPr>
+          <a:xfrm xmlns:a="http://schemas.openxmlformats.org/drawingml/2006/main">
+            <a:off x="8953500" y="2343150"/>
+            <a:ext cx="2619375" cy="819150"/>
           </a:xfrm>
           <a:prstGeom xmlns:a="http://schemas.openxmlformats.org/drawingml/2006/main" prst="rect">
             <a:avLst/>
@@ -5169,47 +7416,48 @@
           <a:lstStyle xmlns:a="http://schemas.openxmlformats.org/drawingml/2006/main"/>
           <a:p xmlns:a="http://schemas.openxmlformats.org/drawingml/2006/main">
             <a:pPr>
-              <a:defRPr sz="2025" b="1">
-                <a:solidFill>
-                  <a:srgbClr val="126FCE"/>
-                </a:solidFill>
-                <a:latin typeface="Helvetica Neue"/>
-                <a:ea typeface="Helvetica Neue"/>
-                <a:cs typeface="Helvetica Neue"/>
-              </a:defRPr>
-            </a:pPr>
-            <a:r>
-              <a:rPr sz="2025" b="1">
-                <a:solidFill>
-                  <a:srgbClr val="126FCE"/>
-                </a:solidFill>
-                <a:latin typeface="Helvetica Neue"/>
-                <a:ea typeface="Helvetica Neue"/>
-                <a:cs typeface="Helvetica Neue"/>
-              </a:rPr>
-              <a:t>Source claim</a:t>
-            </a:r>
-          </a:p>
-        </p:txBody>
-      </p:sp>
-      <p:sp>
-        <p:nvSpPr>
-          <p:cNvPr id="4" name="">
-            <a:extLst xmlns:a="http://schemas.openxmlformats.org/drawingml/2006/main">
-              <a:ext uri="{FF2B5EF4-FFF2-40B4-BE49-F238E27FC236}">
-                <a16:creationId xmlns:a16="http://schemas.microsoft.com/office/drawing/2014/main" id="{B9E67B4F-A628-4DCC-A2CD-E92B9747D68A}"/>
-              </a:ext>
-            </a:extLst>
-          </p:cNvPr>
-          <p:cNvSpPr>
-            <a:spLocks xmlns:a="http://schemas.openxmlformats.org/drawingml/2006/main" noGrp="1"/>
-          </p:cNvSpPr>
-          <p:nvPr/>
-        </p:nvSpPr>
-        <p:spPr>
-          <a:xfrm xmlns:a="http://schemas.openxmlformats.org/drawingml/2006/main">
-            <a:off x="657225" y="2657475"/>
-            <a:ext cx="4419600" cy="1600200"/>
+              <a:buNone/>
+              <a:defRPr sz="1875" b="0">
+                <a:solidFill>
+                  <a:srgbClr val="123363"/>
+                </a:solidFill>
+                <a:latin typeface="Helvetica Neue"/>
+                <a:ea typeface="Helvetica Neue"/>
+                <a:cs typeface="Helvetica Neue"/>
+              </a:defRPr>
+            </a:pPr>
+            <a:r>
+              <a:rPr sz="1875" b="0">
+                <a:solidFill>
+                  <a:srgbClr val="123363"/>
+                </a:solidFill>
+                <a:latin typeface="Helvetica Neue"/>
+                <a:ea typeface="Helvetica Neue"/>
+                <a:cs typeface="Helvetica Neue"/>
+              </a:rPr>
+              <a:t>See what is running and what is ready.</a:t>
+            </a:r>
+          </a:p>
+        </p:txBody>
+      </p:sp>
+      <p:sp>
+        <p:nvSpPr>
+          <p:cNvPr id="5" name="">
+            <a:extLst xmlns:a="http://schemas.openxmlformats.org/drawingml/2006/main">
+              <a:ext uri="{FF2B5EF4-FFF2-40B4-BE49-F238E27FC236}">
+                <a16:creationId xmlns:a16="http://schemas.microsoft.com/office/drawing/2014/main" id="{D495551F-3E43-4BDB-8B00-99CE6415D692}"/>
+              </a:ext>
+            </a:extLst>
+          </p:cNvPr>
+          <p:cNvSpPr>
+            <a:spLocks xmlns:a="http://schemas.openxmlformats.org/drawingml/2006/main" noGrp="1"/>
+          </p:cNvSpPr>
+          <p:nvPr/>
+        </p:nvSpPr>
+        <p:spPr>
+          <a:xfrm xmlns:a="http://schemas.openxmlformats.org/drawingml/2006/main">
+            <a:off x="8953500" y="3438525"/>
+            <a:ext cx="2619375" cy="447675"/>
           </a:xfrm>
           <a:prstGeom xmlns:a="http://schemas.openxmlformats.org/drawingml/2006/main" prst="rect">
             <a:avLst/>
@@ -5226,47 +7474,48 @@
           <a:lstStyle xmlns:a="http://schemas.openxmlformats.org/drawingml/2006/main"/>
           <a:p xmlns:a="http://schemas.openxmlformats.org/drawingml/2006/main">
             <a:pPr>
-              <a:defRPr sz="2100" b="0">
-                <a:solidFill>
-                  <a:srgbClr val="123363"/>
-                </a:solidFill>
-                <a:latin typeface="Helvetica Neue"/>
-                <a:ea typeface="Helvetica Neue"/>
-                <a:cs typeface="Helvetica Neue"/>
-              </a:defRPr>
-            </a:pPr>
-            <a:r>
-              <a:rPr sz="2100" b="0">
-                <a:solidFill>
-                  <a:srgbClr val="123363"/>
-                </a:solidFill>
-                <a:latin typeface="Helvetica Neue"/>
-                <a:ea typeface="Helvetica Neue"/>
-                <a:cs typeface="Helvetica Neue"/>
-              </a:rPr>
-              <a:t>Guillermo Rauch created Next.js and Vercel with a focus on developer experience (DX) to make the Web faster.</a:t>
-            </a:r>
-          </a:p>
-        </p:txBody>
-      </p:sp>
-      <p:sp>
-        <p:nvSpPr>
-          <p:cNvPr id="5" name="">
-            <a:extLst xmlns:a="http://schemas.openxmlformats.org/drawingml/2006/main">
-              <a:ext uri="{FF2B5EF4-FFF2-40B4-BE49-F238E27FC236}">
-                <a16:creationId xmlns:a16="http://schemas.microsoft.com/office/drawing/2014/main" id="{EE73F43A-AF2D-47A3-B91D-5D536385EC71}"/>
-              </a:ext>
-            </a:extLst>
-          </p:cNvPr>
-          <p:cNvSpPr>
-            <a:spLocks xmlns:a="http://schemas.openxmlformats.org/drawingml/2006/main" noGrp="1"/>
-          </p:cNvSpPr>
-          <p:nvPr/>
-        </p:nvSpPr>
-        <p:spPr>
-          <a:xfrm xmlns:a="http://schemas.openxmlformats.org/drawingml/2006/main">
-            <a:off x="5905500" y="2085975"/>
-            <a:ext cx="5638800" cy="457200"/>
+              <a:buNone/>
+              <a:defRPr sz="2025" b="1">
+                <a:solidFill>
+                  <a:srgbClr val="126FCE"/>
+                </a:solidFill>
+                <a:latin typeface="Helvetica Neue"/>
+                <a:ea typeface="Helvetica Neue"/>
+                <a:cs typeface="Helvetica Neue"/>
+              </a:defRPr>
+            </a:pPr>
+            <a:r>
+              <a:rPr sz="2025" b="1">
+                <a:solidFill>
+                  <a:srgbClr val="126FCE"/>
+                </a:solidFill>
+                <a:latin typeface="Helvetica Neue"/>
+                <a:ea typeface="Helvetica Neue"/>
+                <a:cs typeface="Helvetica Neue"/>
+              </a:rPr>
+              <a:t>Saved briefs</a:t>
+            </a:r>
+          </a:p>
+        </p:txBody>
+      </p:sp>
+      <p:sp>
+        <p:nvSpPr>
+          <p:cNvPr id="6" name="">
+            <a:extLst xmlns:a="http://schemas.openxmlformats.org/drawingml/2006/main">
+              <a:ext uri="{FF2B5EF4-FFF2-40B4-BE49-F238E27FC236}">
+                <a16:creationId xmlns:a16="http://schemas.microsoft.com/office/drawing/2014/main" id="{3A88ED9A-9505-482C-9495-930128A2EFF1}"/>
+              </a:ext>
+            </a:extLst>
+          </p:cNvPr>
+          <p:cNvSpPr>
+            <a:spLocks xmlns:a="http://schemas.openxmlformats.org/drawingml/2006/main" noGrp="1"/>
+          </p:cNvSpPr>
+          <p:nvPr/>
+        </p:nvSpPr>
+        <p:spPr>
+          <a:xfrm xmlns:a="http://schemas.openxmlformats.org/drawingml/2006/main">
+            <a:off x="8953500" y="3962400"/>
+            <a:ext cx="2619375" cy="971550"/>
           </a:xfrm>
           <a:prstGeom xmlns:a="http://schemas.openxmlformats.org/drawingml/2006/main" prst="rect">
             <a:avLst/>
@@ -5283,47 +7532,48 @@
           <a:lstStyle xmlns:a="http://schemas.openxmlformats.org/drawingml/2006/main"/>
           <a:p xmlns:a="http://schemas.openxmlformats.org/drawingml/2006/main">
             <a:pPr>
-              <a:defRPr sz="2025" b="1">
-                <a:solidFill>
-                  <a:srgbClr val="126FCE"/>
-                </a:solidFill>
-                <a:latin typeface="Helvetica Neue"/>
-                <a:ea typeface="Helvetica Neue"/>
-                <a:cs typeface="Helvetica Neue"/>
-              </a:defRPr>
-            </a:pPr>
-            <a:r>
-              <a:rPr sz="2025" b="1">
-                <a:solidFill>
-                  <a:srgbClr val="126FCE"/>
-                </a:solidFill>
-                <a:latin typeface="Helvetica Neue"/>
-                <a:ea typeface="Helvetica Neue"/>
-                <a:cs typeface="Helvetica Neue"/>
-              </a:rPr>
-              <a:t>Why it could matter</a:t>
-            </a:r>
-          </a:p>
-        </p:txBody>
-      </p:sp>
-      <p:sp>
-        <p:nvSpPr>
-          <p:cNvPr id="6" name="">
-            <a:extLst xmlns:a="http://schemas.openxmlformats.org/drawingml/2006/main">
-              <a:ext uri="{FF2B5EF4-FFF2-40B4-BE49-F238E27FC236}">
-                <a16:creationId xmlns:a16="http://schemas.microsoft.com/office/drawing/2014/main" id="{3DD3735F-EB53-4637-BD14-CD8D91341E74}"/>
-              </a:ext>
-            </a:extLst>
-          </p:cNvPr>
-          <p:cNvSpPr>
-            <a:spLocks xmlns:a="http://schemas.openxmlformats.org/drawingml/2006/main" noGrp="1"/>
-          </p:cNvSpPr>
-          <p:nvPr/>
-        </p:nvSpPr>
-        <p:spPr>
-          <a:xfrm xmlns:a="http://schemas.openxmlformats.org/drawingml/2006/main">
-            <a:off x="5905500" y="2657475"/>
-            <a:ext cx="5562600" cy="2124075"/>
+              <a:buNone/>
+              <a:defRPr sz="1875" b="0">
+                <a:solidFill>
+                  <a:srgbClr val="123363"/>
+                </a:solidFill>
+                <a:latin typeface="Helvetica Neue"/>
+                <a:ea typeface="Helvetica Neue"/>
+                <a:cs typeface="Helvetica Neue"/>
+              </a:defRPr>
+            </a:pPr>
+            <a:r>
+              <a:rPr sz="1875" b="0">
+                <a:solidFill>
+                  <a:srgbClr val="123363"/>
+                </a:solidFill>
+                <a:latin typeface="Helvetica Neue"/>
+                <a:ea typeface="Helvetica Neue"/>
+                <a:cs typeface="Helvetica Neue"/>
+              </a:rPr>
+              <a:t>Open the latest research and continue preparing.</a:t>
+            </a:r>
+          </a:p>
+        </p:txBody>
+      </p:sp>
+      <p:sp>
+        <p:nvSpPr>
+          <p:cNvPr id="7" name="">
+            <a:extLst xmlns:a="http://schemas.openxmlformats.org/drawingml/2006/main">
+              <a:ext uri="{FF2B5EF4-FFF2-40B4-BE49-F238E27FC236}">
+                <a16:creationId xmlns:a16="http://schemas.microsoft.com/office/drawing/2014/main" id="{5245E354-F539-4A0C-A96E-733686BC0350}"/>
+              </a:ext>
+            </a:extLst>
+          </p:cNvPr>
+          <p:cNvSpPr>
+            <a:spLocks xmlns:a="http://schemas.openxmlformats.org/drawingml/2006/main" noGrp="1"/>
+          </p:cNvSpPr>
+          <p:nvPr/>
+        </p:nvSpPr>
+        <p:spPr>
+          <a:xfrm xmlns:a="http://schemas.openxmlformats.org/drawingml/2006/main">
+            <a:off x="8953500" y="5229225"/>
+            <a:ext cx="2619375" cy="447675"/>
           </a:xfrm>
           <a:prstGeom xmlns:a="http://schemas.openxmlformats.org/drawingml/2006/main" prst="rect">
             <a:avLst/>
@@ -5340,47 +7590,48 @@
           <a:lstStyle xmlns:a="http://schemas.openxmlformats.org/drawingml/2006/main"/>
           <a:p xmlns:a="http://schemas.openxmlformats.org/drawingml/2006/main">
             <a:pPr>
-              <a:defRPr sz="1875" b="0">
-                <a:solidFill>
-                  <a:srgbClr val="123363"/>
-                </a:solidFill>
-                <a:latin typeface="Helvetica Neue"/>
-                <a:ea typeface="Helvetica Neue"/>
-                <a:cs typeface="Helvetica Neue"/>
-              </a:defRPr>
-            </a:pPr>
-            <a:r>
-              <a:rPr sz="1875" b="0">
-                <a:solidFill>
-                  <a:srgbClr val="123363"/>
-                </a:solidFill>
-                <a:latin typeface="Helvetica Neue"/>
-                <a:ea typeface="Helvetica Neue"/>
-                <a:cs typeface="Helvetica Neue"/>
-              </a:rPr>
-              <a:t>If the stated focus on developer experience to make the Web faster means Vercel actively tracks where new users struggle, then onboarding funnel analytics combining usage metrics and session feedback might help prioritize documentation and product fixes more effectively.</a:t>
-            </a:r>
-          </a:p>
-        </p:txBody>
-      </p:sp>
-      <p:sp>
-        <p:nvSpPr>
-          <p:cNvPr id="7" name="">
-            <a:extLst xmlns:a="http://schemas.openxmlformats.org/drawingml/2006/main">
-              <a:ext uri="{FF2B5EF4-FFF2-40B4-BE49-F238E27FC236}">
-                <a16:creationId xmlns:a16="http://schemas.microsoft.com/office/drawing/2014/main" id="{FA706C2D-6BA5-400B-9430-C98A0B31C10F}"/>
-              </a:ext>
-            </a:extLst>
-          </p:cNvPr>
-          <p:cNvSpPr>
-            <a:spLocks xmlns:a="http://schemas.openxmlformats.org/drawingml/2006/main" noGrp="1"/>
-          </p:cNvSpPr>
-          <p:nvPr/>
-        </p:nvSpPr>
-        <p:spPr>
-          <a:xfrm xmlns:a="http://schemas.openxmlformats.org/drawingml/2006/main">
-            <a:off x="5905500" y="4848225"/>
-            <a:ext cx="5562600" cy="381000"/>
+              <a:buNone/>
+              <a:defRPr sz="2025" b="1">
+                <a:solidFill>
+                  <a:srgbClr val="126FCE"/>
+                </a:solidFill>
+                <a:latin typeface="Helvetica Neue"/>
+                <a:ea typeface="Helvetica Neue"/>
+                <a:cs typeface="Helvetica Neue"/>
+              </a:defRPr>
+            </a:pPr>
+            <a:r>
+              <a:rPr sz="2025" b="1">
+                <a:solidFill>
+                  <a:srgbClr val="126FCE"/>
+                </a:solidFill>
+                <a:latin typeface="Helvetica Neue"/>
+                <a:ea typeface="Helvetica Neue"/>
+                <a:cs typeface="Helvetica Neue"/>
+              </a:rPr>
+              <a:t>Team workspace</a:t>
+            </a:r>
+          </a:p>
+        </p:txBody>
+      </p:sp>
+      <p:sp>
+        <p:nvSpPr>
+          <p:cNvPr id="8" name="">
+            <a:extLst xmlns:a="http://schemas.openxmlformats.org/drawingml/2006/main">
+              <a:ext uri="{FF2B5EF4-FFF2-40B4-BE49-F238E27FC236}">
+                <a16:creationId xmlns:a16="http://schemas.microsoft.com/office/drawing/2014/main" id="{29849976-896E-48F3-8FF4-10B5E1151B39}"/>
+              </a:ext>
+            </a:extLst>
+          </p:cNvPr>
+          <p:cNvSpPr>
+            <a:spLocks xmlns:a="http://schemas.openxmlformats.org/drawingml/2006/main" noGrp="1"/>
+          </p:cNvSpPr>
+          <p:nvPr/>
+        </p:nvSpPr>
+        <p:spPr>
+          <a:xfrm xmlns:a="http://schemas.openxmlformats.org/drawingml/2006/main">
+            <a:off x="8953500" y="5762625"/>
+            <a:ext cx="2619375" cy="762000"/>
           </a:xfrm>
           <a:prstGeom xmlns:a="http://schemas.openxmlformats.org/drawingml/2006/main" prst="rect">
             <a:avLst/>
@@ -5397,169 +7648,26 @@
           <a:lstStyle xmlns:a="http://schemas.openxmlformats.org/drawingml/2006/main"/>
           <a:p xmlns:a="http://schemas.openxmlformats.org/drawingml/2006/main">
             <a:pPr>
-              <a:defRPr sz="1575" b="0">
-                <a:solidFill>
-                  <a:srgbClr val="58718B"/>
-                </a:solidFill>
-                <a:latin typeface="Helvetica Neue"/>
-                <a:ea typeface="Helvetica Neue"/>
-                <a:cs typeface="Helvetica Neue"/>
-              </a:defRPr>
-            </a:pPr>
-            <a:r>
-              <a:rPr sz="1575" b="0">
-                <a:solidFill>
-                  <a:srgbClr val="58718B"/>
-                </a:solidFill>
-                <a:latin typeface="Helvetica Neue"/>
-                <a:ea typeface="Helvetica Neue"/>
-                <a:cs typeface="Helvetica Neue"/>
-              </a:rPr>
-              <a:t>Hypothesis to validate</a:t>
-            </a:r>
-          </a:p>
-        </p:txBody>
-      </p:sp>
-      <p:sp>
-        <p:nvSpPr>
-          <p:cNvPr id="8" name="">
-            <a:extLst xmlns:a="http://schemas.openxmlformats.org/drawingml/2006/main">
-              <a:ext uri="{FF2B5EF4-FFF2-40B4-BE49-F238E27FC236}">
-                <a16:creationId xmlns:a16="http://schemas.microsoft.com/office/drawing/2014/main" id="{7A77A900-6897-477F-8089-1D0F18D56ACD}"/>
-              </a:ext>
-            </a:extLst>
-          </p:cNvPr>
-          <p:cNvSpPr>
-            <a:spLocks xmlns:a="http://schemas.openxmlformats.org/drawingml/2006/main" noGrp="1"/>
-          </p:cNvSpPr>
-          <p:nvPr/>
-        </p:nvSpPr>
-        <p:spPr>
-          <a:xfrm xmlns:a="http://schemas.openxmlformats.org/drawingml/2006/main">
-            <a:off x="609600" y="5276850"/>
-            <a:ext cx="10972800" cy="1352550"/>
-          </a:xfrm>
-          <a:prstGeom xmlns:a="http://schemas.openxmlformats.org/drawingml/2006/main" prst="rect">
-            <a:avLst/>
-          </a:prstGeom>
-          <a:solidFill xmlns:a="http://schemas.openxmlformats.org/drawingml/2006/main">
-            <a:srgbClr val="0B214A"/>
-          </a:solidFill>
-          <a:ln xmlns:a="http://schemas.openxmlformats.org/drawingml/2006/main" w="0">
-            <a:noFill/>
-          </a:ln>
-        </p:spPr>
-      </p:sp>
-      <p:sp>
-        <p:nvSpPr>
-          <p:cNvPr id="9" name="">
-            <a:extLst xmlns:a="http://schemas.openxmlformats.org/drawingml/2006/main">
-              <a:ext uri="{FF2B5EF4-FFF2-40B4-BE49-F238E27FC236}">
-                <a16:creationId xmlns:a16="http://schemas.microsoft.com/office/drawing/2014/main" id="{6CC8A373-F186-4ACB-BAD6-EF992BE66607}"/>
-              </a:ext>
-            </a:extLst>
-          </p:cNvPr>
-          <p:cNvSpPr>
-            <a:spLocks xmlns:a="http://schemas.openxmlformats.org/drawingml/2006/main" noGrp="1"/>
-          </p:cNvSpPr>
-          <p:nvPr/>
-        </p:nvSpPr>
-        <p:spPr>
-          <a:xfrm xmlns:a="http://schemas.openxmlformats.org/drawingml/2006/main">
-            <a:off x="790575" y="5410200"/>
-            <a:ext cx="10534650" cy="333375"/>
-          </a:xfrm>
-          <a:prstGeom xmlns:a="http://schemas.openxmlformats.org/drawingml/2006/main" prst="rect">
-            <a:avLst/>
-          </a:prstGeom>
-          <a:noFill xmlns:a="http://schemas.openxmlformats.org/drawingml/2006/main"/>
-          <a:ln xmlns:a="http://schemas.openxmlformats.org/drawingml/2006/main" w="0">
-            <a:noFill/>
-          </a:ln>
-        </p:spPr>
-        <p:txBody>
-          <a:bodyPr xmlns:a="http://schemas.openxmlformats.org/drawingml/2006/main">
-            <a:noAutofit/>
-          </a:bodyPr>
-          <a:lstStyle xmlns:a="http://schemas.openxmlformats.org/drawingml/2006/main"/>
-          <a:p xmlns:a="http://schemas.openxmlformats.org/drawingml/2006/main">
-            <a:pPr>
-              <a:defRPr sz="1575" b="1">
-                <a:solidFill>
-                  <a:srgbClr val="63D7F2"/>
-                </a:solidFill>
-                <a:latin typeface="Helvetica Neue"/>
-                <a:ea typeface="Helvetica Neue"/>
-                <a:cs typeface="Helvetica Neue"/>
-              </a:defRPr>
-            </a:pPr>
-            <a:r>
-              <a:rPr sz="1575" b="1">
-                <a:solidFill>
-                  <a:srgbClr val="63D7F2"/>
-                </a:solidFill>
-                <a:latin typeface="Helvetica Neue"/>
-                <a:ea typeface="Helvetica Neue"/>
-                <a:cs typeface="Helvetica Neue"/>
-              </a:rPr>
-              <a:t>Ask in the conversation</a:t>
-            </a:r>
-          </a:p>
-        </p:txBody>
-      </p:sp>
-      <p:sp>
-        <p:nvSpPr>
-          <p:cNvPr id="10" name="">
-            <a:extLst xmlns:a="http://schemas.openxmlformats.org/drawingml/2006/main">
-              <a:ext uri="{FF2B5EF4-FFF2-40B4-BE49-F238E27FC236}">
-                <a16:creationId xmlns:a16="http://schemas.microsoft.com/office/drawing/2014/main" id="{C2DDC1BD-8060-4444-AC0E-785CCE3B69AB}"/>
-              </a:ext>
-            </a:extLst>
-          </p:cNvPr>
-          <p:cNvSpPr>
-            <a:spLocks xmlns:a="http://schemas.openxmlformats.org/drawingml/2006/main" noGrp="1"/>
-          </p:cNvSpPr>
-          <p:nvPr/>
-        </p:nvSpPr>
-        <p:spPr>
-          <a:xfrm xmlns:a="http://schemas.openxmlformats.org/drawingml/2006/main">
-            <a:off x="790575" y="5810250"/>
-            <a:ext cx="10467975" cy="695325"/>
-          </a:xfrm>
-          <a:prstGeom xmlns:a="http://schemas.openxmlformats.org/drawingml/2006/main" prst="rect">
-            <a:avLst/>
-          </a:prstGeom>
-          <a:noFill xmlns:a="http://schemas.openxmlformats.org/drawingml/2006/main"/>
-          <a:ln xmlns:a="http://schemas.openxmlformats.org/drawingml/2006/main" w="0">
-            <a:noFill/>
-          </a:ln>
-        </p:spPr>
-        <p:txBody>
-          <a:bodyPr xmlns:a="http://schemas.openxmlformats.org/drawingml/2006/main">
-            <a:noAutofit/>
-          </a:bodyPr>
-          <a:lstStyle xmlns:a="http://schemas.openxmlformats.org/drawingml/2006/main"/>
-          <a:p xmlns:a="http://schemas.openxmlformats.org/drawingml/2006/main">
-            <a:pPr>
-              <a:defRPr sz="2025" b="0">
-                <a:solidFill>
-                  <a:srgbClr val="FFFFFF"/>
-                </a:solidFill>
-                <a:latin typeface="Helvetica Neue"/>
-                <a:ea typeface="Helvetica Neue"/>
-                <a:cs typeface="Helvetica Neue"/>
-              </a:defRPr>
-            </a:pPr>
-            <a:r>
-              <a:rPr sz="2025" b="0">
-                <a:solidFill>
-                  <a:srgbClr val="FFFFFF"/>
-                </a:solidFill>
-                <a:latin typeface="Helvetica Neue"/>
-                <a:ea typeface="Helvetica Neue"/>
-                <a:cs typeface="Helvetica Neue"/>
-              </a:rPr>
-              <a:t>How do you currently identify which parts of the initial developer setup cause the most friction?</a:t>
+              <a:buNone/>
+              <a:defRPr sz="1875" b="0">
+                <a:solidFill>
+                  <a:srgbClr val="123363"/>
+                </a:solidFill>
+                <a:latin typeface="Helvetica Neue"/>
+                <a:ea typeface="Helvetica Neue"/>
+                <a:cs typeface="Helvetica Neue"/>
+              </a:defRPr>
+            </a:pPr>
+            <a:r>
+              <a:rPr sz="1875" b="0">
+                <a:solidFill>
+                  <a:srgbClr val="123363"/>
+                </a:solidFill>
+                <a:latin typeface="Helvetica Neue"/>
+                <a:ea typeface="Helvetica Neue"/>
+                <a:cs typeface="Helvetica Neue"/>
+              </a:rPr>
+              <a:t>Keep prospect research together.</a:t>
             </a:r>
           </a:p>
         </p:txBody>
@@ -5567,7 +7675,7 @@
     </p:spTree>
     <p:extLst>
       <p:ext uri="{BB962C8B-B14F-4D97-AF65-F5344CB8AC3E}">
-        <p14:creationId xmlns:p14="http://schemas.microsoft.com/office/powerpoint/2010/main" val="61989414"/>
+        <p14:creationId xmlns:p14="http://schemas.microsoft.com/office/powerpoint/2010/main" val="381628285"/>
       </p:ext>
     </p:extLst>
   </p:cSld>
@@ -5595,22 +7703,22 @@
       </p:grpSpPr>
       <p:sp>
         <p:nvSpPr>
-          <p:cNvPr id="8" name="">
-            <a:extLst xmlns:a="http://schemas.openxmlformats.org/drawingml/2006/main">
-              <a:ext uri="{FF2B5EF4-FFF2-40B4-BE49-F238E27FC236}">
-                <a16:creationId xmlns:a16="http://schemas.microsoft.com/office/drawing/2014/main" id="{84C1C47D-CEA3-474E-A0A2-80768375263E}"/>
-              </a:ext>
-            </a:extLst>
-          </p:cNvPr>
-          <p:cNvSpPr>
-            <a:spLocks xmlns:a="http://schemas.openxmlformats.org/drawingml/2006/main" noGrp="1"/>
-          </p:cNvSpPr>
-          <p:nvPr/>
-        </p:nvSpPr>
-        <p:spPr>
-          <a:xfrm xmlns:a="http://schemas.openxmlformats.org/drawingml/2006/main">
-            <a:off x="523875" y="419100"/>
-            <a:ext cx="11144250" cy="714375"/>
+          <p:cNvPr id="11" name="">
+            <a:extLst xmlns:a="http://schemas.openxmlformats.org/drawingml/2006/main">
+              <a:ext uri="{FF2B5EF4-FFF2-40B4-BE49-F238E27FC236}">
+                <a16:creationId xmlns:a16="http://schemas.microsoft.com/office/drawing/2014/main" id="{A7863CEE-2475-45B2-ABB5-4B8FD2B27792}"/>
+              </a:ext>
+            </a:extLst>
+          </p:cNvPr>
+          <p:cNvSpPr>
+            <a:spLocks xmlns:a="http://schemas.openxmlformats.org/drawingml/2006/main" noGrp="1"/>
+          </p:cNvSpPr>
+          <p:nvPr/>
+        </p:nvSpPr>
+        <p:spPr>
+          <a:xfrm xmlns:a="http://schemas.openxmlformats.org/drawingml/2006/main">
+            <a:off x="609600" y="457200"/>
+            <a:ext cx="10972800" cy="762000"/>
           </a:xfrm>
           <a:prstGeom xmlns:a="http://schemas.openxmlformats.org/drawingml/2006/main" prst="rect">
             <a:avLst/>
@@ -5627,6 +7735,588 @@
           <a:lstStyle xmlns:a="http://schemas.openxmlformats.org/drawingml/2006/main"/>
           <a:p xmlns:a="http://schemas.openxmlformats.org/drawingml/2006/main">
             <a:pPr>
+              <a:buNone/>
+              <a:defRPr sz="3525" b="1">
+                <a:solidFill>
+                  <a:srgbClr val="0B214A"/>
+                </a:solidFill>
+                <a:latin typeface="Helvetica Neue"/>
+                <a:ea typeface="Helvetica Neue"/>
+                <a:cs typeface="Helvetica Neue"/>
+              </a:defRPr>
+            </a:pPr>
+            <a:r>
+              <a:rPr sz="3525" b="1">
+                <a:solidFill>
+                  <a:srgbClr val="0B214A"/>
+                </a:solidFill>
+                <a:latin typeface="Helvetica Neue"/>
+                <a:ea typeface="Helvetica Neue"/>
+                <a:cs typeface="Helvetica Neue"/>
+              </a:rPr>
+              <a:t>Conversation angles you can test</a:t>
+            </a:r>
+          </a:p>
+        </p:txBody>
+      </p:sp>
+      <p:sp>
+        <p:nvSpPr>
+          <p:cNvPr id="2" name="">
+            <a:extLst xmlns:a="http://schemas.openxmlformats.org/drawingml/2006/main">
+              <a:ext uri="{FF2B5EF4-FFF2-40B4-BE49-F238E27FC236}">
+                <a16:creationId xmlns:a16="http://schemas.microsoft.com/office/drawing/2014/main" id="{949CC28D-91EF-4A02-9703-A4D4217664DD}"/>
+              </a:ext>
+            </a:extLst>
+          </p:cNvPr>
+          <p:cNvSpPr>
+            <a:spLocks xmlns:a="http://schemas.openxmlformats.org/drawingml/2006/main" noGrp="1"/>
+          </p:cNvSpPr>
+          <p:nvPr/>
+        </p:nvSpPr>
+        <p:spPr>
+          <a:xfrm xmlns:a="http://schemas.openxmlformats.org/drawingml/2006/main">
+            <a:off x="657225" y="1266825"/>
+            <a:ext cx="10896600" cy="457200"/>
+          </a:xfrm>
+          <a:prstGeom xmlns:a="http://schemas.openxmlformats.org/drawingml/2006/main" prst="rect">
+            <a:avLst/>
+          </a:prstGeom>
+          <a:noFill xmlns:a="http://schemas.openxmlformats.org/drawingml/2006/main"/>
+          <a:ln xmlns:a="http://schemas.openxmlformats.org/drawingml/2006/main" w="0">
+            <a:noFill/>
+          </a:ln>
+        </p:spPr>
+        <p:txBody>
+          <a:bodyPr xmlns:a="http://schemas.openxmlformats.org/drawingml/2006/main">
+            <a:noAutofit/>
+          </a:bodyPr>
+          <a:lstStyle xmlns:a="http://schemas.openxmlformats.org/drawingml/2006/main"/>
+          <a:p xmlns:a="http://schemas.openxmlformats.org/drawingml/2006/main">
+            <a:pPr>
+              <a:buNone/>
+              <a:defRPr sz="1875" b="0">
+                <a:solidFill>
+                  <a:srgbClr val="58718B"/>
+                </a:solidFill>
+                <a:latin typeface="Helvetica Neue"/>
+                <a:ea typeface="Helvetica Neue"/>
+                <a:cs typeface="Helvetica Neue"/>
+              </a:defRPr>
+            </a:pPr>
+            <a:r>
+              <a:rPr sz="1875" b="0">
+                <a:solidFill>
+                  <a:srgbClr val="58718B"/>
+                </a:solidFill>
+                <a:latin typeface="Helvetica Neue"/>
+                <a:ea typeface="Helvetica Neue"/>
+                <a:cs typeface="Helvetica Neue"/>
+              </a:rPr>
+              <a:t>Demonstration example: leadership context</a:t>
+            </a:r>
+          </a:p>
+        </p:txBody>
+      </p:sp>
+      <p:sp>
+        <p:nvSpPr>
+          <p:cNvPr id="3" name="">
+            <a:extLst xmlns:a="http://schemas.openxmlformats.org/drawingml/2006/main">
+              <a:ext uri="{FF2B5EF4-FFF2-40B4-BE49-F238E27FC236}">
+                <a16:creationId xmlns:a16="http://schemas.microsoft.com/office/drawing/2014/main" id="{792B2997-B961-46E9-83A3-877776FE407A}"/>
+              </a:ext>
+            </a:extLst>
+          </p:cNvPr>
+          <p:cNvSpPr>
+            <a:spLocks xmlns:a="http://schemas.openxmlformats.org/drawingml/2006/main" noGrp="1"/>
+          </p:cNvSpPr>
+          <p:nvPr/>
+        </p:nvSpPr>
+        <p:spPr>
+          <a:xfrm xmlns:a="http://schemas.openxmlformats.org/drawingml/2006/main">
+            <a:off x="657225" y="2085975"/>
+            <a:ext cx="4524375" cy="457200"/>
+          </a:xfrm>
+          <a:prstGeom xmlns:a="http://schemas.openxmlformats.org/drawingml/2006/main" prst="rect">
+            <a:avLst/>
+          </a:prstGeom>
+          <a:noFill xmlns:a="http://schemas.openxmlformats.org/drawingml/2006/main"/>
+          <a:ln xmlns:a="http://schemas.openxmlformats.org/drawingml/2006/main" w="0">
+            <a:noFill/>
+          </a:ln>
+        </p:spPr>
+        <p:txBody>
+          <a:bodyPr xmlns:a="http://schemas.openxmlformats.org/drawingml/2006/main">
+            <a:noAutofit/>
+          </a:bodyPr>
+          <a:lstStyle xmlns:a="http://schemas.openxmlformats.org/drawingml/2006/main"/>
+          <a:p xmlns:a="http://schemas.openxmlformats.org/drawingml/2006/main">
+            <a:pPr>
+              <a:buNone/>
+              <a:defRPr sz="2025" b="1">
+                <a:solidFill>
+                  <a:srgbClr val="126FCE"/>
+                </a:solidFill>
+                <a:latin typeface="Helvetica Neue"/>
+                <a:ea typeface="Helvetica Neue"/>
+                <a:cs typeface="Helvetica Neue"/>
+              </a:defRPr>
+            </a:pPr>
+            <a:r>
+              <a:rPr sz="2025" b="1">
+                <a:solidFill>
+                  <a:srgbClr val="126FCE"/>
+                </a:solidFill>
+                <a:latin typeface="Helvetica Neue"/>
+                <a:ea typeface="Helvetica Neue"/>
+                <a:cs typeface="Helvetica Neue"/>
+              </a:rPr>
+              <a:t>Source claim</a:t>
+            </a:r>
+          </a:p>
+        </p:txBody>
+      </p:sp>
+      <p:sp>
+        <p:nvSpPr>
+          <p:cNvPr id="4" name="">
+            <a:extLst xmlns:a="http://schemas.openxmlformats.org/drawingml/2006/main">
+              <a:ext uri="{FF2B5EF4-FFF2-40B4-BE49-F238E27FC236}">
+                <a16:creationId xmlns:a16="http://schemas.microsoft.com/office/drawing/2014/main" id="{B9E67B4F-A628-4DCC-A2CD-E92B9747D68A}"/>
+              </a:ext>
+            </a:extLst>
+          </p:cNvPr>
+          <p:cNvSpPr>
+            <a:spLocks xmlns:a="http://schemas.openxmlformats.org/drawingml/2006/main" noGrp="1"/>
+          </p:cNvSpPr>
+          <p:nvPr/>
+        </p:nvSpPr>
+        <p:spPr>
+          <a:xfrm xmlns:a="http://schemas.openxmlformats.org/drawingml/2006/main">
+            <a:off x="657225" y="2657475"/>
+            <a:ext cx="4419600" cy="1600200"/>
+          </a:xfrm>
+          <a:prstGeom xmlns:a="http://schemas.openxmlformats.org/drawingml/2006/main" prst="rect">
+            <a:avLst/>
+          </a:prstGeom>
+          <a:noFill xmlns:a="http://schemas.openxmlformats.org/drawingml/2006/main"/>
+          <a:ln xmlns:a="http://schemas.openxmlformats.org/drawingml/2006/main" w="0">
+            <a:noFill/>
+          </a:ln>
+        </p:spPr>
+        <p:txBody>
+          <a:bodyPr xmlns:a="http://schemas.openxmlformats.org/drawingml/2006/main">
+            <a:noAutofit/>
+          </a:bodyPr>
+          <a:lstStyle xmlns:a="http://schemas.openxmlformats.org/drawingml/2006/main"/>
+          <a:p xmlns:a="http://schemas.openxmlformats.org/drawingml/2006/main">
+            <a:pPr>
+              <a:buNone/>
+              <a:defRPr sz="2100" b="0">
+                <a:solidFill>
+                  <a:srgbClr val="123363"/>
+                </a:solidFill>
+                <a:latin typeface="Helvetica Neue"/>
+                <a:ea typeface="Helvetica Neue"/>
+                <a:cs typeface="Helvetica Neue"/>
+              </a:defRPr>
+            </a:pPr>
+            <a:r>
+              <a:rPr sz="2100" b="0">
+                <a:solidFill>
+                  <a:srgbClr val="123363"/>
+                </a:solidFill>
+                <a:latin typeface="Helvetica Neue"/>
+                <a:ea typeface="Helvetica Neue"/>
+                <a:cs typeface="Helvetica Neue"/>
+              </a:rPr>
+              <a:t>Timothy Donald Cook is the chief executive officer of Apple Inc.</a:t>
+            </a:r>
+          </a:p>
+        </p:txBody>
+      </p:sp>
+      <p:sp>
+        <p:nvSpPr>
+          <p:cNvPr id="5" name="">
+            <a:extLst xmlns:a="http://schemas.openxmlformats.org/drawingml/2006/main">
+              <a:ext uri="{FF2B5EF4-FFF2-40B4-BE49-F238E27FC236}">
+                <a16:creationId xmlns:a16="http://schemas.microsoft.com/office/drawing/2014/main" id="{EE73F43A-AF2D-47A3-B91D-5D536385EC71}"/>
+              </a:ext>
+            </a:extLst>
+          </p:cNvPr>
+          <p:cNvSpPr>
+            <a:spLocks xmlns:a="http://schemas.openxmlformats.org/drawingml/2006/main" noGrp="1"/>
+          </p:cNvSpPr>
+          <p:nvPr/>
+        </p:nvSpPr>
+        <p:spPr>
+          <a:xfrm xmlns:a="http://schemas.openxmlformats.org/drawingml/2006/main">
+            <a:off x="5905500" y="2085975"/>
+            <a:ext cx="5638800" cy="457200"/>
+          </a:xfrm>
+          <a:prstGeom xmlns:a="http://schemas.openxmlformats.org/drawingml/2006/main" prst="rect">
+            <a:avLst/>
+          </a:prstGeom>
+          <a:noFill xmlns:a="http://schemas.openxmlformats.org/drawingml/2006/main"/>
+          <a:ln xmlns:a="http://schemas.openxmlformats.org/drawingml/2006/main" w="0">
+            <a:noFill/>
+          </a:ln>
+        </p:spPr>
+        <p:txBody>
+          <a:bodyPr xmlns:a="http://schemas.openxmlformats.org/drawingml/2006/main">
+            <a:noAutofit/>
+          </a:bodyPr>
+          <a:lstStyle xmlns:a="http://schemas.openxmlformats.org/drawingml/2006/main"/>
+          <a:p xmlns:a="http://schemas.openxmlformats.org/drawingml/2006/main">
+            <a:pPr>
+              <a:buNone/>
+              <a:defRPr sz="2025" b="1">
+                <a:solidFill>
+                  <a:srgbClr val="126FCE"/>
+                </a:solidFill>
+                <a:latin typeface="Helvetica Neue"/>
+                <a:ea typeface="Helvetica Neue"/>
+                <a:cs typeface="Helvetica Neue"/>
+              </a:defRPr>
+            </a:pPr>
+            <a:r>
+              <a:rPr sz="2025" b="1">
+                <a:solidFill>
+                  <a:srgbClr val="126FCE"/>
+                </a:solidFill>
+                <a:latin typeface="Helvetica Neue"/>
+                <a:ea typeface="Helvetica Neue"/>
+                <a:cs typeface="Helvetica Neue"/>
+              </a:rPr>
+              <a:t>Why it could matter</a:t>
+            </a:r>
+          </a:p>
+        </p:txBody>
+      </p:sp>
+      <p:sp>
+        <p:nvSpPr>
+          <p:cNvPr id="6" name="">
+            <a:extLst xmlns:a="http://schemas.openxmlformats.org/drawingml/2006/main">
+              <a:ext uri="{FF2B5EF4-FFF2-40B4-BE49-F238E27FC236}">
+                <a16:creationId xmlns:a16="http://schemas.microsoft.com/office/drawing/2014/main" id="{3DD3735F-EB53-4637-BD14-CD8D91341E74}"/>
+              </a:ext>
+            </a:extLst>
+          </p:cNvPr>
+          <p:cNvSpPr>
+            <a:spLocks xmlns:a="http://schemas.openxmlformats.org/drawingml/2006/main" noGrp="1"/>
+          </p:cNvSpPr>
+          <p:nvPr/>
+        </p:nvSpPr>
+        <p:spPr>
+          <a:xfrm xmlns:a="http://schemas.openxmlformats.org/drawingml/2006/main">
+            <a:off x="5905500" y="2657475"/>
+            <a:ext cx="5562600" cy="2124075"/>
+          </a:xfrm>
+          <a:prstGeom xmlns:a="http://schemas.openxmlformats.org/drawingml/2006/main" prst="rect">
+            <a:avLst/>
+          </a:prstGeom>
+          <a:noFill xmlns:a="http://schemas.openxmlformats.org/drawingml/2006/main"/>
+          <a:ln xmlns:a="http://schemas.openxmlformats.org/drawingml/2006/main" w="0">
+            <a:noFill/>
+          </a:ln>
+        </p:spPr>
+        <p:txBody>
+          <a:bodyPr xmlns:a="http://schemas.openxmlformats.org/drawingml/2006/main">
+            <a:noAutofit/>
+          </a:bodyPr>
+          <a:lstStyle xmlns:a="http://schemas.openxmlformats.org/drawingml/2006/main"/>
+          <a:p xmlns:a="http://schemas.openxmlformats.org/drawingml/2006/main">
+            <a:pPr>
+              <a:buNone/>
+              <a:defRPr sz="1875" b="0">
+                <a:solidFill>
+                  <a:srgbClr val="123363"/>
+                </a:solidFill>
+                <a:latin typeface="Helvetica Neue"/>
+                <a:ea typeface="Helvetica Neue"/>
+                <a:cs typeface="Helvetica Neue"/>
+              </a:defRPr>
+            </a:pPr>
+            <a:r>
+              <a:rPr sz="1875" b="0">
+                <a:solidFill>
+                  <a:srgbClr val="123363"/>
+                </a:solidFill>
+                <a:latin typeface="Helvetica Neue"/>
+                <a:ea typeface="Helvetica Neue"/>
+                <a:cs typeface="Helvetica Neue"/>
+              </a:rPr>
+              <a:t>Leadership context helps frame a conversation. It does not establish a buying need, budget, or a reason to act now. The seller still needs to test the fit.</a:t>
+            </a:r>
+          </a:p>
+        </p:txBody>
+      </p:sp>
+      <p:sp>
+        <p:nvSpPr>
+          <p:cNvPr id="7" name="">
+            <a:extLst xmlns:a="http://schemas.openxmlformats.org/drawingml/2006/main">
+              <a:ext uri="{FF2B5EF4-FFF2-40B4-BE49-F238E27FC236}">
+                <a16:creationId xmlns:a16="http://schemas.microsoft.com/office/drawing/2014/main" id="{FA706C2D-6BA5-400B-9430-C98A0B31C10F}"/>
+              </a:ext>
+            </a:extLst>
+          </p:cNvPr>
+          <p:cNvSpPr>
+            <a:spLocks xmlns:a="http://schemas.openxmlformats.org/drawingml/2006/main" noGrp="1"/>
+          </p:cNvSpPr>
+          <p:nvPr/>
+        </p:nvSpPr>
+        <p:spPr>
+          <a:xfrm xmlns:a="http://schemas.openxmlformats.org/drawingml/2006/main">
+            <a:off x="5905500" y="4848225"/>
+            <a:ext cx="5562600" cy="381000"/>
+          </a:xfrm>
+          <a:prstGeom xmlns:a="http://schemas.openxmlformats.org/drawingml/2006/main" prst="rect">
+            <a:avLst/>
+          </a:prstGeom>
+          <a:noFill xmlns:a="http://schemas.openxmlformats.org/drawingml/2006/main"/>
+          <a:ln xmlns:a="http://schemas.openxmlformats.org/drawingml/2006/main" w="0">
+            <a:noFill/>
+          </a:ln>
+        </p:spPr>
+        <p:txBody>
+          <a:bodyPr xmlns:a="http://schemas.openxmlformats.org/drawingml/2006/main">
+            <a:noAutofit/>
+          </a:bodyPr>
+          <a:lstStyle xmlns:a="http://schemas.openxmlformats.org/drawingml/2006/main"/>
+          <a:p xmlns:a="http://schemas.openxmlformats.org/drawingml/2006/main">
+            <a:pPr>
+              <a:buNone/>
+              <a:defRPr sz="1575" b="0">
+                <a:solidFill>
+                  <a:srgbClr val="58718B"/>
+                </a:solidFill>
+                <a:latin typeface="Helvetica Neue"/>
+                <a:ea typeface="Helvetica Neue"/>
+                <a:cs typeface="Helvetica Neue"/>
+              </a:defRPr>
+            </a:pPr>
+            <a:r>
+              <a:rPr sz="1575" b="0">
+                <a:solidFill>
+                  <a:srgbClr val="58718B"/>
+                </a:solidFill>
+                <a:latin typeface="Helvetica Neue"/>
+                <a:ea typeface="Helvetica Neue"/>
+                <a:cs typeface="Helvetica Neue"/>
+              </a:rPr>
+              <a:t>Hypothesis to validate</a:t>
+            </a:r>
+          </a:p>
+        </p:txBody>
+      </p:sp>
+      <p:sp>
+        <p:nvSpPr>
+          <p:cNvPr id="8" name="">
+            <a:extLst xmlns:a="http://schemas.openxmlformats.org/drawingml/2006/main">
+              <a:ext uri="{FF2B5EF4-FFF2-40B4-BE49-F238E27FC236}">
+                <a16:creationId xmlns:a16="http://schemas.microsoft.com/office/drawing/2014/main" id="{7A77A900-6897-477F-8089-1D0F18D56ACD}"/>
+              </a:ext>
+            </a:extLst>
+          </p:cNvPr>
+          <p:cNvSpPr>
+            <a:spLocks xmlns:a="http://schemas.openxmlformats.org/drawingml/2006/main" noGrp="1"/>
+          </p:cNvSpPr>
+          <p:nvPr/>
+        </p:nvSpPr>
+        <p:spPr>
+          <a:xfrm xmlns:a="http://schemas.openxmlformats.org/drawingml/2006/main">
+            <a:off x="609600" y="5276850"/>
+            <a:ext cx="10972800" cy="1352550"/>
+          </a:xfrm>
+          <a:prstGeom xmlns:a="http://schemas.openxmlformats.org/drawingml/2006/main" prst="rect">
+            <a:avLst/>
+          </a:prstGeom>
+          <a:solidFill xmlns:a="http://schemas.openxmlformats.org/drawingml/2006/main">
+            <a:srgbClr val="0B214A"/>
+          </a:solidFill>
+          <a:ln xmlns:a="http://schemas.openxmlformats.org/drawingml/2006/main" w="0">
+            <a:noFill/>
+          </a:ln>
+        </p:spPr>
+      </p:sp>
+      <p:sp>
+        <p:nvSpPr>
+          <p:cNvPr id="9" name="">
+            <a:extLst xmlns:a="http://schemas.openxmlformats.org/drawingml/2006/main">
+              <a:ext uri="{FF2B5EF4-FFF2-40B4-BE49-F238E27FC236}">
+                <a16:creationId xmlns:a16="http://schemas.microsoft.com/office/drawing/2014/main" id="{6CC8A373-F186-4ACB-BAD6-EF992BE66607}"/>
+              </a:ext>
+            </a:extLst>
+          </p:cNvPr>
+          <p:cNvSpPr>
+            <a:spLocks xmlns:a="http://schemas.openxmlformats.org/drawingml/2006/main" noGrp="1"/>
+          </p:cNvSpPr>
+          <p:nvPr/>
+        </p:nvSpPr>
+        <p:spPr>
+          <a:xfrm xmlns:a="http://schemas.openxmlformats.org/drawingml/2006/main">
+            <a:off x="790575" y="5410200"/>
+            <a:ext cx="10534650" cy="333375"/>
+          </a:xfrm>
+          <a:prstGeom xmlns:a="http://schemas.openxmlformats.org/drawingml/2006/main" prst="rect">
+            <a:avLst/>
+          </a:prstGeom>
+          <a:noFill xmlns:a="http://schemas.openxmlformats.org/drawingml/2006/main"/>
+          <a:ln xmlns:a="http://schemas.openxmlformats.org/drawingml/2006/main" w="0">
+            <a:noFill/>
+          </a:ln>
+        </p:spPr>
+        <p:txBody>
+          <a:bodyPr xmlns:a="http://schemas.openxmlformats.org/drawingml/2006/main">
+            <a:noAutofit/>
+          </a:bodyPr>
+          <a:lstStyle xmlns:a="http://schemas.openxmlformats.org/drawingml/2006/main"/>
+          <a:p xmlns:a="http://schemas.openxmlformats.org/drawingml/2006/main">
+            <a:pPr>
+              <a:buNone/>
+              <a:defRPr sz="1575" b="1">
+                <a:solidFill>
+                  <a:srgbClr val="63D7F2"/>
+                </a:solidFill>
+                <a:latin typeface="Helvetica Neue"/>
+                <a:ea typeface="Helvetica Neue"/>
+                <a:cs typeface="Helvetica Neue"/>
+              </a:defRPr>
+            </a:pPr>
+            <a:r>
+              <a:rPr sz="1575" b="1">
+                <a:solidFill>
+                  <a:srgbClr val="63D7F2"/>
+                </a:solidFill>
+                <a:latin typeface="Helvetica Neue"/>
+                <a:ea typeface="Helvetica Neue"/>
+                <a:cs typeface="Helvetica Neue"/>
+              </a:rPr>
+              <a:t>Ask in the conversation</a:t>
+            </a:r>
+          </a:p>
+        </p:txBody>
+      </p:sp>
+      <p:sp>
+        <p:nvSpPr>
+          <p:cNvPr id="10" name="">
+            <a:extLst xmlns:a="http://schemas.openxmlformats.org/drawingml/2006/main">
+              <a:ext uri="{FF2B5EF4-FFF2-40B4-BE49-F238E27FC236}">
+                <a16:creationId xmlns:a16="http://schemas.microsoft.com/office/drawing/2014/main" id="{C2DDC1BD-8060-4444-AC0E-785CCE3B69AB}"/>
+              </a:ext>
+            </a:extLst>
+          </p:cNvPr>
+          <p:cNvSpPr>
+            <a:spLocks xmlns:a="http://schemas.openxmlformats.org/drawingml/2006/main" noGrp="1"/>
+          </p:cNvSpPr>
+          <p:nvPr/>
+        </p:nvSpPr>
+        <p:spPr>
+          <a:xfrm xmlns:a="http://schemas.openxmlformats.org/drawingml/2006/main">
+            <a:off x="790575" y="5810250"/>
+            <a:ext cx="10467975" cy="695325"/>
+          </a:xfrm>
+          <a:prstGeom xmlns:a="http://schemas.openxmlformats.org/drawingml/2006/main" prst="rect">
+            <a:avLst/>
+          </a:prstGeom>
+          <a:noFill xmlns:a="http://schemas.openxmlformats.org/drawingml/2006/main"/>
+          <a:ln xmlns:a="http://schemas.openxmlformats.org/drawingml/2006/main" w="0">
+            <a:noFill/>
+          </a:ln>
+        </p:spPr>
+        <p:txBody>
+          <a:bodyPr xmlns:a="http://schemas.openxmlformats.org/drawingml/2006/main">
+            <a:noAutofit/>
+          </a:bodyPr>
+          <a:lstStyle xmlns:a="http://schemas.openxmlformats.org/drawingml/2006/main"/>
+          <a:p xmlns:a="http://schemas.openxmlformats.org/drawingml/2006/main">
+            <a:pPr>
+              <a:buNone/>
+              <a:defRPr sz="2025" b="0">
+                <a:solidFill>
+                  <a:srgbClr val="FFFFFF"/>
+                </a:solidFill>
+                <a:latin typeface="Helvetica Neue"/>
+                <a:ea typeface="Helvetica Neue"/>
+                <a:cs typeface="Helvetica Neue"/>
+              </a:defRPr>
+            </a:pPr>
+            <a:r>
+              <a:rPr sz="2025" b="0">
+                <a:solidFill>
+                  <a:srgbClr val="FFFFFF"/>
+                </a:solidFill>
+                <a:latin typeface="Helvetica Neue"/>
+                <a:ea typeface="Helvetica Neue"/>
+                <a:cs typeface="Helvetica Neue"/>
+              </a:rPr>
+              <a:t>Which current priority would make a focused conversation useful?</a:t>
+            </a:r>
+          </a:p>
+        </p:txBody>
+      </p:sp>
+    </p:spTree>
+    <p:extLst>
+      <p:ext uri="{BB962C8B-B14F-4D97-AF65-F5344CB8AC3E}">
+        <p14:creationId xmlns:p14="http://schemas.microsoft.com/office/powerpoint/2010/main" val="61989414"/>
+      </p:ext>
+    </p:extLst>
+  </p:cSld>
+</p:sld>
+</file>
+
+<file path=ppt/slides/slide8.xml><?xml version="1.0" encoding="utf-8"?>
+<p:sld xmlns:p="http://schemas.openxmlformats.org/presentationml/2006/main">
+  <p:cSld>
+    <p:bg>
+      <p:bgPr>
+        <a:solidFill xmlns:a="http://schemas.openxmlformats.org/drawingml/2006/main">
+          <a:srgbClr val="FFFFFF"/>
+        </a:solidFill>
+      </p:bgPr>
+    </p:bg>
+    <p:spTree>
+      <p:nvGrpSpPr>
+        <p:cNvPr id="1" name=""/>
+        <p:cNvGrpSpPr/>
+        <p:nvPr/>
+      </p:nvGrpSpPr>
+      <p:grpSpPr>
+        <a:xfrm xmlns:a="http://schemas.openxmlformats.org/drawingml/2006/main"/>
+      </p:grpSpPr>
+      <p:sp>
+        <p:nvSpPr>
+          <p:cNvPr id="8" name="">
+            <a:extLst xmlns:a="http://schemas.openxmlformats.org/drawingml/2006/main">
+              <a:ext uri="{FF2B5EF4-FFF2-40B4-BE49-F238E27FC236}">
+                <a16:creationId xmlns:a16="http://schemas.microsoft.com/office/drawing/2014/main" id="{84C1C47D-CEA3-474E-A0A2-80768375263E}"/>
+              </a:ext>
+            </a:extLst>
+          </p:cNvPr>
+          <p:cNvSpPr>
+            <a:spLocks xmlns:a="http://schemas.openxmlformats.org/drawingml/2006/main" noGrp="1"/>
+          </p:cNvSpPr>
+          <p:nvPr/>
+        </p:nvSpPr>
+        <p:spPr>
+          <a:xfrm xmlns:a="http://schemas.openxmlformats.org/drawingml/2006/main">
+            <a:off x="523875" y="419100"/>
+            <a:ext cx="11144250" cy="714375"/>
+          </a:xfrm>
+          <a:prstGeom xmlns:a="http://schemas.openxmlformats.org/drawingml/2006/main" prst="rect">
+            <a:avLst/>
+          </a:prstGeom>
+          <a:noFill xmlns:a="http://schemas.openxmlformats.org/drawingml/2006/main"/>
+          <a:ln xmlns:a="http://schemas.openxmlformats.org/drawingml/2006/main" w="0">
+            <a:noFill/>
+          </a:ln>
+        </p:spPr>
+        <p:txBody>
+          <a:bodyPr xmlns:a="http://schemas.openxmlformats.org/drawingml/2006/main">
+            <a:noAutofit/>
+          </a:bodyPr>
+          <a:lstStyle xmlns:a="http://schemas.openxmlformats.org/drawingml/2006/main"/>
+          <a:p xmlns:a="http://schemas.openxmlformats.org/drawingml/2006/main">
+            <a:pPr>
+              <a:buNone/>
               <a:defRPr sz="3825" b="1">
                 <a:solidFill>
                   <a:srgbClr val="0B214A"/>
@@ -5652,14 +8342,21 @@
       </p:sp>
       <p:pic>
         <p:nvPicPr>
-          <p:cNvPr id="9" name=""/>
+          <p:cNvPr id="9" name="">
+            <a:extLst xmlns:a="http://schemas.openxmlformats.org/drawingml/2006/main">
+              <a:ext uri="{FF2B5EF4-FFF2-40B4-BE49-F238E27FC236}">
+                <a16:creationId xmlns:a16="http://schemas.microsoft.com/office/drawing/2014/main" id="{6DE28242-B4F1-4F09-90A1-049BA5CF1A50}"/>
+              </a:ext>
+            </a:extLst>
+          </p:cNvPr>
           <p:cNvPicPr>
             <a:picLocks xmlns:a="http://schemas.openxmlformats.org/drawingml/2006/main" noChangeAspect="1"/>
           </p:cNvPicPr>
           <p:nvPr/>
         </p:nvPicPr>
         <p:blipFill>
-          <a:blip xmlns:r="http://schemas.openxmlformats.org/officeDocument/2006/relationships" xmlns:a="http://schemas.openxmlformats.org/drawingml/2006/main" r:embed="Rad7bfa14ae8e45a0"/>
+          <a:blip xmlns:r="http://schemas.openxmlformats.org/officeDocument/2006/relationships" xmlns:a="http://schemas.openxmlformats.org/drawingml/2006/main" r:embed="Rfcbc68b5ffc34ba3"/>
+          <a:srcRect xmlns:a="http://schemas.openxmlformats.org/drawingml/2006/main" l="0" t="0" r="0" b="0"/>
           <a:stretch xmlns:a="http://schemas.openxmlformats.org/drawingml/2006/main"/>
         </p:blipFill>
         <p:spPr>
@@ -5706,6 +8403,7 @@
           <a:lstStyle xmlns:a="http://schemas.openxmlformats.org/drawingml/2006/main"/>
           <a:p xmlns:a="http://schemas.openxmlformats.org/drawingml/2006/main">
             <a:pPr>
+              <a:buNone/>
               <a:defRPr sz="2175" b="1">
                 <a:solidFill>
                   <a:srgbClr val="126FCE"/>
@@ -5763,6 +8461,7 @@
           <a:lstStyle xmlns:a="http://schemas.openxmlformats.org/drawingml/2006/main"/>
           <a:p xmlns:a="http://schemas.openxmlformats.org/drawingml/2006/main">
             <a:pPr>
+              <a:buNone/>
               <a:defRPr sz="2025" b="0">
                 <a:solidFill>
                   <a:srgbClr val="123363"/>
@@ -5820,6 +8519,7 @@
           <a:lstStyle xmlns:a="http://schemas.openxmlformats.org/drawingml/2006/main"/>
           <a:p xmlns:a="http://schemas.openxmlformats.org/drawingml/2006/main">
             <a:pPr>
+              <a:buNone/>
               <a:defRPr sz="2175" b="1">
                 <a:solidFill>
                   <a:srgbClr val="126FCE"/>
@@ -5877,6 +8577,7 @@
           <a:lstStyle xmlns:a="http://schemas.openxmlformats.org/drawingml/2006/main"/>
           <a:p xmlns:a="http://schemas.openxmlformats.org/drawingml/2006/main">
             <a:pPr>
+              <a:buNone/>
               <a:defRPr sz="2025" b="0">
                 <a:solidFill>
                   <a:srgbClr val="123363"/>
@@ -5934,6 +8635,7 @@
           <a:lstStyle xmlns:a="http://schemas.openxmlformats.org/drawingml/2006/main"/>
           <a:p xmlns:a="http://schemas.openxmlformats.org/drawingml/2006/main">
             <a:pPr>
+              <a:buNone/>
               <a:defRPr sz="1500" b="0">
                 <a:solidFill>
                   <a:srgbClr val="58718B"/>
@@ -5952,7 +8654,7 @@
                 <a:ea typeface="Helvetica Neue"/>
                 <a:cs typeface="Helvetica Neue"/>
               </a:rPr>
-              <a:t>AI-generated demo research. Source links make claims traceable, not guaranteed.</a:t>
+              <a:t>Demonstration fixture data. Source links make claims traceable, not guaranteed.</a:t>
             </a:r>
           </a:p>
         </p:txBody>
@@ -5967,7 +8669,7 @@
 </p:sld>
 </file>
 
-<file path=ppt/slides/slide8.xml><?xml version="1.0" encoding="utf-8"?>
+<file path=ppt/slides/slide9.xml><?xml version="1.0" encoding="utf-8"?>
 <p:sld xmlns:p="http://schemas.openxmlformats.org/presentationml/2006/main">
   <p:cSld>
     <p:bg>
@@ -6020,6 +8722,7 @@
           <a:lstStyle xmlns:a="http://schemas.openxmlformats.org/drawingml/2006/main"/>
           <a:p xmlns:a="http://schemas.openxmlformats.org/drawingml/2006/main">
             <a:pPr>
+              <a:buNone/>
               <a:defRPr sz="3975" b="1">
                 <a:solidFill>
                   <a:srgbClr val="0B214A"/>
@@ -6077,6 +8780,7 @@
           <a:lstStyle xmlns:a="http://schemas.openxmlformats.org/drawingml/2006/main"/>
           <a:p xmlns:a="http://schemas.openxmlformats.org/drawingml/2006/main">
             <a:pPr>
+              <a:buNone/>
               <a:defRPr sz="2175" b="0">
                 <a:solidFill>
                   <a:srgbClr val="58718B"/>
@@ -6166,6 +8870,7 @@
           <a:lstStyle xmlns:a="http://schemas.openxmlformats.org/drawingml/2006/main"/>
           <a:p xmlns:a="http://schemas.openxmlformats.org/drawingml/2006/main">
             <a:pPr>
+              <a:buNone/>
               <a:defRPr sz="1800" b="1">
                 <a:solidFill>
                   <a:srgbClr val="123363"/>
@@ -6189,6 +8894,7 @@
           </a:p>
           <a:p xmlns:a="http://schemas.openxmlformats.org/drawingml/2006/main">
             <a:pPr>
+              <a:buNone/>
               <a:defRPr sz="1800" b="1">
                 <a:solidFill>
                   <a:srgbClr val="123363"/>
@@ -6278,6 +8984,7 @@
           <a:lstStyle xmlns:a="http://schemas.openxmlformats.org/drawingml/2006/main"/>
           <a:p xmlns:a="http://schemas.openxmlformats.org/drawingml/2006/main">
             <a:pPr>
+              <a:buNone/>
               <a:defRPr sz="1800" b="1">
                 <a:solidFill>
                   <a:srgbClr val="123363"/>
@@ -6301,6 +9008,7 @@
           </a:p>
           <a:p xmlns:a="http://schemas.openxmlformats.org/drawingml/2006/main">
             <a:pPr>
+              <a:buNone/>
               <a:defRPr sz="1800" b="1">
                 <a:solidFill>
                   <a:srgbClr val="123363"/>
@@ -6390,6 +9098,7 @@
           <a:lstStyle xmlns:a="http://schemas.openxmlformats.org/drawingml/2006/main"/>
           <a:p xmlns:a="http://schemas.openxmlformats.org/drawingml/2006/main">
             <a:pPr>
+              <a:buNone/>
               <a:defRPr sz="1800" b="1">
                 <a:solidFill>
                   <a:srgbClr val="FFFFFF"/>
@@ -6413,6 +9122,7 @@
           </a:p>
           <a:p xmlns:a="http://schemas.openxmlformats.org/drawingml/2006/main">
             <a:pPr>
+              <a:buNone/>
               <a:defRPr sz="1800" b="1">
                 <a:solidFill>
                   <a:srgbClr val="FFFFFF"/>
@@ -6502,6 +9212,7 @@
           <a:lstStyle xmlns:a="http://schemas.openxmlformats.org/drawingml/2006/main"/>
           <a:p xmlns:a="http://schemas.openxmlformats.org/drawingml/2006/main">
             <a:pPr>
+              <a:buNone/>
               <a:defRPr sz="1800" b="1">
                 <a:solidFill>
                   <a:srgbClr val="FFFFFF"/>
@@ -6525,6 +9236,7 @@
           </a:p>
           <a:p xmlns:a="http://schemas.openxmlformats.org/drawingml/2006/main">
             <a:pPr>
+              <a:buNone/>
               <a:defRPr sz="1800" b="1">
                 <a:solidFill>
                   <a:srgbClr val="FFFFFF"/>
@@ -6614,6 +9326,7 @@
           <a:lstStyle xmlns:a="http://schemas.openxmlformats.org/drawingml/2006/main"/>
           <a:p xmlns:a="http://schemas.openxmlformats.org/drawingml/2006/main">
             <a:pPr>
+              <a:buNone/>
               <a:defRPr sz="1800" b="1">
                 <a:solidFill>
                   <a:srgbClr val="123363"/>
@@ -6637,6 +9350,7 @@
           </a:p>
           <a:p xmlns:a="http://schemas.openxmlformats.org/drawingml/2006/main">
             <a:pPr>
+              <a:buNone/>
               <a:defRPr sz="1800" b="1">
                 <a:solidFill>
                   <a:srgbClr val="123363"/>
@@ -6726,6 +9440,7 @@
           <a:lstStyle xmlns:a="http://schemas.openxmlformats.org/drawingml/2006/main"/>
           <a:p xmlns:a="http://schemas.openxmlformats.org/drawingml/2006/main">
             <a:pPr>
+              <a:buNone/>
               <a:defRPr sz="1800" b="1">
                 <a:solidFill>
                   <a:srgbClr val="123363"/>
@@ -6749,6 +9464,7 @@
           </a:p>
           <a:p xmlns:a="http://schemas.openxmlformats.org/drawingml/2006/main">
             <a:pPr>
+              <a:buNone/>
               <a:defRPr sz="1800" b="1">
                 <a:solidFill>
                   <a:srgbClr val="123363"/>
@@ -6772,6 +9488,7 @@
           </a:p>
           <a:p xmlns:a="http://schemas.openxmlformats.org/drawingml/2006/main">
             <a:pPr>
+              <a:buNone/>
               <a:defRPr sz="1800" b="1">
                 <a:solidFill>
                   <a:srgbClr val="123363"/>
@@ -6797,7 +9514,13 @@
       </p:sp>
       <p:cxnSp>
         <p:nvCxnSpPr>
-          <p:cNvPr id="35" name=""/>
+          <p:cNvPr id="35" name="">
+            <a:extLst xmlns:a="http://schemas.openxmlformats.org/drawingml/2006/main">
+              <a:ext uri="{FF2B5EF4-FFF2-40B4-BE49-F238E27FC236}">
+                <a16:creationId xmlns:a16="http://schemas.microsoft.com/office/drawing/2014/main" id="{2102C34F-2DF6-4C8B-B8AB-5B06418B01C3}"/>
+              </a:ext>
+            </a:extLst>
+          </p:cNvPr>
           <p:cNvCxnSpPr>
             <a:stCxn xmlns:a="http://schemas.openxmlformats.org/drawingml/2006/main" id="3" idx="3"/>
             <a:endCxn xmlns:a="http://schemas.openxmlformats.org/drawingml/2006/main" id="5" idx="1"/>
@@ -6823,7 +9546,13 @@
       </p:cxnSp>
       <p:cxnSp>
         <p:nvCxnSpPr>
-          <p:cNvPr id="36" name=""/>
+          <p:cNvPr id="36" name="">
+            <a:extLst xmlns:a="http://schemas.openxmlformats.org/drawingml/2006/main">
+              <a:ext uri="{FF2B5EF4-FFF2-40B4-BE49-F238E27FC236}">
+                <a16:creationId xmlns:a16="http://schemas.microsoft.com/office/drawing/2014/main" id="{65FC5B2E-6198-4410-A028-80F57287C7A8}"/>
+              </a:ext>
+            </a:extLst>
+          </p:cNvPr>
           <p:cNvCxnSpPr>
             <a:stCxn xmlns:a="http://schemas.openxmlformats.org/drawingml/2006/main" id="5" idx="3"/>
             <a:endCxn xmlns:a="http://schemas.openxmlformats.org/drawingml/2006/main" id="7" idx="1"/>
@@ -6849,7 +9578,13 @@
       </p:cxnSp>
       <p:cxnSp>
         <p:nvCxnSpPr>
-          <p:cNvPr id="37" name=""/>
+          <p:cNvPr id="37" name="">
+            <a:extLst xmlns:a="http://schemas.openxmlformats.org/drawingml/2006/main">
+              <a:ext uri="{FF2B5EF4-FFF2-40B4-BE49-F238E27FC236}">
+                <a16:creationId xmlns:a16="http://schemas.microsoft.com/office/drawing/2014/main" id="{D2E337E9-B39B-4560-9571-931B458B4F39}"/>
+              </a:ext>
+            </a:extLst>
+          </p:cNvPr>
           <p:cNvCxnSpPr>
             <a:stCxn xmlns:a="http://schemas.openxmlformats.org/drawingml/2006/main" id="7" idx="3"/>
             <a:endCxn xmlns:a="http://schemas.openxmlformats.org/drawingml/2006/main" id="9" idx="1"/>
@@ -6875,7 +9610,13 @@
       </p:cxnSp>
       <p:cxnSp>
         <p:nvCxnSpPr>
-          <p:cNvPr id="38" name=""/>
+          <p:cNvPr id="38" name="">
+            <a:extLst xmlns:a="http://schemas.openxmlformats.org/drawingml/2006/main">
+              <a:ext uri="{FF2B5EF4-FFF2-40B4-BE49-F238E27FC236}">
+                <a16:creationId xmlns:a16="http://schemas.microsoft.com/office/drawing/2014/main" id="{18FFB444-08C6-4F19-BBE3-BB4F3C3BCA14}"/>
+              </a:ext>
+            </a:extLst>
+          </p:cNvPr>
           <p:cNvCxnSpPr>
             <a:stCxn xmlns:a="http://schemas.openxmlformats.org/drawingml/2006/main" id="5" idx="2"/>
             <a:endCxn xmlns:a="http://schemas.openxmlformats.org/drawingml/2006/main" id="11" idx="0"/>
@@ -6901,7 +9642,13 @@
       </p:cxnSp>
       <p:cxnSp>
         <p:nvCxnSpPr>
-          <p:cNvPr id="39" name=""/>
+          <p:cNvPr id="39" name="">
+            <a:extLst xmlns:a="http://schemas.openxmlformats.org/drawingml/2006/main">
+              <a:ext uri="{FF2B5EF4-FFF2-40B4-BE49-F238E27FC236}">
+                <a16:creationId xmlns:a16="http://schemas.microsoft.com/office/drawing/2014/main" id="{BF65847E-DFF0-498F-8981-10BC2E58424F}"/>
+              </a:ext>
+            </a:extLst>
+          </p:cNvPr>
           <p:cNvCxnSpPr>
             <a:stCxn xmlns:a="http://schemas.openxmlformats.org/drawingml/2006/main" id="9" idx="2"/>
             <a:endCxn xmlns:a="http://schemas.openxmlformats.org/drawingml/2006/main" id="13" idx="0"/>
@@ -6959,6 +9706,7 @@
           <a:lstStyle xmlns:a="http://schemas.openxmlformats.org/drawingml/2006/main"/>
           <a:p xmlns:a="http://schemas.openxmlformats.org/drawingml/2006/main">
             <a:pPr>
+              <a:buNone/>
               <a:defRPr sz="1800" b="0">
                 <a:solidFill>
                   <a:srgbClr val="58718B"/>
@@ -6986,457 +9734,6 @@
     <p:extLst>
       <p:ext uri="{BB962C8B-B14F-4D97-AF65-F5344CB8AC3E}">
         <p14:creationId xmlns:p14="http://schemas.microsoft.com/office/powerpoint/2010/main" val="1113105654"/>
-      </p:ext>
-    </p:extLst>
-  </p:cSld>
-</p:sld>
-</file>
-
-<file path=ppt/slides/slide9.xml><?xml version="1.0" encoding="utf-8"?>
-<p:sld xmlns:p="http://schemas.openxmlformats.org/presentationml/2006/main">
-  <p:cSld>
-    <p:bg>
-      <p:bgPr>
-        <a:solidFill xmlns:a="http://schemas.openxmlformats.org/drawingml/2006/main">
-          <a:srgbClr val="FFFFFF"/>
-        </a:solidFill>
-      </p:bgPr>
-    </p:bg>
-    <p:spTree>
-      <p:nvGrpSpPr>
-        <p:cNvPr id="1" name=""/>
-        <p:cNvGrpSpPr/>
-        <p:nvPr/>
-      </p:nvGrpSpPr>
-      <p:grpSpPr>
-        <a:xfrm xmlns:a="http://schemas.openxmlformats.org/drawingml/2006/main"/>
-      </p:grpSpPr>
-      <p:sp>
-        <p:nvSpPr>
-          <p:cNvPr id="8" name="">
-            <a:extLst xmlns:a="http://schemas.openxmlformats.org/drawingml/2006/main">
-              <a:ext uri="{FF2B5EF4-FFF2-40B4-BE49-F238E27FC236}">
-                <a16:creationId xmlns:a16="http://schemas.microsoft.com/office/drawing/2014/main" id="{1BE8D7F7-5B1F-4DC0-BBBF-D586352E1F34}"/>
-              </a:ext>
-            </a:extLst>
-          </p:cNvPr>
-          <p:cNvSpPr>
-            <a:spLocks xmlns:a="http://schemas.openxmlformats.org/drawingml/2006/main" noGrp="1"/>
-          </p:cNvSpPr>
-          <p:nvPr/>
-        </p:nvSpPr>
-        <p:spPr>
-          <a:xfrm xmlns:a="http://schemas.openxmlformats.org/drawingml/2006/main">
-            <a:off x="533400" y="457200"/>
-            <a:ext cx="10953750" cy="752475"/>
-          </a:xfrm>
-          <a:prstGeom xmlns:a="http://schemas.openxmlformats.org/drawingml/2006/main" prst="rect">
-            <a:avLst/>
-          </a:prstGeom>
-          <a:noFill xmlns:a="http://schemas.openxmlformats.org/drawingml/2006/main"/>
-          <a:ln xmlns:a="http://schemas.openxmlformats.org/drawingml/2006/main" w="0">
-            <a:noFill/>
-          </a:ln>
-        </p:spPr>
-        <p:txBody>
-          <a:bodyPr xmlns:a="http://schemas.openxmlformats.org/drawingml/2006/main">
-            <a:noAutofit/>
-          </a:bodyPr>
-          <a:lstStyle xmlns:a="http://schemas.openxmlformats.org/drawingml/2006/main"/>
-          <a:p xmlns:a="http://schemas.openxmlformats.org/drawingml/2006/main">
-            <a:pPr>
-              <a:defRPr sz="3825" b="1">
-                <a:solidFill>
-                  <a:srgbClr val="0B214A"/>
-                </a:solidFill>
-                <a:latin typeface="Helvetica Neue"/>
-                <a:ea typeface="Helvetica Neue"/>
-                <a:cs typeface="Helvetica Neue"/>
-              </a:defRPr>
-            </a:pPr>
-            <a:r>
-              <a:rPr sz="3825" b="1">
-                <a:solidFill>
-                  <a:srgbClr val="0B214A"/>
-                </a:solidFill>
-                <a:latin typeface="Helvetica Neue"/>
-                <a:ea typeface="Helvetica Neue"/>
-                <a:cs typeface="Helvetica Neue"/>
-              </a:rPr>
-              <a:t>An outreach draft for your review</a:t>
-            </a:r>
-          </a:p>
-        </p:txBody>
-      </p:sp>
-      <p:sp>
-        <p:nvSpPr>
-          <p:cNvPr id="2" name="">
-            <a:extLst xmlns:a="http://schemas.openxmlformats.org/drawingml/2006/main">
-              <a:ext uri="{FF2B5EF4-FFF2-40B4-BE49-F238E27FC236}">
-                <a16:creationId xmlns:a16="http://schemas.microsoft.com/office/drawing/2014/main" id="{BF6B1CCC-7EC0-4393-8788-A356D9BE9A8B}"/>
-              </a:ext>
-            </a:extLst>
-          </p:cNvPr>
-          <p:cNvSpPr>
-            <a:spLocks xmlns:a="http://schemas.openxmlformats.org/drawingml/2006/main" noGrp="1"/>
-          </p:cNvSpPr>
-          <p:nvPr/>
-        </p:nvSpPr>
-        <p:spPr>
-          <a:xfrm xmlns:a="http://schemas.openxmlformats.org/drawingml/2006/main">
-            <a:off x="590550" y="1352550"/>
-            <a:ext cx="10953750" cy="571500"/>
-          </a:xfrm>
-          <a:prstGeom xmlns:a="http://schemas.openxmlformats.org/drawingml/2006/main" prst="rect">
-            <a:avLst/>
-          </a:prstGeom>
-          <a:noFill xmlns:a="http://schemas.openxmlformats.org/drawingml/2006/main"/>
-          <a:ln xmlns:a="http://schemas.openxmlformats.org/drawingml/2006/main" w="0">
-            <a:noFill/>
-          </a:ln>
-        </p:spPr>
-        <p:txBody>
-          <a:bodyPr xmlns:a="http://schemas.openxmlformats.org/drawingml/2006/main">
-            <a:noAutofit/>
-          </a:bodyPr>
-          <a:lstStyle xmlns:a="http://schemas.openxmlformats.org/drawingml/2006/main"/>
-          <a:p xmlns:a="http://schemas.openxmlformats.org/drawingml/2006/main">
-            <a:pPr>
-              <a:defRPr sz="2025" b="0">
-                <a:solidFill>
-                  <a:srgbClr val="58718B"/>
-                </a:solidFill>
-                <a:latin typeface="Helvetica Neue"/>
-                <a:ea typeface="Helvetica Neue"/>
-                <a:cs typeface="Helvetica Neue"/>
-              </a:defRPr>
-            </a:pPr>
-            <a:r>
-              <a:rPr sz="2025" b="0">
-                <a:solidFill>
-                  <a:srgbClr val="58718B"/>
-                </a:solidFill>
-                <a:latin typeface="Helvetica Neue"/>
-                <a:ea typeface="Helvetica Neue"/>
-                <a:cs typeface="Helvetica Neue"/>
-              </a:rPr>
-              <a:t>A source-based opener, a conditional fit, and a question that invites a reply.</a:t>
-            </a:r>
-          </a:p>
-        </p:txBody>
-      </p:sp>
-      <p:sp>
-        <p:nvSpPr>
-          <p:cNvPr id="3" name="">
-            <a:extLst xmlns:a="http://schemas.openxmlformats.org/drawingml/2006/main">
-              <a:ext uri="{FF2B5EF4-FFF2-40B4-BE49-F238E27FC236}">
-                <a16:creationId xmlns:a16="http://schemas.microsoft.com/office/drawing/2014/main" id="{425D3703-05BD-4BCB-A5E7-700879BC8AF0}"/>
-              </a:ext>
-            </a:extLst>
-          </p:cNvPr>
-          <p:cNvSpPr>
-            <a:spLocks xmlns:a="http://schemas.openxmlformats.org/drawingml/2006/main" noGrp="1"/>
-          </p:cNvSpPr>
-          <p:nvPr/>
-        </p:nvSpPr>
-        <p:spPr>
-          <a:xfrm xmlns:a="http://schemas.openxmlformats.org/drawingml/2006/main">
-            <a:off x="657225" y="2305050"/>
-            <a:ext cx="10829925" cy="390525"/>
-          </a:xfrm>
-          <a:prstGeom xmlns:a="http://schemas.openxmlformats.org/drawingml/2006/main" prst="rect">
-            <a:avLst/>
-          </a:prstGeom>
-          <a:noFill xmlns:a="http://schemas.openxmlformats.org/drawingml/2006/main"/>
-          <a:ln xmlns:a="http://schemas.openxmlformats.org/drawingml/2006/main" w="0">
-            <a:noFill/>
-          </a:ln>
-        </p:spPr>
-        <p:txBody>
-          <a:bodyPr xmlns:a="http://schemas.openxmlformats.org/drawingml/2006/main">
-            <a:noAutofit/>
-          </a:bodyPr>
-          <a:lstStyle xmlns:a="http://schemas.openxmlformats.org/drawingml/2006/main"/>
-          <a:p xmlns:a="http://schemas.openxmlformats.org/drawingml/2006/main">
-            <a:pPr>
-              <a:defRPr sz="1875" b="0">
-                <a:solidFill>
-                  <a:srgbClr val="123363"/>
-                </a:solidFill>
-                <a:latin typeface="Helvetica Neue"/>
-                <a:ea typeface="Helvetica Neue"/>
-                <a:cs typeface="Helvetica Neue"/>
-              </a:defRPr>
-            </a:pPr>
-            <a:r>
-              <a:rPr sz="1875" b="0">
-                <a:solidFill>
-                  <a:srgbClr val="123363"/>
-                </a:solidFill>
-                <a:latin typeface="Helvetica Neue"/>
-                <a:ea typeface="Helvetica Neue"/>
-                <a:cs typeface="Helvetica Neue"/>
-              </a:rPr>
-              <a:t>Hi Guillermo,</a:t>
-            </a:r>
-          </a:p>
-        </p:txBody>
-      </p:sp>
-      <p:sp>
-        <p:nvSpPr>
-          <p:cNvPr id="4" name="">
-            <a:extLst xmlns:a="http://schemas.openxmlformats.org/drawingml/2006/main">
-              <a:ext uri="{FF2B5EF4-FFF2-40B4-BE49-F238E27FC236}">
-                <a16:creationId xmlns:a16="http://schemas.microsoft.com/office/drawing/2014/main" id="{E3721BE4-D65B-44D2-913A-1FD0D1C2343A}"/>
-              </a:ext>
-            </a:extLst>
-          </p:cNvPr>
-          <p:cNvSpPr>
-            <a:spLocks xmlns:a="http://schemas.openxmlformats.org/drawingml/2006/main" noGrp="1"/>
-          </p:cNvSpPr>
-          <p:nvPr/>
-        </p:nvSpPr>
-        <p:spPr>
-          <a:xfrm xmlns:a="http://schemas.openxmlformats.org/drawingml/2006/main">
-            <a:off x="657225" y="2886075"/>
-            <a:ext cx="10829925" cy="1343025"/>
-          </a:xfrm>
-          <a:prstGeom xmlns:a="http://schemas.openxmlformats.org/drawingml/2006/main" prst="rect">
-            <a:avLst/>
-          </a:prstGeom>
-          <a:noFill xmlns:a="http://schemas.openxmlformats.org/drawingml/2006/main"/>
-          <a:ln xmlns:a="http://schemas.openxmlformats.org/drawingml/2006/main" w="0">
-            <a:noFill/>
-          </a:ln>
-        </p:spPr>
-        <p:txBody>
-          <a:bodyPr xmlns:a="http://schemas.openxmlformats.org/drawingml/2006/main">
-            <a:noAutofit/>
-          </a:bodyPr>
-          <a:lstStyle xmlns:a="http://schemas.openxmlformats.org/drawingml/2006/main"/>
-          <a:p xmlns:a="http://schemas.openxmlformats.org/drawingml/2006/main">
-            <a:pPr>
-              <a:defRPr sz="1875" b="0">
-                <a:solidFill>
-                  <a:srgbClr val="123363"/>
-                </a:solidFill>
-                <a:latin typeface="Helvetica Neue"/>
-                <a:ea typeface="Helvetica Neue"/>
-                <a:cs typeface="Helvetica Neue"/>
-              </a:defRPr>
-            </a:pPr>
-            <a:r>
-              <a:rPr sz="1875" b="0">
-                <a:solidFill>
-                  <a:srgbClr val="123363"/>
-                </a:solidFill>
-                <a:latin typeface="Helvetica Neue"/>
-                <a:ea typeface="Helvetica Neue"/>
-                <a:cs typeface="Helvetica Neue"/>
-              </a:rPr>
-              <a:t>I noticed Vercel’s stated vision includes providing analytics as part of an end-to-end platform. With 3 product tiers and technical Account Executives working alongside developers, I’m curious how your team identifies where developers get stuck during onboarding.</a:t>
-            </a:r>
-          </a:p>
-        </p:txBody>
-      </p:sp>
-      <p:sp>
-        <p:nvSpPr>
-          <p:cNvPr id="5" name="">
-            <a:extLst xmlns:a="http://schemas.openxmlformats.org/drawingml/2006/main">
-              <a:ext uri="{FF2B5EF4-FFF2-40B4-BE49-F238E27FC236}">
-                <a16:creationId xmlns:a16="http://schemas.microsoft.com/office/drawing/2014/main" id="{F0FC8601-A985-4591-A9D2-AAD1A6F60EBB}"/>
-              </a:ext>
-            </a:extLst>
-          </p:cNvPr>
-          <p:cNvSpPr>
-            <a:spLocks xmlns:a="http://schemas.openxmlformats.org/drawingml/2006/main" noGrp="1"/>
-          </p:cNvSpPr>
-          <p:nvPr/>
-        </p:nvSpPr>
-        <p:spPr>
-          <a:xfrm xmlns:a="http://schemas.openxmlformats.org/drawingml/2006/main">
-            <a:off x="657225" y="4324350"/>
-            <a:ext cx="10829925" cy="1047750"/>
-          </a:xfrm>
-          <a:prstGeom xmlns:a="http://schemas.openxmlformats.org/drawingml/2006/main" prst="rect">
-            <a:avLst/>
-          </a:prstGeom>
-          <a:noFill xmlns:a="http://schemas.openxmlformats.org/drawingml/2006/main"/>
-          <a:ln xmlns:a="http://schemas.openxmlformats.org/drawingml/2006/main" w="0">
-            <a:noFill/>
-          </a:ln>
-        </p:spPr>
-        <p:txBody>
-          <a:bodyPr xmlns:a="http://schemas.openxmlformats.org/drawingml/2006/main">
-            <a:noAutofit/>
-          </a:bodyPr>
-          <a:lstStyle xmlns:a="http://schemas.openxmlformats.org/drawingml/2006/main"/>
-          <a:p xmlns:a="http://schemas.openxmlformats.org/drawingml/2006/main">
-            <a:pPr>
-              <a:defRPr sz="1875" b="0">
-                <a:solidFill>
-                  <a:srgbClr val="123363"/>
-                </a:solidFill>
-                <a:latin typeface="Helvetica Neue"/>
-                <a:ea typeface="Helvetica Neue"/>
-                <a:cs typeface="Helvetica Neue"/>
-              </a:defRPr>
-            </a:pPr>
-            <a:r>
-              <a:rPr sz="1875" b="0">
-                <a:solidFill>
-                  <a:srgbClr val="123363"/>
-                </a:solidFill>
-                <a:latin typeface="Helvetica Neue"/>
-                <a:ea typeface="Helvetica Neue"/>
-                <a:cs typeface="Helvetica Neue"/>
-              </a:rPr>
-              <a:t>We help developer platforms combine usage metrics and session feedback to prioritize documentation and product fixes. If improving onboarding visibility is a current focus, would it make sense to connect?</a:t>
-            </a:r>
-          </a:p>
-        </p:txBody>
-      </p:sp>
-      <p:sp>
-        <p:nvSpPr>
-          <p:cNvPr id="6" name="">
-            <a:extLst xmlns:a="http://schemas.openxmlformats.org/drawingml/2006/main">
-              <a:ext uri="{FF2B5EF4-FFF2-40B4-BE49-F238E27FC236}">
-                <a16:creationId xmlns:a16="http://schemas.microsoft.com/office/drawing/2014/main" id="{866FC527-9622-42D4-BEE6-DF4F2B91D9C0}"/>
-              </a:ext>
-            </a:extLst>
-          </p:cNvPr>
-          <p:cNvSpPr>
-            <a:spLocks xmlns:a="http://schemas.openxmlformats.org/drawingml/2006/main" noGrp="1"/>
-          </p:cNvSpPr>
-          <p:nvPr/>
-        </p:nvSpPr>
-        <p:spPr>
-          <a:xfrm xmlns:a="http://schemas.openxmlformats.org/drawingml/2006/main">
-            <a:off x="657225" y="5467350"/>
-            <a:ext cx="10829925" cy="733425"/>
-          </a:xfrm>
-          <a:prstGeom xmlns:a="http://schemas.openxmlformats.org/drawingml/2006/main" prst="rect">
-            <a:avLst/>
-          </a:prstGeom>
-          <a:noFill xmlns:a="http://schemas.openxmlformats.org/drawingml/2006/main"/>
-          <a:ln xmlns:a="http://schemas.openxmlformats.org/drawingml/2006/main" w="0">
-            <a:noFill/>
-          </a:ln>
-        </p:spPr>
-        <p:txBody>
-          <a:bodyPr xmlns:a="http://schemas.openxmlformats.org/drawingml/2006/main">
-            <a:noAutofit/>
-          </a:bodyPr>
-          <a:lstStyle xmlns:a="http://schemas.openxmlformats.org/drawingml/2006/main"/>
-          <a:p xmlns:a="http://schemas.openxmlformats.org/drawingml/2006/main">
-            <a:pPr>
-              <a:defRPr sz="1800" b="0">
-                <a:solidFill>
-                  <a:srgbClr val="58718B"/>
-                </a:solidFill>
-                <a:latin typeface="Helvetica Neue"/>
-                <a:ea typeface="Helvetica Neue"/>
-                <a:cs typeface="Helvetica Neue"/>
-              </a:defRPr>
-            </a:pPr>
-            <a:r>
-              <a:rPr sz="1800" b="0">
-                <a:solidFill>
-                  <a:srgbClr val="58718B"/>
-                </a:solidFill>
-                <a:latin typeface="Helvetica Neue"/>
-                <a:ea typeface="Helvetica Neue"/>
-                <a:cs typeface="Helvetica Neue"/>
-              </a:rPr>
-              <a:t>Best,</a:t>
-            </a:r>
-          </a:p>
-          <a:p xmlns:a="http://schemas.openxmlformats.org/drawingml/2006/main">
-            <a:pPr>
-              <a:defRPr sz="1800" b="0">
-                <a:solidFill>
-                  <a:srgbClr val="58718B"/>
-                </a:solidFill>
-                <a:latin typeface="Helvetica Neue"/>
-                <a:ea typeface="Helvetica Neue"/>
-                <a:cs typeface="Helvetica Neue"/>
-              </a:defRPr>
-            </a:pPr>
-            <a:r>
-              <a:rPr sz="1800" b="0">
-                <a:solidFill>
-                  <a:srgbClr val="58718B"/>
-                </a:solidFill>
-                <a:latin typeface="Helvetica Neue"/>
-                <a:ea typeface="Helvetica Neue"/>
-                <a:cs typeface="Helvetica Neue"/>
-              </a:rPr>
-              <a:t>E2E Tester</a:t>
-            </a:r>
-          </a:p>
-        </p:txBody>
-      </p:sp>
-      <p:sp>
-        <p:nvSpPr>
-          <p:cNvPr id="7" name="">
-            <a:extLst xmlns:a="http://schemas.openxmlformats.org/drawingml/2006/main">
-              <a:ext uri="{FF2B5EF4-FFF2-40B4-BE49-F238E27FC236}">
-                <a16:creationId xmlns:a16="http://schemas.microsoft.com/office/drawing/2014/main" id="{19AE429C-87E2-4E84-8610-E1DF3EB8C1F8}"/>
-              </a:ext>
-            </a:extLst>
-          </p:cNvPr>
-          <p:cNvSpPr>
-            <a:spLocks xmlns:a="http://schemas.openxmlformats.org/drawingml/2006/main" noGrp="1"/>
-          </p:cNvSpPr>
-          <p:nvPr/>
-        </p:nvSpPr>
-        <p:spPr>
-          <a:xfrm xmlns:a="http://schemas.openxmlformats.org/drawingml/2006/main">
-            <a:off x="590550" y="6315075"/>
-            <a:ext cx="10858500" cy="409575"/>
-          </a:xfrm>
-          <a:prstGeom xmlns:a="http://schemas.openxmlformats.org/drawingml/2006/main" prst="rect">
-            <a:avLst/>
-          </a:prstGeom>
-          <a:noFill xmlns:a="http://schemas.openxmlformats.org/drawingml/2006/main"/>
-          <a:ln xmlns:a="http://schemas.openxmlformats.org/drawingml/2006/main" w="0">
-            <a:noFill/>
-          </a:ln>
-        </p:spPr>
-        <p:txBody>
-          <a:bodyPr xmlns:a="http://schemas.openxmlformats.org/drawingml/2006/main">
-            <a:noAutofit/>
-          </a:bodyPr>
-          <a:lstStyle xmlns:a="http://schemas.openxmlformats.org/drawingml/2006/main"/>
-          <a:p xmlns:a="http://schemas.openxmlformats.org/drawingml/2006/main">
-            <a:pPr>
-              <a:defRPr sz="1800" b="1">
-                <a:solidFill>
-                  <a:srgbClr val="123363"/>
-                </a:solidFill>
-                <a:latin typeface="Helvetica Neue"/>
-                <a:ea typeface="Helvetica Neue"/>
-                <a:cs typeface="Helvetica Neue"/>
-              </a:defRPr>
-            </a:pPr>
-            <a:r>
-              <a:rPr sz="1800" b="1">
-                <a:solidFill>
-                  <a:srgbClr val="123363"/>
-                </a:solidFill>
-                <a:latin typeface="Helvetica Neue"/>
-                <a:ea typeface="Helvetica Neue"/>
-                <a:cs typeface="Helvetica Neue"/>
-              </a:rPr>
-              <a:t>Personalize the message and verify its claims before sending.</a:t>
-            </a:r>
-          </a:p>
-        </p:txBody>
-      </p:sp>
-    </p:spTree>
-    <p:extLst>
-      <p:ext uri="{BB962C8B-B14F-4D97-AF65-F5344CB8AC3E}">
-        <p14:creationId xmlns:p14="http://schemas.microsoft.com/office/powerpoint/2010/main" val="1597425485"/>
       </p:ext>
     </p:extLst>
   </p:cSld>

--- a/presentation/Lead-Trace-pitch-enhanced.pptx
+++ b/presentation/Lead-Trace-pitch-enhanced.pptx
@@ -2,24 +2,24 @@
 <file path=ppt/presentation.xml><?xml version="1.0" encoding="utf-8"?>
 <p:presentation xmlns:p="http://schemas.openxmlformats.org/presentationml/2006/main">
   <p:sldMasterIdLst>
-    <p:sldMasterId xmlns:r="http://schemas.openxmlformats.org/officeDocument/2006/relationships" id="2147483648" r:id="Rc36682fe38c54133"/>
+    <p:sldMasterId xmlns:r="http://schemas.openxmlformats.org/officeDocument/2006/relationships" id="2147483648" r:id="R9ec0e67b19264802"/>
   </p:sldMasterIdLst>
   <p:notesMasterIdLst>
-    <p:notesMasterId xmlns:r="http://schemas.openxmlformats.org/officeDocument/2006/relationships" r:id="R1ab30a478564408e"/>
+    <p:notesMasterId xmlns:r="http://schemas.openxmlformats.org/officeDocument/2006/relationships" r:id="Re46cfd2af96a4d3c"/>
   </p:notesMasterIdLst>
   <p:sldIdLst>
-    <p:sldId xmlns:r="http://schemas.openxmlformats.org/officeDocument/2006/relationships" id="256" r:id="Re142ba9c94c347d0"/>
-    <p:sldId xmlns:r="http://schemas.openxmlformats.org/officeDocument/2006/relationships" id="257" r:id="Rafb4000874e14301"/>
-    <p:sldId xmlns:r="http://schemas.openxmlformats.org/officeDocument/2006/relationships" id="258" r:id="R7d4d2d4baed94c9f"/>
-    <p:sldId xmlns:r="http://schemas.openxmlformats.org/officeDocument/2006/relationships" id="259" r:id="R14836c64487e47d6"/>
-    <p:sldId xmlns:r="http://schemas.openxmlformats.org/officeDocument/2006/relationships" id="260" r:id="R437f5106c19e4770"/>
-    <p:sldId xmlns:r="http://schemas.openxmlformats.org/officeDocument/2006/relationships" id="261" r:id="R950b2d4510e04276"/>
-    <p:sldId xmlns:r="http://schemas.openxmlformats.org/officeDocument/2006/relationships" id="262" r:id="Rf0e0b78f9c924229"/>
-    <p:sldId xmlns:r="http://schemas.openxmlformats.org/officeDocument/2006/relationships" id="263" r:id="R92633dfdd3d84451"/>
-    <p:sldId xmlns:r="http://schemas.openxmlformats.org/officeDocument/2006/relationships" id="264" r:id="R34d13621fcec4c49"/>
-    <p:sldId xmlns:r="http://schemas.openxmlformats.org/officeDocument/2006/relationships" id="265" r:id="R71d42c96c4544311"/>
-    <p:sldId xmlns:r="http://schemas.openxmlformats.org/officeDocument/2006/relationships" id="266" r:id="R70dbd2bda7204a8a"/>
-    <p:sldId xmlns:r="http://schemas.openxmlformats.org/officeDocument/2006/relationships" id="267" r:id="Raa66c55720174164"/>
+    <p:sldId xmlns:r="http://schemas.openxmlformats.org/officeDocument/2006/relationships" id="256" r:id="R332fc9fbe5984690"/>
+    <p:sldId xmlns:r="http://schemas.openxmlformats.org/officeDocument/2006/relationships" id="257" r:id="Rb3341d63c0074c6c"/>
+    <p:sldId xmlns:r="http://schemas.openxmlformats.org/officeDocument/2006/relationships" id="258" r:id="Rfe95722983c249a7"/>
+    <p:sldId xmlns:r="http://schemas.openxmlformats.org/officeDocument/2006/relationships" id="259" r:id="Rad5ef14931e44e14"/>
+    <p:sldId xmlns:r="http://schemas.openxmlformats.org/officeDocument/2006/relationships" id="260" r:id="R27c8f255f8094d06"/>
+    <p:sldId xmlns:r="http://schemas.openxmlformats.org/officeDocument/2006/relationships" id="261" r:id="Rd116bf45dfa64657"/>
+    <p:sldId xmlns:r="http://schemas.openxmlformats.org/officeDocument/2006/relationships" id="262" r:id="Rcba9a35fd5cf4e51"/>
+    <p:sldId xmlns:r="http://schemas.openxmlformats.org/officeDocument/2006/relationships" id="263" r:id="R8c429b2b3830470e"/>
+    <p:sldId xmlns:r="http://schemas.openxmlformats.org/officeDocument/2006/relationships" id="264" r:id="Rf97bc462aee247e5"/>
+    <p:sldId xmlns:r="http://schemas.openxmlformats.org/officeDocument/2006/relationships" id="265" r:id="Rc43c65dff1c44d9d"/>
+    <p:sldId xmlns:r="http://schemas.openxmlformats.org/officeDocument/2006/relationships" id="266" r:id="Ra472090ec4e6483c"/>
+    <p:sldId xmlns:r="http://schemas.openxmlformats.org/officeDocument/2006/relationships" id="267" r:id="Rd77e2271100442bf"/>
   </p:sldIdLst>
   <p:sldSz cx="12192000" cy="6858000"/>
   <p:notesSz cx="6858000" cy="9144000"/>
@@ -1291,7 +1291,7 @@
   </p:cSld>
   <p:clrMap bg1="lt1" tx1="dk1" bg2="lt2" tx2="dk2" accent1="accent1" accent2="accent2" accent3="accent3" accent4="accent4" accent5="accent5" accent6="accent6" hlink="hlink" folHlink="folHlink"/>
   <p:sldLayoutIdLst>
-    <p:sldLayoutId xmlns:r="http://schemas.openxmlformats.org/officeDocument/2006/relationships" id="2147483649" r:id="R53646ed383184e69"/>
+    <p:sldLayoutId xmlns:r="http://schemas.openxmlformats.org/officeDocument/2006/relationships" id="2147483649" r:id="R1d717382dc93430d"/>
   </p:sldLayoutIdLst>
   <p:txStyles>
     <p:titleStyle>
@@ -1842,7 +1842,7 @@
           <p:cNvPr id="6" name="">
             <a:extLst xmlns:a="http://schemas.openxmlformats.org/drawingml/2006/main">
               <a:ext uri="{FF2B5EF4-FFF2-40B4-BE49-F238E27FC236}">
-                <a16:creationId xmlns:a16="http://schemas.microsoft.com/office/drawing/2014/main" id="{99F8E682-2A7C-40E8-9938-F6BCF77D123F}"/>
+                <a16:creationId xmlns:a16="http://schemas.microsoft.com/office/drawing/2014/main" id="{CD4C5A75-0D8A-449C-8FCC-DBC5B70F88C5}"/>
               </a:ext>
             </a:extLst>
           </p:cNvPr>
@@ -1852,7 +1852,7 @@
           <p:nvPr/>
         </p:nvPicPr>
         <p:blipFill>
-          <a:blip xmlns:r="http://schemas.openxmlformats.org/officeDocument/2006/relationships" xmlns:a="http://schemas.openxmlformats.org/drawingml/2006/main" r:embed="R2e7fa74ae99e4f6b"/>
+          <a:blip xmlns:r="http://schemas.openxmlformats.org/officeDocument/2006/relationships" xmlns:a="http://schemas.openxmlformats.org/drawingml/2006/main" r:embed="R797817f2286f41b5"/>
           <a:srcRect xmlns:a="http://schemas.openxmlformats.org/drawingml/2006/main" l="0" t="0" r="0" b="0"/>
           <a:stretch xmlns:a="http://schemas.openxmlformats.org/drawingml/2006/main"/>
         </p:blipFill>
@@ -2977,7 +2977,7 @@
           <p:cNvPr id="5" name="">
             <a:extLst xmlns:a="http://schemas.openxmlformats.org/drawingml/2006/main">
               <a:ext uri="{FF2B5EF4-FFF2-40B4-BE49-F238E27FC236}">
-                <a16:creationId xmlns:a16="http://schemas.microsoft.com/office/drawing/2014/main" id="{162D7CF8-5BC7-4D87-A89F-F4F22E95F6D4}"/>
+                <a16:creationId xmlns:a16="http://schemas.microsoft.com/office/drawing/2014/main" id="{2C46365F-297E-4B39-BCFC-A147752FD189}"/>
               </a:ext>
             </a:extLst>
           </p:cNvPr>
@@ -2987,7 +2987,7 @@
           <p:nvPr/>
         </p:nvPicPr>
         <p:blipFill>
-          <a:blip xmlns:r="http://schemas.openxmlformats.org/officeDocument/2006/relationships" xmlns:a="http://schemas.openxmlformats.org/drawingml/2006/main" r:embed="R46a790d31f224eaf"/>
+          <a:blip xmlns:r="http://schemas.openxmlformats.org/officeDocument/2006/relationships" xmlns:a="http://schemas.openxmlformats.org/drawingml/2006/main" r:embed="R594764bfbc5e4754"/>
           <a:stretch xmlns:a="http://schemas.openxmlformats.org/drawingml/2006/main"/>
         </p:blipFill>
         <p:spPr>
@@ -4599,6 +4599,7 @@
               </a:defRPr>
             </a:defPPr>
             <a:lvl1pPr>
+              <a:buNone/>
               <a:defRPr>
                 <a:solidFill>
                   <a:srgbClr val="173B75"/>
@@ -4606,6 +4607,7 @@
               </a:defRPr>
             </a:lvl1pPr>
             <a:lvl2pPr>
+              <a:buNone/>
               <a:defRPr>
                 <a:solidFill>
                   <a:srgbClr val="173B75"/>
@@ -4613,6 +4615,7 @@
               </a:defRPr>
             </a:lvl2pPr>
             <a:lvl3pPr>
+              <a:buNone/>
               <a:defRPr>
                 <a:solidFill>
                   <a:srgbClr val="173B75"/>
@@ -4620,6 +4623,7 @@
               </a:defRPr>
             </a:lvl3pPr>
             <a:lvl4pPr>
+              <a:buNone/>
               <a:defRPr>
                 <a:solidFill>
                   <a:srgbClr val="173B75"/>
@@ -4627,6 +4631,7 @@
               </a:defRPr>
             </a:lvl4pPr>
             <a:lvl5pPr>
+              <a:buNone/>
               <a:defRPr>
                 <a:solidFill>
                   <a:srgbClr val="173B75"/>
@@ -4634,6 +4639,7 @@
               </a:defRPr>
             </a:lvl5pPr>
             <a:lvl6pPr>
+              <a:buNone/>
               <a:defRPr>
                 <a:solidFill>
                   <a:srgbClr val="173B75"/>
@@ -4641,6 +4647,7 @@
               </a:defRPr>
             </a:lvl6pPr>
             <a:lvl7pPr>
+              <a:buNone/>
               <a:defRPr>
                 <a:solidFill>
                   <a:srgbClr val="173B75"/>
@@ -4648,6 +4655,7 @@
               </a:defRPr>
             </a:lvl7pPr>
             <a:lvl8pPr>
+              <a:buNone/>
               <a:defRPr>
                 <a:solidFill>
                   <a:srgbClr val="173B75"/>
@@ -4655,6 +4663,7 @@
               </a:defRPr>
             </a:lvl8pPr>
             <a:lvl9pPr>
+              <a:buNone/>
               <a:defRPr>
                 <a:solidFill>
                   <a:srgbClr val="173B75"/>
@@ -4728,6 +4737,7 @@
               </a:defRPr>
             </a:defPPr>
             <a:lvl1pPr>
+              <a:buNone/>
               <a:defRPr>
                 <a:solidFill>
                   <a:srgbClr val="173B75"/>
@@ -4735,6 +4745,7 @@
               </a:defRPr>
             </a:lvl1pPr>
             <a:lvl2pPr>
+              <a:buNone/>
               <a:defRPr>
                 <a:solidFill>
                   <a:srgbClr val="173B75"/>
@@ -4742,6 +4753,7 @@
               </a:defRPr>
             </a:lvl2pPr>
             <a:lvl3pPr>
+              <a:buNone/>
               <a:defRPr>
                 <a:solidFill>
                   <a:srgbClr val="173B75"/>
@@ -4749,6 +4761,7 @@
               </a:defRPr>
             </a:lvl3pPr>
             <a:lvl4pPr>
+              <a:buNone/>
               <a:defRPr>
                 <a:solidFill>
                   <a:srgbClr val="173B75"/>
@@ -4756,6 +4769,7 @@
               </a:defRPr>
             </a:lvl4pPr>
             <a:lvl5pPr>
+              <a:buNone/>
               <a:defRPr>
                 <a:solidFill>
                   <a:srgbClr val="173B75"/>
@@ -4763,6 +4777,7 @@
               </a:defRPr>
             </a:lvl5pPr>
             <a:lvl6pPr>
+              <a:buNone/>
               <a:defRPr>
                 <a:solidFill>
                   <a:srgbClr val="173B75"/>
@@ -4770,6 +4785,7 @@
               </a:defRPr>
             </a:lvl6pPr>
             <a:lvl7pPr>
+              <a:buNone/>
               <a:defRPr>
                 <a:solidFill>
                   <a:srgbClr val="173B75"/>
@@ -4777,6 +4793,7 @@
               </a:defRPr>
             </a:lvl7pPr>
             <a:lvl8pPr>
+              <a:buNone/>
               <a:defRPr>
                 <a:solidFill>
                   <a:srgbClr val="173B75"/>
@@ -4784,6 +4801,7 @@
               </a:defRPr>
             </a:lvl8pPr>
             <a:lvl9pPr>
+              <a:buNone/>
               <a:defRPr>
                 <a:solidFill>
                   <a:srgbClr val="173B75"/>
@@ -4905,6 +4923,7 @@
               </a:defRPr>
             </a:defPPr>
             <a:lvl1pPr>
+              <a:buNone/>
               <a:defRPr>
                 <a:solidFill>
                   <a:srgbClr val="1768C7"/>
@@ -4912,6 +4931,7 @@
               </a:defRPr>
             </a:lvl1pPr>
             <a:lvl2pPr>
+              <a:buNone/>
               <a:defRPr>
                 <a:solidFill>
                   <a:srgbClr val="1768C7"/>
@@ -4919,6 +4939,7 @@
               </a:defRPr>
             </a:lvl2pPr>
             <a:lvl3pPr>
+              <a:buNone/>
               <a:defRPr>
                 <a:solidFill>
                   <a:srgbClr val="1768C7"/>
@@ -4926,6 +4947,7 @@
               </a:defRPr>
             </a:lvl3pPr>
             <a:lvl4pPr>
+              <a:buNone/>
               <a:defRPr>
                 <a:solidFill>
                   <a:srgbClr val="1768C7"/>
@@ -4933,6 +4955,7 @@
               </a:defRPr>
             </a:lvl4pPr>
             <a:lvl5pPr>
+              <a:buNone/>
               <a:defRPr>
                 <a:solidFill>
                   <a:srgbClr val="1768C7"/>
@@ -4940,6 +4963,7 @@
               </a:defRPr>
             </a:lvl5pPr>
             <a:lvl6pPr>
+              <a:buNone/>
               <a:defRPr>
                 <a:solidFill>
                   <a:srgbClr val="1768C7"/>
@@ -4947,6 +4971,7 @@
               </a:defRPr>
             </a:lvl6pPr>
             <a:lvl7pPr>
+              <a:buNone/>
               <a:defRPr>
                 <a:solidFill>
                   <a:srgbClr val="1768C7"/>
@@ -4954,6 +4979,7 @@
               </a:defRPr>
             </a:lvl7pPr>
             <a:lvl8pPr>
+              <a:buNone/>
               <a:defRPr>
                 <a:solidFill>
                   <a:srgbClr val="1768C7"/>
@@ -4961,6 +4987,7 @@
               </a:defRPr>
             </a:lvl8pPr>
             <a:lvl9pPr>
+              <a:buNone/>
               <a:defRPr>
                 <a:solidFill>
                   <a:srgbClr val="1768C7"/>
@@ -5034,6 +5061,7 @@
               </a:defRPr>
             </a:defPPr>
             <a:lvl1pPr>
+              <a:buNone/>
               <a:defRPr>
                 <a:solidFill>
                   <a:srgbClr val="173B75"/>
@@ -5041,6 +5069,7 @@
               </a:defRPr>
             </a:lvl1pPr>
             <a:lvl2pPr>
+              <a:buNone/>
               <a:defRPr>
                 <a:solidFill>
                   <a:srgbClr val="173B75"/>
@@ -5048,6 +5077,7 @@
               </a:defRPr>
             </a:lvl2pPr>
             <a:lvl3pPr>
+              <a:buNone/>
               <a:defRPr>
                 <a:solidFill>
                   <a:srgbClr val="173B75"/>
@@ -5055,6 +5085,7 @@
               </a:defRPr>
             </a:lvl3pPr>
             <a:lvl4pPr>
+              <a:buNone/>
               <a:defRPr>
                 <a:solidFill>
                   <a:srgbClr val="173B75"/>
@@ -5062,6 +5093,7 @@
               </a:defRPr>
             </a:lvl4pPr>
             <a:lvl5pPr>
+              <a:buNone/>
               <a:defRPr>
                 <a:solidFill>
                   <a:srgbClr val="173B75"/>
@@ -5069,6 +5101,7 @@
               </a:defRPr>
             </a:lvl5pPr>
             <a:lvl6pPr>
+              <a:buNone/>
               <a:defRPr>
                 <a:solidFill>
                   <a:srgbClr val="173B75"/>
@@ -5076,6 +5109,7 @@
               </a:defRPr>
             </a:lvl6pPr>
             <a:lvl7pPr>
+              <a:buNone/>
               <a:defRPr>
                 <a:solidFill>
                   <a:srgbClr val="173B75"/>
@@ -5083,6 +5117,7 @@
               </a:defRPr>
             </a:lvl7pPr>
             <a:lvl8pPr>
+              <a:buNone/>
               <a:defRPr>
                 <a:solidFill>
                   <a:srgbClr val="173B75"/>
@@ -5090,6 +5125,7 @@
               </a:defRPr>
             </a:lvl8pPr>
             <a:lvl9pPr>
+              <a:buNone/>
               <a:defRPr>
                 <a:solidFill>
                   <a:srgbClr val="173B75"/>
@@ -5221,6 +5257,7 @@
               </a:defRPr>
             </a:defPPr>
             <a:lvl1pPr>
+              <a:buNone/>
               <a:defRPr>
                 <a:solidFill>
                   <a:srgbClr val="1768C7"/>
@@ -5228,6 +5265,7 @@
               </a:defRPr>
             </a:lvl1pPr>
             <a:lvl2pPr>
+              <a:buNone/>
               <a:defRPr>
                 <a:solidFill>
                   <a:srgbClr val="1768C7"/>
@@ -5235,6 +5273,7 @@
               </a:defRPr>
             </a:lvl2pPr>
             <a:lvl3pPr>
+              <a:buNone/>
               <a:defRPr>
                 <a:solidFill>
                   <a:srgbClr val="1768C7"/>
@@ -5242,6 +5281,7 @@
               </a:defRPr>
             </a:lvl3pPr>
             <a:lvl4pPr>
+              <a:buNone/>
               <a:defRPr>
                 <a:solidFill>
                   <a:srgbClr val="1768C7"/>
@@ -5249,6 +5289,7 @@
               </a:defRPr>
             </a:lvl4pPr>
             <a:lvl5pPr>
+              <a:buNone/>
               <a:defRPr>
                 <a:solidFill>
                   <a:srgbClr val="1768C7"/>
@@ -5256,6 +5297,7 @@
               </a:defRPr>
             </a:lvl5pPr>
             <a:lvl6pPr>
+              <a:buNone/>
               <a:defRPr>
                 <a:solidFill>
                   <a:srgbClr val="1768C7"/>
@@ -5263,6 +5305,7 @@
               </a:defRPr>
             </a:lvl6pPr>
             <a:lvl7pPr>
+              <a:buNone/>
               <a:defRPr>
                 <a:solidFill>
                   <a:srgbClr val="1768C7"/>
@@ -5270,6 +5313,7 @@
               </a:defRPr>
             </a:lvl7pPr>
             <a:lvl8pPr>
+              <a:buNone/>
               <a:defRPr>
                 <a:solidFill>
                   <a:srgbClr val="1768C7"/>
@@ -5277,6 +5321,7 @@
               </a:defRPr>
             </a:lvl8pPr>
             <a:lvl9pPr>
+              <a:buNone/>
               <a:defRPr>
                 <a:solidFill>
                   <a:srgbClr val="1768C7"/>
@@ -5680,7 +5725,7 @@
           <p:cNvPr id="3" name="">
             <a:extLst xmlns:a="http://schemas.openxmlformats.org/drawingml/2006/main">
               <a:ext uri="{FF2B5EF4-FFF2-40B4-BE49-F238E27FC236}">
-                <a16:creationId xmlns:a16="http://schemas.microsoft.com/office/drawing/2014/main" id="{F7AA59C8-163B-4623-A6BA-7B74F7895377}"/>
+                <a16:creationId xmlns:a16="http://schemas.microsoft.com/office/drawing/2014/main" id="{179EE5FC-8339-41D5-A399-11D256470E88}"/>
               </a:ext>
             </a:extLst>
           </p:cNvPr>
@@ -5690,7 +5735,7 @@
           <p:nvPr/>
         </p:nvPicPr>
         <p:blipFill>
-          <a:blip xmlns:r="http://schemas.openxmlformats.org/officeDocument/2006/relationships" xmlns:a="http://schemas.openxmlformats.org/drawingml/2006/main" r:embed="R1046b4a977eb46a9"/>
+          <a:blip xmlns:r="http://schemas.openxmlformats.org/officeDocument/2006/relationships" xmlns:a="http://schemas.openxmlformats.org/drawingml/2006/main" r:embed="R9045a33294ae47da"/>
           <a:stretch xmlns:a="http://schemas.openxmlformats.org/drawingml/2006/main"/>
         </p:blipFill>
         <p:spPr>
@@ -5708,7 +5753,7 @@
           <p:cNvPr id="4" name="">
             <a:extLst xmlns:a="http://schemas.openxmlformats.org/drawingml/2006/main">
               <a:ext uri="{FF2B5EF4-FFF2-40B4-BE49-F238E27FC236}">
-                <a16:creationId xmlns:a16="http://schemas.microsoft.com/office/drawing/2014/main" id="{79BE21EE-9B7F-400B-B2E6-CB03344B8480}"/>
+                <a16:creationId xmlns:a16="http://schemas.microsoft.com/office/drawing/2014/main" id="{8A2E10DB-CC77-4D44-81B1-C21B7A431BF0}"/>
               </a:ext>
             </a:extLst>
           </p:cNvPr>
@@ -5718,7 +5763,7 @@
           <p:nvPr/>
         </p:nvPicPr>
         <p:blipFill>
-          <a:blip xmlns:r="http://schemas.openxmlformats.org/officeDocument/2006/relationships" xmlns:a="http://schemas.openxmlformats.org/drawingml/2006/main" r:embed="R91116e12c6714242"/>
+          <a:blip xmlns:r="http://schemas.openxmlformats.org/officeDocument/2006/relationships" xmlns:a="http://schemas.openxmlformats.org/drawingml/2006/main" r:embed="R08ea2c8689b94652"/>
           <a:stretch xmlns:a="http://schemas.openxmlformats.org/drawingml/2006/main"/>
         </p:blipFill>
         <p:spPr>
@@ -6334,6 +6379,7 @@
               </a:defRPr>
             </a:defPPr>
             <a:lvl1pPr>
+              <a:buNone/>
               <a:defRPr>
                 <a:solidFill>
                   <a:srgbClr val="173B75"/>
@@ -6341,6 +6387,7 @@
               </a:defRPr>
             </a:lvl1pPr>
             <a:lvl2pPr>
+              <a:buNone/>
               <a:defRPr>
                 <a:solidFill>
                   <a:srgbClr val="173B75"/>
@@ -6348,6 +6395,7 @@
               </a:defRPr>
             </a:lvl2pPr>
             <a:lvl3pPr>
+              <a:buNone/>
               <a:defRPr>
                 <a:solidFill>
                   <a:srgbClr val="173B75"/>
@@ -6355,6 +6403,7 @@
               </a:defRPr>
             </a:lvl3pPr>
             <a:lvl4pPr>
+              <a:buNone/>
               <a:defRPr>
                 <a:solidFill>
                   <a:srgbClr val="173B75"/>
@@ -6362,6 +6411,7 @@
               </a:defRPr>
             </a:lvl4pPr>
             <a:lvl5pPr>
+              <a:buNone/>
               <a:defRPr>
                 <a:solidFill>
                   <a:srgbClr val="173B75"/>
@@ -6369,6 +6419,7 @@
               </a:defRPr>
             </a:lvl5pPr>
             <a:lvl6pPr>
+              <a:buNone/>
               <a:defRPr>
                 <a:solidFill>
                   <a:srgbClr val="173B75"/>
@@ -6376,6 +6427,7 @@
               </a:defRPr>
             </a:lvl6pPr>
             <a:lvl7pPr>
+              <a:buNone/>
               <a:defRPr>
                 <a:solidFill>
                   <a:srgbClr val="173B75"/>
@@ -6383,6 +6435,7 @@
               </a:defRPr>
             </a:lvl7pPr>
             <a:lvl8pPr>
+              <a:buNone/>
               <a:defRPr>
                 <a:solidFill>
                   <a:srgbClr val="173B75"/>
@@ -6390,6 +6443,7 @@
               </a:defRPr>
             </a:lvl8pPr>
             <a:lvl9pPr>
+              <a:buNone/>
               <a:defRPr>
                 <a:solidFill>
                   <a:srgbClr val="173B75"/>
@@ -6463,6 +6517,7 @@
               </a:defRPr>
             </a:defPPr>
             <a:lvl1pPr>
+              <a:buNone/>
               <a:defRPr>
                 <a:solidFill>
                   <a:srgbClr val="1768C7"/>
@@ -6470,6 +6525,7 @@
               </a:defRPr>
             </a:lvl1pPr>
             <a:lvl2pPr>
+              <a:buNone/>
               <a:defRPr>
                 <a:solidFill>
                   <a:srgbClr val="1768C7"/>
@@ -6477,6 +6533,7 @@
               </a:defRPr>
             </a:lvl2pPr>
             <a:lvl3pPr>
+              <a:buNone/>
               <a:defRPr>
                 <a:solidFill>
                   <a:srgbClr val="1768C7"/>
@@ -6484,6 +6541,7 @@
               </a:defRPr>
             </a:lvl3pPr>
             <a:lvl4pPr>
+              <a:buNone/>
               <a:defRPr>
                 <a:solidFill>
                   <a:srgbClr val="1768C7"/>
@@ -6491,6 +6549,7 @@
               </a:defRPr>
             </a:lvl4pPr>
             <a:lvl5pPr>
+              <a:buNone/>
               <a:defRPr>
                 <a:solidFill>
                   <a:srgbClr val="1768C7"/>
@@ -6498,6 +6557,7 @@
               </a:defRPr>
             </a:lvl5pPr>
             <a:lvl6pPr>
+              <a:buNone/>
               <a:defRPr>
                 <a:solidFill>
                   <a:srgbClr val="1768C7"/>
@@ -6505,6 +6565,7 @@
               </a:defRPr>
             </a:lvl6pPr>
             <a:lvl7pPr>
+              <a:buNone/>
               <a:defRPr>
                 <a:solidFill>
                   <a:srgbClr val="1768C7"/>
@@ -6512,6 +6573,7 @@
               </a:defRPr>
             </a:lvl7pPr>
             <a:lvl8pPr>
+              <a:buNone/>
               <a:defRPr>
                 <a:solidFill>
                   <a:srgbClr val="1768C7"/>
@@ -6519,6 +6581,7 @@
               </a:defRPr>
             </a:lvl8pPr>
             <a:lvl9pPr>
+              <a:buNone/>
               <a:defRPr>
                 <a:solidFill>
                   <a:srgbClr val="1768C7"/>
@@ -6592,6 +6655,7 @@
               </a:defRPr>
             </a:defPPr>
             <a:lvl1pPr>
+              <a:buNone/>
               <a:defRPr>
                 <a:solidFill>
                   <a:srgbClr val="173B75"/>
@@ -6599,6 +6663,7 @@
               </a:defRPr>
             </a:lvl1pPr>
             <a:lvl2pPr>
+              <a:buNone/>
               <a:defRPr>
                 <a:solidFill>
                   <a:srgbClr val="173B75"/>
@@ -6606,6 +6671,7 @@
               </a:defRPr>
             </a:lvl2pPr>
             <a:lvl3pPr>
+              <a:buNone/>
               <a:defRPr>
                 <a:solidFill>
                   <a:srgbClr val="173B75"/>
@@ -6613,6 +6679,7 @@
               </a:defRPr>
             </a:lvl3pPr>
             <a:lvl4pPr>
+              <a:buNone/>
               <a:defRPr>
                 <a:solidFill>
                   <a:srgbClr val="173B75"/>
@@ -6620,6 +6687,7 @@
               </a:defRPr>
             </a:lvl4pPr>
             <a:lvl5pPr>
+              <a:buNone/>
               <a:defRPr>
                 <a:solidFill>
                   <a:srgbClr val="173B75"/>
@@ -6627,6 +6695,7 @@
               </a:defRPr>
             </a:lvl5pPr>
             <a:lvl6pPr>
+              <a:buNone/>
               <a:defRPr>
                 <a:solidFill>
                   <a:srgbClr val="173B75"/>
@@ -6634,6 +6703,7 @@
               </a:defRPr>
             </a:lvl6pPr>
             <a:lvl7pPr>
+              <a:buNone/>
               <a:defRPr>
                 <a:solidFill>
                   <a:srgbClr val="173B75"/>
@@ -6641,6 +6711,7 @@
               </a:defRPr>
             </a:lvl7pPr>
             <a:lvl8pPr>
+              <a:buNone/>
               <a:defRPr>
                 <a:solidFill>
                   <a:srgbClr val="173B75"/>
@@ -6648,6 +6719,7 @@
               </a:defRPr>
             </a:lvl8pPr>
             <a:lvl9pPr>
+              <a:buNone/>
               <a:defRPr>
                 <a:solidFill>
                   <a:srgbClr val="173B75"/>
@@ -6769,6 +6841,7 @@
               </a:defRPr>
             </a:defPPr>
             <a:lvl1pPr>
+              <a:buNone/>
               <a:defRPr>
                 <a:solidFill>
                   <a:srgbClr val="1768C7"/>
@@ -6776,6 +6849,7 @@
               </a:defRPr>
             </a:lvl1pPr>
             <a:lvl2pPr>
+              <a:buNone/>
               <a:defRPr>
                 <a:solidFill>
                   <a:srgbClr val="1768C7"/>
@@ -6783,6 +6857,7 @@
               </a:defRPr>
             </a:lvl2pPr>
             <a:lvl3pPr>
+              <a:buNone/>
               <a:defRPr>
                 <a:solidFill>
                   <a:srgbClr val="1768C7"/>
@@ -6790,6 +6865,7 @@
               </a:defRPr>
             </a:lvl3pPr>
             <a:lvl4pPr>
+              <a:buNone/>
               <a:defRPr>
                 <a:solidFill>
                   <a:srgbClr val="1768C7"/>
@@ -6797,6 +6873,7 @@
               </a:defRPr>
             </a:lvl4pPr>
             <a:lvl5pPr>
+              <a:buNone/>
               <a:defRPr>
                 <a:solidFill>
                   <a:srgbClr val="1768C7"/>
@@ -6804,6 +6881,7 @@
               </a:defRPr>
             </a:lvl5pPr>
             <a:lvl6pPr>
+              <a:buNone/>
               <a:defRPr>
                 <a:solidFill>
                   <a:srgbClr val="1768C7"/>
@@ -6811,6 +6889,7 @@
               </a:defRPr>
             </a:lvl6pPr>
             <a:lvl7pPr>
+              <a:buNone/>
               <a:defRPr>
                 <a:solidFill>
                   <a:srgbClr val="1768C7"/>
@@ -6818,6 +6897,7 @@
               </a:defRPr>
             </a:lvl7pPr>
             <a:lvl8pPr>
+              <a:buNone/>
               <a:defRPr>
                 <a:solidFill>
                   <a:srgbClr val="1768C7"/>
@@ -6825,6 +6905,7 @@
               </a:defRPr>
             </a:lvl8pPr>
             <a:lvl9pPr>
+              <a:buNone/>
               <a:defRPr>
                 <a:solidFill>
                   <a:srgbClr val="1768C7"/>
@@ -6898,6 +6979,7 @@
               </a:defRPr>
             </a:defPPr>
             <a:lvl1pPr>
+              <a:buNone/>
               <a:defRPr>
                 <a:solidFill>
                   <a:srgbClr val="173B75"/>
@@ -6905,6 +6987,7 @@
               </a:defRPr>
             </a:lvl1pPr>
             <a:lvl2pPr>
+              <a:buNone/>
               <a:defRPr>
                 <a:solidFill>
                   <a:srgbClr val="173B75"/>
@@ -6912,6 +6995,7 @@
               </a:defRPr>
             </a:lvl2pPr>
             <a:lvl3pPr>
+              <a:buNone/>
               <a:defRPr>
                 <a:solidFill>
                   <a:srgbClr val="173B75"/>
@@ -6919,6 +7003,7 @@
               </a:defRPr>
             </a:lvl3pPr>
             <a:lvl4pPr>
+              <a:buNone/>
               <a:defRPr>
                 <a:solidFill>
                   <a:srgbClr val="173B75"/>
@@ -6926,6 +7011,7 @@
               </a:defRPr>
             </a:lvl4pPr>
             <a:lvl5pPr>
+              <a:buNone/>
               <a:defRPr>
                 <a:solidFill>
                   <a:srgbClr val="173B75"/>
@@ -6933,6 +7019,7 @@
               </a:defRPr>
             </a:lvl5pPr>
             <a:lvl6pPr>
+              <a:buNone/>
               <a:defRPr>
                 <a:solidFill>
                   <a:srgbClr val="173B75"/>
@@ -6940,6 +7027,7 @@
               </a:defRPr>
             </a:lvl6pPr>
             <a:lvl7pPr>
+              <a:buNone/>
               <a:defRPr>
                 <a:solidFill>
                   <a:srgbClr val="173B75"/>
@@ -6947,6 +7035,7 @@
               </a:defRPr>
             </a:lvl7pPr>
             <a:lvl8pPr>
+              <a:buNone/>
               <a:defRPr>
                 <a:solidFill>
                   <a:srgbClr val="173B75"/>
@@ -6954,6 +7043,7 @@
               </a:defRPr>
             </a:lvl8pPr>
             <a:lvl9pPr>
+              <a:buNone/>
               <a:defRPr>
                 <a:solidFill>
                   <a:srgbClr val="173B75"/>
@@ -7075,6 +7165,7 @@
               </a:defRPr>
             </a:defPPr>
             <a:lvl1pPr>
+              <a:buNone/>
               <a:defRPr>
                 <a:solidFill>
                   <a:srgbClr val="173B75"/>
@@ -7082,6 +7173,7 @@
               </a:defRPr>
             </a:lvl1pPr>
             <a:lvl2pPr>
+              <a:buNone/>
               <a:defRPr>
                 <a:solidFill>
                   <a:srgbClr val="173B75"/>
@@ -7089,6 +7181,7 @@
               </a:defRPr>
             </a:lvl2pPr>
             <a:lvl3pPr>
+              <a:buNone/>
               <a:defRPr>
                 <a:solidFill>
                   <a:srgbClr val="173B75"/>
@@ -7096,6 +7189,7 @@
               </a:defRPr>
             </a:lvl3pPr>
             <a:lvl4pPr>
+              <a:buNone/>
               <a:defRPr>
                 <a:solidFill>
                   <a:srgbClr val="173B75"/>
@@ -7103,6 +7197,7 @@
               </a:defRPr>
             </a:lvl4pPr>
             <a:lvl5pPr>
+              <a:buNone/>
               <a:defRPr>
                 <a:solidFill>
                   <a:srgbClr val="173B75"/>
@@ -7110,6 +7205,7 @@
               </a:defRPr>
             </a:lvl5pPr>
             <a:lvl6pPr>
+              <a:buNone/>
               <a:defRPr>
                 <a:solidFill>
                   <a:srgbClr val="173B75"/>
@@ -7117,6 +7213,7 @@
               </a:defRPr>
             </a:lvl6pPr>
             <a:lvl7pPr>
+              <a:buNone/>
               <a:defRPr>
                 <a:solidFill>
                   <a:srgbClr val="173B75"/>
@@ -7124,6 +7221,7 @@
               </a:defRPr>
             </a:lvl7pPr>
             <a:lvl8pPr>
+              <a:buNone/>
               <a:defRPr>
                 <a:solidFill>
                   <a:srgbClr val="173B75"/>
@@ -7131,6 +7229,7 @@
               </a:defRPr>
             </a:lvl8pPr>
             <a:lvl9pPr>
+              <a:buNone/>
               <a:defRPr>
                 <a:solidFill>
                   <a:srgbClr val="173B75"/>
@@ -7204,6 +7303,7 @@
               </a:defRPr>
             </a:defPPr>
             <a:lvl1pPr>
+              <a:buNone/>
               <a:defRPr>
                 <a:solidFill>
                   <a:srgbClr val="1768C7"/>
@@ -7211,6 +7311,7 @@
               </a:defRPr>
             </a:lvl1pPr>
             <a:lvl2pPr>
+              <a:buNone/>
               <a:defRPr>
                 <a:solidFill>
                   <a:srgbClr val="1768C7"/>
@@ -7218,6 +7319,7 @@
               </a:defRPr>
             </a:lvl2pPr>
             <a:lvl3pPr>
+              <a:buNone/>
               <a:defRPr>
                 <a:solidFill>
                   <a:srgbClr val="1768C7"/>
@@ -7225,6 +7327,7 @@
               </a:defRPr>
             </a:lvl3pPr>
             <a:lvl4pPr>
+              <a:buNone/>
               <a:defRPr>
                 <a:solidFill>
                   <a:srgbClr val="1768C7"/>
@@ -7232,6 +7335,7 @@
               </a:defRPr>
             </a:lvl4pPr>
             <a:lvl5pPr>
+              <a:buNone/>
               <a:defRPr>
                 <a:solidFill>
                   <a:srgbClr val="1768C7"/>
@@ -7239,6 +7343,7 @@
               </a:defRPr>
             </a:lvl5pPr>
             <a:lvl6pPr>
+              <a:buNone/>
               <a:defRPr>
                 <a:solidFill>
                   <a:srgbClr val="1768C7"/>
@@ -7246,6 +7351,7 @@
               </a:defRPr>
             </a:lvl6pPr>
             <a:lvl7pPr>
+              <a:buNone/>
               <a:defRPr>
                 <a:solidFill>
                   <a:srgbClr val="1768C7"/>
@@ -7253,6 +7359,7 @@
               </a:defRPr>
             </a:lvl7pPr>
             <a:lvl8pPr>
+              <a:buNone/>
               <a:defRPr>
                 <a:solidFill>
                   <a:srgbClr val="1768C7"/>
@@ -7260,6 +7367,7 @@
               </a:defRPr>
             </a:lvl8pPr>
             <a:lvl9pPr>
+              <a:buNone/>
               <a:defRPr>
                 <a:solidFill>
                   <a:srgbClr val="1768C7"/>
@@ -7573,7 +7681,7 @@
           <p:cNvPr id="10" name="">
             <a:extLst xmlns:a="http://schemas.openxmlformats.org/drawingml/2006/main">
               <a:ext uri="{FF2B5EF4-FFF2-40B4-BE49-F238E27FC236}">
-                <a16:creationId xmlns:a16="http://schemas.microsoft.com/office/drawing/2014/main" id="{1AAB0C77-8B67-426F-B8E6-FCEF16A63EE1}"/>
+                <a16:creationId xmlns:a16="http://schemas.microsoft.com/office/drawing/2014/main" id="{7249F54F-CB39-4130-A33F-A02DCBF5439A}"/>
               </a:ext>
             </a:extLst>
           </p:cNvPr>
@@ -7583,7 +7691,7 @@
           <p:nvPr/>
         </p:nvPicPr>
         <p:blipFill>
-          <a:blip xmlns:r="http://schemas.openxmlformats.org/officeDocument/2006/relationships" xmlns:a="http://schemas.openxmlformats.org/drawingml/2006/main" r:embed="Rc305b240c50c459b"/>
+          <a:blip xmlns:r="http://schemas.openxmlformats.org/officeDocument/2006/relationships" xmlns:a="http://schemas.openxmlformats.org/drawingml/2006/main" r:embed="Rbcbbbd4bd2e346cc"/>
           <a:srcRect xmlns:a="http://schemas.openxmlformats.org/drawingml/2006/main" l="0" t="0" r="0" b="0"/>
           <a:stretch xmlns:a="http://schemas.openxmlformats.org/drawingml/2006/main"/>
         </p:blipFill>
@@ -7951,6 +8059,7 @@
               </a:defRPr>
             </a:defPPr>
             <a:lvl1pPr>
+              <a:buNone/>
               <a:defRPr sz="2175" b="1">
                 <a:solidFill>
                   <a:srgbClr val="173B75"/>
@@ -7961,6 +8070,7 @@
               </a:defRPr>
             </a:lvl1pPr>
             <a:lvl2pPr>
+              <a:buNone/>
               <a:defRPr sz="2175" b="1">
                 <a:solidFill>
                   <a:srgbClr val="173B75"/>
@@ -7971,6 +8081,7 @@
               </a:defRPr>
             </a:lvl2pPr>
             <a:lvl3pPr>
+              <a:buNone/>
               <a:defRPr sz="2175" b="1">
                 <a:solidFill>
                   <a:srgbClr val="173B75"/>
@@ -7981,6 +8092,7 @@
               </a:defRPr>
             </a:lvl3pPr>
             <a:lvl4pPr>
+              <a:buNone/>
               <a:defRPr sz="2175" b="1">
                 <a:solidFill>
                   <a:srgbClr val="173B75"/>
@@ -7991,6 +8103,7 @@
               </a:defRPr>
             </a:lvl4pPr>
             <a:lvl5pPr>
+              <a:buNone/>
               <a:defRPr sz="2175" b="1">
                 <a:solidFill>
                   <a:srgbClr val="173B75"/>
@@ -8001,6 +8114,7 @@
               </a:defRPr>
             </a:lvl5pPr>
             <a:lvl6pPr>
+              <a:buNone/>
               <a:defRPr sz="2175" b="1">
                 <a:solidFill>
                   <a:srgbClr val="173B75"/>
@@ -8011,6 +8125,7 @@
               </a:defRPr>
             </a:lvl6pPr>
             <a:lvl7pPr>
+              <a:buNone/>
               <a:defRPr sz="2175" b="1">
                 <a:solidFill>
                   <a:srgbClr val="173B75"/>
@@ -8021,6 +8136,7 @@
               </a:defRPr>
             </a:lvl7pPr>
             <a:lvl8pPr>
+              <a:buNone/>
               <a:defRPr sz="2175" b="1">
                 <a:solidFill>
                   <a:srgbClr val="173B75"/>
@@ -8031,6 +8147,7 @@
               </a:defRPr>
             </a:lvl8pPr>
             <a:lvl9pPr>
+              <a:buNone/>
               <a:defRPr sz="2175" b="1">
                 <a:solidFill>
                   <a:srgbClr val="173B75"/>
@@ -8043,6 +8160,7 @@
           </a:lstStyle>
           <a:p xmlns:a="http://schemas.openxmlformats.org/drawingml/2006/main">
             <a:pPr>
+              <a:buNone/>
               <a:defRPr sz="2175" b="1">
                 <a:solidFill>
                   <a:srgbClr val="173B75"/>
@@ -8071,7 +8189,7 @@
           <p:cNvPr id="2" name="">
             <a:extLst xmlns:a="http://schemas.openxmlformats.org/drawingml/2006/main">
               <a:ext uri="{FF2B5EF4-FFF2-40B4-BE49-F238E27FC236}">
-                <a16:creationId xmlns:a16="http://schemas.microsoft.com/office/drawing/2014/main" id="{9EB2DB45-990A-4E83-854F-C6C956B4619D}"/>
+                <a16:creationId xmlns:a16="http://schemas.microsoft.com/office/drawing/2014/main" id="{3F708B57-BD8E-46A8-B3E0-2DB4E27A2CF1}"/>
               </a:ext>
             </a:extLst>
           </p:cNvPr>
@@ -8081,10 +8199,10 @@
           <p:nvPr/>
         </p:nvPicPr>
         <p:blipFill>
-          <a:blip xmlns:r="http://schemas.openxmlformats.org/officeDocument/2006/relationships" xmlns:a="http://schemas.openxmlformats.org/drawingml/2006/main" r:embed="Rf4285cb48bd9418d">
+          <a:blip xmlns:r="http://schemas.openxmlformats.org/officeDocument/2006/relationships" xmlns:a="http://schemas.openxmlformats.org/drawingml/2006/main" r:embed="R7278ab48a33e4ba4">
             <a:extLst>
               <a:ext uri="{96DAC541-7B7A-43D3-8B79-37D633B846F1}">
-                <asvg:svgBlip xmlns:asvg="http://schemas.microsoft.com/office/drawing/2016/SVG/main" r:embed="Redc056869654470e"/>
+                <asvg:svgBlip xmlns:asvg="http://schemas.microsoft.com/office/drawing/2016/SVG/main" r:embed="R5c0e6d95b37a4f45"/>
               </a:ext>
             </a:extLst>
           </a:blip>
@@ -8143,6 +8261,7 @@
               </a:defRPr>
             </a:defPPr>
             <a:lvl1pPr>
+              <a:buNone/>
               <a:defRPr sz="2850" b="1">
                 <a:solidFill>
                   <a:srgbClr val="173B75"/>
@@ -8153,6 +8272,7 @@
               </a:defRPr>
             </a:lvl1pPr>
             <a:lvl2pPr>
+              <a:buNone/>
               <a:defRPr sz="2850" b="1">
                 <a:solidFill>
                   <a:srgbClr val="173B75"/>
@@ -8163,6 +8283,7 @@
               </a:defRPr>
             </a:lvl2pPr>
             <a:lvl3pPr>
+              <a:buNone/>
               <a:defRPr sz="2850" b="1">
                 <a:solidFill>
                   <a:srgbClr val="173B75"/>
@@ -8173,6 +8294,7 @@
               </a:defRPr>
             </a:lvl3pPr>
             <a:lvl4pPr>
+              <a:buNone/>
               <a:defRPr sz="2850" b="1">
                 <a:solidFill>
                   <a:srgbClr val="173B75"/>
@@ -8183,6 +8305,7 @@
               </a:defRPr>
             </a:lvl4pPr>
             <a:lvl5pPr>
+              <a:buNone/>
               <a:defRPr sz="2850" b="1">
                 <a:solidFill>
                   <a:srgbClr val="173B75"/>
@@ -8193,6 +8316,7 @@
               </a:defRPr>
             </a:lvl5pPr>
             <a:lvl6pPr>
+              <a:buNone/>
               <a:defRPr sz="2850" b="1">
                 <a:solidFill>
                   <a:srgbClr val="173B75"/>
@@ -8203,6 +8327,7 @@
               </a:defRPr>
             </a:lvl6pPr>
             <a:lvl7pPr>
+              <a:buNone/>
               <a:defRPr sz="2850" b="1">
                 <a:solidFill>
                   <a:srgbClr val="173B75"/>
@@ -8213,6 +8338,7 @@
               </a:defRPr>
             </a:lvl7pPr>
             <a:lvl8pPr>
+              <a:buNone/>
               <a:defRPr sz="2850" b="1">
                 <a:solidFill>
                   <a:srgbClr val="173B75"/>
@@ -8223,6 +8349,7 @@
               </a:defRPr>
             </a:lvl8pPr>
             <a:lvl9pPr>
+              <a:buNone/>
               <a:defRPr sz="2850" b="1">
                 <a:solidFill>
                   <a:srgbClr val="173B75"/>
@@ -8235,6 +8362,7 @@
           </a:lstStyle>
           <a:p xmlns:a="http://schemas.openxmlformats.org/drawingml/2006/main">
             <a:pPr>
+              <a:buNone/>
               <a:defRPr sz="2850" b="1">
                 <a:solidFill>
                   <a:srgbClr val="173B75"/>
@@ -8301,6 +8429,7 @@
               </a:defRPr>
             </a:defPPr>
             <a:lvl1pPr>
+              <a:buNone/>
               <a:defRPr sz="1575" b="0">
                 <a:solidFill>
                   <a:srgbClr val="607DA3"/>
@@ -8311,6 +8440,7 @@
               </a:defRPr>
             </a:lvl1pPr>
             <a:lvl2pPr>
+              <a:buNone/>
               <a:defRPr sz="1575" b="0">
                 <a:solidFill>
                   <a:srgbClr val="607DA3"/>
@@ -8321,6 +8451,7 @@
               </a:defRPr>
             </a:lvl2pPr>
             <a:lvl3pPr>
+              <a:buNone/>
               <a:defRPr sz="1575" b="0">
                 <a:solidFill>
                   <a:srgbClr val="607DA3"/>
@@ -8331,6 +8462,7 @@
               </a:defRPr>
             </a:lvl3pPr>
             <a:lvl4pPr>
+              <a:buNone/>
               <a:defRPr sz="1575" b="0">
                 <a:solidFill>
                   <a:srgbClr val="607DA3"/>
@@ -8341,6 +8473,7 @@
               </a:defRPr>
             </a:lvl4pPr>
             <a:lvl5pPr>
+              <a:buNone/>
               <a:defRPr sz="1575" b="0">
                 <a:solidFill>
                   <a:srgbClr val="607DA3"/>
@@ -8351,6 +8484,7 @@
               </a:defRPr>
             </a:lvl5pPr>
             <a:lvl6pPr>
+              <a:buNone/>
               <a:defRPr sz="1575" b="0">
                 <a:solidFill>
                   <a:srgbClr val="607DA3"/>
@@ -8361,6 +8495,7 @@
               </a:defRPr>
             </a:lvl6pPr>
             <a:lvl7pPr>
+              <a:buNone/>
               <a:defRPr sz="1575" b="0">
                 <a:solidFill>
                   <a:srgbClr val="607DA3"/>
@@ -8371,6 +8506,7 @@
               </a:defRPr>
             </a:lvl7pPr>
             <a:lvl8pPr>
+              <a:buNone/>
               <a:defRPr sz="1575" b="0">
                 <a:solidFill>
                   <a:srgbClr val="607DA3"/>
@@ -8381,6 +8517,7 @@
               </a:defRPr>
             </a:lvl8pPr>
             <a:lvl9pPr>
+              <a:buNone/>
               <a:defRPr sz="1575" b="0">
                 <a:solidFill>
                   <a:srgbClr val="607DA3"/>
@@ -8393,6 +8530,7 @@
           </a:lstStyle>
           <a:p xmlns:a="http://schemas.openxmlformats.org/drawingml/2006/main">
             <a:pPr>
+              <a:buNone/>
               <a:defRPr sz="1575" b="0">
                 <a:solidFill>
                   <a:srgbClr val="607DA3"/>
@@ -8421,7 +8559,7 @@
           <p:cNvPr id="5" name="Blue process arrow">
             <a:extLst xmlns:a="http://schemas.openxmlformats.org/drawingml/2006/main">
               <a:ext uri="{FF2B5EF4-FFF2-40B4-BE49-F238E27FC236}">
-                <a16:creationId xmlns:a16="http://schemas.microsoft.com/office/drawing/2014/main" id="{4BD4B128-656C-46D3-92D5-91BA497DA5FF}"/>
+                <a16:creationId xmlns:a16="http://schemas.microsoft.com/office/drawing/2014/main" id="{62994324-3843-4D8A-8568-51A798B9956E}"/>
               </a:ext>
             </a:extLst>
           </p:cNvPr>
@@ -8449,7 +8587,7 @@
           <p:cNvPr id="6" name="Blue process arrow">
             <a:extLst xmlns:a="http://schemas.openxmlformats.org/drawingml/2006/main">
               <a:ext uri="{FF2B5EF4-FFF2-40B4-BE49-F238E27FC236}">
-                <a16:creationId xmlns:a16="http://schemas.microsoft.com/office/drawing/2014/main" id="{BBDD0C3A-8978-43D6-9952-95A7131FE30D}"/>
+                <a16:creationId xmlns:a16="http://schemas.microsoft.com/office/drawing/2014/main" id="{444BCB25-56B4-4657-A906-2E6403EF308E}"/>
               </a:ext>
             </a:extLst>
           </p:cNvPr>
@@ -8477,7 +8615,7 @@
           <p:cNvPr id="7" name="Blue process arrow">
             <a:extLst xmlns:a="http://schemas.openxmlformats.org/drawingml/2006/main">
               <a:ext uri="{FF2B5EF4-FFF2-40B4-BE49-F238E27FC236}">
-                <a16:creationId xmlns:a16="http://schemas.microsoft.com/office/drawing/2014/main" id="{9B4AC95B-4D89-4C7B-B224-251B466A91FB}"/>
+                <a16:creationId xmlns:a16="http://schemas.microsoft.com/office/drawing/2014/main" id="{CFB41D16-00B5-4345-9A31-C1872CF2B827}"/>
               </a:ext>
             </a:extLst>
           </p:cNvPr>
@@ -8505,7 +8643,7 @@
           <p:cNvPr id="8" name="Blue process arrow">
             <a:extLst xmlns:a="http://schemas.openxmlformats.org/drawingml/2006/main">
               <a:ext uri="{FF2B5EF4-FFF2-40B4-BE49-F238E27FC236}">
-                <a16:creationId xmlns:a16="http://schemas.microsoft.com/office/drawing/2014/main" id="{EA69BABF-636E-4E12-8F41-AF0497C0555C}"/>
+                <a16:creationId xmlns:a16="http://schemas.microsoft.com/office/drawing/2014/main" id="{5ADE8E08-242B-44F7-B3DE-44939F3943F3}"/>
               </a:ext>
             </a:extLst>
           </p:cNvPr>
@@ -8605,6 +8743,7 @@
               </a:defRPr>
             </a:defPPr>
             <a:lvl1pPr>
+              <a:buNone/>
               <a:defRPr sz="1650" b="1">
                 <a:solidFill>
                   <a:srgbClr val="1768C7"/>
@@ -8615,6 +8754,7 @@
               </a:defRPr>
             </a:lvl1pPr>
             <a:lvl2pPr>
+              <a:buNone/>
               <a:defRPr sz="1650" b="1">
                 <a:solidFill>
                   <a:srgbClr val="1768C7"/>
@@ -8625,6 +8765,7 @@
               </a:defRPr>
             </a:lvl2pPr>
             <a:lvl3pPr>
+              <a:buNone/>
               <a:defRPr sz="1650" b="1">
                 <a:solidFill>
                   <a:srgbClr val="1768C7"/>
@@ -8635,6 +8776,7 @@
               </a:defRPr>
             </a:lvl3pPr>
             <a:lvl4pPr>
+              <a:buNone/>
               <a:defRPr sz="1650" b="1">
                 <a:solidFill>
                   <a:srgbClr val="1768C7"/>
@@ -8645,6 +8787,7 @@
               </a:defRPr>
             </a:lvl4pPr>
             <a:lvl5pPr>
+              <a:buNone/>
               <a:defRPr sz="1650" b="1">
                 <a:solidFill>
                   <a:srgbClr val="1768C7"/>
@@ -8655,6 +8798,7 @@
               </a:defRPr>
             </a:lvl5pPr>
             <a:lvl6pPr>
+              <a:buNone/>
               <a:defRPr sz="1650" b="1">
                 <a:solidFill>
                   <a:srgbClr val="1768C7"/>
@@ -8665,6 +8809,7 @@
               </a:defRPr>
             </a:lvl6pPr>
             <a:lvl7pPr>
+              <a:buNone/>
               <a:defRPr sz="1650" b="1">
                 <a:solidFill>
                   <a:srgbClr val="1768C7"/>
@@ -8675,6 +8820,7 @@
               </a:defRPr>
             </a:lvl7pPr>
             <a:lvl8pPr>
+              <a:buNone/>
               <a:defRPr sz="1650" b="1">
                 <a:solidFill>
                   <a:srgbClr val="1768C7"/>
@@ -8685,6 +8831,7 @@
               </a:defRPr>
             </a:lvl8pPr>
             <a:lvl9pPr>
+              <a:buNone/>
               <a:defRPr sz="1650" b="1">
                 <a:solidFill>
                   <a:srgbClr val="1768C7"/>
@@ -8697,6 +8844,7 @@
           </a:lstStyle>
           <a:p xmlns:a="http://schemas.openxmlformats.org/drawingml/2006/main">
             <a:pPr>
+              <a:buNone/>
               <a:defRPr sz="1650" b="1">
                 <a:solidFill>
                   <a:srgbClr val="1768C7"/>
@@ -8763,6 +8911,7 @@
               </a:defRPr>
             </a:defPPr>
             <a:lvl1pPr>
+              <a:buNone/>
               <a:defRPr sz="1575" b="0">
                 <a:solidFill>
                   <a:srgbClr val="173B75"/>
@@ -8773,6 +8922,7 @@
               </a:defRPr>
             </a:lvl1pPr>
             <a:lvl2pPr>
+              <a:buNone/>
               <a:defRPr sz="1575" b="0">
                 <a:solidFill>
                   <a:srgbClr val="173B75"/>
@@ -8783,6 +8933,7 @@
               </a:defRPr>
             </a:lvl2pPr>
             <a:lvl3pPr>
+              <a:buNone/>
               <a:defRPr sz="1575" b="0">
                 <a:solidFill>
                   <a:srgbClr val="173B75"/>
@@ -8793,6 +8944,7 @@
               </a:defRPr>
             </a:lvl3pPr>
             <a:lvl4pPr>
+              <a:buNone/>
               <a:defRPr sz="1575" b="0">
                 <a:solidFill>
                   <a:srgbClr val="173B75"/>
@@ -8803,6 +8955,7 @@
               </a:defRPr>
             </a:lvl4pPr>
             <a:lvl5pPr>
+              <a:buNone/>
               <a:defRPr sz="1575" b="0">
                 <a:solidFill>
                   <a:srgbClr val="173B75"/>
@@ -8813,6 +8966,7 @@
               </a:defRPr>
             </a:lvl5pPr>
             <a:lvl6pPr>
+              <a:buNone/>
               <a:defRPr sz="1575" b="0">
                 <a:solidFill>
                   <a:srgbClr val="173B75"/>
@@ -8823,6 +8977,7 @@
               </a:defRPr>
             </a:lvl6pPr>
             <a:lvl7pPr>
+              <a:buNone/>
               <a:defRPr sz="1575" b="0">
                 <a:solidFill>
                   <a:srgbClr val="173B75"/>
@@ -8833,6 +8988,7 @@
               </a:defRPr>
             </a:lvl7pPr>
             <a:lvl8pPr>
+              <a:buNone/>
               <a:defRPr sz="1575" b="0">
                 <a:solidFill>
                   <a:srgbClr val="173B75"/>
@@ -8843,6 +8999,7 @@
               </a:defRPr>
             </a:lvl8pPr>
             <a:lvl9pPr>
+              <a:buNone/>
               <a:defRPr sz="1575" b="0">
                 <a:solidFill>
                   <a:srgbClr val="173B75"/>
@@ -8855,6 +9012,7 @@
           </a:lstStyle>
           <a:p xmlns:a="http://schemas.openxmlformats.org/drawingml/2006/main">
             <a:pPr>
+              <a:buNone/>
               <a:defRPr sz="1575" b="0">
                 <a:solidFill>
                   <a:srgbClr val="173B75"/>
@@ -8878,6 +9036,7 @@
           </a:p>
           <a:p xmlns:a="http://schemas.openxmlformats.org/drawingml/2006/main">
             <a:pPr>
+              <a:buNone/>
               <a:defRPr sz="1575" b="0">
                 <a:solidFill>
                   <a:srgbClr val="173B75"/>
@@ -8901,6 +9060,7 @@
           </a:p>
           <a:p xmlns:a="http://schemas.openxmlformats.org/drawingml/2006/main">
             <a:pPr>
+              <a:buNone/>
               <a:defRPr sz="1575" b="0">
                 <a:solidFill>
                   <a:srgbClr val="173B75"/>
@@ -9001,6 +9161,7 @@
               </a:defRPr>
             </a:defPPr>
             <a:lvl1pPr>
+              <a:buNone/>
               <a:defRPr sz="1650" b="1">
                 <a:solidFill>
                   <a:srgbClr val="1768C7"/>
@@ -9011,6 +9172,7 @@
               </a:defRPr>
             </a:lvl1pPr>
             <a:lvl2pPr>
+              <a:buNone/>
               <a:defRPr sz="1650" b="1">
                 <a:solidFill>
                   <a:srgbClr val="1768C7"/>
@@ -9021,6 +9183,7 @@
               </a:defRPr>
             </a:lvl2pPr>
             <a:lvl3pPr>
+              <a:buNone/>
               <a:defRPr sz="1650" b="1">
                 <a:solidFill>
                   <a:srgbClr val="1768C7"/>
@@ -9031,6 +9194,7 @@
               </a:defRPr>
             </a:lvl3pPr>
             <a:lvl4pPr>
+              <a:buNone/>
               <a:defRPr sz="1650" b="1">
                 <a:solidFill>
                   <a:srgbClr val="1768C7"/>
@@ -9041,6 +9205,7 @@
               </a:defRPr>
             </a:lvl4pPr>
             <a:lvl5pPr>
+              <a:buNone/>
               <a:defRPr sz="1650" b="1">
                 <a:solidFill>
                   <a:srgbClr val="1768C7"/>
@@ -9051,6 +9216,7 @@
               </a:defRPr>
             </a:lvl5pPr>
             <a:lvl6pPr>
+              <a:buNone/>
               <a:defRPr sz="1650" b="1">
                 <a:solidFill>
                   <a:srgbClr val="1768C7"/>
@@ -9061,6 +9227,7 @@
               </a:defRPr>
             </a:lvl6pPr>
             <a:lvl7pPr>
+              <a:buNone/>
               <a:defRPr sz="1650" b="1">
                 <a:solidFill>
                   <a:srgbClr val="1768C7"/>
@@ -9071,6 +9238,7 @@
               </a:defRPr>
             </a:lvl7pPr>
             <a:lvl8pPr>
+              <a:buNone/>
               <a:defRPr sz="1650" b="1">
                 <a:solidFill>
                   <a:srgbClr val="1768C7"/>
@@ -9081,6 +9249,7 @@
               </a:defRPr>
             </a:lvl8pPr>
             <a:lvl9pPr>
+              <a:buNone/>
               <a:defRPr sz="1650" b="1">
                 <a:solidFill>
                   <a:srgbClr val="1768C7"/>
@@ -9093,6 +9262,7 @@
           </a:lstStyle>
           <a:p xmlns:a="http://schemas.openxmlformats.org/drawingml/2006/main">
             <a:pPr>
+              <a:buNone/>
               <a:defRPr sz="1650" b="1">
                 <a:solidFill>
                   <a:srgbClr val="1768C7"/>
@@ -9159,6 +9329,7 @@
               </a:defRPr>
             </a:defPPr>
             <a:lvl1pPr>
+              <a:buNone/>
               <a:defRPr sz="1575" b="0">
                 <a:solidFill>
                   <a:srgbClr val="173B75"/>
@@ -9169,6 +9340,7 @@
               </a:defRPr>
             </a:lvl1pPr>
             <a:lvl2pPr>
+              <a:buNone/>
               <a:defRPr sz="1575" b="0">
                 <a:solidFill>
                   <a:srgbClr val="173B75"/>
@@ -9179,6 +9351,7 @@
               </a:defRPr>
             </a:lvl2pPr>
             <a:lvl3pPr>
+              <a:buNone/>
               <a:defRPr sz="1575" b="0">
                 <a:solidFill>
                   <a:srgbClr val="173B75"/>
@@ -9189,6 +9362,7 @@
               </a:defRPr>
             </a:lvl3pPr>
             <a:lvl4pPr>
+              <a:buNone/>
               <a:defRPr sz="1575" b="0">
                 <a:solidFill>
                   <a:srgbClr val="173B75"/>
@@ -9199,6 +9373,7 @@
               </a:defRPr>
             </a:lvl4pPr>
             <a:lvl5pPr>
+              <a:buNone/>
               <a:defRPr sz="1575" b="0">
                 <a:solidFill>
                   <a:srgbClr val="173B75"/>
@@ -9209,6 +9384,7 @@
               </a:defRPr>
             </a:lvl5pPr>
             <a:lvl6pPr>
+              <a:buNone/>
               <a:defRPr sz="1575" b="0">
                 <a:solidFill>
                   <a:srgbClr val="173B75"/>
@@ -9219,6 +9395,7 @@
               </a:defRPr>
             </a:lvl6pPr>
             <a:lvl7pPr>
+              <a:buNone/>
               <a:defRPr sz="1575" b="0">
                 <a:solidFill>
                   <a:srgbClr val="173B75"/>
@@ -9229,6 +9406,7 @@
               </a:defRPr>
             </a:lvl7pPr>
             <a:lvl8pPr>
+              <a:buNone/>
               <a:defRPr sz="1575" b="0">
                 <a:solidFill>
                   <a:srgbClr val="173B75"/>
@@ -9239,6 +9417,7 @@
               </a:defRPr>
             </a:lvl8pPr>
             <a:lvl9pPr>
+              <a:buNone/>
               <a:defRPr sz="1575" b="0">
                 <a:solidFill>
                   <a:srgbClr val="173B75"/>
@@ -9251,6 +9430,7 @@
           </a:lstStyle>
           <a:p xmlns:a="http://schemas.openxmlformats.org/drawingml/2006/main">
             <a:pPr>
+              <a:buNone/>
               <a:defRPr sz="1575" b="0">
                 <a:solidFill>
                   <a:srgbClr val="173B75"/>
@@ -9274,6 +9454,7 @@
           </a:p>
           <a:p xmlns:a="http://schemas.openxmlformats.org/drawingml/2006/main">
             <a:pPr>
+              <a:buNone/>
               <a:defRPr sz="1575" b="0">
                 <a:solidFill>
                   <a:srgbClr val="173B75"/>
@@ -9297,6 +9478,7 @@
           </a:p>
           <a:p xmlns:a="http://schemas.openxmlformats.org/drawingml/2006/main">
             <a:pPr>
+              <a:buNone/>
               <a:defRPr sz="1575" b="0">
                 <a:solidFill>
                   <a:srgbClr val="173B75"/>
@@ -9397,6 +9579,7 @@
               </a:defRPr>
             </a:defPPr>
             <a:lvl1pPr>
+              <a:buNone/>
               <a:defRPr sz="1650" b="1">
                 <a:solidFill>
                   <a:srgbClr val="1768C7"/>
@@ -9407,6 +9590,7 @@
               </a:defRPr>
             </a:lvl1pPr>
             <a:lvl2pPr>
+              <a:buNone/>
               <a:defRPr sz="1650" b="1">
                 <a:solidFill>
                   <a:srgbClr val="1768C7"/>
@@ -9417,6 +9601,7 @@
               </a:defRPr>
             </a:lvl2pPr>
             <a:lvl3pPr>
+              <a:buNone/>
               <a:defRPr sz="1650" b="1">
                 <a:solidFill>
                   <a:srgbClr val="1768C7"/>
@@ -9427,6 +9612,7 @@
               </a:defRPr>
             </a:lvl3pPr>
             <a:lvl4pPr>
+              <a:buNone/>
               <a:defRPr sz="1650" b="1">
                 <a:solidFill>
                   <a:srgbClr val="1768C7"/>
@@ -9437,6 +9623,7 @@
               </a:defRPr>
             </a:lvl4pPr>
             <a:lvl5pPr>
+              <a:buNone/>
               <a:defRPr sz="1650" b="1">
                 <a:solidFill>
                   <a:srgbClr val="1768C7"/>
@@ -9447,6 +9634,7 @@
               </a:defRPr>
             </a:lvl5pPr>
             <a:lvl6pPr>
+              <a:buNone/>
               <a:defRPr sz="1650" b="1">
                 <a:solidFill>
                   <a:srgbClr val="1768C7"/>
@@ -9457,6 +9645,7 @@
               </a:defRPr>
             </a:lvl6pPr>
             <a:lvl7pPr>
+              <a:buNone/>
               <a:defRPr sz="1650" b="1">
                 <a:solidFill>
                   <a:srgbClr val="1768C7"/>
@@ -9467,6 +9656,7 @@
               </a:defRPr>
             </a:lvl7pPr>
             <a:lvl8pPr>
+              <a:buNone/>
               <a:defRPr sz="1650" b="1">
                 <a:solidFill>
                   <a:srgbClr val="1768C7"/>
@@ -9477,6 +9667,7 @@
               </a:defRPr>
             </a:lvl8pPr>
             <a:lvl9pPr>
+              <a:buNone/>
               <a:defRPr sz="1650" b="1">
                 <a:solidFill>
                   <a:srgbClr val="1768C7"/>
@@ -9489,6 +9680,7 @@
           </a:lstStyle>
           <a:p xmlns:a="http://schemas.openxmlformats.org/drawingml/2006/main">
             <a:pPr>
+              <a:buNone/>
               <a:defRPr sz="1650" b="1">
                 <a:solidFill>
                   <a:srgbClr val="1768C7"/>
@@ -9555,6 +9747,7 @@
               </a:defRPr>
             </a:defPPr>
             <a:lvl1pPr>
+              <a:buNone/>
               <a:defRPr sz="1575" b="0">
                 <a:solidFill>
                   <a:srgbClr val="173B75"/>
@@ -9565,6 +9758,7 @@
               </a:defRPr>
             </a:lvl1pPr>
             <a:lvl2pPr>
+              <a:buNone/>
               <a:defRPr sz="1575" b="0">
                 <a:solidFill>
                   <a:srgbClr val="173B75"/>
@@ -9575,6 +9769,7 @@
               </a:defRPr>
             </a:lvl2pPr>
             <a:lvl3pPr>
+              <a:buNone/>
               <a:defRPr sz="1575" b="0">
                 <a:solidFill>
                   <a:srgbClr val="173B75"/>
@@ -9585,6 +9780,7 @@
               </a:defRPr>
             </a:lvl3pPr>
             <a:lvl4pPr>
+              <a:buNone/>
               <a:defRPr sz="1575" b="0">
                 <a:solidFill>
                   <a:srgbClr val="173B75"/>
@@ -9595,6 +9791,7 @@
               </a:defRPr>
             </a:lvl4pPr>
             <a:lvl5pPr>
+              <a:buNone/>
               <a:defRPr sz="1575" b="0">
                 <a:solidFill>
                   <a:srgbClr val="173B75"/>
@@ -9605,6 +9802,7 @@
               </a:defRPr>
             </a:lvl5pPr>
             <a:lvl6pPr>
+              <a:buNone/>
               <a:defRPr sz="1575" b="0">
                 <a:solidFill>
                   <a:srgbClr val="173B75"/>
@@ -9615,6 +9813,7 @@
               </a:defRPr>
             </a:lvl6pPr>
             <a:lvl7pPr>
+              <a:buNone/>
               <a:defRPr sz="1575" b="0">
                 <a:solidFill>
                   <a:srgbClr val="173B75"/>
@@ -9625,6 +9824,7 @@
               </a:defRPr>
             </a:lvl7pPr>
             <a:lvl8pPr>
+              <a:buNone/>
               <a:defRPr sz="1575" b="0">
                 <a:solidFill>
                   <a:srgbClr val="173B75"/>
@@ -9635,6 +9835,7 @@
               </a:defRPr>
             </a:lvl8pPr>
             <a:lvl9pPr>
+              <a:buNone/>
               <a:defRPr sz="1575" b="0">
                 <a:solidFill>
                   <a:srgbClr val="173B75"/>
@@ -9647,6 +9848,7 @@
           </a:lstStyle>
           <a:p xmlns:a="http://schemas.openxmlformats.org/drawingml/2006/main">
             <a:pPr>
+              <a:buNone/>
               <a:defRPr sz="1575" b="0">
                 <a:solidFill>
                   <a:srgbClr val="173B75"/>
@@ -9670,6 +9872,7 @@
           </a:p>
           <a:p xmlns:a="http://schemas.openxmlformats.org/drawingml/2006/main">
             <a:pPr>
+              <a:buNone/>
               <a:defRPr sz="1575" b="0">
                 <a:solidFill>
                   <a:srgbClr val="173B75"/>
@@ -9693,6 +9896,7 @@
           </a:p>
           <a:p xmlns:a="http://schemas.openxmlformats.org/drawingml/2006/main">
             <a:pPr>
+              <a:buNone/>
               <a:defRPr sz="1575" b="0">
                 <a:solidFill>
                   <a:srgbClr val="173B75"/>
@@ -9793,6 +9997,7 @@
               </a:defRPr>
             </a:defPPr>
             <a:lvl1pPr>
+              <a:buNone/>
               <a:defRPr sz="1650" b="1">
                 <a:solidFill>
                   <a:srgbClr val="1768C7"/>
@@ -9803,6 +10008,7 @@
               </a:defRPr>
             </a:lvl1pPr>
             <a:lvl2pPr>
+              <a:buNone/>
               <a:defRPr sz="1650" b="1">
                 <a:solidFill>
                   <a:srgbClr val="1768C7"/>
@@ -9813,6 +10019,7 @@
               </a:defRPr>
             </a:lvl2pPr>
             <a:lvl3pPr>
+              <a:buNone/>
               <a:defRPr sz="1650" b="1">
                 <a:solidFill>
                   <a:srgbClr val="1768C7"/>
@@ -9823,6 +10030,7 @@
               </a:defRPr>
             </a:lvl3pPr>
             <a:lvl4pPr>
+              <a:buNone/>
               <a:defRPr sz="1650" b="1">
                 <a:solidFill>
                   <a:srgbClr val="1768C7"/>
@@ -9833,6 +10041,7 @@
               </a:defRPr>
             </a:lvl4pPr>
             <a:lvl5pPr>
+              <a:buNone/>
               <a:defRPr sz="1650" b="1">
                 <a:solidFill>
                   <a:srgbClr val="1768C7"/>
@@ -9843,6 +10052,7 @@
               </a:defRPr>
             </a:lvl5pPr>
             <a:lvl6pPr>
+              <a:buNone/>
               <a:defRPr sz="1650" b="1">
                 <a:solidFill>
                   <a:srgbClr val="1768C7"/>
@@ -9853,6 +10063,7 @@
               </a:defRPr>
             </a:lvl6pPr>
             <a:lvl7pPr>
+              <a:buNone/>
               <a:defRPr sz="1650" b="1">
                 <a:solidFill>
                   <a:srgbClr val="1768C7"/>
@@ -9863,6 +10074,7 @@
               </a:defRPr>
             </a:lvl7pPr>
             <a:lvl8pPr>
+              <a:buNone/>
               <a:defRPr sz="1650" b="1">
                 <a:solidFill>
                   <a:srgbClr val="1768C7"/>
@@ -9873,6 +10085,7 @@
               </a:defRPr>
             </a:lvl8pPr>
             <a:lvl9pPr>
+              <a:buNone/>
               <a:defRPr sz="1650" b="1">
                 <a:solidFill>
                   <a:srgbClr val="1768C7"/>
@@ -9885,6 +10098,7 @@
           </a:lstStyle>
           <a:p xmlns:a="http://schemas.openxmlformats.org/drawingml/2006/main">
             <a:pPr>
+              <a:buNone/>
               <a:defRPr sz="1650" b="1">
                 <a:solidFill>
                   <a:srgbClr val="1768C7"/>
@@ -9951,6 +10165,7 @@
               </a:defRPr>
             </a:defPPr>
             <a:lvl1pPr>
+              <a:buNone/>
               <a:defRPr sz="1575" b="0">
                 <a:solidFill>
                   <a:srgbClr val="173B75"/>
@@ -9961,6 +10176,7 @@
               </a:defRPr>
             </a:lvl1pPr>
             <a:lvl2pPr>
+              <a:buNone/>
               <a:defRPr sz="1575" b="0">
                 <a:solidFill>
                   <a:srgbClr val="173B75"/>
@@ -9971,6 +10187,7 @@
               </a:defRPr>
             </a:lvl2pPr>
             <a:lvl3pPr>
+              <a:buNone/>
               <a:defRPr sz="1575" b="0">
                 <a:solidFill>
                   <a:srgbClr val="173B75"/>
@@ -9981,6 +10198,7 @@
               </a:defRPr>
             </a:lvl3pPr>
             <a:lvl4pPr>
+              <a:buNone/>
               <a:defRPr sz="1575" b="0">
                 <a:solidFill>
                   <a:srgbClr val="173B75"/>
@@ -9991,6 +10209,7 @@
               </a:defRPr>
             </a:lvl4pPr>
             <a:lvl5pPr>
+              <a:buNone/>
               <a:defRPr sz="1575" b="0">
                 <a:solidFill>
                   <a:srgbClr val="173B75"/>
@@ -10001,6 +10220,7 @@
               </a:defRPr>
             </a:lvl5pPr>
             <a:lvl6pPr>
+              <a:buNone/>
               <a:defRPr sz="1575" b="0">
                 <a:solidFill>
                   <a:srgbClr val="173B75"/>
@@ -10011,6 +10231,7 @@
               </a:defRPr>
             </a:lvl6pPr>
             <a:lvl7pPr>
+              <a:buNone/>
               <a:defRPr sz="1575" b="0">
                 <a:solidFill>
                   <a:srgbClr val="173B75"/>
@@ -10021,6 +10242,7 @@
               </a:defRPr>
             </a:lvl7pPr>
             <a:lvl8pPr>
+              <a:buNone/>
               <a:defRPr sz="1575" b="0">
                 <a:solidFill>
                   <a:srgbClr val="173B75"/>
@@ -10031,6 +10253,7 @@
               </a:defRPr>
             </a:lvl8pPr>
             <a:lvl9pPr>
+              <a:buNone/>
               <a:defRPr sz="1575" b="0">
                 <a:solidFill>
                   <a:srgbClr val="173B75"/>
@@ -10043,6 +10266,7 @@
           </a:lstStyle>
           <a:p xmlns:a="http://schemas.openxmlformats.org/drawingml/2006/main">
             <a:pPr>
+              <a:buNone/>
               <a:defRPr sz="1575" b="0">
                 <a:solidFill>
                   <a:srgbClr val="173B75"/>
@@ -10066,6 +10290,7 @@
           </a:p>
           <a:p xmlns:a="http://schemas.openxmlformats.org/drawingml/2006/main">
             <a:pPr>
+              <a:buNone/>
               <a:defRPr sz="1575" b="0">
                 <a:solidFill>
                   <a:srgbClr val="173B75"/>
@@ -10089,6 +10314,7 @@
           </a:p>
           <a:p xmlns:a="http://schemas.openxmlformats.org/drawingml/2006/main">
             <a:pPr>
+              <a:buNone/>
               <a:defRPr sz="1575" b="0">
                 <a:solidFill>
                   <a:srgbClr val="173B75"/>
@@ -10189,6 +10415,7 @@
               </a:defRPr>
             </a:defPPr>
             <a:lvl1pPr>
+              <a:buNone/>
               <a:defRPr sz="1650" b="1">
                 <a:solidFill>
                   <a:srgbClr val="1768C7"/>
@@ -10199,6 +10426,7 @@
               </a:defRPr>
             </a:lvl1pPr>
             <a:lvl2pPr>
+              <a:buNone/>
               <a:defRPr sz="1650" b="1">
                 <a:solidFill>
                   <a:srgbClr val="1768C7"/>
@@ -10209,6 +10437,7 @@
               </a:defRPr>
             </a:lvl2pPr>
             <a:lvl3pPr>
+              <a:buNone/>
               <a:defRPr sz="1650" b="1">
                 <a:solidFill>
                   <a:srgbClr val="1768C7"/>
@@ -10219,6 +10448,7 @@
               </a:defRPr>
             </a:lvl3pPr>
             <a:lvl4pPr>
+              <a:buNone/>
               <a:defRPr sz="1650" b="1">
                 <a:solidFill>
                   <a:srgbClr val="1768C7"/>
@@ -10229,6 +10459,7 @@
               </a:defRPr>
             </a:lvl4pPr>
             <a:lvl5pPr>
+              <a:buNone/>
               <a:defRPr sz="1650" b="1">
                 <a:solidFill>
                   <a:srgbClr val="1768C7"/>
@@ -10239,6 +10470,7 @@
               </a:defRPr>
             </a:lvl5pPr>
             <a:lvl6pPr>
+              <a:buNone/>
               <a:defRPr sz="1650" b="1">
                 <a:solidFill>
                   <a:srgbClr val="1768C7"/>
@@ -10249,6 +10481,7 @@
               </a:defRPr>
             </a:lvl6pPr>
             <a:lvl7pPr>
+              <a:buNone/>
               <a:defRPr sz="1650" b="1">
                 <a:solidFill>
                   <a:srgbClr val="1768C7"/>
@@ -10259,6 +10492,7 @@
               </a:defRPr>
             </a:lvl7pPr>
             <a:lvl8pPr>
+              <a:buNone/>
               <a:defRPr sz="1650" b="1">
                 <a:solidFill>
                   <a:srgbClr val="1768C7"/>
@@ -10269,6 +10503,7 @@
               </a:defRPr>
             </a:lvl8pPr>
             <a:lvl9pPr>
+              <a:buNone/>
               <a:defRPr sz="1650" b="1">
                 <a:solidFill>
                   <a:srgbClr val="1768C7"/>
@@ -10281,6 +10516,7 @@
           </a:lstStyle>
           <a:p xmlns:a="http://schemas.openxmlformats.org/drawingml/2006/main">
             <a:pPr>
+              <a:buNone/>
               <a:defRPr sz="1650" b="1">
                 <a:solidFill>
                   <a:srgbClr val="1768C7"/>
@@ -10347,6 +10583,7 @@
               </a:defRPr>
             </a:defPPr>
             <a:lvl1pPr>
+              <a:buNone/>
               <a:defRPr sz="1575" b="0">
                 <a:solidFill>
                   <a:srgbClr val="173B75"/>
@@ -10357,6 +10594,7 @@
               </a:defRPr>
             </a:lvl1pPr>
             <a:lvl2pPr>
+              <a:buNone/>
               <a:defRPr sz="1575" b="0">
                 <a:solidFill>
                   <a:srgbClr val="173B75"/>
@@ -10367,6 +10605,7 @@
               </a:defRPr>
             </a:lvl2pPr>
             <a:lvl3pPr>
+              <a:buNone/>
               <a:defRPr sz="1575" b="0">
                 <a:solidFill>
                   <a:srgbClr val="173B75"/>
@@ -10377,6 +10616,7 @@
               </a:defRPr>
             </a:lvl3pPr>
             <a:lvl4pPr>
+              <a:buNone/>
               <a:defRPr sz="1575" b="0">
                 <a:solidFill>
                   <a:srgbClr val="173B75"/>
@@ -10387,6 +10627,7 @@
               </a:defRPr>
             </a:lvl4pPr>
             <a:lvl5pPr>
+              <a:buNone/>
               <a:defRPr sz="1575" b="0">
                 <a:solidFill>
                   <a:srgbClr val="173B75"/>
@@ -10397,6 +10638,7 @@
               </a:defRPr>
             </a:lvl5pPr>
             <a:lvl6pPr>
+              <a:buNone/>
               <a:defRPr sz="1575" b="0">
                 <a:solidFill>
                   <a:srgbClr val="173B75"/>
@@ -10407,6 +10649,7 @@
               </a:defRPr>
             </a:lvl6pPr>
             <a:lvl7pPr>
+              <a:buNone/>
               <a:defRPr sz="1575" b="0">
                 <a:solidFill>
                   <a:srgbClr val="173B75"/>
@@ -10417,6 +10660,7 @@
               </a:defRPr>
             </a:lvl7pPr>
             <a:lvl8pPr>
+              <a:buNone/>
               <a:defRPr sz="1575" b="0">
                 <a:solidFill>
                   <a:srgbClr val="173B75"/>
@@ -10427,6 +10671,7 @@
               </a:defRPr>
             </a:lvl8pPr>
             <a:lvl9pPr>
+              <a:buNone/>
               <a:defRPr sz="1575" b="0">
                 <a:solidFill>
                   <a:srgbClr val="173B75"/>
@@ -10439,6 +10684,7 @@
           </a:lstStyle>
           <a:p xmlns:a="http://schemas.openxmlformats.org/drawingml/2006/main">
             <a:pPr>
+              <a:buNone/>
               <a:defRPr sz="1575" b="0">
                 <a:solidFill>
                   <a:srgbClr val="173B75"/>
@@ -10462,6 +10708,7 @@
           </a:p>
           <a:p xmlns:a="http://schemas.openxmlformats.org/drawingml/2006/main">
             <a:pPr>
+              <a:buNone/>
               <a:defRPr sz="1575" b="0">
                 <a:solidFill>
                   <a:srgbClr val="173B75"/>
@@ -10485,6 +10732,7 @@
           </a:p>
           <a:p xmlns:a="http://schemas.openxmlformats.org/drawingml/2006/main">
             <a:pPr>
+              <a:buNone/>
               <a:defRPr sz="1575" b="0">
                 <a:solidFill>
                   <a:srgbClr val="173B75"/>
@@ -10551,6 +10799,7 @@
               </a:defRPr>
             </a:defPPr>
             <a:lvl1pPr>
+              <a:buNone/>
               <a:defRPr sz="1650" b="1">
                 <a:solidFill>
                   <a:srgbClr val="1768C7"/>
@@ -10561,6 +10810,7 @@
               </a:defRPr>
             </a:lvl1pPr>
             <a:lvl2pPr>
+              <a:buNone/>
               <a:defRPr sz="1650" b="1">
                 <a:solidFill>
                   <a:srgbClr val="1768C7"/>
@@ -10571,6 +10821,7 @@
               </a:defRPr>
             </a:lvl2pPr>
             <a:lvl3pPr>
+              <a:buNone/>
               <a:defRPr sz="1650" b="1">
                 <a:solidFill>
                   <a:srgbClr val="1768C7"/>
@@ -10581,6 +10832,7 @@
               </a:defRPr>
             </a:lvl3pPr>
             <a:lvl4pPr>
+              <a:buNone/>
               <a:defRPr sz="1650" b="1">
                 <a:solidFill>
                   <a:srgbClr val="1768C7"/>
@@ -10591,6 +10843,7 @@
               </a:defRPr>
             </a:lvl4pPr>
             <a:lvl5pPr>
+              <a:buNone/>
               <a:defRPr sz="1650" b="1">
                 <a:solidFill>
                   <a:srgbClr val="1768C7"/>
@@ -10601,6 +10854,7 @@
               </a:defRPr>
             </a:lvl5pPr>
             <a:lvl6pPr>
+              <a:buNone/>
               <a:defRPr sz="1650" b="1">
                 <a:solidFill>
                   <a:srgbClr val="1768C7"/>
@@ -10611,6 +10865,7 @@
               </a:defRPr>
             </a:lvl6pPr>
             <a:lvl7pPr>
+              <a:buNone/>
               <a:defRPr sz="1650" b="1">
                 <a:solidFill>
                   <a:srgbClr val="1768C7"/>
@@ -10621,6 +10876,7 @@
               </a:defRPr>
             </a:lvl7pPr>
             <a:lvl8pPr>
+              <a:buNone/>
               <a:defRPr sz="1650" b="1">
                 <a:solidFill>
                   <a:srgbClr val="1768C7"/>
@@ -10631,6 +10887,7 @@
               </a:defRPr>
             </a:lvl8pPr>
             <a:lvl9pPr>
+              <a:buNone/>
               <a:defRPr sz="1650" b="1">
                 <a:solidFill>
                   <a:srgbClr val="1768C7"/>
@@ -10643,6 +10900,7 @@
           </a:lstStyle>
           <a:p xmlns:a="http://schemas.openxmlformats.org/drawingml/2006/main">
             <a:pPr>
+              <a:buNone/>
               <a:defRPr sz="1650" b="1">
                 <a:solidFill>
                   <a:srgbClr val="1768C7"/>
@@ -10709,6 +10967,7 @@
               </a:defRPr>
             </a:defPPr>
             <a:lvl1pPr>
+              <a:buNone/>
               <a:defRPr sz="1125" b="0">
                 <a:solidFill>
                   <a:srgbClr val="607DA3"/>
@@ -10719,6 +10978,7 @@
               </a:defRPr>
             </a:lvl1pPr>
             <a:lvl2pPr>
+              <a:buNone/>
               <a:defRPr sz="1125" b="0">
                 <a:solidFill>
                   <a:srgbClr val="607DA3"/>
@@ -10729,6 +10989,7 @@
               </a:defRPr>
             </a:lvl2pPr>
             <a:lvl3pPr>
+              <a:buNone/>
               <a:defRPr sz="1125" b="0">
                 <a:solidFill>
                   <a:srgbClr val="607DA3"/>
@@ -10739,6 +11000,7 @@
               </a:defRPr>
             </a:lvl3pPr>
             <a:lvl4pPr>
+              <a:buNone/>
               <a:defRPr sz="1125" b="0">
                 <a:solidFill>
                   <a:srgbClr val="607DA3"/>
@@ -10749,6 +11011,7 @@
               </a:defRPr>
             </a:lvl4pPr>
             <a:lvl5pPr>
+              <a:buNone/>
               <a:defRPr sz="1125" b="0">
                 <a:solidFill>
                   <a:srgbClr val="607DA3"/>
@@ -10759,6 +11022,7 @@
               </a:defRPr>
             </a:lvl5pPr>
             <a:lvl6pPr>
+              <a:buNone/>
               <a:defRPr sz="1125" b="0">
                 <a:solidFill>
                   <a:srgbClr val="607DA3"/>
@@ -10769,6 +11033,7 @@
               </a:defRPr>
             </a:lvl6pPr>
             <a:lvl7pPr>
+              <a:buNone/>
               <a:defRPr sz="1125" b="0">
                 <a:solidFill>
                   <a:srgbClr val="607DA3"/>
@@ -10779,6 +11044,7 @@
               </a:defRPr>
             </a:lvl7pPr>
             <a:lvl8pPr>
+              <a:buNone/>
               <a:defRPr sz="1125" b="0">
                 <a:solidFill>
                   <a:srgbClr val="607DA3"/>
@@ -10789,6 +11055,7 @@
               </a:defRPr>
             </a:lvl8pPr>
             <a:lvl9pPr>
+              <a:buNone/>
               <a:defRPr sz="1125" b="0">
                 <a:solidFill>
                   <a:srgbClr val="607DA3"/>
@@ -10801,6 +11068,7 @@
           </a:lstStyle>
           <a:p xmlns:a="http://schemas.openxmlformats.org/drawingml/2006/main">
             <a:pPr>
+              <a:buNone/>
               <a:defRPr sz="1125" b="0">
                 <a:solidFill>
                   <a:srgbClr val="607DA3"/>
@@ -10916,7 +11184,7 @@
           <p:cNvPr id="10" name="">
             <a:extLst xmlns:a="http://schemas.openxmlformats.org/drawingml/2006/main">
               <a:ext uri="{FF2B5EF4-FFF2-40B4-BE49-F238E27FC236}">
-                <a16:creationId xmlns:a16="http://schemas.microsoft.com/office/drawing/2014/main" id="{4A76E2AB-47D7-4572-84BE-388B9B18AE64}"/>
+                <a16:creationId xmlns:a16="http://schemas.microsoft.com/office/drawing/2014/main" id="{3A96ADCD-9F2B-40C4-9039-C39F1482198C}"/>
               </a:ext>
             </a:extLst>
           </p:cNvPr>
@@ -10926,7 +11194,7 @@
           <p:nvPr/>
         </p:nvPicPr>
         <p:blipFill>
-          <a:blip xmlns:r="http://schemas.openxmlformats.org/officeDocument/2006/relationships" xmlns:a="http://schemas.openxmlformats.org/drawingml/2006/main" r:embed="R44fc69a564594344"/>
+          <a:blip xmlns:r="http://schemas.openxmlformats.org/officeDocument/2006/relationships" xmlns:a="http://schemas.openxmlformats.org/drawingml/2006/main" r:embed="Rae41c3e7eba240a8"/>
           <a:srcRect xmlns:a="http://schemas.openxmlformats.org/drawingml/2006/main" l="0" t="0" r="0" b="0"/>
           <a:stretch xmlns:a="http://schemas.openxmlformats.org/drawingml/2006/main"/>
         </p:blipFill>
@@ -12152,7 +12420,7 @@
           <p:cNvPr id="5" name="">
             <a:extLst xmlns:a="http://schemas.openxmlformats.org/drawingml/2006/main">
               <a:ext uri="{FF2B5EF4-FFF2-40B4-BE49-F238E27FC236}">
-                <a16:creationId xmlns:a16="http://schemas.microsoft.com/office/drawing/2014/main" id="{727380D7-E8DD-4B1B-8144-A9A9BA7F556E}"/>
+                <a16:creationId xmlns:a16="http://schemas.microsoft.com/office/drawing/2014/main" id="{07295D30-3362-4365-AE3C-791E7DA16CA3}"/>
               </a:ext>
             </a:extLst>
           </p:cNvPr>
@@ -12162,7 +12430,7 @@
           <p:nvPr/>
         </p:nvPicPr>
         <p:blipFill>
-          <a:blip xmlns:r="http://schemas.openxmlformats.org/officeDocument/2006/relationships" xmlns:a="http://schemas.openxmlformats.org/drawingml/2006/main" r:embed="R8328aabeb9c94118"/>
+          <a:blip xmlns:r="http://schemas.openxmlformats.org/officeDocument/2006/relationships" xmlns:a="http://schemas.openxmlformats.org/drawingml/2006/main" r:embed="Rc125c774e0004b8e"/>
           <a:stretch xmlns:a="http://schemas.openxmlformats.org/drawingml/2006/main"/>
         </p:blipFill>
         <p:spPr>
@@ -12180,7 +12448,7 @@
           <p:cNvPr id="6" name="">
             <a:extLst xmlns:a="http://schemas.openxmlformats.org/drawingml/2006/main">
               <a:ext uri="{FF2B5EF4-FFF2-40B4-BE49-F238E27FC236}">
-                <a16:creationId xmlns:a16="http://schemas.microsoft.com/office/drawing/2014/main" id="{D9A10317-C620-4E9D-AACA-95168BE3945F}"/>
+                <a16:creationId xmlns:a16="http://schemas.microsoft.com/office/drawing/2014/main" id="{E9C95E9C-852B-4C54-9E7A-C114809C0EB4}"/>
               </a:ext>
             </a:extLst>
           </p:cNvPr>
@@ -12190,7 +12458,7 @@
           <p:nvPr/>
         </p:nvPicPr>
         <p:blipFill>
-          <a:blip xmlns:r="http://schemas.openxmlformats.org/officeDocument/2006/relationships" xmlns:a="http://schemas.openxmlformats.org/drawingml/2006/main" r:embed="R499403cce8c24c54"/>
+          <a:blip xmlns:r="http://schemas.openxmlformats.org/officeDocument/2006/relationships" xmlns:a="http://schemas.openxmlformats.org/drawingml/2006/main" r:embed="R18762b3c4ac547e1"/>
           <a:stretch xmlns:a="http://schemas.openxmlformats.org/drawingml/2006/main"/>
         </p:blipFill>
         <p:spPr>
@@ -12627,7 +12895,7 @@
           <p:cNvPr id="9" name="">
             <a:extLst xmlns:a="http://schemas.openxmlformats.org/drawingml/2006/main">
               <a:ext uri="{FF2B5EF4-FFF2-40B4-BE49-F238E27FC236}">
-                <a16:creationId xmlns:a16="http://schemas.microsoft.com/office/drawing/2014/main" id="{0CFAF001-7B72-4C69-9E5B-2FD4EBEC9F4D}"/>
+                <a16:creationId xmlns:a16="http://schemas.microsoft.com/office/drawing/2014/main" id="{D2351B23-7FFF-46DE-9C14-A1AA59D9E910}"/>
               </a:ext>
             </a:extLst>
           </p:cNvPr>
@@ -12637,7 +12905,7 @@
           <p:nvPr/>
         </p:nvPicPr>
         <p:blipFill>
-          <a:blip xmlns:r="http://schemas.openxmlformats.org/officeDocument/2006/relationships" xmlns:a="http://schemas.openxmlformats.org/drawingml/2006/main" r:embed="R14fd7d2b794b4d98"/>
+          <a:blip xmlns:r="http://schemas.openxmlformats.org/officeDocument/2006/relationships" xmlns:a="http://schemas.openxmlformats.org/drawingml/2006/main" r:embed="R17bb8c5f1f4a441a"/>
           <a:srcRect xmlns:a="http://schemas.openxmlformats.org/drawingml/2006/main" l="0" t="0" r="0" b="0"/>
           <a:stretch xmlns:a="http://schemas.openxmlformats.org/drawingml/2006/main"/>
         </p:blipFill>
@@ -12878,7 +13146,29 @@
                 <a:ea typeface="Helvetica Neue"/>
                 <a:cs typeface="Helvetica Neue"/>
               </a:rPr>
-              <a:t>Check gaps, adapt the outreach draft, then copy or export.</a:t>
+              <a:t>Check gaps, adapt the </a:t>
+            </a:r>
+            <a:r>
+              <a:rPr sz="2025" b="0">
+                <a:solidFill>
+                  <a:srgbClr val="123363"/>
+                </a:solidFill>
+                <a:latin typeface="Helvetica Neue"/>
+                <a:ea typeface="Helvetica Neue"/>
+                <a:cs typeface="Helvetica Neue"/>
+              </a:rPr>
+              <a:t>outreach message</a:t>
+            </a:r>
+            <a:r>
+              <a:rPr sz="2025" b="0">
+                <a:solidFill>
+                  <a:srgbClr val="123363"/>
+                </a:solidFill>
+                <a:latin typeface="Helvetica Neue"/>
+                <a:ea typeface="Helvetica Neue"/>
+                <a:cs typeface="Helvetica Neue"/>
+              </a:rPr>
+              <a:t>, then copy or export.</a:t>
             </a:r>
           </a:p>
         </p:txBody>
@@ -13013,6 +13303,7 @@
               </a:defRPr>
             </a:defPPr>
             <a:lvl1pPr>
+              <a:buNone/>
               <a:defRPr sz="2175" b="1">
                 <a:solidFill>
                   <a:srgbClr val="173B75"/>
@@ -13023,6 +13314,7 @@
               </a:defRPr>
             </a:lvl1pPr>
             <a:lvl2pPr>
+              <a:buNone/>
               <a:defRPr sz="2175" b="1">
                 <a:solidFill>
                   <a:srgbClr val="173B75"/>
@@ -13033,6 +13325,7 @@
               </a:defRPr>
             </a:lvl2pPr>
             <a:lvl3pPr>
+              <a:buNone/>
               <a:defRPr sz="2175" b="1">
                 <a:solidFill>
                   <a:srgbClr val="173B75"/>
@@ -13043,6 +13336,7 @@
               </a:defRPr>
             </a:lvl3pPr>
             <a:lvl4pPr>
+              <a:buNone/>
               <a:defRPr sz="2175" b="1">
                 <a:solidFill>
                   <a:srgbClr val="173B75"/>
@@ -13053,6 +13347,7 @@
               </a:defRPr>
             </a:lvl4pPr>
             <a:lvl5pPr>
+              <a:buNone/>
               <a:defRPr sz="2175" b="1">
                 <a:solidFill>
                   <a:srgbClr val="173B75"/>
@@ -13063,6 +13358,7 @@
               </a:defRPr>
             </a:lvl5pPr>
             <a:lvl6pPr>
+              <a:buNone/>
               <a:defRPr sz="2175" b="1">
                 <a:solidFill>
                   <a:srgbClr val="173B75"/>
@@ -13073,6 +13369,7 @@
               </a:defRPr>
             </a:lvl6pPr>
             <a:lvl7pPr>
+              <a:buNone/>
               <a:defRPr sz="2175" b="1">
                 <a:solidFill>
                   <a:srgbClr val="173B75"/>
@@ -13083,6 +13380,7 @@
               </a:defRPr>
             </a:lvl7pPr>
             <a:lvl8pPr>
+              <a:buNone/>
               <a:defRPr sz="2175" b="1">
                 <a:solidFill>
                   <a:srgbClr val="173B75"/>
@@ -13093,6 +13391,7 @@
               </a:defRPr>
             </a:lvl8pPr>
             <a:lvl9pPr>
+              <a:buNone/>
               <a:defRPr sz="2175" b="1">
                 <a:solidFill>
                   <a:srgbClr val="173B75"/>
@@ -13105,6 +13404,7 @@
           </a:lstStyle>
           <a:p xmlns:a="http://schemas.openxmlformats.org/drawingml/2006/main">
             <a:pPr>
+              <a:buNone/>
               <a:defRPr sz="2175" b="1">
                 <a:solidFill>
                   <a:srgbClr val="173B75"/>
@@ -13133,7 +13433,7 @@
           <p:cNvPr id="2" name="">
             <a:extLst xmlns:a="http://schemas.openxmlformats.org/drawingml/2006/main">
               <a:ext uri="{FF2B5EF4-FFF2-40B4-BE49-F238E27FC236}">
-                <a16:creationId xmlns:a16="http://schemas.microsoft.com/office/drawing/2014/main" id="{45E24609-DAC0-4C8E-82E1-86EA1C71CB14}"/>
+                <a16:creationId xmlns:a16="http://schemas.microsoft.com/office/drawing/2014/main" id="{D7F31CA2-0A6C-4362-A986-9F2655342BB5}"/>
               </a:ext>
             </a:extLst>
           </p:cNvPr>
@@ -13143,10 +13443,10 @@
           <p:nvPr/>
         </p:nvPicPr>
         <p:blipFill>
-          <a:blip xmlns:r="http://schemas.openxmlformats.org/officeDocument/2006/relationships" xmlns:a="http://schemas.openxmlformats.org/drawingml/2006/main" r:embed="R70a65fa51c184523">
+          <a:blip xmlns:r="http://schemas.openxmlformats.org/officeDocument/2006/relationships" xmlns:a="http://schemas.openxmlformats.org/drawingml/2006/main" r:embed="R617d0656bdfc4cec">
             <a:extLst>
               <a:ext uri="{96DAC541-7B7A-43D3-8B79-37D633B846F1}">
-                <asvg:svgBlip xmlns:asvg="http://schemas.microsoft.com/office/drawing/2016/SVG/main" r:embed="Rb16025ae2c8346d1"/>
+                <asvg:svgBlip xmlns:asvg="http://schemas.microsoft.com/office/drawing/2016/SVG/main" r:embed="R6d08e3cd458d4f40"/>
               </a:ext>
             </a:extLst>
           </a:blip>
@@ -13205,6 +13505,7 @@
               </a:defRPr>
             </a:defPPr>
             <a:lvl1pPr>
+              <a:buNone/>
               <a:defRPr sz="2850" b="1">
                 <a:solidFill>
                   <a:srgbClr val="173B75"/>
@@ -13215,6 +13516,7 @@
               </a:defRPr>
             </a:lvl1pPr>
             <a:lvl2pPr>
+              <a:buNone/>
               <a:defRPr sz="2850" b="1">
                 <a:solidFill>
                   <a:srgbClr val="173B75"/>
@@ -13225,6 +13527,7 @@
               </a:defRPr>
             </a:lvl2pPr>
             <a:lvl3pPr>
+              <a:buNone/>
               <a:defRPr sz="2850" b="1">
                 <a:solidFill>
                   <a:srgbClr val="173B75"/>
@@ -13235,6 +13538,7 @@
               </a:defRPr>
             </a:lvl3pPr>
             <a:lvl4pPr>
+              <a:buNone/>
               <a:defRPr sz="2850" b="1">
                 <a:solidFill>
                   <a:srgbClr val="173B75"/>
@@ -13245,6 +13549,7 @@
               </a:defRPr>
             </a:lvl4pPr>
             <a:lvl5pPr>
+              <a:buNone/>
               <a:defRPr sz="2850" b="1">
                 <a:solidFill>
                   <a:srgbClr val="173B75"/>
@@ -13255,6 +13560,7 @@
               </a:defRPr>
             </a:lvl5pPr>
             <a:lvl6pPr>
+              <a:buNone/>
               <a:defRPr sz="2850" b="1">
                 <a:solidFill>
                   <a:srgbClr val="173B75"/>
@@ -13265,6 +13571,7 @@
               </a:defRPr>
             </a:lvl6pPr>
             <a:lvl7pPr>
+              <a:buNone/>
               <a:defRPr sz="2850" b="1">
                 <a:solidFill>
                   <a:srgbClr val="173B75"/>
@@ -13275,6 +13582,7 @@
               </a:defRPr>
             </a:lvl7pPr>
             <a:lvl8pPr>
+              <a:buNone/>
               <a:defRPr sz="2850" b="1">
                 <a:solidFill>
                   <a:srgbClr val="173B75"/>
@@ -13285,6 +13593,7 @@
               </a:defRPr>
             </a:lvl8pPr>
             <a:lvl9pPr>
+              <a:buNone/>
               <a:defRPr sz="2850" b="1">
                 <a:solidFill>
                   <a:srgbClr val="173B75"/>
@@ -13297,6 +13606,7 @@
           </a:lstStyle>
           <a:p xmlns:a="http://schemas.openxmlformats.org/drawingml/2006/main">
             <a:pPr>
+              <a:buNone/>
               <a:defRPr sz="2850" b="1">
                 <a:solidFill>
                   <a:srgbClr val="173B75"/>
@@ -13363,6 +13673,7 @@
               </a:defRPr>
             </a:defPPr>
             <a:lvl1pPr>
+              <a:buNone/>
               <a:defRPr sz="1575" b="0">
                 <a:solidFill>
                   <a:srgbClr val="607DA3"/>
@@ -13373,6 +13684,7 @@
               </a:defRPr>
             </a:lvl1pPr>
             <a:lvl2pPr>
+              <a:buNone/>
               <a:defRPr sz="1575" b="0">
                 <a:solidFill>
                   <a:srgbClr val="607DA3"/>
@@ -13383,6 +13695,7 @@
               </a:defRPr>
             </a:lvl2pPr>
             <a:lvl3pPr>
+              <a:buNone/>
               <a:defRPr sz="1575" b="0">
                 <a:solidFill>
                   <a:srgbClr val="607DA3"/>
@@ -13393,6 +13706,7 @@
               </a:defRPr>
             </a:lvl3pPr>
             <a:lvl4pPr>
+              <a:buNone/>
               <a:defRPr sz="1575" b="0">
                 <a:solidFill>
                   <a:srgbClr val="607DA3"/>
@@ -13403,6 +13717,7 @@
               </a:defRPr>
             </a:lvl4pPr>
             <a:lvl5pPr>
+              <a:buNone/>
               <a:defRPr sz="1575" b="0">
                 <a:solidFill>
                   <a:srgbClr val="607DA3"/>
@@ -13413,6 +13728,7 @@
               </a:defRPr>
             </a:lvl5pPr>
             <a:lvl6pPr>
+              <a:buNone/>
               <a:defRPr sz="1575" b="0">
                 <a:solidFill>
                   <a:srgbClr val="607DA3"/>
@@ -13423,6 +13739,7 @@
               </a:defRPr>
             </a:lvl6pPr>
             <a:lvl7pPr>
+              <a:buNone/>
               <a:defRPr sz="1575" b="0">
                 <a:solidFill>
                   <a:srgbClr val="607DA3"/>
@@ -13433,6 +13750,7 @@
               </a:defRPr>
             </a:lvl7pPr>
             <a:lvl8pPr>
+              <a:buNone/>
               <a:defRPr sz="1575" b="0">
                 <a:solidFill>
                   <a:srgbClr val="607DA3"/>
@@ -13443,6 +13761,7 @@
               </a:defRPr>
             </a:lvl8pPr>
             <a:lvl9pPr>
+              <a:buNone/>
               <a:defRPr sz="1575" b="0">
                 <a:solidFill>
                   <a:srgbClr val="607DA3"/>
@@ -13455,6 +13774,7 @@
           </a:lstStyle>
           <a:p xmlns:a="http://schemas.openxmlformats.org/drawingml/2006/main">
             <a:pPr>
+              <a:buNone/>
               <a:defRPr sz="1575" b="0">
                 <a:solidFill>
                   <a:srgbClr val="607DA3"/>
@@ -13483,7 +13803,7 @@
           <p:cNvPr id="5" name="Blue process arrow">
             <a:extLst xmlns:a="http://schemas.openxmlformats.org/drawingml/2006/main">
               <a:ext uri="{FF2B5EF4-FFF2-40B4-BE49-F238E27FC236}">
-                <a16:creationId xmlns:a16="http://schemas.microsoft.com/office/drawing/2014/main" id="{14E90E5F-728E-40E6-ACA5-69AEFD38B0C6}"/>
+                <a16:creationId xmlns:a16="http://schemas.microsoft.com/office/drawing/2014/main" id="{86DA8142-C6DC-4CE4-910E-50C9FF8B25A6}"/>
               </a:ext>
             </a:extLst>
           </p:cNvPr>
@@ -13511,7 +13831,7 @@
           <p:cNvPr id="6" name="Blue process arrow">
             <a:extLst xmlns:a="http://schemas.openxmlformats.org/drawingml/2006/main">
               <a:ext uri="{FF2B5EF4-FFF2-40B4-BE49-F238E27FC236}">
-                <a16:creationId xmlns:a16="http://schemas.microsoft.com/office/drawing/2014/main" id="{E6558594-F76A-4375-A4CC-E8F72EAC36CD}"/>
+                <a16:creationId xmlns:a16="http://schemas.microsoft.com/office/drawing/2014/main" id="{58A9FD46-2E07-4E2A-AF42-57B9893FA05D}"/>
               </a:ext>
             </a:extLst>
           </p:cNvPr>
@@ -13539,7 +13859,7 @@
           <p:cNvPr id="7" name="Blue process arrow">
             <a:extLst xmlns:a="http://schemas.openxmlformats.org/drawingml/2006/main">
               <a:ext uri="{FF2B5EF4-FFF2-40B4-BE49-F238E27FC236}">
-                <a16:creationId xmlns:a16="http://schemas.microsoft.com/office/drawing/2014/main" id="{124CE001-EDBA-4A77-825B-9E1653D7520B}"/>
+                <a16:creationId xmlns:a16="http://schemas.microsoft.com/office/drawing/2014/main" id="{0FF4CAD3-7E31-4A0C-8408-1CB027E5BF4D}"/>
               </a:ext>
             </a:extLst>
           </p:cNvPr>
@@ -13567,7 +13887,7 @@
           <p:cNvPr id="8" name="Blue process arrow">
             <a:extLst xmlns:a="http://schemas.openxmlformats.org/drawingml/2006/main">
               <a:ext uri="{FF2B5EF4-FFF2-40B4-BE49-F238E27FC236}">
-                <a16:creationId xmlns:a16="http://schemas.microsoft.com/office/drawing/2014/main" id="{C5BA7315-4B75-4234-8F70-A02FB99E1472}"/>
+                <a16:creationId xmlns:a16="http://schemas.microsoft.com/office/drawing/2014/main" id="{682E816D-AA33-48AC-BF09-5C02A7D6233A}"/>
               </a:ext>
             </a:extLst>
           </p:cNvPr>
@@ -13595,7 +13915,7 @@
           <p:cNvPr id="9" name="Blue process arrow">
             <a:extLst xmlns:a="http://schemas.openxmlformats.org/drawingml/2006/main">
               <a:ext uri="{FF2B5EF4-FFF2-40B4-BE49-F238E27FC236}">
-                <a16:creationId xmlns:a16="http://schemas.microsoft.com/office/drawing/2014/main" id="{AF3D3FCD-CF92-40A1-A90F-3DE6B7C70A72}"/>
+                <a16:creationId xmlns:a16="http://schemas.microsoft.com/office/drawing/2014/main" id="{F38A085E-BD02-4434-B1F1-C2528E1A73A4}"/>
               </a:ext>
             </a:extLst>
           </p:cNvPr>
@@ -13622,7 +13942,7 @@
           <p:cNvPr id="10" name="Blue process arrow">
             <a:extLst xmlns:a="http://schemas.openxmlformats.org/drawingml/2006/main">
               <a:ext uri="{FF2B5EF4-FFF2-40B4-BE49-F238E27FC236}">
-                <a16:creationId xmlns:a16="http://schemas.microsoft.com/office/drawing/2014/main" id="{E353304F-B522-4AFD-83FF-9350C4082529}"/>
+                <a16:creationId xmlns:a16="http://schemas.microsoft.com/office/drawing/2014/main" id="{A00A446A-C79A-4842-B206-32965B9C8436}"/>
               </a:ext>
             </a:extLst>
           </p:cNvPr>
@@ -13649,7 +13969,7 @@
           <p:cNvPr id="11" name="Blue process arrow">
             <a:extLst xmlns:a="http://schemas.openxmlformats.org/drawingml/2006/main">
               <a:ext uri="{FF2B5EF4-FFF2-40B4-BE49-F238E27FC236}">
-                <a16:creationId xmlns:a16="http://schemas.microsoft.com/office/drawing/2014/main" id="{E3E20CE5-7F22-4A24-98DF-6758481CA1DE}"/>
+                <a16:creationId xmlns:a16="http://schemas.microsoft.com/office/drawing/2014/main" id="{1D7958D7-346E-4B1F-B446-72D31F845F24}"/>
               </a:ext>
             </a:extLst>
           </p:cNvPr>
@@ -13677,7 +13997,7 @@
           <p:cNvPr id="12" name="Blue process arrow">
             <a:extLst xmlns:a="http://schemas.openxmlformats.org/drawingml/2006/main">
               <a:ext uri="{FF2B5EF4-FFF2-40B4-BE49-F238E27FC236}">
-                <a16:creationId xmlns:a16="http://schemas.microsoft.com/office/drawing/2014/main" id="{64375664-D30E-45F1-85B6-A679716E4A00}"/>
+                <a16:creationId xmlns:a16="http://schemas.microsoft.com/office/drawing/2014/main" id="{DCC4BFCF-FB46-4F11-982A-E7ADB766A49F}"/>
               </a:ext>
             </a:extLst>
           </p:cNvPr>
@@ -13704,7 +14024,7 @@
           <p:cNvPr id="13" name="Blue process arrow">
             <a:extLst xmlns:a="http://schemas.openxmlformats.org/drawingml/2006/main">
               <a:ext uri="{FF2B5EF4-FFF2-40B4-BE49-F238E27FC236}">
-                <a16:creationId xmlns:a16="http://schemas.microsoft.com/office/drawing/2014/main" id="{5C4769B4-DA5A-4DA2-883D-73E81DE14B2A}"/>
+                <a16:creationId xmlns:a16="http://schemas.microsoft.com/office/drawing/2014/main" id="{F0DA3ADE-9322-469C-8CE7-0EE09F7F9991}"/>
               </a:ext>
             </a:extLst>
           </p:cNvPr>
@@ -13731,7 +14051,7 @@
           <p:cNvPr id="14" name="Blue process arrow">
             <a:extLst xmlns:a="http://schemas.openxmlformats.org/drawingml/2006/main">
               <a:ext uri="{FF2B5EF4-FFF2-40B4-BE49-F238E27FC236}">
-                <a16:creationId xmlns:a16="http://schemas.microsoft.com/office/drawing/2014/main" id="{1129A719-F6A0-4216-8D1A-16C27CD8A836}"/>
+                <a16:creationId xmlns:a16="http://schemas.microsoft.com/office/drawing/2014/main" id="{42D45A54-CE3C-4A0D-9F9E-225C268E816A}"/>
               </a:ext>
             </a:extLst>
           </p:cNvPr>
@@ -13758,7 +14078,7 @@
           <p:cNvPr id="15" name="Blue process arrow">
             <a:extLst xmlns:a="http://schemas.openxmlformats.org/drawingml/2006/main">
               <a:ext uri="{FF2B5EF4-FFF2-40B4-BE49-F238E27FC236}">
-                <a16:creationId xmlns:a16="http://schemas.microsoft.com/office/drawing/2014/main" id="{F57EC5D2-B41D-4973-AE7C-0DAE27AF89DC}"/>
+                <a16:creationId xmlns:a16="http://schemas.microsoft.com/office/drawing/2014/main" id="{A1C7474D-2946-4F8C-AA20-007025737283}"/>
               </a:ext>
             </a:extLst>
           </p:cNvPr>
@@ -13786,7 +14106,7 @@
           <p:cNvPr id="16" name="Blue process arrow">
             <a:extLst xmlns:a="http://schemas.openxmlformats.org/drawingml/2006/main">
               <a:ext uri="{FF2B5EF4-FFF2-40B4-BE49-F238E27FC236}">
-                <a16:creationId xmlns:a16="http://schemas.microsoft.com/office/drawing/2014/main" id="{17FA439D-D0A2-47FC-BBED-4A9FC0123CD8}"/>
+                <a16:creationId xmlns:a16="http://schemas.microsoft.com/office/drawing/2014/main" id="{366EC5CF-327F-4410-827A-75119787C8CE}"/>
               </a:ext>
             </a:extLst>
           </p:cNvPr>
@@ -13886,6 +14206,7 @@
               </a:defRPr>
             </a:defPPr>
             <a:lvl1pPr>
+              <a:buNone/>
               <a:defRPr sz="1575" b="1">
                 <a:solidFill>
                   <a:srgbClr val="1768C7"/>
@@ -13896,6 +14217,7 @@
               </a:defRPr>
             </a:lvl1pPr>
             <a:lvl2pPr>
+              <a:buNone/>
               <a:defRPr sz="1575" b="1">
                 <a:solidFill>
                   <a:srgbClr val="1768C7"/>
@@ -13906,6 +14228,7 @@
               </a:defRPr>
             </a:lvl2pPr>
             <a:lvl3pPr>
+              <a:buNone/>
               <a:defRPr sz="1575" b="1">
                 <a:solidFill>
                   <a:srgbClr val="1768C7"/>
@@ -13916,6 +14239,7 @@
               </a:defRPr>
             </a:lvl3pPr>
             <a:lvl4pPr>
+              <a:buNone/>
               <a:defRPr sz="1575" b="1">
                 <a:solidFill>
                   <a:srgbClr val="1768C7"/>
@@ -13926,6 +14250,7 @@
               </a:defRPr>
             </a:lvl4pPr>
             <a:lvl5pPr>
+              <a:buNone/>
               <a:defRPr sz="1575" b="1">
                 <a:solidFill>
                   <a:srgbClr val="1768C7"/>
@@ -13936,6 +14261,7 @@
               </a:defRPr>
             </a:lvl5pPr>
             <a:lvl6pPr>
+              <a:buNone/>
               <a:defRPr sz="1575" b="1">
                 <a:solidFill>
                   <a:srgbClr val="1768C7"/>
@@ -13946,6 +14272,7 @@
               </a:defRPr>
             </a:lvl6pPr>
             <a:lvl7pPr>
+              <a:buNone/>
               <a:defRPr sz="1575" b="1">
                 <a:solidFill>
                   <a:srgbClr val="1768C7"/>
@@ -13956,6 +14283,7 @@
               </a:defRPr>
             </a:lvl7pPr>
             <a:lvl8pPr>
+              <a:buNone/>
               <a:defRPr sz="1575" b="1">
                 <a:solidFill>
                   <a:srgbClr val="1768C7"/>
@@ -13966,6 +14294,7 @@
               </a:defRPr>
             </a:lvl8pPr>
             <a:lvl9pPr>
+              <a:buNone/>
               <a:defRPr sz="1575" b="1">
                 <a:solidFill>
                   <a:srgbClr val="1768C7"/>
@@ -13978,6 +14307,7 @@
           </a:lstStyle>
           <a:p xmlns:a="http://schemas.openxmlformats.org/drawingml/2006/main">
             <a:pPr>
+              <a:buNone/>
               <a:defRPr sz="1575" b="1">
                 <a:solidFill>
                   <a:srgbClr val="1768C7"/>
@@ -14044,6 +14374,7 @@
               </a:defRPr>
             </a:defPPr>
             <a:lvl1pPr>
+              <a:buNone/>
               <a:defRPr sz="1500" b="0">
                 <a:solidFill>
                   <a:srgbClr val="173B75"/>
@@ -14054,6 +14385,7 @@
               </a:defRPr>
             </a:lvl1pPr>
             <a:lvl2pPr>
+              <a:buNone/>
               <a:defRPr sz="1500" b="0">
                 <a:solidFill>
                   <a:srgbClr val="173B75"/>
@@ -14064,6 +14396,7 @@
               </a:defRPr>
             </a:lvl2pPr>
             <a:lvl3pPr>
+              <a:buNone/>
               <a:defRPr sz="1500" b="0">
                 <a:solidFill>
                   <a:srgbClr val="173B75"/>
@@ -14074,6 +14407,7 @@
               </a:defRPr>
             </a:lvl3pPr>
             <a:lvl4pPr>
+              <a:buNone/>
               <a:defRPr sz="1500" b="0">
                 <a:solidFill>
                   <a:srgbClr val="173B75"/>
@@ -14084,6 +14418,7 @@
               </a:defRPr>
             </a:lvl4pPr>
             <a:lvl5pPr>
+              <a:buNone/>
               <a:defRPr sz="1500" b="0">
                 <a:solidFill>
                   <a:srgbClr val="173B75"/>
@@ -14094,6 +14429,7 @@
               </a:defRPr>
             </a:lvl5pPr>
             <a:lvl6pPr>
+              <a:buNone/>
               <a:defRPr sz="1500" b="0">
                 <a:solidFill>
                   <a:srgbClr val="173B75"/>
@@ -14104,6 +14440,7 @@
               </a:defRPr>
             </a:lvl6pPr>
             <a:lvl7pPr>
+              <a:buNone/>
               <a:defRPr sz="1500" b="0">
                 <a:solidFill>
                   <a:srgbClr val="173B75"/>
@@ -14114,6 +14451,7 @@
               </a:defRPr>
             </a:lvl7pPr>
             <a:lvl8pPr>
+              <a:buNone/>
               <a:defRPr sz="1500" b="0">
                 <a:solidFill>
                   <a:srgbClr val="173B75"/>
@@ -14124,6 +14462,7 @@
               </a:defRPr>
             </a:lvl8pPr>
             <a:lvl9pPr>
+              <a:buNone/>
               <a:defRPr sz="1500" b="0">
                 <a:solidFill>
                   <a:srgbClr val="173B75"/>
@@ -14136,6 +14475,7 @@
           </a:lstStyle>
           <a:p xmlns:a="http://schemas.openxmlformats.org/drawingml/2006/main">
             <a:pPr>
+              <a:buNone/>
               <a:defRPr sz="1500" b="0">
                 <a:solidFill>
                   <a:srgbClr val="173B75"/>
@@ -14159,6 +14499,7 @@
           </a:p>
           <a:p xmlns:a="http://schemas.openxmlformats.org/drawingml/2006/main">
             <a:pPr>
+              <a:buNone/>
               <a:defRPr sz="1500" b="0">
                 <a:solidFill>
                   <a:srgbClr val="173B75"/>
@@ -14259,6 +14600,7 @@
               </a:defRPr>
             </a:defPPr>
             <a:lvl1pPr>
+              <a:buNone/>
               <a:defRPr sz="1575" b="1">
                 <a:solidFill>
                   <a:srgbClr val="1768C7"/>
@@ -14269,6 +14611,7 @@
               </a:defRPr>
             </a:lvl1pPr>
             <a:lvl2pPr>
+              <a:buNone/>
               <a:defRPr sz="1575" b="1">
                 <a:solidFill>
                   <a:srgbClr val="1768C7"/>
@@ -14279,6 +14622,7 @@
               </a:defRPr>
             </a:lvl2pPr>
             <a:lvl3pPr>
+              <a:buNone/>
               <a:defRPr sz="1575" b="1">
                 <a:solidFill>
                   <a:srgbClr val="1768C7"/>
@@ -14289,6 +14633,7 @@
               </a:defRPr>
             </a:lvl3pPr>
             <a:lvl4pPr>
+              <a:buNone/>
               <a:defRPr sz="1575" b="1">
                 <a:solidFill>
                   <a:srgbClr val="1768C7"/>
@@ -14299,6 +14644,7 @@
               </a:defRPr>
             </a:lvl4pPr>
             <a:lvl5pPr>
+              <a:buNone/>
               <a:defRPr sz="1575" b="1">
                 <a:solidFill>
                   <a:srgbClr val="1768C7"/>
@@ -14309,6 +14655,7 @@
               </a:defRPr>
             </a:lvl5pPr>
             <a:lvl6pPr>
+              <a:buNone/>
               <a:defRPr sz="1575" b="1">
                 <a:solidFill>
                   <a:srgbClr val="1768C7"/>
@@ -14319,6 +14666,7 @@
               </a:defRPr>
             </a:lvl6pPr>
             <a:lvl7pPr>
+              <a:buNone/>
               <a:defRPr sz="1575" b="1">
                 <a:solidFill>
                   <a:srgbClr val="1768C7"/>
@@ -14329,6 +14677,7 @@
               </a:defRPr>
             </a:lvl7pPr>
             <a:lvl8pPr>
+              <a:buNone/>
               <a:defRPr sz="1575" b="1">
                 <a:solidFill>
                   <a:srgbClr val="1768C7"/>
@@ -14339,6 +14688,7 @@
               </a:defRPr>
             </a:lvl8pPr>
             <a:lvl9pPr>
+              <a:buNone/>
               <a:defRPr sz="1575" b="1">
                 <a:solidFill>
                   <a:srgbClr val="1768C7"/>
@@ -14351,6 +14701,7 @@
           </a:lstStyle>
           <a:p xmlns:a="http://schemas.openxmlformats.org/drawingml/2006/main">
             <a:pPr>
+              <a:buNone/>
               <a:defRPr sz="1575" b="1">
                 <a:solidFill>
                   <a:srgbClr val="1768C7"/>
@@ -14417,6 +14768,7 @@
               </a:defRPr>
             </a:defPPr>
             <a:lvl1pPr>
+              <a:buNone/>
               <a:defRPr sz="1500" b="0">
                 <a:solidFill>
                   <a:srgbClr val="173B75"/>
@@ -14427,6 +14779,7 @@
               </a:defRPr>
             </a:lvl1pPr>
             <a:lvl2pPr>
+              <a:buNone/>
               <a:defRPr sz="1500" b="0">
                 <a:solidFill>
                   <a:srgbClr val="173B75"/>
@@ -14437,6 +14790,7 @@
               </a:defRPr>
             </a:lvl2pPr>
             <a:lvl3pPr>
+              <a:buNone/>
               <a:defRPr sz="1500" b="0">
                 <a:solidFill>
                   <a:srgbClr val="173B75"/>
@@ -14447,6 +14801,7 @@
               </a:defRPr>
             </a:lvl3pPr>
             <a:lvl4pPr>
+              <a:buNone/>
               <a:defRPr sz="1500" b="0">
                 <a:solidFill>
                   <a:srgbClr val="173B75"/>
@@ -14457,6 +14812,7 @@
               </a:defRPr>
             </a:lvl4pPr>
             <a:lvl5pPr>
+              <a:buNone/>
               <a:defRPr sz="1500" b="0">
                 <a:solidFill>
                   <a:srgbClr val="173B75"/>
@@ -14467,6 +14823,7 @@
               </a:defRPr>
             </a:lvl5pPr>
             <a:lvl6pPr>
+              <a:buNone/>
               <a:defRPr sz="1500" b="0">
                 <a:solidFill>
                   <a:srgbClr val="173B75"/>
@@ -14477,6 +14834,7 @@
               </a:defRPr>
             </a:lvl6pPr>
             <a:lvl7pPr>
+              <a:buNone/>
               <a:defRPr sz="1500" b="0">
                 <a:solidFill>
                   <a:srgbClr val="173B75"/>
@@ -14487,6 +14845,7 @@
               </a:defRPr>
             </a:lvl7pPr>
             <a:lvl8pPr>
+              <a:buNone/>
               <a:defRPr sz="1500" b="0">
                 <a:solidFill>
                   <a:srgbClr val="173B75"/>
@@ -14497,6 +14856,7 @@
               </a:defRPr>
             </a:lvl8pPr>
             <a:lvl9pPr>
+              <a:buNone/>
               <a:defRPr sz="1500" b="0">
                 <a:solidFill>
                   <a:srgbClr val="173B75"/>
@@ -14509,6 +14869,7 @@
           </a:lstStyle>
           <a:p xmlns:a="http://schemas.openxmlformats.org/drawingml/2006/main">
             <a:pPr>
+              <a:buNone/>
               <a:defRPr sz="1500" b="0">
                 <a:solidFill>
                   <a:srgbClr val="173B75"/>
@@ -14532,6 +14893,7 @@
           </a:p>
           <a:p xmlns:a="http://schemas.openxmlformats.org/drawingml/2006/main">
             <a:pPr>
+              <a:buNone/>
               <a:defRPr sz="1500" b="0">
                 <a:solidFill>
                   <a:srgbClr val="173B75"/>
@@ -14632,6 +14994,7 @@
               </a:defRPr>
             </a:defPPr>
             <a:lvl1pPr>
+              <a:buNone/>
               <a:defRPr sz="1575" b="1">
                 <a:solidFill>
                   <a:srgbClr val="1768C7"/>
@@ -14642,6 +15005,7 @@
               </a:defRPr>
             </a:lvl1pPr>
             <a:lvl2pPr>
+              <a:buNone/>
               <a:defRPr sz="1575" b="1">
                 <a:solidFill>
                   <a:srgbClr val="1768C7"/>
@@ -14652,6 +15016,7 @@
               </a:defRPr>
             </a:lvl2pPr>
             <a:lvl3pPr>
+              <a:buNone/>
               <a:defRPr sz="1575" b="1">
                 <a:solidFill>
                   <a:srgbClr val="1768C7"/>
@@ -14662,6 +15027,7 @@
               </a:defRPr>
             </a:lvl3pPr>
             <a:lvl4pPr>
+              <a:buNone/>
               <a:defRPr sz="1575" b="1">
                 <a:solidFill>
                   <a:srgbClr val="1768C7"/>
@@ -14672,6 +15038,7 @@
               </a:defRPr>
             </a:lvl4pPr>
             <a:lvl5pPr>
+              <a:buNone/>
               <a:defRPr sz="1575" b="1">
                 <a:solidFill>
                   <a:srgbClr val="1768C7"/>
@@ -14682,6 +15049,7 @@
               </a:defRPr>
             </a:lvl5pPr>
             <a:lvl6pPr>
+              <a:buNone/>
               <a:defRPr sz="1575" b="1">
                 <a:solidFill>
                   <a:srgbClr val="1768C7"/>
@@ -14692,6 +15060,7 @@
               </a:defRPr>
             </a:lvl6pPr>
             <a:lvl7pPr>
+              <a:buNone/>
               <a:defRPr sz="1575" b="1">
                 <a:solidFill>
                   <a:srgbClr val="1768C7"/>
@@ -14702,6 +15071,7 @@
               </a:defRPr>
             </a:lvl7pPr>
             <a:lvl8pPr>
+              <a:buNone/>
               <a:defRPr sz="1575" b="1">
                 <a:solidFill>
                   <a:srgbClr val="1768C7"/>
@@ -14712,6 +15082,7 @@
               </a:defRPr>
             </a:lvl8pPr>
             <a:lvl9pPr>
+              <a:buNone/>
               <a:defRPr sz="1575" b="1">
                 <a:solidFill>
                   <a:srgbClr val="1768C7"/>
@@ -14724,6 +15095,7 @@
           </a:lstStyle>
           <a:p xmlns:a="http://schemas.openxmlformats.org/drawingml/2006/main">
             <a:pPr>
+              <a:buNone/>
               <a:defRPr sz="1575" b="1">
                 <a:solidFill>
                   <a:srgbClr val="1768C7"/>
@@ -14790,6 +15162,7 @@
               </a:defRPr>
             </a:defPPr>
             <a:lvl1pPr>
+              <a:buNone/>
               <a:defRPr sz="1500" b="0">
                 <a:solidFill>
                   <a:srgbClr val="173B75"/>
@@ -14800,6 +15173,7 @@
               </a:defRPr>
             </a:lvl1pPr>
             <a:lvl2pPr>
+              <a:buNone/>
               <a:defRPr sz="1500" b="0">
                 <a:solidFill>
                   <a:srgbClr val="173B75"/>
@@ -14810,6 +15184,7 @@
               </a:defRPr>
             </a:lvl2pPr>
             <a:lvl3pPr>
+              <a:buNone/>
               <a:defRPr sz="1500" b="0">
                 <a:solidFill>
                   <a:srgbClr val="173B75"/>
@@ -14820,6 +15195,7 @@
               </a:defRPr>
             </a:lvl3pPr>
             <a:lvl4pPr>
+              <a:buNone/>
               <a:defRPr sz="1500" b="0">
                 <a:solidFill>
                   <a:srgbClr val="173B75"/>
@@ -14830,6 +15206,7 @@
               </a:defRPr>
             </a:lvl4pPr>
             <a:lvl5pPr>
+              <a:buNone/>
               <a:defRPr sz="1500" b="0">
                 <a:solidFill>
                   <a:srgbClr val="173B75"/>
@@ -14840,6 +15217,7 @@
               </a:defRPr>
             </a:lvl5pPr>
             <a:lvl6pPr>
+              <a:buNone/>
               <a:defRPr sz="1500" b="0">
                 <a:solidFill>
                   <a:srgbClr val="173B75"/>
@@ -14850,6 +15228,7 @@
               </a:defRPr>
             </a:lvl6pPr>
             <a:lvl7pPr>
+              <a:buNone/>
               <a:defRPr sz="1500" b="0">
                 <a:solidFill>
                   <a:srgbClr val="173B75"/>
@@ -14860,6 +15239,7 @@
               </a:defRPr>
             </a:lvl7pPr>
             <a:lvl8pPr>
+              <a:buNone/>
               <a:defRPr sz="1500" b="0">
                 <a:solidFill>
                   <a:srgbClr val="173B75"/>
@@ -14870,6 +15250,7 @@
               </a:defRPr>
             </a:lvl8pPr>
             <a:lvl9pPr>
+              <a:buNone/>
               <a:defRPr sz="1500" b="0">
                 <a:solidFill>
                   <a:srgbClr val="173B75"/>
@@ -14882,6 +15263,7 @@
           </a:lstStyle>
           <a:p xmlns:a="http://schemas.openxmlformats.org/drawingml/2006/main">
             <a:pPr>
+              <a:buNone/>
               <a:defRPr sz="1500" b="0">
                 <a:solidFill>
                   <a:srgbClr val="173B75"/>
@@ -14905,6 +15287,7 @@
           </a:p>
           <a:p xmlns:a="http://schemas.openxmlformats.org/drawingml/2006/main">
             <a:pPr>
+              <a:buNone/>
               <a:defRPr sz="1500" b="0">
                 <a:solidFill>
                   <a:srgbClr val="173B75"/>
@@ -15005,6 +15388,7 @@
               </a:defRPr>
             </a:defPPr>
             <a:lvl1pPr>
+              <a:buNone/>
               <a:defRPr sz="1575" b="1">
                 <a:solidFill>
                   <a:srgbClr val="1768C7"/>
@@ -15015,6 +15399,7 @@
               </a:defRPr>
             </a:lvl1pPr>
             <a:lvl2pPr>
+              <a:buNone/>
               <a:defRPr sz="1575" b="1">
                 <a:solidFill>
                   <a:srgbClr val="1768C7"/>
@@ -15025,6 +15410,7 @@
               </a:defRPr>
             </a:lvl2pPr>
             <a:lvl3pPr>
+              <a:buNone/>
               <a:defRPr sz="1575" b="1">
                 <a:solidFill>
                   <a:srgbClr val="1768C7"/>
@@ -15035,6 +15421,7 @@
               </a:defRPr>
             </a:lvl3pPr>
             <a:lvl4pPr>
+              <a:buNone/>
               <a:defRPr sz="1575" b="1">
                 <a:solidFill>
                   <a:srgbClr val="1768C7"/>
@@ -15045,6 +15432,7 @@
               </a:defRPr>
             </a:lvl4pPr>
             <a:lvl5pPr>
+              <a:buNone/>
               <a:defRPr sz="1575" b="1">
                 <a:solidFill>
                   <a:srgbClr val="1768C7"/>
@@ -15055,6 +15443,7 @@
               </a:defRPr>
             </a:lvl5pPr>
             <a:lvl6pPr>
+              <a:buNone/>
               <a:defRPr sz="1575" b="1">
                 <a:solidFill>
                   <a:srgbClr val="1768C7"/>
@@ -15065,6 +15454,7 @@
               </a:defRPr>
             </a:lvl6pPr>
             <a:lvl7pPr>
+              <a:buNone/>
               <a:defRPr sz="1575" b="1">
                 <a:solidFill>
                   <a:srgbClr val="1768C7"/>
@@ -15075,6 +15465,7 @@
               </a:defRPr>
             </a:lvl7pPr>
             <a:lvl8pPr>
+              <a:buNone/>
               <a:defRPr sz="1575" b="1">
                 <a:solidFill>
                   <a:srgbClr val="1768C7"/>
@@ -15085,6 +15476,7 @@
               </a:defRPr>
             </a:lvl8pPr>
             <a:lvl9pPr>
+              <a:buNone/>
               <a:defRPr sz="1575" b="1">
                 <a:solidFill>
                   <a:srgbClr val="1768C7"/>
@@ -15097,6 +15489,7 @@
           </a:lstStyle>
           <a:p xmlns:a="http://schemas.openxmlformats.org/drawingml/2006/main">
             <a:pPr>
+              <a:buNone/>
               <a:defRPr sz="1575" b="1">
                 <a:solidFill>
                   <a:srgbClr val="1768C7"/>
@@ -15163,6 +15556,7 @@
               </a:defRPr>
             </a:defPPr>
             <a:lvl1pPr>
+              <a:buNone/>
               <a:defRPr sz="1500" b="0">
                 <a:solidFill>
                   <a:srgbClr val="173B75"/>
@@ -15173,6 +15567,7 @@
               </a:defRPr>
             </a:lvl1pPr>
             <a:lvl2pPr>
+              <a:buNone/>
               <a:defRPr sz="1500" b="0">
                 <a:solidFill>
                   <a:srgbClr val="173B75"/>
@@ -15183,6 +15578,7 @@
               </a:defRPr>
             </a:lvl2pPr>
             <a:lvl3pPr>
+              <a:buNone/>
               <a:defRPr sz="1500" b="0">
                 <a:solidFill>
                   <a:srgbClr val="173B75"/>
@@ -15193,6 +15589,7 @@
               </a:defRPr>
             </a:lvl3pPr>
             <a:lvl4pPr>
+              <a:buNone/>
               <a:defRPr sz="1500" b="0">
                 <a:solidFill>
                   <a:srgbClr val="173B75"/>
@@ -15203,6 +15600,7 @@
               </a:defRPr>
             </a:lvl4pPr>
             <a:lvl5pPr>
+              <a:buNone/>
               <a:defRPr sz="1500" b="0">
                 <a:solidFill>
                   <a:srgbClr val="173B75"/>
@@ -15213,6 +15611,7 @@
               </a:defRPr>
             </a:lvl5pPr>
             <a:lvl6pPr>
+              <a:buNone/>
               <a:defRPr sz="1500" b="0">
                 <a:solidFill>
                   <a:srgbClr val="173B75"/>
@@ -15223,6 +15622,7 @@
               </a:defRPr>
             </a:lvl6pPr>
             <a:lvl7pPr>
+              <a:buNone/>
               <a:defRPr sz="1500" b="0">
                 <a:solidFill>
                   <a:srgbClr val="173B75"/>
@@ -15233,6 +15633,7 @@
               </a:defRPr>
             </a:lvl7pPr>
             <a:lvl8pPr>
+              <a:buNone/>
               <a:defRPr sz="1500" b="0">
                 <a:solidFill>
                   <a:srgbClr val="173B75"/>
@@ -15243,6 +15644,7 @@
               </a:defRPr>
             </a:lvl8pPr>
             <a:lvl9pPr>
+              <a:buNone/>
               <a:defRPr sz="1500" b="0">
                 <a:solidFill>
                   <a:srgbClr val="173B75"/>
@@ -15255,6 +15657,7 @@
           </a:lstStyle>
           <a:p xmlns:a="http://schemas.openxmlformats.org/drawingml/2006/main">
             <a:pPr>
+              <a:buNone/>
               <a:defRPr sz="1500" b="0">
                 <a:solidFill>
                   <a:srgbClr val="173B75"/>
@@ -15278,6 +15681,7 @@
           </a:p>
           <a:p xmlns:a="http://schemas.openxmlformats.org/drawingml/2006/main">
             <a:pPr>
+              <a:buNone/>
               <a:defRPr sz="1500" b="0">
                 <a:solidFill>
                   <a:srgbClr val="173B75"/>
@@ -15378,6 +15782,7 @@
               </a:defRPr>
             </a:defPPr>
             <a:lvl1pPr>
+              <a:buNone/>
               <a:defRPr sz="1575" b="1">
                 <a:solidFill>
                   <a:srgbClr val="1768C7"/>
@@ -15388,6 +15793,7 @@
               </a:defRPr>
             </a:lvl1pPr>
             <a:lvl2pPr>
+              <a:buNone/>
               <a:defRPr sz="1575" b="1">
                 <a:solidFill>
                   <a:srgbClr val="1768C7"/>
@@ -15398,6 +15804,7 @@
               </a:defRPr>
             </a:lvl2pPr>
             <a:lvl3pPr>
+              <a:buNone/>
               <a:defRPr sz="1575" b="1">
                 <a:solidFill>
                   <a:srgbClr val="1768C7"/>
@@ -15408,6 +15815,7 @@
               </a:defRPr>
             </a:lvl3pPr>
             <a:lvl4pPr>
+              <a:buNone/>
               <a:defRPr sz="1575" b="1">
                 <a:solidFill>
                   <a:srgbClr val="1768C7"/>
@@ -15418,6 +15826,7 @@
               </a:defRPr>
             </a:lvl4pPr>
             <a:lvl5pPr>
+              <a:buNone/>
               <a:defRPr sz="1575" b="1">
                 <a:solidFill>
                   <a:srgbClr val="1768C7"/>
@@ -15428,6 +15837,7 @@
               </a:defRPr>
             </a:lvl5pPr>
             <a:lvl6pPr>
+              <a:buNone/>
               <a:defRPr sz="1575" b="1">
                 <a:solidFill>
                   <a:srgbClr val="1768C7"/>
@@ -15438,6 +15848,7 @@
               </a:defRPr>
             </a:lvl6pPr>
             <a:lvl7pPr>
+              <a:buNone/>
               <a:defRPr sz="1575" b="1">
                 <a:solidFill>
                   <a:srgbClr val="1768C7"/>
@@ -15448,6 +15859,7 @@
               </a:defRPr>
             </a:lvl7pPr>
             <a:lvl8pPr>
+              <a:buNone/>
               <a:defRPr sz="1575" b="1">
                 <a:solidFill>
                   <a:srgbClr val="1768C7"/>
@@ -15458,6 +15870,7 @@
               </a:defRPr>
             </a:lvl8pPr>
             <a:lvl9pPr>
+              <a:buNone/>
               <a:defRPr sz="1575" b="1">
                 <a:solidFill>
                   <a:srgbClr val="1768C7"/>
@@ -15470,6 +15883,7 @@
           </a:lstStyle>
           <a:p xmlns:a="http://schemas.openxmlformats.org/drawingml/2006/main">
             <a:pPr>
+              <a:buNone/>
               <a:defRPr sz="1575" b="1">
                 <a:solidFill>
                   <a:srgbClr val="1768C7"/>
@@ -15536,6 +15950,7 @@
               </a:defRPr>
             </a:defPPr>
             <a:lvl1pPr>
+              <a:buNone/>
               <a:defRPr sz="1500" b="0">
                 <a:solidFill>
                   <a:srgbClr val="173B75"/>
@@ -15546,6 +15961,7 @@
               </a:defRPr>
             </a:lvl1pPr>
             <a:lvl2pPr>
+              <a:buNone/>
               <a:defRPr sz="1500" b="0">
                 <a:solidFill>
                   <a:srgbClr val="173B75"/>
@@ -15556,6 +15972,7 @@
               </a:defRPr>
             </a:lvl2pPr>
             <a:lvl3pPr>
+              <a:buNone/>
               <a:defRPr sz="1500" b="0">
                 <a:solidFill>
                   <a:srgbClr val="173B75"/>
@@ -15566,6 +15983,7 @@
               </a:defRPr>
             </a:lvl3pPr>
             <a:lvl4pPr>
+              <a:buNone/>
               <a:defRPr sz="1500" b="0">
                 <a:solidFill>
                   <a:srgbClr val="173B75"/>
@@ -15576,6 +15994,7 @@
               </a:defRPr>
             </a:lvl4pPr>
             <a:lvl5pPr>
+              <a:buNone/>
               <a:defRPr sz="1500" b="0">
                 <a:solidFill>
                   <a:srgbClr val="173B75"/>
@@ -15586,6 +16005,7 @@
               </a:defRPr>
             </a:lvl5pPr>
             <a:lvl6pPr>
+              <a:buNone/>
               <a:defRPr sz="1500" b="0">
                 <a:solidFill>
                   <a:srgbClr val="173B75"/>
@@ -15596,6 +16016,7 @@
               </a:defRPr>
             </a:lvl6pPr>
             <a:lvl7pPr>
+              <a:buNone/>
               <a:defRPr sz="1500" b="0">
                 <a:solidFill>
                   <a:srgbClr val="173B75"/>
@@ -15606,6 +16027,7 @@
               </a:defRPr>
             </a:lvl7pPr>
             <a:lvl8pPr>
+              <a:buNone/>
               <a:defRPr sz="1500" b="0">
                 <a:solidFill>
                   <a:srgbClr val="173B75"/>
@@ -15616,6 +16038,7 @@
               </a:defRPr>
             </a:lvl8pPr>
             <a:lvl9pPr>
+              <a:buNone/>
               <a:defRPr sz="1500" b="0">
                 <a:solidFill>
                   <a:srgbClr val="173B75"/>
@@ -15628,6 +16051,7 @@
           </a:lstStyle>
           <a:p xmlns:a="http://schemas.openxmlformats.org/drawingml/2006/main">
             <a:pPr>
+              <a:buNone/>
               <a:defRPr sz="1500" b="0">
                 <a:solidFill>
                   <a:srgbClr val="173B75"/>
@@ -15651,6 +16075,7 @@
           </a:p>
           <a:p xmlns:a="http://schemas.openxmlformats.org/drawingml/2006/main">
             <a:pPr>
+              <a:buNone/>
               <a:defRPr sz="1500" b="0">
                 <a:solidFill>
                   <a:srgbClr val="173B75"/>
@@ -15751,6 +16176,7 @@
               </a:defRPr>
             </a:defPPr>
             <a:lvl1pPr>
+              <a:buNone/>
               <a:defRPr sz="1575" b="1">
                 <a:solidFill>
                   <a:srgbClr val="1768C7"/>
@@ -15761,6 +16187,7 @@
               </a:defRPr>
             </a:lvl1pPr>
             <a:lvl2pPr>
+              <a:buNone/>
               <a:defRPr sz="1575" b="1">
                 <a:solidFill>
                   <a:srgbClr val="1768C7"/>
@@ -15771,6 +16198,7 @@
               </a:defRPr>
             </a:lvl2pPr>
             <a:lvl3pPr>
+              <a:buNone/>
               <a:defRPr sz="1575" b="1">
                 <a:solidFill>
                   <a:srgbClr val="1768C7"/>
@@ -15781,6 +16209,7 @@
               </a:defRPr>
             </a:lvl3pPr>
             <a:lvl4pPr>
+              <a:buNone/>
               <a:defRPr sz="1575" b="1">
                 <a:solidFill>
                   <a:srgbClr val="1768C7"/>
@@ -15791,6 +16220,7 @@
               </a:defRPr>
             </a:lvl4pPr>
             <a:lvl5pPr>
+              <a:buNone/>
               <a:defRPr sz="1575" b="1">
                 <a:solidFill>
                   <a:srgbClr val="1768C7"/>
@@ -15801,6 +16231,7 @@
               </a:defRPr>
             </a:lvl5pPr>
             <a:lvl6pPr>
+              <a:buNone/>
               <a:defRPr sz="1575" b="1">
                 <a:solidFill>
                   <a:srgbClr val="1768C7"/>
@@ -15811,6 +16242,7 @@
               </a:defRPr>
             </a:lvl6pPr>
             <a:lvl7pPr>
+              <a:buNone/>
               <a:defRPr sz="1575" b="1">
                 <a:solidFill>
                   <a:srgbClr val="1768C7"/>
@@ -15821,6 +16253,7 @@
               </a:defRPr>
             </a:lvl7pPr>
             <a:lvl8pPr>
+              <a:buNone/>
               <a:defRPr sz="1575" b="1">
                 <a:solidFill>
                   <a:srgbClr val="1768C7"/>
@@ -15831,6 +16264,7 @@
               </a:defRPr>
             </a:lvl8pPr>
             <a:lvl9pPr>
+              <a:buNone/>
               <a:defRPr sz="1575" b="1">
                 <a:solidFill>
                   <a:srgbClr val="1768C7"/>
@@ -15843,6 +16277,7 @@
           </a:lstStyle>
           <a:p xmlns:a="http://schemas.openxmlformats.org/drawingml/2006/main">
             <a:pPr>
+              <a:buNone/>
               <a:defRPr sz="1575" b="1">
                 <a:solidFill>
                   <a:srgbClr val="1768C7"/>
@@ -15909,6 +16344,7 @@
               </a:defRPr>
             </a:defPPr>
             <a:lvl1pPr>
+              <a:buNone/>
               <a:defRPr sz="1500" b="0">
                 <a:solidFill>
                   <a:srgbClr val="173B75"/>
@@ -15919,6 +16355,7 @@
               </a:defRPr>
             </a:lvl1pPr>
             <a:lvl2pPr>
+              <a:buNone/>
               <a:defRPr sz="1500" b="0">
                 <a:solidFill>
                   <a:srgbClr val="173B75"/>
@@ -15929,6 +16366,7 @@
               </a:defRPr>
             </a:lvl2pPr>
             <a:lvl3pPr>
+              <a:buNone/>
               <a:defRPr sz="1500" b="0">
                 <a:solidFill>
                   <a:srgbClr val="173B75"/>
@@ -15939,6 +16377,7 @@
               </a:defRPr>
             </a:lvl3pPr>
             <a:lvl4pPr>
+              <a:buNone/>
               <a:defRPr sz="1500" b="0">
                 <a:solidFill>
                   <a:srgbClr val="173B75"/>
@@ -15949,6 +16388,7 @@
               </a:defRPr>
             </a:lvl4pPr>
             <a:lvl5pPr>
+              <a:buNone/>
               <a:defRPr sz="1500" b="0">
                 <a:solidFill>
                   <a:srgbClr val="173B75"/>
@@ -15959,6 +16399,7 @@
               </a:defRPr>
             </a:lvl5pPr>
             <a:lvl6pPr>
+              <a:buNone/>
               <a:defRPr sz="1500" b="0">
                 <a:solidFill>
                   <a:srgbClr val="173B75"/>
@@ -15969,6 +16410,7 @@
               </a:defRPr>
             </a:lvl6pPr>
             <a:lvl7pPr>
+              <a:buNone/>
               <a:defRPr sz="1500" b="0">
                 <a:solidFill>
                   <a:srgbClr val="173B75"/>
@@ -15979,6 +16421,7 @@
               </a:defRPr>
             </a:lvl7pPr>
             <a:lvl8pPr>
+              <a:buNone/>
               <a:defRPr sz="1500" b="0">
                 <a:solidFill>
                   <a:srgbClr val="173B75"/>
@@ -15989,6 +16432,7 @@
               </a:defRPr>
             </a:lvl8pPr>
             <a:lvl9pPr>
+              <a:buNone/>
               <a:defRPr sz="1500" b="0">
                 <a:solidFill>
                   <a:srgbClr val="173B75"/>
@@ -16001,6 +16445,7 @@
           </a:lstStyle>
           <a:p xmlns:a="http://schemas.openxmlformats.org/drawingml/2006/main">
             <a:pPr>
+              <a:buNone/>
               <a:defRPr sz="1500" b="0">
                 <a:solidFill>
                   <a:srgbClr val="173B75"/>
@@ -16024,6 +16469,7 @@
           </a:p>
           <a:p xmlns:a="http://schemas.openxmlformats.org/drawingml/2006/main">
             <a:pPr>
+              <a:buNone/>
               <a:defRPr sz="1500" b="0">
                 <a:solidFill>
                   <a:srgbClr val="173B75"/>
@@ -16124,6 +16570,7 @@
               </a:defRPr>
             </a:defPPr>
             <a:lvl1pPr>
+              <a:buNone/>
               <a:defRPr sz="1575" b="1">
                 <a:solidFill>
                   <a:srgbClr val="1768C7"/>
@@ -16134,6 +16581,7 @@
               </a:defRPr>
             </a:lvl1pPr>
             <a:lvl2pPr>
+              <a:buNone/>
               <a:defRPr sz="1575" b="1">
                 <a:solidFill>
                   <a:srgbClr val="1768C7"/>
@@ -16144,6 +16592,7 @@
               </a:defRPr>
             </a:lvl2pPr>
             <a:lvl3pPr>
+              <a:buNone/>
               <a:defRPr sz="1575" b="1">
                 <a:solidFill>
                   <a:srgbClr val="1768C7"/>
@@ -16154,6 +16603,7 @@
               </a:defRPr>
             </a:lvl3pPr>
             <a:lvl4pPr>
+              <a:buNone/>
               <a:defRPr sz="1575" b="1">
                 <a:solidFill>
                   <a:srgbClr val="1768C7"/>
@@ -16164,6 +16614,7 @@
               </a:defRPr>
             </a:lvl4pPr>
             <a:lvl5pPr>
+              <a:buNone/>
               <a:defRPr sz="1575" b="1">
                 <a:solidFill>
                   <a:srgbClr val="1768C7"/>
@@ -16174,6 +16625,7 @@
               </a:defRPr>
             </a:lvl5pPr>
             <a:lvl6pPr>
+              <a:buNone/>
               <a:defRPr sz="1575" b="1">
                 <a:solidFill>
                   <a:srgbClr val="1768C7"/>
@@ -16184,6 +16636,7 @@
               </a:defRPr>
             </a:lvl6pPr>
             <a:lvl7pPr>
+              <a:buNone/>
               <a:defRPr sz="1575" b="1">
                 <a:solidFill>
                   <a:srgbClr val="1768C7"/>
@@ -16194,6 +16647,7 @@
               </a:defRPr>
             </a:lvl7pPr>
             <a:lvl8pPr>
+              <a:buNone/>
               <a:defRPr sz="1575" b="1">
                 <a:solidFill>
                   <a:srgbClr val="1768C7"/>
@@ -16204,6 +16658,7 @@
               </a:defRPr>
             </a:lvl8pPr>
             <a:lvl9pPr>
+              <a:buNone/>
               <a:defRPr sz="1575" b="1">
                 <a:solidFill>
                   <a:srgbClr val="1768C7"/>
@@ -16216,6 +16671,7 @@
           </a:lstStyle>
           <a:p xmlns:a="http://schemas.openxmlformats.org/drawingml/2006/main">
             <a:pPr>
+              <a:buNone/>
               <a:defRPr sz="1575" b="1">
                 <a:solidFill>
                   <a:srgbClr val="1768C7"/>
@@ -16282,6 +16738,7 @@
               </a:defRPr>
             </a:defPPr>
             <a:lvl1pPr>
+              <a:buNone/>
               <a:defRPr sz="1500" b="0">
                 <a:solidFill>
                   <a:srgbClr val="173B75"/>
@@ -16292,6 +16749,7 @@
               </a:defRPr>
             </a:lvl1pPr>
             <a:lvl2pPr>
+              <a:buNone/>
               <a:defRPr sz="1500" b="0">
                 <a:solidFill>
                   <a:srgbClr val="173B75"/>
@@ -16302,6 +16760,7 @@
               </a:defRPr>
             </a:lvl2pPr>
             <a:lvl3pPr>
+              <a:buNone/>
               <a:defRPr sz="1500" b="0">
                 <a:solidFill>
                   <a:srgbClr val="173B75"/>
@@ -16312,6 +16771,7 @@
               </a:defRPr>
             </a:lvl3pPr>
             <a:lvl4pPr>
+              <a:buNone/>
               <a:defRPr sz="1500" b="0">
                 <a:solidFill>
                   <a:srgbClr val="173B75"/>
@@ -16322,6 +16782,7 @@
               </a:defRPr>
             </a:lvl4pPr>
             <a:lvl5pPr>
+              <a:buNone/>
               <a:defRPr sz="1500" b="0">
                 <a:solidFill>
                   <a:srgbClr val="173B75"/>
@@ -16332,6 +16793,7 @@
               </a:defRPr>
             </a:lvl5pPr>
             <a:lvl6pPr>
+              <a:buNone/>
               <a:defRPr sz="1500" b="0">
                 <a:solidFill>
                   <a:srgbClr val="173B75"/>
@@ -16342,6 +16804,7 @@
               </a:defRPr>
             </a:lvl6pPr>
             <a:lvl7pPr>
+              <a:buNone/>
               <a:defRPr sz="1500" b="0">
                 <a:solidFill>
                   <a:srgbClr val="173B75"/>
@@ -16352,6 +16815,7 @@
               </a:defRPr>
             </a:lvl7pPr>
             <a:lvl8pPr>
+              <a:buNone/>
               <a:defRPr sz="1500" b="0">
                 <a:solidFill>
                   <a:srgbClr val="173B75"/>
@@ -16362,6 +16826,7 @@
               </a:defRPr>
             </a:lvl8pPr>
             <a:lvl9pPr>
+              <a:buNone/>
               <a:defRPr sz="1500" b="0">
                 <a:solidFill>
                   <a:srgbClr val="173B75"/>
@@ -16374,6 +16839,7 @@
           </a:lstStyle>
           <a:p xmlns:a="http://schemas.openxmlformats.org/drawingml/2006/main">
             <a:pPr>
+              <a:buNone/>
               <a:defRPr sz="1500" b="0">
                 <a:solidFill>
                   <a:srgbClr val="173B75"/>
@@ -16397,6 +16863,7 @@
           </a:p>
           <a:p xmlns:a="http://schemas.openxmlformats.org/drawingml/2006/main">
             <a:pPr>
+              <a:buNone/>
               <a:defRPr sz="1500" b="0">
                 <a:solidFill>
                   <a:srgbClr val="173B75"/>
@@ -16463,6 +16930,7 @@
               </a:defRPr>
             </a:defPPr>
             <a:lvl1pPr>
+              <a:buNone/>
               <a:defRPr sz="1650" b="0">
                 <a:solidFill>
                   <a:srgbClr val="607DA3"/>
@@ -16473,6 +16941,7 @@
               </a:defRPr>
             </a:lvl1pPr>
             <a:lvl2pPr>
+              <a:buNone/>
               <a:defRPr sz="1650" b="0">
                 <a:solidFill>
                   <a:srgbClr val="607DA3"/>
@@ -16483,6 +16952,7 @@
               </a:defRPr>
             </a:lvl2pPr>
             <a:lvl3pPr>
+              <a:buNone/>
               <a:defRPr sz="1650" b="0">
                 <a:solidFill>
                   <a:srgbClr val="607DA3"/>
@@ -16493,6 +16963,7 @@
               </a:defRPr>
             </a:lvl3pPr>
             <a:lvl4pPr>
+              <a:buNone/>
               <a:defRPr sz="1650" b="0">
                 <a:solidFill>
                   <a:srgbClr val="607DA3"/>
@@ -16503,6 +16974,7 @@
               </a:defRPr>
             </a:lvl4pPr>
             <a:lvl5pPr>
+              <a:buNone/>
               <a:defRPr sz="1650" b="0">
                 <a:solidFill>
                   <a:srgbClr val="607DA3"/>
@@ -16513,6 +16985,7 @@
               </a:defRPr>
             </a:lvl5pPr>
             <a:lvl6pPr>
+              <a:buNone/>
               <a:defRPr sz="1650" b="0">
                 <a:solidFill>
                   <a:srgbClr val="607DA3"/>
@@ -16523,6 +16996,7 @@
               </a:defRPr>
             </a:lvl6pPr>
             <a:lvl7pPr>
+              <a:buNone/>
               <a:defRPr sz="1650" b="0">
                 <a:solidFill>
                   <a:srgbClr val="607DA3"/>
@@ -16533,6 +17007,7 @@
               </a:defRPr>
             </a:lvl7pPr>
             <a:lvl8pPr>
+              <a:buNone/>
               <a:defRPr sz="1650" b="0">
                 <a:solidFill>
                   <a:srgbClr val="607DA3"/>
@@ -16543,6 +17018,7 @@
               </a:defRPr>
             </a:lvl8pPr>
             <a:lvl9pPr>
+              <a:buNone/>
               <a:defRPr sz="1650" b="0">
                 <a:solidFill>
                   <a:srgbClr val="607DA3"/>
@@ -16555,6 +17031,7 @@
           </a:lstStyle>
           <a:p xmlns:a="http://schemas.openxmlformats.org/drawingml/2006/main">
             <a:pPr>
+              <a:buNone/>
               <a:defRPr sz="1650" b="0">
                 <a:solidFill>
                   <a:srgbClr val="607DA3"/>
@@ -16621,6 +17098,7 @@
               </a:defRPr>
             </a:defPPr>
             <a:lvl1pPr>
+              <a:buNone/>
               <a:defRPr sz="1125" b="0">
                 <a:solidFill>
                   <a:srgbClr val="607DA3"/>
@@ -16631,6 +17109,7 @@
               </a:defRPr>
             </a:lvl1pPr>
             <a:lvl2pPr>
+              <a:buNone/>
               <a:defRPr sz="1125" b="0">
                 <a:solidFill>
                   <a:srgbClr val="607DA3"/>
@@ -16641,6 +17120,7 @@
               </a:defRPr>
             </a:lvl2pPr>
             <a:lvl3pPr>
+              <a:buNone/>
               <a:defRPr sz="1125" b="0">
                 <a:solidFill>
                   <a:srgbClr val="607DA3"/>
@@ -16651,6 +17131,7 @@
               </a:defRPr>
             </a:lvl3pPr>
             <a:lvl4pPr>
+              <a:buNone/>
               <a:defRPr sz="1125" b="0">
                 <a:solidFill>
                   <a:srgbClr val="607DA3"/>
@@ -16661,6 +17142,7 @@
               </a:defRPr>
             </a:lvl4pPr>
             <a:lvl5pPr>
+              <a:buNone/>
               <a:defRPr sz="1125" b="0">
                 <a:solidFill>
                   <a:srgbClr val="607DA3"/>
@@ -16671,6 +17153,7 @@
               </a:defRPr>
             </a:lvl5pPr>
             <a:lvl6pPr>
+              <a:buNone/>
               <a:defRPr sz="1125" b="0">
                 <a:solidFill>
                   <a:srgbClr val="607DA3"/>
@@ -16681,6 +17164,7 @@
               </a:defRPr>
             </a:lvl6pPr>
             <a:lvl7pPr>
+              <a:buNone/>
               <a:defRPr sz="1125" b="0">
                 <a:solidFill>
                   <a:srgbClr val="607DA3"/>
@@ -16691,6 +17175,7 @@
               </a:defRPr>
             </a:lvl7pPr>
             <a:lvl8pPr>
+              <a:buNone/>
               <a:defRPr sz="1125" b="0">
                 <a:solidFill>
                   <a:srgbClr val="607DA3"/>
@@ -16701,6 +17186,7 @@
               </a:defRPr>
             </a:lvl8pPr>
             <a:lvl9pPr>
+              <a:buNone/>
               <a:defRPr sz="1125" b="0">
                 <a:solidFill>
                   <a:srgbClr val="607DA3"/>
@@ -16713,6 +17199,7 @@
           </a:lstStyle>
           <a:p xmlns:a="http://schemas.openxmlformats.org/drawingml/2006/main">
             <a:pPr>
+              <a:buNone/>
               <a:defRPr sz="1125" b="0">
                 <a:solidFill>
                   <a:srgbClr val="607DA3"/>
